--- a/docs/FigForIGEM.pptx
+++ b/docs/FigForIGEM.pptx
@@ -2,15 +2,15 @@
 <file path=ppt/presentation.xml><?xml version="1.0" encoding="utf-8"?>
 <p:presentation xmlns:p="http://schemas.openxmlformats.org/presentationml/2006/main">
   <p:sldMasterIdLst>
-    <p:sldMasterId xmlns:r="http://schemas.openxmlformats.org/officeDocument/2006/relationships" id="2147483648" r:id="R07af444852554556"/>
+    <p:sldMasterId xmlns:r="http://schemas.openxmlformats.org/officeDocument/2006/relationships" id="2147483648" r:id="Rc0e3c52adf44471a"/>
   </p:sldMasterIdLst>
   <p:notesMasterIdLst>
-    <p:notesMasterId xmlns:r="http://schemas.openxmlformats.org/officeDocument/2006/relationships" r:id="Rd6bce3e2c0124471"/>
+    <p:notesMasterId xmlns:r="http://schemas.openxmlformats.org/officeDocument/2006/relationships" r:id="R98e3f97620514940"/>
   </p:notesMasterIdLst>
   <p:sldIdLst>
-    <p:sldId xmlns:r="http://schemas.openxmlformats.org/officeDocument/2006/relationships" id="256" r:id="Rf261b47795d247d6"/>
-    <p:sldId xmlns:r="http://schemas.openxmlformats.org/officeDocument/2006/relationships" id="257" r:id="R6233a6aeaa574515"/>
-    <p:sldId xmlns:r="http://schemas.openxmlformats.org/officeDocument/2006/relationships" id="258" r:id="Rd7ad3a2779da4aaa"/>
+    <p:sldId xmlns:r="http://schemas.openxmlformats.org/officeDocument/2006/relationships" id="256" r:id="R1613e57816364a07"/>
+    <p:sldId xmlns:r="http://schemas.openxmlformats.org/officeDocument/2006/relationships" id="257" r:id="Rcef9473cc71e478d"/>
+    <p:sldId xmlns:r="http://schemas.openxmlformats.org/officeDocument/2006/relationships" id="258" r:id="R14a3061b38c14377"/>
   </p:sldIdLst>
   <p:sldSz cx="15240000" cy="11239500"/>
   <p:notesSz cx="6858000" cy="9144000"/>
@@ -444,12 +444,12 @@
           <a:lstStyle xmlns:a="http://schemas.openxmlformats.org/drawingml/2006/main"/>
           <a:p xmlns:a="http://schemas.openxmlformats.org/drawingml/2006/main">
             <a:r>
-              <a:t>Three stages connect a starting enzyme and substrate to predicted candidates. The UMAP inset uses ten real computational candidates, not experimental observations.</a:t>
+              <a:t>Original editable workflow. Three-model construction runs left to right. Enzora Assistant controls scorer weights from below. Computational iteration is supported; the wet-lab feedback route is prospective and was not tested over multiple experimental rounds.</a:t>
             </a:r>
           </a:p>
           <a:p xmlns:a="http://schemas.openxmlformats.org/drawingml/2006/main">
             <a:r>
-              <a:t>Sources: Enzora production workflow and fixed WT-reference scoring. UMAP coordinates come from the verified ten-candidate computational integration run. Input-fold component is coordinate-derived from the project prediction. Design direction: AnewOmni figure composition, DOI 10.64898/2026.03.12.711044. Equations: native PowerPoint LaTeX-to-OMML conversion, screenshot after conversion. The separate formula source preserves editable equations.</a:t>
+              <a:t>Sources: Enzora production workflow and fixed WT-reference scoring. UMAP coordinates come from the verified ten-candidate computational integration run. Input-fold component is coordinate-derived from the project prediction. Original vector components; prospective wet-lab route is explicitly identified. Equations: native PowerPoint LaTeX-to-OMML conversion, screenshot after conversion. The separate formula source preserves editable equations.</a:t>
             </a:r>
           </a:p>
         </p:txBody>
@@ -524,7 +524,7 @@
           </a:p>
           <a:p xmlns:a="http://schemas.openxmlformats.org/drawingml/2006/main">
             <a:r>
-              <a:t>Sources: Enzora production workflow and fixed WT-reference scoring. UMAP coordinates come from the verified ten-candidate computational integration run. Input-fold component is coordinate-derived from the project prediction. Design direction: AnewOmni figure composition, DOI 10.64898/2026.03.12.711044. Equations: native PowerPoint LaTeX-to-OMML conversion, screenshot after conversion. The separate formula source preserves editable equations.</a:t>
+              <a:t>Sources: Enzora production workflow and fixed WT-reference scoring. UMAP coordinates come from the verified ten-candidate computational integration run. Input-fold component is coordinate-derived from the project prediction. Original vector components; prospective wet-lab route is explicitly identified. Equations: native PowerPoint LaTeX-to-OMML conversion, screenshot after conversion. The separate formula source preserves editable equations.</a:t>
             </a:r>
           </a:p>
         </p:txBody>
@@ -599,7 +599,7 @@
           </a:p>
           <a:p xmlns:a="http://schemas.openxmlformats.org/drawingml/2006/main">
             <a:r>
-              <a:t>Sources: Enzora production workflow and fixed WT-reference scoring. UMAP coordinates come from the verified ten-candidate computational integration run. Input-fold component is coordinate-derived from the project prediction. Design direction: AnewOmni figure composition, DOI 10.64898/2026.03.12.711044. Equations: native PowerPoint LaTeX-to-OMML conversion, screenshot after conversion. The separate formula source preserves editable equations.</a:t>
+              <a:t>Sources: Enzora production workflow and fixed WT-reference scoring. UMAP coordinates come from the verified ten-candidate computational integration run. Input-fold component is coordinate-derived from the project prediction. Original vector components; prospective wet-lab route is explicitly identified. Equations: native PowerPoint LaTeX-to-OMML conversion, screenshot after conversion. The separate formula source preserves editable equations.</a:t>
             </a:r>
           </a:p>
         </p:txBody>
@@ -646,7 +646,7 @@
           <p:cNvPr id="3" name="Title">
             <a:extLst xmlns:a="http://schemas.openxmlformats.org/drawingml/2006/main">
               <a:ext uri="{FF2B5EF4-FFF2-40B4-BE49-F238E27FC236}">
-                <a16:creationId xmlns:a16="http://schemas.microsoft.com/office/drawing/2014/main" id="{DA8AED51-91DE-4BAA-916C-E79B0C5A10BD}"/>
+                <a16:creationId xmlns:a16="http://schemas.microsoft.com/office/drawing/2014/main" id="{3D891885-01E9-4912-8C51-DB83887EA6EA}"/>
               </a:ext>
             </a:extLst>
           </p:cNvPr>
@@ -803,7 +803,7 @@
           <p:cNvPr id="2" name="Subtitle">
             <a:extLst xmlns:a="http://schemas.openxmlformats.org/drawingml/2006/main">
               <a:ext uri="{FF2B5EF4-FFF2-40B4-BE49-F238E27FC236}">
-                <a16:creationId xmlns:a16="http://schemas.microsoft.com/office/drawing/2014/main" id="{BF2B9B4B-0EC6-4679-BA8D-66538A646CFC}"/>
+                <a16:creationId xmlns:a16="http://schemas.microsoft.com/office/drawing/2014/main" id="{9DFC252C-7DCE-4E96-9B2D-4715D384B2EB}"/>
               </a:ext>
             </a:extLst>
           </p:cNvPr>
@@ -977,7 +977,7 @@
           <p:cNvPr id="2" name="Section title">
             <a:extLst xmlns:a="http://schemas.openxmlformats.org/drawingml/2006/main">
               <a:ext uri="{FF2B5EF4-FFF2-40B4-BE49-F238E27FC236}">
-                <a16:creationId xmlns:a16="http://schemas.microsoft.com/office/drawing/2014/main" id="{CB31D0FD-63CF-48FC-B4A7-080C21C8A2C7}"/>
+                <a16:creationId xmlns:a16="http://schemas.microsoft.com/office/drawing/2014/main" id="{993847FB-1C56-49F5-8B6D-2F642A1D7D71}"/>
               </a:ext>
             </a:extLst>
           </p:cNvPr>
@@ -1151,7 +1151,7 @@
           <p:cNvPr id="3" name="Title">
             <a:extLst xmlns:a="http://schemas.openxmlformats.org/drawingml/2006/main">
               <a:ext uri="{FF2B5EF4-FFF2-40B4-BE49-F238E27FC236}">
-                <a16:creationId xmlns:a16="http://schemas.microsoft.com/office/drawing/2014/main" id="{6BF56095-67CD-4087-8F86-7B13EE059CE3}"/>
+                <a16:creationId xmlns:a16="http://schemas.microsoft.com/office/drawing/2014/main" id="{9CA716FD-2C41-411F-AA64-2354EF34ACF7}"/>
               </a:ext>
             </a:extLst>
           </p:cNvPr>
@@ -1308,7 +1308,7 @@
           <p:cNvPr id="2" name="Body">
             <a:extLst xmlns:a="http://schemas.openxmlformats.org/drawingml/2006/main">
               <a:ext uri="{FF2B5EF4-FFF2-40B4-BE49-F238E27FC236}">
-                <a16:creationId xmlns:a16="http://schemas.microsoft.com/office/drawing/2014/main" id="{766464F7-62BE-4FBD-814E-74A194D843C1}"/>
+                <a16:creationId xmlns:a16="http://schemas.microsoft.com/office/drawing/2014/main" id="{997312D6-8743-43FF-A494-77DA856B46CF}"/>
               </a:ext>
             </a:extLst>
           </p:cNvPr>
@@ -1482,7 +1482,7 @@
           <p:cNvPr id="4" name="Title">
             <a:extLst xmlns:a="http://schemas.openxmlformats.org/drawingml/2006/main">
               <a:ext uri="{FF2B5EF4-FFF2-40B4-BE49-F238E27FC236}">
-                <a16:creationId xmlns:a16="http://schemas.microsoft.com/office/drawing/2014/main" id="{7EDAB4F2-9105-4140-AA8B-A72A041E1825}"/>
+                <a16:creationId xmlns:a16="http://schemas.microsoft.com/office/drawing/2014/main" id="{E9E192F3-6521-4F50-9105-78DC14E6C652}"/>
               </a:ext>
             </a:extLst>
           </p:cNvPr>
@@ -1639,7 +1639,7 @@
           <p:cNvPr id="2" name="Left column">
             <a:extLst xmlns:a="http://schemas.openxmlformats.org/drawingml/2006/main">
               <a:ext uri="{FF2B5EF4-FFF2-40B4-BE49-F238E27FC236}">
-                <a16:creationId xmlns:a16="http://schemas.microsoft.com/office/drawing/2014/main" id="{771D2F5C-3B38-4833-AE89-330E63E3F2C8}"/>
+                <a16:creationId xmlns:a16="http://schemas.microsoft.com/office/drawing/2014/main" id="{4A9FBBB9-56EA-4458-B1EA-993E20BB5480}"/>
               </a:ext>
             </a:extLst>
           </p:cNvPr>
@@ -1796,7 +1796,7 @@
           <p:cNvPr id="3" name="Right column">
             <a:extLst xmlns:a="http://schemas.openxmlformats.org/drawingml/2006/main">
               <a:ext uri="{FF2B5EF4-FFF2-40B4-BE49-F238E27FC236}">
-                <a16:creationId xmlns:a16="http://schemas.microsoft.com/office/drawing/2014/main" id="{1217117A-F70A-40DC-964A-09CD52E819FA}"/>
+                <a16:creationId xmlns:a16="http://schemas.microsoft.com/office/drawing/2014/main" id="{4482E2B1-6293-4387-B817-5C253FBF6FA2}"/>
               </a:ext>
             </a:extLst>
           </p:cNvPr>
@@ -1970,7 +1970,7 @@
           <p:cNvPr id="3" name="Title">
             <a:extLst xmlns:a="http://schemas.openxmlformats.org/drawingml/2006/main">
               <a:ext uri="{FF2B5EF4-FFF2-40B4-BE49-F238E27FC236}">
-                <a16:creationId xmlns:a16="http://schemas.microsoft.com/office/drawing/2014/main" id="{A4CBD200-CDE5-46A1-9D50-758BEC5F763B}"/>
+                <a16:creationId xmlns:a16="http://schemas.microsoft.com/office/drawing/2014/main" id="{4FB15577-EC3A-402B-A77B-924B3DD8D72C}"/>
               </a:ext>
             </a:extLst>
           </p:cNvPr>
@@ -2127,7 +2127,7 @@
           <p:cNvPr id="2" name="Left column">
             <a:extLst xmlns:a="http://schemas.openxmlformats.org/drawingml/2006/main">
               <a:ext uri="{FF2B5EF4-FFF2-40B4-BE49-F238E27FC236}">
-                <a16:creationId xmlns:a16="http://schemas.microsoft.com/office/drawing/2014/main" id="{169C7909-E335-4A2F-AC1E-E194BFD16EBE}"/>
+                <a16:creationId xmlns:a16="http://schemas.microsoft.com/office/drawing/2014/main" id="{F6DEE5E5-02A6-46DF-990F-C70D9B9A8831}"/>
               </a:ext>
             </a:extLst>
           </p:cNvPr>
@@ -2322,12 +2322,12 @@
   </p:cSld>
   <p:clrMap bg1="lt1" tx1="dk1" bg2="lt2" tx2="dk2" accent1="accent1" accent2="accent2" accent3="accent3" accent4="accent4" accent5="accent5" accent6="accent6" hlink="hlink" folHlink="folHlink"/>
   <p:sldLayoutIdLst>
-    <p:sldLayoutId xmlns:r="http://schemas.openxmlformats.org/officeDocument/2006/relationships" id="2147483649" r:id="Re5c26af251eb4f0f"/>
-    <p:sldLayoutId xmlns:r="http://schemas.openxmlformats.org/officeDocument/2006/relationships" id="2147483650" r:id="R85f4b089625f4377"/>
-    <p:sldLayoutId xmlns:r="http://schemas.openxmlformats.org/officeDocument/2006/relationships" id="2147483651" r:id="R806b66ebf75b40b3"/>
-    <p:sldLayoutId xmlns:r="http://schemas.openxmlformats.org/officeDocument/2006/relationships" id="2147483652" r:id="R72eedc888c624981"/>
-    <p:sldLayoutId xmlns:r="http://schemas.openxmlformats.org/officeDocument/2006/relationships" id="2147483653" r:id="R8e782ae7e4e34544"/>
-    <p:sldLayoutId xmlns:r="http://schemas.openxmlformats.org/officeDocument/2006/relationships" id="2147483654" r:id="Rf8403edcafc8483d"/>
+    <p:sldLayoutId xmlns:r="http://schemas.openxmlformats.org/officeDocument/2006/relationships" id="2147483649" r:id="Rf28a7f5636a345c8"/>
+    <p:sldLayoutId xmlns:r="http://schemas.openxmlformats.org/officeDocument/2006/relationships" id="2147483650" r:id="Rc37f98502794424e"/>
+    <p:sldLayoutId xmlns:r="http://schemas.openxmlformats.org/officeDocument/2006/relationships" id="2147483651" r:id="R589bae4444cf45aa"/>
+    <p:sldLayoutId xmlns:r="http://schemas.openxmlformats.org/officeDocument/2006/relationships" id="2147483652" r:id="R914ca684e1454098"/>
+    <p:sldLayoutId xmlns:r="http://schemas.openxmlformats.org/officeDocument/2006/relationships" id="2147483653" r:id="Re08e0e60860f4f6d"/>
+    <p:sldLayoutId xmlns:r="http://schemas.openxmlformats.org/officeDocument/2006/relationships" id="2147483654" r:id="Rbd8307ac84544667"/>
   </p:sldLayoutIdLst>
   <p:txStyles>
     <p:titleStyle>
@@ -2875,10 +2875,10 @@
       </p:grpSpPr>
       <p:sp>
         <p:nvSpPr>
-          <p:cNvPr id="97" name="">
-            <a:extLst xmlns:a="http://schemas.openxmlformats.org/drawingml/2006/main">
-              <a:ext uri="{FF2B5EF4-FFF2-40B4-BE49-F238E27FC236}">
-                <a16:creationId xmlns:a16="http://schemas.microsoft.com/office/drawing/2014/main" id="{CECE7E17-2A26-462A-8BAF-06681E15EBAA}"/>
+          <p:cNvPr id="71" name="">
+            <a:extLst xmlns:a="http://schemas.openxmlformats.org/drawingml/2006/main">
+              <a:ext uri="{FF2B5EF4-FFF2-40B4-BE49-F238E27FC236}">
+                <a16:creationId xmlns:a16="http://schemas.microsoft.com/office/drawing/2014/main" id="{C2BE8BF5-AB9D-4492-B4B1-ED5D0778BFB2}"/>
               </a:ext>
             </a:extLst>
           </p:cNvPr>
@@ -2908,19 +2908,19 @@
           <p:cNvPr id="2" name="label-1">
             <a:extLst xmlns:a="http://schemas.openxmlformats.org/drawingml/2006/main">
               <a:ext uri="{FF2B5EF4-FFF2-40B4-BE49-F238E27FC236}">
-                <a16:creationId xmlns:a16="http://schemas.microsoft.com/office/drawing/2014/main" id="{727A6A67-1911-47E7-8DD5-79E8F44B0949}"/>
-              </a:ext>
-            </a:extLst>
-          </p:cNvPr>
-          <p:cNvSpPr>
-            <a:spLocks xmlns:a="http://schemas.openxmlformats.org/drawingml/2006/main" noGrp="1"/>
-          </p:cNvSpPr>
-          <p:nvPr/>
-        </p:nvSpPr>
-        <p:spPr>
-          <a:xfrm xmlns:a="http://schemas.openxmlformats.org/drawingml/2006/main">
-            <a:off x="523875" y="361950"/>
-            <a:ext cx="14192250" cy="573405"/>
+                <a16:creationId xmlns:a16="http://schemas.microsoft.com/office/drawing/2014/main" id="{45F01621-43B1-4859-9DA3-B590AAF514B3}"/>
+              </a:ext>
+            </a:extLst>
+          </p:cNvPr>
+          <p:cNvSpPr>
+            <a:spLocks xmlns:a="http://schemas.openxmlformats.org/drawingml/2006/main" noGrp="1"/>
+          </p:cNvSpPr>
+          <p:nvPr/>
+        </p:nvSpPr>
+        <p:spPr>
+          <a:xfrm xmlns:a="http://schemas.openxmlformats.org/drawingml/2006/main">
+            <a:off x="476250" y="209550"/>
+            <a:ext cx="14287500" cy="520065"/>
           </a:xfrm>
           <a:prstGeom xmlns:a="http://schemas.openxmlformats.org/drawingml/2006/main" prst="rect">
             <a:avLst/>
@@ -2934,7 +2934,7 @@
           <a:bodyPr xmlns:a="http://schemas.openxmlformats.org/drawingml/2006/main" lIns="0" tIns="0" rIns="0" bIns="0" anchor="t"/>
           <a:lstStyle xmlns:a="http://schemas.openxmlformats.org/drawingml/2006/main">
             <a:defPPr>
-              <a:defRPr sz="3225" b="1">
+              <a:defRPr sz="2925" b="1">
                 <a:solidFill>
                   <a:srgbClr val="20333D"/>
                 </a:solidFill>
@@ -2946,7 +2946,7 @@
           </a:lstStyle>
           <a:p xmlns:a="http://schemas.openxmlformats.org/drawingml/2006/main">
             <a:pPr>
-              <a:defRPr sz="3225" b="1">
+              <a:defRPr sz="2925" b="1">
                 <a:solidFill>
                   <a:srgbClr val="20333D"/>
                 </a:solidFill>
@@ -2956,7 +2956,7 @@
               </a:defRPr>
             </a:pPr>
             <a:r>
-              <a:rPr sz="3225" b="1">
+              <a:rPr sz="2925" b="1">
                 <a:solidFill>
                   <a:srgbClr val="20333D"/>
                 </a:solidFill>
@@ -2964,7 +2964,7 @@
                 <a:ea typeface="Arial"/>
                 <a:cs typeface="Arial"/>
               </a:rPr>
-              <a:t>Enzora: mutations for the next experiment</a:t>
+              <a:t>Enzora: automated enzyme design, selection and iteration</a:t>
             </a:r>
           </a:p>
         </p:txBody>
@@ -2974,19 +2974,19 @@
           <p:cNvPr id="3" name="label-2">
             <a:extLst xmlns:a="http://schemas.openxmlformats.org/drawingml/2006/main">
               <a:ext uri="{FF2B5EF4-FFF2-40B4-BE49-F238E27FC236}">
-                <a16:creationId xmlns:a16="http://schemas.microsoft.com/office/drawing/2014/main" id="{8A777D8F-2607-4C3F-9B34-46E4DD22C6D6}"/>
-              </a:ext>
-            </a:extLst>
-          </p:cNvPr>
-          <p:cNvSpPr>
-            <a:spLocks xmlns:a="http://schemas.openxmlformats.org/drawingml/2006/main" noGrp="1"/>
-          </p:cNvSpPr>
-          <p:nvPr/>
-        </p:nvSpPr>
-        <p:spPr>
-          <a:xfrm xmlns:a="http://schemas.openxmlformats.org/drawingml/2006/main">
-            <a:off x="542925" y="952500"/>
-            <a:ext cx="14097000" cy="333375"/>
+                <a16:creationId xmlns:a16="http://schemas.microsoft.com/office/drawing/2014/main" id="{B96AF128-ED36-4EF3-84F3-292EFFA667C0}"/>
+              </a:ext>
+            </a:extLst>
+          </p:cNvPr>
+          <p:cNvSpPr>
+            <a:spLocks xmlns:a="http://schemas.openxmlformats.org/drawingml/2006/main" noGrp="1"/>
+          </p:cNvSpPr>
+          <p:nvPr/>
+        </p:nvSpPr>
+        <p:spPr>
+          <a:xfrm xmlns:a="http://schemas.openxmlformats.org/drawingml/2006/main">
+            <a:off x="495300" y="742950"/>
+            <a:ext cx="14192250" cy="320040"/>
           </a:xfrm>
           <a:prstGeom xmlns:a="http://schemas.openxmlformats.org/drawingml/2006/main" prst="rect">
             <a:avLst/>
@@ -3000,7 +3000,7 @@
           <a:bodyPr xmlns:a="http://schemas.openxmlformats.org/drawingml/2006/main" lIns="0" tIns="0" rIns="0" bIns="0" anchor="t"/>
           <a:lstStyle xmlns:a="http://schemas.openxmlformats.org/drawingml/2006/main">
             <a:defPPr>
-              <a:defRPr sz="1875" b="1">
+              <a:defRPr sz="1800" b="1">
                 <a:solidFill>
                   <a:srgbClr val="4B606D"/>
                 </a:solidFill>
@@ -3012,7 +3012,7 @@
           </a:lstStyle>
           <a:p xmlns:a="http://schemas.openxmlformats.org/drawingml/2006/main">
             <a:pPr>
-              <a:defRPr sz="1875" b="1">
+              <a:defRPr sz="1800" b="1">
                 <a:solidFill>
                   <a:srgbClr val="4B606D"/>
                 </a:solidFill>
@@ -3022,7 +3022,7 @@
               </a:defRPr>
             </a:pPr>
             <a:r>
-              <a:rPr sz="1875" b="1">
+              <a:rPr sz="1800" b="1">
                 <a:solidFill>
                   <a:srgbClr val="4B606D"/>
                 </a:solidFill>
@@ -3030,7 +3030,7 @@
                 <a:ea typeface="Arial"/>
                 <a:cs typeface="Arial"/>
               </a:rPr>
-              <a:t>Many possible substitutions. A limited budget for prediction and wet-lab testing.</a:t>
+              <a:t>A finite candidate budget turns an expanding mutation space into testable designs.</a:t>
             </a:r>
           </a:p>
         </p:txBody>
@@ -3040,27 +3040,27 @@
           <p:cNvPr id="4" name="">
             <a:extLst xmlns:a="http://schemas.openxmlformats.org/drawingml/2006/main">
               <a:ext uri="{FF2B5EF4-FFF2-40B4-BE49-F238E27FC236}">
-                <a16:creationId xmlns:a16="http://schemas.microsoft.com/office/drawing/2014/main" id="{7CC6F22E-540E-43D4-8DD3-1370EB69988B}"/>
-              </a:ext>
-            </a:extLst>
-          </p:cNvPr>
-          <p:cNvSpPr>
-            <a:spLocks xmlns:a="http://schemas.openxmlformats.org/drawingml/2006/main" noGrp="1"/>
-          </p:cNvSpPr>
-          <p:nvPr/>
-        </p:nvSpPr>
-        <p:spPr>
-          <a:xfrm xmlns:a="http://schemas.openxmlformats.org/drawingml/2006/main">
-            <a:off x="523875" y="1466850"/>
-            <a:ext cx="14192250" cy="971550"/>
+                <a16:creationId xmlns:a16="http://schemas.microsoft.com/office/drawing/2014/main" id="{E5126C07-AD04-4043-BE0E-ADA3926D7371}"/>
+              </a:ext>
+            </a:extLst>
+          </p:cNvPr>
+          <p:cNvSpPr>
+            <a:spLocks xmlns:a="http://schemas.openxmlformats.org/drawingml/2006/main" noGrp="1"/>
+          </p:cNvSpPr>
+          <p:nvPr/>
+        </p:nvSpPr>
+        <p:spPr>
+          <a:xfrm xmlns:a="http://schemas.openxmlformats.org/drawingml/2006/main">
+            <a:off x="428625" y="1295400"/>
+            <a:ext cx="14382750" cy="3028950"/>
           </a:xfrm>
           <a:prstGeom xmlns:a="http://schemas.openxmlformats.org/drawingml/2006/main" prst="roundRect">
             <a:avLst>
-              <a:gd name="adj" fmla="val 15686"/>
+              <a:gd name="adj" fmla="val 5031"/>
             </a:avLst>
           </a:prstGeom>
           <a:solidFill xmlns:a="http://schemas.openxmlformats.org/drawingml/2006/main">
-            <a:srgbClr val="EDF6F7"/>
+            <a:srgbClr val="F0F7F8"/>
           </a:solidFill>
           <a:ln xmlns:a="http://schemas.openxmlformats.org/drawingml/2006/main" w="0">
             <a:noFill/>
@@ -3072,19 +3072,19 @@
           <p:cNvPr id="5" name="label-4">
             <a:extLst xmlns:a="http://schemas.openxmlformats.org/drawingml/2006/main">
               <a:ext uri="{FF2B5EF4-FFF2-40B4-BE49-F238E27FC236}">
-                <a16:creationId xmlns:a16="http://schemas.microsoft.com/office/drawing/2014/main" id="{9CBD47AB-C740-4962-927B-1D7AF4FF27ED}"/>
-              </a:ext>
-            </a:extLst>
-          </p:cNvPr>
-          <p:cNvSpPr>
-            <a:spLocks xmlns:a="http://schemas.openxmlformats.org/drawingml/2006/main" noGrp="1"/>
-          </p:cNvSpPr>
-          <p:nvPr/>
-        </p:nvSpPr>
-        <p:spPr>
-          <a:xfrm xmlns:a="http://schemas.openxmlformats.org/drawingml/2006/main">
-            <a:off x="762000" y="1657350"/>
-            <a:ext cx="5143500" cy="373380"/>
+                <a16:creationId xmlns:a16="http://schemas.microsoft.com/office/drawing/2014/main" id="{C11F83E7-C656-49B6-B4D0-92E4C7F6F4E8}"/>
+              </a:ext>
+            </a:extLst>
+          </p:cNvPr>
+          <p:cNvSpPr>
+            <a:spLocks xmlns:a="http://schemas.openxmlformats.org/drawingml/2006/main" noGrp="1"/>
+          </p:cNvSpPr>
+          <p:nvPr/>
+        </p:nvSpPr>
+        <p:spPr>
+          <a:xfrm xmlns:a="http://schemas.openxmlformats.org/drawingml/2006/main">
+            <a:off x="619125" y="1409700"/>
+            <a:ext cx="13906500" cy="373380"/>
           </a:xfrm>
           <a:prstGeom xmlns:a="http://schemas.openxmlformats.org/drawingml/2006/main" prst="rect">
             <a:avLst/>
@@ -3128,29 +3128,63 @@
                 <a:ea typeface="Arial"/>
                 <a:cs typeface="Arial"/>
               </a:rPr>
-              <a:t>Starting enzyme and substrate</a:t>
+              <a:t>a  Budgeted mutation-library construction</a:t>
             </a:r>
           </a:p>
         </p:txBody>
       </p:sp>
-      <p:sp>
-        <p:nvSpPr>
-          <p:cNvPr id="6" name="label-5">
-            <a:extLst xmlns:a="http://schemas.openxmlformats.org/drawingml/2006/main">
-              <a:ext uri="{FF2B5EF4-FFF2-40B4-BE49-F238E27FC236}">
-                <a16:creationId xmlns:a16="http://schemas.microsoft.com/office/drawing/2014/main" id="{F1FE06E9-131F-49BF-AE53-8D83EA4D52FF}"/>
-              </a:ext>
-            </a:extLst>
-          </p:cNvPr>
-          <p:cNvSpPr>
-            <a:spLocks xmlns:a="http://schemas.openxmlformats.org/drawingml/2006/main" noGrp="1"/>
-          </p:cNvSpPr>
-          <p:nvPr/>
-        </p:nvSpPr>
-        <p:spPr>
-          <a:xfrm xmlns:a="http://schemas.openxmlformats.org/drawingml/2006/main">
-            <a:off x="762000" y="2019300"/>
-            <a:ext cx="5143500" cy="293370"/>
+      <p:pic>
+        <p:nvPicPr>
+          <p:cNvPr id="6" name="">
+            <a:extLst xmlns:a="http://schemas.openxmlformats.org/drawingml/2006/main">
+              <a:ext uri="{FF2B5EF4-FFF2-40B4-BE49-F238E27FC236}">
+                <a16:creationId xmlns:a16="http://schemas.microsoft.com/office/drawing/2014/main" id="{D28CFF2B-7AA7-4ABD-9546-55640F630CBD}"/>
+              </a:ext>
+            </a:extLst>
+          </p:cNvPr>
+          <p:cNvPicPr>
+            <a:picLocks xmlns:a="http://schemas.openxmlformats.org/drawingml/2006/main" noChangeAspect="1"/>
+          </p:cNvPicPr>
+          <p:nvPr/>
+        </p:nvPicPr>
+        <p:blipFill>
+          <a:blip xmlns:r="http://schemas.openxmlformats.org/officeDocument/2006/relationships" xmlns:a="http://schemas.openxmlformats.org/drawingml/2006/main" r:embed="Rb0233b9653b24f81">
+            <a:extLst>
+              <a:ext uri="{96DAC541-7B7A-43D3-8B79-37D633B846F1}">
+                <asvg:svgBlip xmlns:asvg="http://schemas.microsoft.com/office/drawing/2016/SVG/main" r:embed="Ra957634879c74c7e"/>
+              </a:ext>
+            </a:extLst>
+          </a:blip>
+          <a:stretch xmlns:a="http://schemas.openxmlformats.org/drawingml/2006/main"/>
+        </p:blipFill>
+        <p:spPr>
+          <a:xfrm xmlns:a="http://schemas.openxmlformats.org/drawingml/2006/main">
+            <a:off x="600075" y="1981200"/>
+            <a:ext cx="1714500" cy="1209675"/>
+          </a:xfrm>
+          <a:prstGeom xmlns:a="http://schemas.openxmlformats.org/drawingml/2006/main" prst="rect">
+            <a:avLst/>
+          </a:prstGeom>
+        </p:spPr>
+      </p:pic>
+      <p:sp>
+        <p:nvSpPr>
+          <p:cNvPr id="7" name="label-6">
+            <a:extLst xmlns:a="http://schemas.openxmlformats.org/drawingml/2006/main">
+              <a:ext uri="{FF2B5EF4-FFF2-40B4-BE49-F238E27FC236}">
+                <a16:creationId xmlns:a16="http://schemas.microsoft.com/office/drawing/2014/main" id="{93F7FCF5-C132-4896-BA9C-308B7BE01901}"/>
+              </a:ext>
+            </a:extLst>
+          </p:cNvPr>
+          <p:cNvSpPr>
+            <a:spLocks xmlns:a="http://schemas.openxmlformats.org/drawingml/2006/main" noGrp="1"/>
+          </p:cNvSpPr>
+          <p:nvPr/>
+        </p:nvSpPr>
+        <p:spPr>
+          <a:xfrm xmlns:a="http://schemas.openxmlformats.org/drawingml/2006/main">
+            <a:off x="571500" y="3333750"/>
+            <a:ext cx="2238375" cy="293370"/>
           </a:xfrm>
           <a:prstGeom xmlns:a="http://schemas.openxmlformats.org/drawingml/2006/main" prst="rect">
             <a:avLst/>
@@ -3166,7 +3200,7 @@
             <a:defPPr>
               <a:defRPr sz="1650" b="1">
                 <a:solidFill>
-                  <a:srgbClr val="4B606D"/>
+                  <a:srgbClr val="20333D"/>
                 </a:solidFill>
                 <a:latin typeface="Arial"/>
                 <a:ea typeface="Arial"/>
@@ -3178,7 +3212,7 @@
             <a:pPr>
               <a:defRPr sz="1650" b="1">
                 <a:solidFill>
-                  <a:srgbClr val="4B606D"/>
+                  <a:srgbClr val="20333D"/>
                 </a:solidFill>
                 <a:latin typeface="Arial"/>
                 <a:ea typeface="Arial"/>
@@ -3188,35 +3222,101 @@
             <a:r>
               <a:rPr sz="1650" b="1">
                 <a:solidFill>
-                  <a:srgbClr val="4B606D"/>
+                  <a:srgbClr val="20333D"/>
                 </a:solidFill>
                 <a:latin typeface="Arial"/>
                 <a:ea typeface="Arial"/>
                 <a:cs typeface="Arial"/>
               </a:rPr>
-              <a:t>Define the property you want to improve</a:t>
+              <a:t>Enzyme + substrate</a:t>
             </a:r>
           </a:p>
         </p:txBody>
       </p:sp>
       <p:sp>
         <p:nvSpPr>
-          <p:cNvPr id="7" name="">
-            <a:extLst xmlns:a="http://schemas.openxmlformats.org/drawingml/2006/main">
-              <a:ext uri="{FF2B5EF4-FFF2-40B4-BE49-F238E27FC236}">
-                <a16:creationId xmlns:a16="http://schemas.microsoft.com/office/drawing/2014/main" id="{0C819B4E-2B20-4FC5-BB79-C9E5E7F618E6}"/>
-              </a:ext>
-            </a:extLst>
-          </p:cNvPr>
-          <p:cNvSpPr>
-            <a:spLocks xmlns:a="http://schemas.openxmlformats.org/drawingml/2006/main" noGrp="1"/>
-          </p:cNvSpPr>
-          <p:nvPr/>
-        </p:nvSpPr>
-        <p:spPr>
-          <a:xfrm xmlns:a="http://schemas.openxmlformats.org/drawingml/2006/main">
-            <a:off x="6191250" y="1819275"/>
-            <a:ext cx="781050" cy="209550"/>
+          <p:cNvPr id="8" name="label-7">
+            <a:extLst xmlns:a="http://schemas.openxmlformats.org/drawingml/2006/main">
+              <a:ext uri="{FF2B5EF4-FFF2-40B4-BE49-F238E27FC236}">
+                <a16:creationId xmlns:a16="http://schemas.microsoft.com/office/drawing/2014/main" id="{4A5D856D-1FF7-4A9D-B89B-0FF67442BFE0}"/>
+              </a:ext>
+            </a:extLst>
+          </p:cNvPr>
+          <p:cNvSpPr>
+            <a:spLocks xmlns:a="http://schemas.openxmlformats.org/drawingml/2006/main" noGrp="1"/>
+          </p:cNvSpPr>
+          <p:nvPr/>
+        </p:nvSpPr>
+        <p:spPr>
+          <a:xfrm xmlns:a="http://schemas.openxmlformats.org/drawingml/2006/main">
+            <a:off x="571500" y="3676650"/>
+            <a:ext cx="2247900" cy="266700"/>
+          </a:xfrm>
+          <a:prstGeom xmlns:a="http://schemas.openxmlformats.org/drawingml/2006/main" prst="rect">
+            <a:avLst/>
+          </a:prstGeom>
+          <a:noFill xmlns:a="http://schemas.openxmlformats.org/drawingml/2006/main"/>
+          <a:ln xmlns:a="http://schemas.openxmlformats.org/drawingml/2006/main" w="0">
+            <a:noFill/>
+          </a:ln>
+        </p:spPr>
+        <p:txBody>
+          <a:bodyPr xmlns:a="http://schemas.openxmlformats.org/drawingml/2006/main" lIns="0" tIns="0" rIns="0" bIns="0" anchor="t"/>
+          <a:lstStyle xmlns:a="http://schemas.openxmlformats.org/drawingml/2006/main">
+            <a:defPPr>
+              <a:defRPr sz="1500" b="1">
+                <a:solidFill>
+                  <a:srgbClr val="4B606D"/>
+                </a:solidFill>
+                <a:latin typeface="Arial"/>
+                <a:ea typeface="Arial"/>
+                <a:cs typeface="Arial"/>
+              </a:defRPr>
+            </a:defPPr>
+          </a:lstStyle>
+          <a:p xmlns:a="http://schemas.openxmlformats.org/drawingml/2006/main">
+            <a:pPr>
+              <a:defRPr sz="1500" b="1">
+                <a:solidFill>
+                  <a:srgbClr val="4B606D"/>
+                </a:solidFill>
+                <a:latin typeface="Arial"/>
+                <a:ea typeface="Arial"/>
+                <a:cs typeface="Arial"/>
+              </a:defRPr>
+            </a:pPr>
+            <a:r>
+              <a:rPr sz="1500" b="1">
+                <a:solidFill>
+                  <a:srgbClr val="4B606D"/>
+                </a:solidFill>
+                <a:latin typeface="Arial"/>
+                <a:ea typeface="Arial"/>
+                <a:cs typeface="Arial"/>
+              </a:rPr>
+              <a:t>544 aa WT · CO2</a:t>
+            </a:r>
+          </a:p>
+        </p:txBody>
+      </p:sp>
+      <p:sp>
+        <p:nvSpPr>
+          <p:cNvPr id="9" name="">
+            <a:extLst xmlns:a="http://schemas.openxmlformats.org/drawingml/2006/main">
+              <a:ext uri="{FF2B5EF4-FFF2-40B4-BE49-F238E27FC236}">
+                <a16:creationId xmlns:a16="http://schemas.microsoft.com/office/drawing/2014/main" id="{066C8DB9-8557-4769-AB6B-9E87EB624B84}"/>
+              </a:ext>
+            </a:extLst>
+          </p:cNvPr>
+          <p:cNvSpPr>
+            <a:spLocks xmlns:a="http://schemas.openxmlformats.org/drawingml/2006/main" noGrp="1"/>
+          </p:cNvSpPr>
+          <p:nvPr/>
+        </p:nvSpPr>
+        <p:spPr>
+          <a:xfrm xmlns:a="http://schemas.openxmlformats.org/drawingml/2006/main">
+            <a:off x="2647950" y="2619375"/>
+            <a:ext cx="523875" cy="228600"/>
           </a:xfrm>
           <a:prstGeom xmlns:a="http://schemas.openxmlformats.org/drawingml/2006/main" prst="rightArrow">
             <a:avLst/>
@@ -3231,22 +3331,1140 @@
       </p:sp>
       <p:sp>
         <p:nvSpPr>
-          <p:cNvPr id="8" name="label-7">
-            <a:extLst xmlns:a="http://schemas.openxmlformats.org/drawingml/2006/main">
-              <a:ext uri="{FF2B5EF4-FFF2-40B4-BE49-F238E27FC236}">
-                <a16:creationId xmlns:a16="http://schemas.microsoft.com/office/drawing/2014/main" id="{4C2CC042-4A32-4225-AB1C-290084C6C469}"/>
-              </a:ext>
-            </a:extLst>
-          </p:cNvPr>
-          <p:cNvSpPr>
-            <a:spLocks xmlns:a="http://schemas.openxmlformats.org/drawingml/2006/main" noGrp="1"/>
-          </p:cNvSpPr>
-          <p:nvPr/>
-        </p:nvSpPr>
-        <p:spPr>
-          <a:xfrm xmlns:a="http://schemas.openxmlformats.org/drawingml/2006/main">
-            <a:off x="7334250" y="1657350"/>
-            <a:ext cx="7096125" cy="373380"/>
+          <p:cNvPr id="10" name="">
+            <a:extLst xmlns:a="http://schemas.openxmlformats.org/drawingml/2006/main">
+              <a:ext uri="{FF2B5EF4-FFF2-40B4-BE49-F238E27FC236}">
+                <a16:creationId xmlns:a16="http://schemas.microsoft.com/office/drawing/2014/main" id="{48655AD4-1BE3-49AA-AF43-93CD5AE0B66D}"/>
+              </a:ext>
+            </a:extLst>
+          </p:cNvPr>
+          <p:cNvSpPr>
+            <a:spLocks xmlns:a="http://schemas.openxmlformats.org/drawingml/2006/main" noGrp="1"/>
+          </p:cNvSpPr>
+          <p:nvPr/>
+        </p:nvSpPr>
+        <p:spPr>
+          <a:xfrm xmlns:a="http://schemas.openxmlformats.org/drawingml/2006/main">
+            <a:off x="3381375" y="1962150"/>
+            <a:ext cx="3381375" cy="504825"/>
+          </a:xfrm>
+          <a:prstGeom xmlns:a="http://schemas.openxmlformats.org/drawingml/2006/main" prst="roundRect">
+            <a:avLst>
+              <a:gd name="adj" fmla="val 15094"/>
+            </a:avLst>
+          </a:prstGeom>
+          <a:solidFill xmlns:a="http://schemas.openxmlformats.org/drawingml/2006/main">
+            <a:srgbClr val="FFFFFF"/>
+          </a:solidFill>
+          <a:ln xmlns:a="http://schemas.openxmlformats.org/drawingml/2006/main" w="19050">
+            <a:solidFill>
+              <a:srgbClr val="AE91C8"/>
+            </a:solidFill>
+          </a:ln>
+        </p:spPr>
+      </p:sp>
+      <p:sp>
+        <p:nvSpPr>
+          <p:cNvPr id="11" name="">
+            <a:extLst xmlns:a="http://schemas.openxmlformats.org/drawingml/2006/main">
+              <a:ext uri="{FF2B5EF4-FFF2-40B4-BE49-F238E27FC236}">
+                <a16:creationId xmlns:a16="http://schemas.microsoft.com/office/drawing/2014/main" id="{CD00EC8E-1784-4C0E-82F9-46C6E2B91DE5}"/>
+              </a:ext>
+            </a:extLst>
+          </p:cNvPr>
+          <p:cNvSpPr>
+            <a:spLocks xmlns:a="http://schemas.openxmlformats.org/drawingml/2006/main" noGrp="1"/>
+          </p:cNvSpPr>
+          <p:nvPr/>
+        </p:nvSpPr>
+        <p:spPr>
+          <a:xfrm xmlns:a="http://schemas.openxmlformats.org/drawingml/2006/main">
+            <a:off x="3381375" y="1962150"/>
+            <a:ext cx="76200" cy="504825"/>
+          </a:xfrm>
+          <a:prstGeom xmlns:a="http://schemas.openxmlformats.org/drawingml/2006/main" prst="roundRect">
+            <a:avLst>
+              <a:gd name="adj" fmla="val 37500"/>
+            </a:avLst>
+          </a:prstGeom>
+          <a:solidFill xmlns:a="http://schemas.openxmlformats.org/drawingml/2006/main">
+            <a:srgbClr val="AE91C8"/>
+          </a:solidFill>
+          <a:ln xmlns:a="http://schemas.openxmlformats.org/drawingml/2006/main" w="0">
+            <a:noFill/>
+          </a:ln>
+        </p:spPr>
+      </p:sp>
+      <p:sp>
+        <p:nvSpPr>
+          <p:cNvPr id="12" name="label-11">
+            <a:extLst xmlns:a="http://schemas.openxmlformats.org/drawingml/2006/main">
+              <a:ext uri="{FF2B5EF4-FFF2-40B4-BE49-F238E27FC236}">
+                <a16:creationId xmlns:a16="http://schemas.microsoft.com/office/drawing/2014/main" id="{359D0EED-CB17-44A6-BB12-F4CEE184F817}"/>
+              </a:ext>
+            </a:extLst>
+          </p:cNvPr>
+          <p:cNvSpPr>
+            <a:spLocks xmlns:a="http://schemas.openxmlformats.org/drawingml/2006/main" noGrp="1"/>
+          </p:cNvSpPr>
+          <p:nvPr/>
+        </p:nvSpPr>
+        <p:spPr>
+          <a:xfrm xmlns:a="http://schemas.openxmlformats.org/drawingml/2006/main">
+            <a:off x="3571875" y="2019300"/>
+            <a:ext cx="3000375" cy="306705"/>
+          </a:xfrm>
+          <a:prstGeom xmlns:a="http://schemas.openxmlformats.org/drawingml/2006/main" prst="rect">
+            <a:avLst/>
+          </a:prstGeom>
+          <a:noFill xmlns:a="http://schemas.openxmlformats.org/drawingml/2006/main"/>
+          <a:ln xmlns:a="http://schemas.openxmlformats.org/drawingml/2006/main" w="0">
+            <a:noFill/>
+          </a:ln>
+        </p:spPr>
+        <p:txBody>
+          <a:bodyPr xmlns:a="http://schemas.openxmlformats.org/drawingml/2006/main" lIns="0" tIns="0" rIns="0" bIns="0" anchor="t"/>
+          <a:lstStyle xmlns:a="http://schemas.openxmlformats.org/drawingml/2006/main">
+            <a:defPPr>
+              <a:defRPr sz="1725" b="1">
+                <a:solidFill>
+                  <a:srgbClr val="20333D"/>
+                </a:solidFill>
+                <a:latin typeface="Arial"/>
+                <a:ea typeface="Arial"/>
+                <a:cs typeface="Arial"/>
+              </a:defRPr>
+            </a:defPPr>
+          </a:lstStyle>
+          <a:p xmlns:a="http://schemas.openxmlformats.org/drawingml/2006/main">
+            <a:pPr>
+              <a:defRPr sz="1725" b="1">
+                <a:solidFill>
+                  <a:srgbClr val="20333D"/>
+                </a:solidFill>
+                <a:latin typeface="Arial"/>
+                <a:ea typeface="Arial"/>
+                <a:cs typeface="Arial"/>
+              </a:defRPr>
+            </a:pPr>
+            <a:r>
+              <a:rPr sz="1725" b="1">
+                <a:solidFill>
+                  <a:srgbClr val="20333D"/>
+                </a:solidFill>
+                <a:latin typeface="Arial"/>
+                <a:ea typeface="Arial"/>
+                <a:cs typeface="Arial"/>
+              </a:rPr>
+              <a:t>ProteinDPO</a:t>
+            </a:r>
+          </a:p>
+        </p:txBody>
+      </p:sp>
+      <p:sp>
+        <p:nvSpPr>
+          <p:cNvPr id="13" name="label-12">
+            <a:extLst xmlns:a="http://schemas.openxmlformats.org/drawingml/2006/main">
+              <a:ext uri="{FF2B5EF4-FFF2-40B4-BE49-F238E27FC236}">
+                <a16:creationId xmlns:a16="http://schemas.microsoft.com/office/drawing/2014/main" id="{B5B9435D-38D2-4977-A490-DC7A7E6BEF24}"/>
+              </a:ext>
+            </a:extLst>
+          </p:cNvPr>
+          <p:cNvSpPr>
+            <a:spLocks xmlns:a="http://schemas.openxmlformats.org/drawingml/2006/main" noGrp="1"/>
+          </p:cNvSpPr>
+          <p:nvPr/>
+        </p:nvSpPr>
+        <p:spPr>
+          <a:xfrm xmlns:a="http://schemas.openxmlformats.org/drawingml/2006/main">
+            <a:off x="3571875" y="2266950"/>
+            <a:ext cx="3000375" cy="213360"/>
+          </a:xfrm>
+          <a:prstGeom xmlns:a="http://schemas.openxmlformats.org/drawingml/2006/main" prst="rect">
+            <a:avLst/>
+          </a:prstGeom>
+          <a:noFill xmlns:a="http://schemas.openxmlformats.org/drawingml/2006/main"/>
+          <a:ln xmlns:a="http://schemas.openxmlformats.org/drawingml/2006/main" w="0">
+            <a:noFill/>
+          </a:ln>
+        </p:spPr>
+        <p:txBody>
+          <a:bodyPr xmlns:a="http://schemas.openxmlformats.org/drawingml/2006/main" lIns="0" tIns="0" rIns="0" bIns="0" anchor="t"/>
+          <a:lstStyle xmlns:a="http://schemas.openxmlformats.org/drawingml/2006/main">
+            <a:defPPr>
+              <a:defRPr sz="1200" b="1">
+                <a:solidFill>
+                  <a:srgbClr val="4B606D"/>
+                </a:solidFill>
+                <a:latin typeface="Arial"/>
+                <a:ea typeface="Arial"/>
+                <a:cs typeface="Arial"/>
+              </a:defRPr>
+            </a:defPPr>
+          </a:lstStyle>
+          <a:p xmlns:a="http://schemas.openxmlformats.org/drawingml/2006/main">
+            <a:pPr>
+              <a:defRPr sz="1200" b="1">
+                <a:solidFill>
+                  <a:srgbClr val="4B606D"/>
+                </a:solidFill>
+                <a:latin typeface="Arial"/>
+                <a:ea typeface="Arial"/>
+                <a:cs typeface="Arial"/>
+              </a:defRPr>
+            </a:pPr>
+            <a:r>
+              <a:rPr sz="1200" b="1">
+                <a:solidFill>
+                  <a:srgbClr val="4B606D"/>
+                </a:solidFill>
+                <a:latin typeface="Arial"/>
+                <a:ea typeface="Arial"/>
+                <a:cs typeface="Arial"/>
+              </a:rPr>
+              <a:t>Inverse folding</a:t>
+            </a:r>
+          </a:p>
+        </p:txBody>
+      </p:sp>
+      <p:sp>
+        <p:nvSpPr>
+          <p:cNvPr id="14" name="">
+            <a:extLst xmlns:a="http://schemas.openxmlformats.org/drawingml/2006/main">
+              <a:ext uri="{FF2B5EF4-FFF2-40B4-BE49-F238E27FC236}">
+                <a16:creationId xmlns:a16="http://schemas.microsoft.com/office/drawing/2014/main" id="{5A3C0407-4D63-49C5-9E2C-3CF9B51521C5}"/>
+              </a:ext>
+            </a:extLst>
+          </p:cNvPr>
+          <p:cNvSpPr>
+            <a:spLocks xmlns:a="http://schemas.openxmlformats.org/drawingml/2006/main" noGrp="1"/>
+          </p:cNvSpPr>
+          <p:nvPr/>
+        </p:nvSpPr>
+        <p:spPr>
+          <a:xfrm xmlns:a="http://schemas.openxmlformats.org/drawingml/2006/main">
+            <a:off x="3381375" y="2571750"/>
+            <a:ext cx="3381375" cy="504825"/>
+          </a:xfrm>
+          <a:prstGeom xmlns:a="http://schemas.openxmlformats.org/drawingml/2006/main" prst="roundRect">
+            <a:avLst>
+              <a:gd name="adj" fmla="val 15094"/>
+            </a:avLst>
+          </a:prstGeom>
+          <a:solidFill xmlns:a="http://schemas.openxmlformats.org/drawingml/2006/main">
+            <a:srgbClr val="FFFFFF"/>
+          </a:solidFill>
+          <a:ln xmlns:a="http://schemas.openxmlformats.org/drawingml/2006/main" w="19050">
+            <a:solidFill>
+              <a:srgbClr val="81BABC"/>
+            </a:solidFill>
+          </a:ln>
+        </p:spPr>
+      </p:sp>
+      <p:sp>
+        <p:nvSpPr>
+          <p:cNvPr id="15" name="">
+            <a:extLst xmlns:a="http://schemas.openxmlformats.org/drawingml/2006/main">
+              <a:ext uri="{FF2B5EF4-FFF2-40B4-BE49-F238E27FC236}">
+                <a16:creationId xmlns:a16="http://schemas.microsoft.com/office/drawing/2014/main" id="{7A336578-5866-4363-A0F3-2DDACC580C6B}"/>
+              </a:ext>
+            </a:extLst>
+          </p:cNvPr>
+          <p:cNvSpPr>
+            <a:spLocks xmlns:a="http://schemas.openxmlformats.org/drawingml/2006/main" noGrp="1"/>
+          </p:cNvSpPr>
+          <p:nvPr/>
+        </p:nvSpPr>
+        <p:spPr>
+          <a:xfrm xmlns:a="http://schemas.openxmlformats.org/drawingml/2006/main">
+            <a:off x="3381375" y="2571750"/>
+            <a:ext cx="76200" cy="504825"/>
+          </a:xfrm>
+          <a:prstGeom xmlns:a="http://schemas.openxmlformats.org/drawingml/2006/main" prst="roundRect">
+            <a:avLst>
+              <a:gd name="adj" fmla="val 37500"/>
+            </a:avLst>
+          </a:prstGeom>
+          <a:solidFill xmlns:a="http://schemas.openxmlformats.org/drawingml/2006/main">
+            <a:srgbClr val="81BABC"/>
+          </a:solidFill>
+          <a:ln xmlns:a="http://schemas.openxmlformats.org/drawingml/2006/main" w="0">
+            <a:noFill/>
+          </a:ln>
+        </p:spPr>
+      </p:sp>
+      <p:sp>
+        <p:nvSpPr>
+          <p:cNvPr id="16" name="label-15">
+            <a:extLst xmlns:a="http://schemas.openxmlformats.org/drawingml/2006/main">
+              <a:ext uri="{FF2B5EF4-FFF2-40B4-BE49-F238E27FC236}">
+                <a16:creationId xmlns:a16="http://schemas.microsoft.com/office/drawing/2014/main" id="{BC517424-53DB-416E-85AB-E7E65906B9EB}"/>
+              </a:ext>
+            </a:extLst>
+          </p:cNvPr>
+          <p:cNvSpPr>
+            <a:spLocks xmlns:a="http://schemas.openxmlformats.org/drawingml/2006/main" noGrp="1"/>
+          </p:cNvSpPr>
+          <p:nvPr/>
+        </p:nvSpPr>
+        <p:spPr>
+          <a:xfrm xmlns:a="http://schemas.openxmlformats.org/drawingml/2006/main">
+            <a:off x="3571875" y="2628900"/>
+            <a:ext cx="3000375" cy="306705"/>
+          </a:xfrm>
+          <a:prstGeom xmlns:a="http://schemas.openxmlformats.org/drawingml/2006/main" prst="rect">
+            <a:avLst/>
+          </a:prstGeom>
+          <a:noFill xmlns:a="http://schemas.openxmlformats.org/drawingml/2006/main"/>
+          <a:ln xmlns:a="http://schemas.openxmlformats.org/drawingml/2006/main" w="0">
+            <a:noFill/>
+          </a:ln>
+        </p:spPr>
+        <p:txBody>
+          <a:bodyPr xmlns:a="http://schemas.openxmlformats.org/drawingml/2006/main" lIns="0" tIns="0" rIns="0" bIns="0" anchor="t"/>
+          <a:lstStyle xmlns:a="http://schemas.openxmlformats.org/drawingml/2006/main">
+            <a:defPPr>
+              <a:defRPr sz="1725" b="1">
+                <a:solidFill>
+                  <a:srgbClr val="20333D"/>
+                </a:solidFill>
+                <a:latin typeface="Arial"/>
+                <a:ea typeface="Arial"/>
+                <a:cs typeface="Arial"/>
+              </a:defRPr>
+            </a:defPPr>
+          </a:lstStyle>
+          <a:p xmlns:a="http://schemas.openxmlformats.org/drawingml/2006/main">
+            <a:pPr>
+              <a:defRPr sz="1725" b="1">
+                <a:solidFill>
+                  <a:srgbClr val="20333D"/>
+                </a:solidFill>
+                <a:latin typeface="Arial"/>
+                <a:ea typeface="Arial"/>
+                <a:cs typeface="Arial"/>
+              </a:defRPr>
+            </a:pPr>
+            <a:r>
+              <a:rPr sz="1725" b="1">
+                <a:solidFill>
+                  <a:srgbClr val="20333D"/>
+                </a:solidFill>
+                <a:latin typeface="Arial"/>
+                <a:ea typeface="Arial"/>
+                <a:cs typeface="Arial"/>
+              </a:rPr>
+              <a:t>EnzGFM</a:t>
+            </a:r>
+          </a:p>
+        </p:txBody>
+      </p:sp>
+      <p:sp>
+        <p:nvSpPr>
+          <p:cNvPr id="17" name="label-16">
+            <a:extLst xmlns:a="http://schemas.openxmlformats.org/drawingml/2006/main">
+              <a:ext uri="{FF2B5EF4-FFF2-40B4-BE49-F238E27FC236}">
+                <a16:creationId xmlns:a16="http://schemas.microsoft.com/office/drawing/2014/main" id="{C6C3D252-CF86-4511-954C-A4B2DAEAEE67}"/>
+              </a:ext>
+            </a:extLst>
+          </p:cNvPr>
+          <p:cNvSpPr>
+            <a:spLocks xmlns:a="http://schemas.openxmlformats.org/drawingml/2006/main" noGrp="1"/>
+          </p:cNvSpPr>
+          <p:nvPr/>
+        </p:nvSpPr>
+        <p:spPr>
+          <a:xfrm xmlns:a="http://schemas.openxmlformats.org/drawingml/2006/main">
+            <a:off x="3571875" y="2876550"/>
+            <a:ext cx="3000375" cy="213360"/>
+          </a:xfrm>
+          <a:prstGeom xmlns:a="http://schemas.openxmlformats.org/drawingml/2006/main" prst="rect">
+            <a:avLst/>
+          </a:prstGeom>
+          <a:noFill xmlns:a="http://schemas.openxmlformats.org/drawingml/2006/main"/>
+          <a:ln xmlns:a="http://schemas.openxmlformats.org/drawingml/2006/main" w="0">
+            <a:noFill/>
+          </a:ln>
+        </p:spPr>
+        <p:txBody>
+          <a:bodyPr xmlns:a="http://schemas.openxmlformats.org/drawingml/2006/main" lIns="0" tIns="0" rIns="0" bIns="0" anchor="t"/>
+          <a:lstStyle xmlns:a="http://schemas.openxmlformats.org/drawingml/2006/main">
+            <a:defPPr>
+              <a:defRPr sz="1200" b="1">
+                <a:solidFill>
+                  <a:srgbClr val="4B606D"/>
+                </a:solidFill>
+                <a:latin typeface="Arial"/>
+                <a:ea typeface="Arial"/>
+                <a:cs typeface="Arial"/>
+              </a:defRPr>
+            </a:defPPr>
+          </a:lstStyle>
+          <a:p xmlns:a="http://schemas.openxmlformats.org/drawingml/2006/main">
+            <a:pPr>
+              <a:defRPr sz="1200" b="1">
+                <a:solidFill>
+                  <a:srgbClr val="4B606D"/>
+                </a:solidFill>
+                <a:latin typeface="Arial"/>
+                <a:ea typeface="Arial"/>
+                <a:cs typeface="Arial"/>
+              </a:defRPr>
+            </a:pPr>
+            <a:r>
+              <a:rPr sz="1200" b="1">
+                <a:solidFill>
+                  <a:srgbClr val="4B606D"/>
+                </a:solidFill>
+                <a:latin typeface="Arial"/>
+                <a:ea typeface="Arial"/>
+                <a:cs typeface="Arial"/>
+              </a:rPr>
+              <a:t>Enzyme-adapted PLM</a:t>
+            </a:r>
+          </a:p>
+        </p:txBody>
+      </p:sp>
+      <p:sp>
+        <p:nvSpPr>
+          <p:cNvPr id="18" name="">
+            <a:extLst xmlns:a="http://schemas.openxmlformats.org/drawingml/2006/main">
+              <a:ext uri="{FF2B5EF4-FFF2-40B4-BE49-F238E27FC236}">
+                <a16:creationId xmlns:a16="http://schemas.microsoft.com/office/drawing/2014/main" id="{27B2591E-CD15-449E-873F-78D91BF83A65}"/>
+              </a:ext>
+            </a:extLst>
+          </p:cNvPr>
+          <p:cNvSpPr>
+            <a:spLocks xmlns:a="http://schemas.openxmlformats.org/drawingml/2006/main" noGrp="1"/>
+          </p:cNvSpPr>
+          <p:nvPr/>
+        </p:nvSpPr>
+        <p:spPr>
+          <a:xfrm xmlns:a="http://schemas.openxmlformats.org/drawingml/2006/main">
+            <a:off x="3381375" y="3181350"/>
+            <a:ext cx="3381375" cy="504825"/>
+          </a:xfrm>
+          <a:prstGeom xmlns:a="http://schemas.openxmlformats.org/drawingml/2006/main" prst="roundRect">
+            <a:avLst>
+              <a:gd name="adj" fmla="val 15094"/>
+            </a:avLst>
+          </a:prstGeom>
+          <a:solidFill xmlns:a="http://schemas.openxmlformats.org/drawingml/2006/main">
+            <a:srgbClr val="FFFFFF"/>
+          </a:solidFill>
+          <a:ln xmlns:a="http://schemas.openxmlformats.org/drawingml/2006/main" w="19050">
+            <a:solidFill>
+              <a:srgbClr val="E8ACC9"/>
+            </a:solidFill>
+          </a:ln>
+        </p:spPr>
+      </p:sp>
+      <p:sp>
+        <p:nvSpPr>
+          <p:cNvPr id="19" name="">
+            <a:extLst xmlns:a="http://schemas.openxmlformats.org/drawingml/2006/main">
+              <a:ext uri="{FF2B5EF4-FFF2-40B4-BE49-F238E27FC236}">
+                <a16:creationId xmlns:a16="http://schemas.microsoft.com/office/drawing/2014/main" id="{D2D6914C-1B58-4A85-B96B-8A5CAF128190}"/>
+              </a:ext>
+            </a:extLst>
+          </p:cNvPr>
+          <p:cNvSpPr>
+            <a:spLocks xmlns:a="http://schemas.openxmlformats.org/drawingml/2006/main" noGrp="1"/>
+          </p:cNvSpPr>
+          <p:nvPr/>
+        </p:nvSpPr>
+        <p:spPr>
+          <a:xfrm xmlns:a="http://schemas.openxmlformats.org/drawingml/2006/main">
+            <a:off x="3381375" y="3181350"/>
+            <a:ext cx="76200" cy="504825"/>
+          </a:xfrm>
+          <a:prstGeom xmlns:a="http://schemas.openxmlformats.org/drawingml/2006/main" prst="roundRect">
+            <a:avLst>
+              <a:gd name="adj" fmla="val 37500"/>
+            </a:avLst>
+          </a:prstGeom>
+          <a:solidFill xmlns:a="http://schemas.openxmlformats.org/drawingml/2006/main">
+            <a:srgbClr val="E8ACC9"/>
+          </a:solidFill>
+          <a:ln xmlns:a="http://schemas.openxmlformats.org/drawingml/2006/main" w="0">
+            <a:noFill/>
+          </a:ln>
+        </p:spPr>
+      </p:sp>
+      <p:sp>
+        <p:nvSpPr>
+          <p:cNvPr id="20" name="label-19">
+            <a:extLst xmlns:a="http://schemas.openxmlformats.org/drawingml/2006/main">
+              <a:ext uri="{FF2B5EF4-FFF2-40B4-BE49-F238E27FC236}">
+                <a16:creationId xmlns:a16="http://schemas.microsoft.com/office/drawing/2014/main" id="{798B3A28-1B89-4227-A992-B26CE1842839}"/>
+              </a:ext>
+            </a:extLst>
+          </p:cNvPr>
+          <p:cNvSpPr>
+            <a:spLocks xmlns:a="http://schemas.openxmlformats.org/drawingml/2006/main" noGrp="1"/>
+          </p:cNvSpPr>
+          <p:nvPr/>
+        </p:nvSpPr>
+        <p:spPr>
+          <a:xfrm xmlns:a="http://schemas.openxmlformats.org/drawingml/2006/main">
+            <a:off x="3571875" y="3238500"/>
+            <a:ext cx="3000375" cy="306705"/>
+          </a:xfrm>
+          <a:prstGeom xmlns:a="http://schemas.openxmlformats.org/drawingml/2006/main" prst="rect">
+            <a:avLst/>
+          </a:prstGeom>
+          <a:noFill xmlns:a="http://schemas.openxmlformats.org/drawingml/2006/main"/>
+          <a:ln xmlns:a="http://schemas.openxmlformats.org/drawingml/2006/main" w="0">
+            <a:noFill/>
+          </a:ln>
+        </p:spPr>
+        <p:txBody>
+          <a:bodyPr xmlns:a="http://schemas.openxmlformats.org/drawingml/2006/main" lIns="0" tIns="0" rIns="0" bIns="0" anchor="t"/>
+          <a:lstStyle xmlns:a="http://schemas.openxmlformats.org/drawingml/2006/main">
+            <a:defPPr>
+              <a:defRPr sz="1725" b="1">
+                <a:solidFill>
+                  <a:srgbClr val="20333D"/>
+                </a:solidFill>
+                <a:latin typeface="Arial"/>
+                <a:ea typeface="Arial"/>
+                <a:cs typeface="Arial"/>
+              </a:defRPr>
+            </a:defPPr>
+          </a:lstStyle>
+          <a:p xmlns:a="http://schemas.openxmlformats.org/drawingml/2006/main">
+            <a:pPr>
+              <a:defRPr sz="1725" b="1">
+                <a:solidFill>
+                  <a:srgbClr val="20333D"/>
+                </a:solidFill>
+                <a:latin typeface="Arial"/>
+                <a:ea typeface="Arial"/>
+                <a:cs typeface="Arial"/>
+              </a:defRPr>
+            </a:pPr>
+            <a:r>
+              <a:rPr sz="1725" b="1">
+                <a:solidFill>
+                  <a:srgbClr val="20333D"/>
+                </a:solidFill>
+                <a:latin typeface="Arial"/>
+                <a:ea typeface="Arial"/>
+                <a:cs typeface="Arial"/>
+              </a:rPr>
+              <a:t>VESM3</a:t>
+            </a:r>
+          </a:p>
+        </p:txBody>
+      </p:sp>
+      <p:sp>
+        <p:nvSpPr>
+          <p:cNvPr id="21" name="label-20">
+            <a:extLst xmlns:a="http://schemas.openxmlformats.org/drawingml/2006/main">
+              <a:ext uri="{FF2B5EF4-FFF2-40B4-BE49-F238E27FC236}">
+                <a16:creationId xmlns:a16="http://schemas.microsoft.com/office/drawing/2014/main" id="{1D942077-6357-4CA8-913C-10177DF625B7}"/>
+              </a:ext>
+            </a:extLst>
+          </p:cNvPr>
+          <p:cNvSpPr>
+            <a:spLocks xmlns:a="http://schemas.openxmlformats.org/drawingml/2006/main" noGrp="1"/>
+          </p:cNvSpPr>
+          <p:nvPr/>
+        </p:nvSpPr>
+        <p:spPr>
+          <a:xfrm xmlns:a="http://schemas.openxmlformats.org/drawingml/2006/main">
+            <a:off x="3571875" y="3486150"/>
+            <a:ext cx="3000375" cy="213360"/>
+          </a:xfrm>
+          <a:prstGeom xmlns:a="http://schemas.openxmlformats.org/drawingml/2006/main" prst="rect">
+            <a:avLst/>
+          </a:prstGeom>
+          <a:noFill xmlns:a="http://schemas.openxmlformats.org/drawingml/2006/main"/>
+          <a:ln xmlns:a="http://schemas.openxmlformats.org/drawingml/2006/main" w="0">
+            <a:noFill/>
+          </a:ln>
+        </p:spPr>
+        <p:txBody>
+          <a:bodyPr xmlns:a="http://schemas.openxmlformats.org/drawingml/2006/main" lIns="0" tIns="0" rIns="0" bIns="0" anchor="t"/>
+          <a:lstStyle xmlns:a="http://schemas.openxmlformats.org/drawingml/2006/main">
+            <a:defPPr>
+              <a:defRPr sz="1200" b="1">
+                <a:solidFill>
+                  <a:srgbClr val="4B606D"/>
+                </a:solidFill>
+                <a:latin typeface="Arial"/>
+                <a:ea typeface="Arial"/>
+                <a:cs typeface="Arial"/>
+              </a:defRPr>
+            </a:defPPr>
+          </a:lstStyle>
+          <a:p xmlns:a="http://schemas.openxmlformats.org/drawingml/2006/main">
+            <a:pPr>
+              <a:defRPr sz="1200" b="1">
+                <a:solidFill>
+                  <a:srgbClr val="4B606D"/>
+                </a:solidFill>
+                <a:latin typeface="Arial"/>
+                <a:ea typeface="Arial"/>
+                <a:cs typeface="Arial"/>
+              </a:defRPr>
+            </a:pPr>
+            <a:r>
+              <a:rPr sz="1200" b="1">
+                <a:solidFill>
+                  <a:srgbClr val="4B606D"/>
+                </a:solidFill>
+                <a:latin typeface="Arial"/>
+                <a:ea typeface="Arial"/>
+                <a:cs typeface="Arial"/>
+              </a:rPr>
+              <a:t>Distilled multimodal ESM3</a:t>
+            </a:r>
+          </a:p>
+        </p:txBody>
+      </p:sp>
+      <p:sp>
+        <p:nvSpPr>
+          <p:cNvPr id="22" name="">
+            <a:extLst xmlns:a="http://schemas.openxmlformats.org/drawingml/2006/main">
+              <a:ext uri="{FF2B5EF4-FFF2-40B4-BE49-F238E27FC236}">
+                <a16:creationId xmlns:a16="http://schemas.microsoft.com/office/drawing/2014/main" id="{8FAEBB4A-10A8-4C78-B122-7E5BB0D0E651}"/>
+              </a:ext>
+            </a:extLst>
+          </p:cNvPr>
+          <p:cNvSpPr>
+            <a:spLocks xmlns:a="http://schemas.openxmlformats.org/drawingml/2006/main" noGrp="1"/>
+          </p:cNvSpPr>
+          <p:nvPr/>
+        </p:nvSpPr>
+        <p:spPr>
+          <a:xfrm xmlns:a="http://schemas.openxmlformats.org/drawingml/2006/main">
+            <a:off x="6943725" y="2619375"/>
+            <a:ext cx="552450" cy="228600"/>
+          </a:xfrm>
+          <a:prstGeom xmlns:a="http://schemas.openxmlformats.org/drawingml/2006/main" prst="rightArrow">
+            <a:avLst/>
+          </a:prstGeom>
+          <a:solidFill xmlns:a="http://schemas.openxmlformats.org/drawingml/2006/main">
+            <a:srgbClr val="81BABC"/>
+          </a:solidFill>
+          <a:ln xmlns:a="http://schemas.openxmlformats.org/drawingml/2006/main" w="0">
+            <a:noFill/>
+          </a:ln>
+        </p:spPr>
+      </p:sp>
+      <p:sp>
+        <p:nvSpPr>
+          <p:cNvPr id="23" name="label-22">
+            <a:extLst xmlns:a="http://schemas.openxmlformats.org/drawingml/2006/main">
+              <a:ext uri="{FF2B5EF4-FFF2-40B4-BE49-F238E27FC236}">
+                <a16:creationId xmlns:a16="http://schemas.microsoft.com/office/drawing/2014/main" id="{2B9C3FC2-DE67-41ED-8E8D-5556CE82520D}"/>
+              </a:ext>
+            </a:extLst>
+          </p:cNvPr>
+          <p:cNvSpPr>
+            <a:spLocks xmlns:a="http://schemas.openxmlformats.org/drawingml/2006/main" noGrp="1"/>
+          </p:cNvSpPr>
+          <p:nvPr/>
+        </p:nvSpPr>
+        <p:spPr>
+          <a:xfrm xmlns:a="http://schemas.openxmlformats.org/drawingml/2006/main">
+            <a:off x="7762875" y="2076450"/>
+            <a:ext cx="3143250" cy="306705"/>
+          </a:xfrm>
+          <a:prstGeom xmlns:a="http://schemas.openxmlformats.org/drawingml/2006/main" prst="rect">
+            <a:avLst/>
+          </a:prstGeom>
+          <a:noFill xmlns:a="http://schemas.openxmlformats.org/drawingml/2006/main"/>
+          <a:ln xmlns:a="http://schemas.openxmlformats.org/drawingml/2006/main" w="0">
+            <a:noFill/>
+          </a:ln>
+        </p:spPr>
+        <p:txBody>
+          <a:bodyPr xmlns:a="http://schemas.openxmlformats.org/drawingml/2006/main" lIns="0" tIns="0" rIns="0" bIns="0" anchor="t"/>
+          <a:lstStyle xmlns:a="http://schemas.openxmlformats.org/drawingml/2006/main">
+            <a:defPPr>
+              <a:defRPr sz="1725" b="1">
+                <a:solidFill>
+                  <a:srgbClr val="20333D"/>
+                </a:solidFill>
+                <a:latin typeface="Arial"/>
+                <a:ea typeface="Arial"/>
+                <a:cs typeface="Arial"/>
+              </a:defRPr>
+            </a:defPPr>
+          </a:lstStyle>
+          <a:p xmlns:a="http://schemas.openxmlformats.org/drawingml/2006/main">
+            <a:pPr>
+              <a:defRPr sz="1725" b="1">
+                <a:solidFill>
+                  <a:srgbClr val="20333D"/>
+                </a:solidFill>
+                <a:latin typeface="Arial"/>
+                <a:ea typeface="Arial"/>
+                <a:cs typeface="Arial"/>
+              </a:defRPr>
+            </a:pPr>
+            <a:r>
+              <a:rPr sz="1725" b="1">
+                <a:solidFill>
+                  <a:srgbClr val="20333D"/>
+                </a:solidFill>
+                <a:latin typeface="Arial"/>
+                <a:ea typeface="Arial"/>
+                <a:cs typeface="Arial"/>
+              </a:rPr>
+              <a:t>Align substitution effects</a:t>
+            </a:r>
+          </a:p>
+        </p:txBody>
+      </p:sp>
+      <p:sp>
+        <p:nvSpPr>
+          <p:cNvPr id="24" name="label-23">
+            <a:extLst xmlns:a="http://schemas.openxmlformats.org/drawingml/2006/main">
+              <a:ext uri="{FF2B5EF4-FFF2-40B4-BE49-F238E27FC236}">
+                <a16:creationId xmlns:a16="http://schemas.microsoft.com/office/drawing/2014/main" id="{C1A8E7DE-2786-4899-9334-23182C524156}"/>
+              </a:ext>
+            </a:extLst>
+          </p:cNvPr>
+          <p:cNvSpPr>
+            <a:spLocks xmlns:a="http://schemas.openxmlformats.org/drawingml/2006/main" noGrp="1"/>
+          </p:cNvSpPr>
+          <p:nvPr/>
+        </p:nvSpPr>
+        <p:spPr>
+          <a:xfrm xmlns:a="http://schemas.openxmlformats.org/drawingml/2006/main">
+            <a:off x="7762875" y="2505075"/>
+            <a:ext cx="3143250" cy="280035"/>
+          </a:xfrm>
+          <a:prstGeom xmlns:a="http://schemas.openxmlformats.org/drawingml/2006/main" prst="rect">
+            <a:avLst/>
+          </a:prstGeom>
+          <a:noFill xmlns:a="http://schemas.openxmlformats.org/drawingml/2006/main"/>
+          <a:ln xmlns:a="http://schemas.openxmlformats.org/drawingml/2006/main" w="0">
+            <a:noFill/>
+          </a:ln>
+        </p:spPr>
+        <p:txBody>
+          <a:bodyPr xmlns:a="http://schemas.openxmlformats.org/drawingml/2006/main" lIns="0" tIns="0" rIns="0" bIns="0" anchor="t"/>
+          <a:lstStyle xmlns:a="http://schemas.openxmlformats.org/drawingml/2006/main">
+            <a:defPPr>
+              <a:defRPr sz="1575" b="1">
+                <a:solidFill>
+                  <a:srgbClr val="4B606D"/>
+                </a:solidFill>
+                <a:latin typeface="Arial"/>
+                <a:ea typeface="Arial"/>
+                <a:cs typeface="Arial"/>
+              </a:defRPr>
+            </a:defPPr>
+          </a:lstStyle>
+          <a:p xmlns:a="http://schemas.openxmlformats.org/drawingml/2006/main">
+            <a:pPr>
+              <a:defRPr sz="1575" b="1">
+                <a:solidFill>
+                  <a:srgbClr val="4B606D"/>
+                </a:solidFill>
+                <a:latin typeface="Arial"/>
+                <a:ea typeface="Arial"/>
+                <a:cs typeface="Arial"/>
+              </a:defRPr>
+            </a:pPr>
+            <a:r>
+              <a:rPr sz="1575" b="1">
+                <a:solidFill>
+                  <a:srgbClr val="4B606D"/>
+                </a:solidFill>
+                <a:latin typeface="Arial"/>
+                <a:ea typeface="Arial"/>
+                <a:cs typeface="Arial"/>
+              </a:rPr>
+              <a:t>Quantile calibration</a:t>
+            </a:r>
+          </a:p>
+        </p:txBody>
+      </p:sp>
+      <p:sp>
+        <p:nvSpPr>
+          <p:cNvPr id="25" name="label-24">
+            <a:extLst xmlns:a="http://schemas.openxmlformats.org/drawingml/2006/main">
+              <a:ext uri="{FF2B5EF4-FFF2-40B4-BE49-F238E27FC236}">
+                <a16:creationId xmlns:a16="http://schemas.microsoft.com/office/drawing/2014/main" id="{F5AA6AF4-BA59-4DA3-A3B3-4C1782B72DC7}"/>
+              </a:ext>
+            </a:extLst>
+          </p:cNvPr>
+          <p:cNvSpPr>
+            <a:spLocks xmlns:a="http://schemas.openxmlformats.org/drawingml/2006/main" noGrp="1"/>
+          </p:cNvSpPr>
+          <p:nvPr/>
+        </p:nvSpPr>
+        <p:spPr>
+          <a:xfrm xmlns:a="http://schemas.openxmlformats.org/drawingml/2006/main">
+            <a:off x="7762875" y="2867025"/>
+            <a:ext cx="3143250" cy="280035"/>
+          </a:xfrm>
+          <a:prstGeom xmlns:a="http://schemas.openxmlformats.org/drawingml/2006/main" prst="rect">
+            <a:avLst/>
+          </a:prstGeom>
+          <a:noFill xmlns:a="http://schemas.openxmlformats.org/drawingml/2006/main"/>
+          <a:ln xmlns:a="http://schemas.openxmlformats.org/drawingml/2006/main" w="0">
+            <a:noFill/>
+          </a:ln>
+        </p:spPr>
+        <p:txBody>
+          <a:bodyPr xmlns:a="http://schemas.openxmlformats.org/drawingml/2006/main" lIns="0" tIns="0" rIns="0" bIns="0" anchor="t"/>
+          <a:lstStyle xmlns:a="http://schemas.openxmlformats.org/drawingml/2006/main">
+            <a:defPPr>
+              <a:defRPr sz="1575" b="1">
+                <a:solidFill>
+                  <a:srgbClr val="4B606D"/>
+                </a:solidFill>
+                <a:latin typeface="Arial"/>
+                <a:ea typeface="Arial"/>
+                <a:cs typeface="Arial"/>
+              </a:defRPr>
+            </a:defPPr>
+          </a:lstStyle>
+          <a:p xmlns:a="http://schemas.openxmlformats.org/drawingml/2006/main">
+            <a:pPr>
+              <a:defRPr sz="1575" b="1">
+                <a:solidFill>
+                  <a:srgbClr val="4B606D"/>
+                </a:solidFill>
+                <a:latin typeface="Arial"/>
+                <a:ea typeface="Arial"/>
+                <a:cs typeface="Arial"/>
+              </a:defRPr>
+            </a:pPr>
+            <a:r>
+              <a:rPr sz="1575" b="1">
+                <a:solidFill>
+                  <a:srgbClr val="4B606D"/>
+                </a:solidFill>
+                <a:latin typeface="Arial"/>
+                <a:ea typeface="Arial"/>
+                <a:cs typeface="Arial"/>
+              </a:rPr>
+              <a:t>Conservative ensemble</a:t>
+            </a:r>
+          </a:p>
+        </p:txBody>
+      </p:sp>
+      <p:sp>
+        <p:nvSpPr>
+          <p:cNvPr id="26" name="label-25">
+            <a:extLst xmlns:a="http://schemas.openxmlformats.org/drawingml/2006/main">
+              <a:ext uri="{FF2B5EF4-FFF2-40B4-BE49-F238E27FC236}">
+                <a16:creationId xmlns:a16="http://schemas.microsoft.com/office/drawing/2014/main" id="{664BEBC3-4FE8-441E-B4BE-30C8A89AF12D}"/>
+              </a:ext>
+            </a:extLst>
+          </p:cNvPr>
+          <p:cNvSpPr>
+            <a:spLocks xmlns:a="http://schemas.openxmlformats.org/drawingml/2006/main" noGrp="1"/>
+          </p:cNvSpPr>
+          <p:nvPr/>
+        </p:nvSpPr>
+        <p:spPr>
+          <a:xfrm xmlns:a="http://schemas.openxmlformats.org/drawingml/2006/main">
+            <a:off x="7762875" y="3333750"/>
+            <a:ext cx="3190875" cy="293370"/>
+          </a:xfrm>
+          <a:prstGeom xmlns:a="http://schemas.openxmlformats.org/drawingml/2006/main" prst="rect">
+            <a:avLst/>
+          </a:prstGeom>
+          <a:noFill xmlns:a="http://schemas.openxmlformats.org/drawingml/2006/main"/>
+          <a:ln xmlns:a="http://schemas.openxmlformats.org/drawingml/2006/main" w="0">
+            <a:noFill/>
+          </a:ln>
+        </p:spPr>
+        <p:txBody>
+          <a:bodyPr xmlns:a="http://schemas.openxmlformats.org/drawingml/2006/main" lIns="0" tIns="0" rIns="0" bIns="0" anchor="t"/>
+          <a:lstStyle xmlns:a="http://schemas.openxmlformats.org/drawingml/2006/main">
+            <a:defPPr>
+              <a:defRPr sz="1650" b="1">
+                <a:solidFill>
+                  <a:srgbClr val="20333D"/>
+                </a:solidFill>
+                <a:latin typeface="Arial"/>
+                <a:ea typeface="Arial"/>
+                <a:cs typeface="Arial"/>
+              </a:defRPr>
+            </a:defPPr>
+          </a:lstStyle>
+          <a:p xmlns:a="http://schemas.openxmlformats.org/drawingml/2006/main">
+            <a:pPr>
+              <a:defRPr sz="1650" b="1">
+                <a:solidFill>
+                  <a:srgbClr val="20333D"/>
+                </a:solidFill>
+                <a:latin typeface="Arial"/>
+                <a:ea typeface="Arial"/>
+                <a:cs typeface="Arial"/>
+              </a:defRPr>
+            </a:pPr>
+            <a:r>
+              <a:rPr sz="1650" b="1">
+                <a:solidFill>
+                  <a:srgbClr val="20333D"/>
+                </a:solidFill>
+                <a:latin typeface="Arial"/>
+                <a:ea typeface="Arial"/>
+                <a:cs typeface="Arial"/>
+              </a:rPr>
+              <a:t>Combine selected positions</a:t>
+            </a:r>
+          </a:p>
+        </p:txBody>
+      </p:sp>
+      <p:sp>
+        <p:nvSpPr>
+          <p:cNvPr id="27" name="label-26">
+            <a:extLst xmlns:a="http://schemas.openxmlformats.org/drawingml/2006/main">
+              <a:ext uri="{FF2B5EF4-FFF2-40B4-BE49-F238E27FC236}">
+                <a16:creationId xmlns:a16="http://schemas.microsoft.com/office/drawing/2014/main" id="{5EF7F47D-ADEA-4375-B361-370FCB4F94A1}"/>
+              </a:ext>
+            </a:extLst>
+          </p:cNvPr>
+          <p:cNvSpPr>
+            <a:spLocks xmlns:a="http://schemas.openxmlformats.org/drawingml/2006/main" noGrp="1"/>
+          </p:cNvSpPr>
+          <p:nvPr/>
+        </p:nvSpPr>
+        <p:spPr>
+          <a:xfrm xmlns:a="http://schemas.openxmlformats.org/drawingml/2006/main">
+            <a:off x="7762875" y="3705225"/>
+            <a:ext cx="3190875" cy="253365"/>
+          </a:xfrm>
+          <a:prstGeom xmlns:a="http://schemas.openxmlformats.org/drawingml/2006/main" prst="rect">
+            <a:avLst/>
+          </a:prstGeom>
+          <a:noFill xmlns:a="http://schemas.openxmlformats.org/drawingml/2006/main"/>
+          <a:ln xmlns:a="http://schemas.openxmlformats.org/drawingml/2006/main" w="0">
+            <a:noFill/>
+          </a:ln>
+        </p:spPr>
+        <p:txBody>
+          <a:bodyPr xmlns:a="http://schemas.openxmlformats.org/drawingml/2006/main" lIns="0" tIns="0" rIns="0" bIns="0" anchor="t"/>
+          <a:lstStyle xmlns:a="http://schemas.openxmlformats.org/drawingml/2006/main">
+            <a:defPPr>
+              <a:defRPr sz="1425" b="1">
+                <a:solidFill>
+                  <a:srgbClr val="4B606D"/>
+                </a:solidFill>
+                <a:latin typeface="Arial"/>
+                <a:ea typeface="Arial"/>
+                <a:cs typeface="Arial"/>
+              </a:defRPr>
+            </a:defPPr>
+          </a:lstStyle>
+          <a:p xmlns:a="http://schemas.openxmlformats.org/drawingml/2006/main">
+            <a:pPr>
+              <a:defRPr sz="1425" b="1">
+                <a:solidFill>
+                  <a:srgbClr val="4B606D"/>
+                </a:solidFill>
+                <a:latin typeface="Arial"/>
+                <a:ea typeface="Arial"/>
+                <a:cs typeface="Arial"/>
+              </a:defRPr>
+            </a:pPr>
+            <a:r>
+              <a:rPr sz="1425" b="1">
+                <a:solidFill>
+                  <a:srgbClr val="4B606D"/>
+                </a:solidFill>
+                <a:latin typeface="Arial"/>
+                <a:ea typeface="Arial"/>
+                <a:cs typeface="Arial"/>
+              </a:rPr>
+              <a:t>No exhaustive enumeration</a:t>
+            </a:r>
+          </a:p>
+        </p:txBody>
+      </p:sp>
+      <p:sp>
+        <p:nvSpPr>
+          <p:cNvPr id="28" name="">
+            <a:extLst xmlns:a="http://schemas.openxmlformats.org/drawingml/2006/main">
+              <a:ext uri="{FF2B5EF4-FFF2-40B4-BE49-F238E27FC236}">
+                <a16:creationId xmlns:a16="http://schemas.microsoft.com/office/drawing/2014/main" id="{E520E60E-91D9-48C4-9F22-20E1F2AA533E}"/>
+              </a:ext>
+            </a:extLst>
+          </p:cNvPr>
+          <p:cNvSpPr>
+            <a:spLocks xmlns:a="http://schemas.openxmlformats.org/drawingml/2006/main" noGrp="1"/>
+          </p:cNvSpPr>
+          <p:nvPr/>
+        </p:nvSpPr>
+        <p:spPr>
+          <a:xfrm xmlns:a="http://schemas.openxmlformats.org/drawingml/2006/main">
+            <a:off x="10982325" y="2619375"/>
+            <a:ext cx="523875" cy="228600"/>
+          </a:xfrm>
+          <a:prstGeom xmlns:a="http://schemas.openxmlformats.org/drawingml/2006/main" prst="rightArrow">
+            <a:avLst/>
+          </a:prstGeom>
+          <a:solidFill xmlns:a="http://schemas.openxmlformats.org/drawingml/2006/main">
+            <a:srgbClr val="81BABC"/>
+          </a:solidFill>
+          <a:ln xmlns:a="http://schemas.openxmlformats.org/drawingml/2006/main" w="0">
+            <a:noFill/>
+          </a:ln>
+        </p:spPr>
+      </p:sp>
+      <p:pic>
+        <p:nvPicPr>
+          <p:cNvPr id="29" name="">
+            <a:extLst xmlns:a="http://schemas.openxmlformats.org/drawingml/2006/main">
+              <a:ext uri="{FF2B5EF4-FFF2-40B4-BE49-F238E27FC236}">
+                <a16:creationId xmlns:a16="http://schemas.microsoft.com/office/drawing/2014/main" id="{E3647FDB-2C29-4488-9629-B054225331E8}"/>
+              </a:ext>
+            </a:extLst>
+          </p:cNvPr>
+          <p:cNvPicPr>
+            <a:picLocks xmlns:a="http://schemas.openxmlformats.org/drawingml/2006/main" noChangeAspect="1"/>
+          </p:cNvPicPr>
+          <p:nvPr/>
+        </p:nvPicPr>
+        <p:blipFill>
+          <a:blip xmlns:r="http://schemas.openxmlformats.org/officeDocument/2006/relationships" xmlns:a="http://schemas.openxmlformats.org/drawingml/2006/main" r:embed="R9c92d0d29f7d4f40">
+            <a:extLst>
+              <a:ext uri="{96DAC541-7B7A-43D3-8B79-37D633B846F1}">
+                <asvg:svgBlip xmlns:asvg="http://schemas.microsoft.com/office/drawing/2016/SVG/main" r:embed="Rc31c2fd5555542ea"/>
+              </a:ext>
+            </a:extLst>
+          </a:blip>
+          <a:stretch xmlns:a="http://schemas.openxmlformats.org/drawingml/2006/main"/>
+        </p:blipFill>
+        <p:spPr>
+          <a:xfrm xmlns:a="http://schemas.openxmlformats.org/drawingml/2006/main">
+            <a:off x="11811000" y="1924050"/>
+            <a:ext cx="2476500" cy="1685925"/>
+          </a:xfrm>
+          <a:prstGeom xmlns:a="http://schemas.openxmlformats.org/drawingml/2006/main" prst="rect">
+            <a:avLst/>
+          </a:prstGeom>
+        </p:spPr>
+      </p:pic>
+      <p:sp>
+        <p:nvSpPr>
+          <p:cNvPr id="30" name="label-29">
+            <a:extLst xmlns:a="http://schemas.openxmlformats.org/drawingml/2006/main">
+              <a:ext uri="{FF2B5EF4-FFF2-40B4-BE49-F238E27FC236}">
+                <a16:creationId xmlns:a16="http://schemas.microsoft.com/office/drawing/2014/main" id="{0E6F5F8F-79F7-429B-9DD9-E13A4103DC0F}"/>
+              </a:ext>
+            </a:extLst>
+          </p:cNvPr>
+          <p:cNvSpPr>
+            <a:spLocks xmlns:a="http://schemas.openxmlformats.org/drawingml/2006/main" noGrp="1"/>
+          </p:cNvSpPr>
+          <p:nvPr/>
+        </p:nvSpPr>
+        <p:spPr>
+          <a:xfrm xmlns:a="http://schemas.openxmlformats.org/drawingml/2006/main">
+            <a:off x="11734800" y="3676650"/>
+            <a:ext cx="2762250" cy="293370"/>
+          </a:xfrm>
+          <a:prstGeom xmlns:a="http://schemas.openxmlformats.org/drawingml/2006/main" prst="rect">
+            <a:avLst/>
+          </a:prstGeom>
+          <a:noFill xmlns:a="http://schemas.openxmlformats.org/drawingml/2006/main"/>
+          <a:ln xmlns:a="http://schemas.openxmlformats.org/drawingml/2006/main" w="0">
+            <a:noFill/>
+          </a:ln>
+        </p:spPr>
+        <p:txBody>
+          <a:bodyPr xmlns:a="http://schemas.openxmlformats.org/drawingml/2006/main" lIns="0" tIns="0" rIns="0" bIns="0" anchor="t"/>
+          <a:lstStyle xmlns:a="http://schemas.openxmlformats.org/drawingml/2006/main">
+            <a:defPPr>
+              <a:defRPr sz="1650" b="1">
+                <a:solidFill>
+                  <a:srgbClr val="20333D"/>
+                </a:solidFill>
+                <a:latin typeface="Arial"/>
+                <a:ea typeface="Arial"/>
+                <a:cs typeface="Arial"/>
+              </a:defRPr>
+            </a:defPPr>
+          </a:lstStyle>
+          <a:p xmlns:a="http://schemas.openxmlformats.org/drawingml/2006/main">
+            <a:pPr>
+              <a:defRPr sz="1650" b="1">
+                <a:solidFill>
+                  <a:srgbClr val="20333D"/>
+                </a:solidFill>
+                <a:latin typeface="Arial"/>
+                <a:ea typeface="Arial"/>
+                <a:cs typeface="Arial"/>
+              </a:defRPr>
+            </a:pPr>
+            <a:r>
+              <a:rPr sz="1650" b="1">
+                <a:solidFill>
+                  <a:srgbClr val="20333D"/>
+                </a:solidFill>
+                <a:latin typeface="Arial"/>
+                <a:ea typeface="Arial"/>
+                <a:cs typeface="Arial"/>
+              </a:rPr>
+              <a:t>1,000 variants by default</a:t>
+            </a:r>
+          </a:p>
+        </p:txBody>
+      </p:sp>
+      <p:pic>
+        <p:nvPicPr>
+          <p:cNvPr id="31" name="">
+            <a:extLst xmlns:a="http://schemas.openxmlformats.org/drawingml/2006/main">
+              <a:ext uri="{FF2B5EF4-FFF2-40B4-BE49-F238E27FC236}">
+                <a16:creationId xmlns:a16="http://schemas.microsoft.com/office/drawing/2014/main" id="{49C88222-2EAF-474C-8980-21F6BCE37678}"/>
+              </a:ext>
+            </a:extLst>
+          </p:cNvPr>
+          <p:cNvPicPr>
+            <a:picLocks xmlns:a="http://schemas.openxmlformats.org/drawingml/2006/main" noChangeAspect="1"/>
+          </p:cNvPicPr>
+          <p:nvPr/>
+        </p:nvPicPr>
+        <p:blipFill>
+          <a:blip xmlns:r="http://schemas.openxmlformats.org/officeDocument/2006/relationships" xmlns:a="http://schemas.openxmlformats.org/drawingml/2006/main" r:embed="R2742685667a94b78">
+            <a:extLst>
+              <a:ext uri="{96DAC541-7B7A-43D3-8B79-37D633B846F1}">
+                <asvg:svgBlip xmlns:asvg="http://schemas.microsoft.com/office/drawing/2016/SVG/main" r:embed="R00f973bb50174435"/>
+              </a:ext>
+            </a:extLst>
+          </a:blip>
+          <a:stretch xmlns:a="http://schemas.openxmlformats.org/drawingml/2006/main"/>
+        </p:blipFill>
+        <p:spPr>
+          <a:xfrm xmlns:a="http://schemas.openxmlformats.org/drawingml/2006/main">
+            <a:off x="285750" y="4333875"/>
+            <a:ext cx="14478000" cy="781050"/>
+          </a:xfrm>
+          <a:prstGeom xmlns:a="http://schemas.openxmlformats.org/drawingml/2006/main" prst="rect">
+            <a:avLst/>
+          </a:prstGeom>
+        </p:spPr>
+      </p:pic>
+      <p:sp>
+        <p:nvSpPr>
+          <p:cNvPr id="32" name="label-31">
+            <a:extLst xmlns:a="http://schemas.openxmlformats.org/drawingml/2006/main">
+              <a:ext uri="{FF2B5EF4-FFF2-40B4-BE49-F238E27FC236}">
+                <a16:creationId xmlns:a16="http://schemas.microsoft.com/office/drawing/2014/main" id="{C616D790-9672-4E36-B58F-B3BD497458DB}"/>
+              </a:ext>
+            </a:extLst>
+          </p:cNvPr>
+          <p:cNvSpPr>
+            <a:spLocks xmlns:a="http://schemas.openxmlformats.org/drawingml/2006/main" noGrp="1"/>
+          </p:cNvSpPr>
+          <p:nvPr/>
+        </p:nvSpPr>
+        <p:spPr>
+          <a:xfrm xmlns:a="http://schemas.openxmlformats.org/drawingml/2006/main">
+            <a:off x="619125" y="4629150"/>
+            <a:ext cx="7620000" cy="373380"/>
           </a:xfrm>
           <a:prstGeom xmlns:a="http://schemas.openxmlformats.org/drawingml/2006/main" prst="rect">
             <a:avLst/>
@@ -3290,29 +4508,161 @@
                 <a:ea typeface="Arial"/>
                 <a:cs typeface="Arial"/>
               </a:rPr>
-              <a:t>A ranked shortlist with traceable evidence</a:t>
+              <a:t>b  Confidence-informed multi-objective screening</a:t>
             </a:r>
           </a:p>
         </p:txBody>
       </p:sp>
       <p:sp>
         <p:nvSpPr>
-          <p:cNvPr id="9" name="label-8">
-            <a:extLst xmlns:a="http://schemas.openxmlformats.org/drawingml/2006/main">
-              <a:ext uri="{FF2B5EF4-FFF2-40B4-BE49-F238E27FC236}">
-                <a16:creationId xmlns:a16="http://schemas.microsoft.com/office/drawing/2014/main" id="{1F9F416B-8158-404B-A540-307F18766EE3}"/>
-              </a:ext>
-            </a:extLst>
-          </p:cNvPr>
-          <p:cNvSpPr>
-            <a:spLocks xmlns:a="http://schemas.openxmlformats.org/drawingml/2006/main" noGrp="1"/>
-          </p:cNvSpPr>
-          <p:nvPr/>
-        </p:nvSpPr>
-        <p:spPr>
-          <a:xfrm xmlns:a="http://schemas.openxmlformats.org/drawingml/2006/main">
-            <a:off x="7334250" y="2019300"/>
-            <a:ext cx="7096125" cy="293370"/>
+          <p:cNvPr id="33" name="">
+            <a:extLst xmlns:a="http://schemas.openxmlformats.org/drawingml/2006/main">
+              <a:ext uri="{FF2B5EF4-FFF2-40B4-BE49-F238E27FC236}">
+                <a16:creationId xmlns:a16="http://schemas.microsoft.com/office/drawing/2014/main" id="{BD5A0AF8-0999-4F5F-A56D-99FC369BAA33}"/>
+              </a:ext>
+            </a:extLst>
+          </p:cNvPr>
+          <p:cNvSpPr>
+            <a:spLocks xmlns:a="http://schemas.openxmlformats.org/drawingml/2006/main" noGrp="1"/>
+          </p:cNvSpPr>
+          <p:nvPr/>
+        </p:nvSpPr>
+        <p:spPr>
+          <a:xfrm xmlns:a="http://schemas.openxmlformats.org/drawingml/2006/main">
+            <a:off x="619125" y="5162550"/>
+            <a:ext cx="2924175" cy="1314450"/>
+          </a:xfrm>
+          <a:prstGeom xmlns:a="http://schemas.openxmlformats.org/drawingml/2006/main" prst="roundRect">
+            <a:avLst>
+              <a:gd name="adj" fmla="val 7246"/>
+            </a:avLst>
+          </a:prstGeom>
+          <a:solidFill xmlns:a="http://schemas.openxmlformats.org/drawingml/2006/main">
+            <a:srgbClr val="FAFBFD"/>
+          </a:solidFill>
+          <a:ln xmlns:a="http://schemas.openxmlformats.org/drawingml/2006/main" w="19050">
+            <a:solidFill>
+              <a:srgbClr val="AE91C8"/>
+            </a:solidFill>
+          </a:ln>
+        </p:spPr>
+      </p:sp>
+      <p:sp>
+        <p:nvSpPr>
+          <p:cNvPr id="34" name="">
+            <a:extLst xmlns:a="http://schemas.openxmlformats.org/drawingml/2006/main">
+              <a:ext uri="{FF2B5EF4-FFF2-40B4-BE49-F238E27FC236}">
+                <a16:creationId xmlns:a16="http://schemas.microsoft.com/office/drawing/2014/main" id="{A047F26C-F5E5-471A-811A-E94F318AED61}"/>
+              </a:ext>
+            </a:extLst>
+          </p:cNvPr>
+          <p:cNvSpPr>
+            <a:spLocks xmlns:a="http://schemas.openxmlformats.org/drawingml/2006/main" noGrp="1"/>
+          </p:cNvSpPr>
+          <p:nvPr/>
+        </p:nvSpPr>
+        <p:spPr>
+          <a:xfrm xmlns:a="http://schemas.openxmlformats.org/drawingml/2006/main">
+            <a:off x="619125" y="5162550"/>
+            <a:ext cx="2924175" cy="76200"/>
+          </a:xfrm>
+          <a:prstGeom xmlns:a="http://schemas.openxmlformats.org/drawingml/2006/main" prst="roundRect">
+            <a:avLst>
+              <a:gd name="adj" fmla="val 37500"/>
+            </a:avLst>
+          </a:prstGeom>
+          <a:solidFill xmlns:a="http://schemas.openxmlformats.org/drawingml/2006/main">
+            <a:srgbClr val="AE91C8"/>
+          </a:solidFill>
+          <a:ln xmlns:a="http://schemas.openxmlformats.org/drawingml/2006/main" w="0">
+            <a:noFill/>
+          </a:ln>
+        </p:spPr>
+      </p:sp>
+      <p:sp>
+        <p:nvSpPr>
+          <p:cNvPr id="35" name="label-34">
+            <a:extLst xmlns:a="http://schemas.openxmlformats.org/drawingml/2006/main">
+              <a:ext uri="{FF2B5EF4-FFF2-40B4-BE49-F238E27FC236}">
+                <a16:creationId xmlns:a16="http://schemas.microsoft.com/office/drawing/2014/main" id="{6592B07F-C9AC-4CFF-824E-DE8C5E70ABD1}"/>
+              </a:ext>
+            </a:extLst>
+          </p:cNvPr>
+          <p:cNvSpPr>
+            <a:spLocks xmlns:a="http://schemas.openxmlformats.org/drawingml/2006/main" noGrp="1"/>
+          </p:cNvSpPr>
+          <p:nvPr/>
+        </p:nvSpPr>
+        <p:spPr>
+          <a:xfrm xmlns:a="http://schemas.openxmlformats.org/drawingml/2006/main">
+            <a:off x="790575" y="5324475"/>
+            <a:ext cx="2571750" cy="346710"/>
+          </a:xfrm>
+          <a:prstGeom xmlns:a="http://schemas.openxmlformats.org/drawingml/2006/main" prst="rect">
+            <a:avLst/>
+          </a:prstGeom>
+          <a:noFill xmlns:a="http://schemas.openxmlformats.org/drawingml/2006/main"/>
+          <a:ln xmlns:a="http://schemas.openxmlformats.org/drawingml/2006/main" w="0">
+            <a:noFill/>
+          </a:ln>
+        </p:spPr>
+        <p:txBody>
+          <a:bodyPr xmlns:a="http://schemas.openxmlformats.org/drawingml/2006/main" lIns="0" tIns="0" rIns="0" bIns="0" anchor="t"/>
+          <a:lstStyle xmlns:a="http://schemas.openxmlformats.org/drawingml/2006/main">
+            <a:defPPr>
+              <a:defRPr sz="1950" b="1">
+                <a:solidFill>
+                  <a:srgbClr val="20333D"/>
+                </a:solidFill>
+                <a:latin typeface="Arial"/>
+                <a:ea typeface="Arial"/>
+                <a:cs typeface="Arial"/>
+              </a:defRPr>
+            </a:defPPr>
+          </a:lstStyle>
+          <a:p xmlns:a="http://schemas.openxmlformats.org/drawingml/2006/main">
+            <a:pPr>
+              <a:defRPr sz="1950" b="1">
+                <a:solidFill>
+                  <a:srgbClr val="20333D"/>
+                </a:solidFill>
+                <a:latin typeface="Arial"/>
+                <a:ea typeface="Arial"/>
+                <a:cs typeface="Arial"/>
+              </a:defRPr>
+            </a:pPr>
+            <a:r>
+              <a:rPr sz="1950" b="1">
+                <a:solidFill>
+                  <a:srgbClr val="20333D"/>
+                </a:solidFill>
+                <a:latin typeface="Arial"/>
+                <a:ea typeface="Arial"/>
+                <a:cs typeface="Arial"/>
+              </a:rPr>
+              <a:t>PHENOM</a:t>
+            </a:r>
+          </a:p>
+        </p:txBody>
+      </p:sp>
+      <p:sp>
+        <p:nvSpPr>
+          <p:cNvPr id="36" name="label-35">
+            <a:extLst xmlns:a="http://schemas.openxmlformats.org/drawingml/2006/main">
+              <a:ext uri="{FF2B5EF4-FFF2-40B4-BE49-F238E27FC236}">
+                <a16:creationId xmlns:a16="http://schemas.microsoft.com/office/drawing/2014/main" id="{B10FC63B-E23B-4F22-8FAB-C1F77003B90F}"/>
+              </a:ext>
+            </a:extLst>
+          </p:cNvPr>
+          <p:cNvSpPr>
+            <a:spLocks xmlns:a="http://schemas.openxmlformats.org/drawingml/2006/main" noGrp="1"/>
+          </p:cNvSpPr>
+          <p:nvPr/>
+        </p:nvSpPr>
+        <p:spPr>
+          <a:xfrm xmlns:a="http://schemas.openxmlformats.org/drawingml/2006/main">
+            <a:off x="790575" y="5715000"/>
+            <a:ext cx="2571750" cy="293370"/>
           </a:xfrm>
           <a:prstGeom xmlns:a="http://schemas.openxmlformats.org/drawingml/2006/main" prst="rect">
             <a:avLst/>
@@ -3328,7 +4678,7 @@
             <a:defPPr>
               <a:defRPr sz="1650" b="1">
                 <a:solidFill>
-                  <a:srgbClr val="4B606D"/>
+                  <a:srgbClr val="20333D"/>
                 </a:solidFill>
                 <a:latin typeface="Arial"/>
                 <a:ea typeface="Arial"/>
@@ -3340,7 +4690,7 @@
             <a:pPr>
               <a:defRPr sz="1650" b="1">
                 <a:solidFill>
-                  <a:srgbClr val="4B606D"/>
+                  <a:srgbClr val="20333D"/>
                 </a:solidFill>
                 <a:latin typeface="Arial"/>
                 <a:ea typeface="Arial"/>
@@ -3350,43 +4700,143 @@
             <a:r>
               <a:rPr sz="1650" b="1">
                 <a:solidFill>
-                  <a:srgbClr val="4B606D"/>
+                  <a:srgbClr val="20333D"/>
                 </a:solidFill>
                 <a:latin typeface="Arial"/>
                 <a:ea typeface="Arial"/>
                 <a:cs typeface="Arial"/>
               </a:rPr>
-              <a:t>Keep the sequence, predictions and design decisions together</a:t>
+              <a:t>Catalytic activity</a:t>
             </a:r>
           </a:p>
         </p:txBody>
       </p:sp>
       <p:sp>
         <p:nvSpPr>
-          <p:cNvPr id="10" name="">
-            <a:extLst xmlns:a="http://schemas.openxmlformats.org/drawingml/2006/main">
-              <a:ext uri="{FF2B5EF4-FFF2-40B4-BE49-F238E27FC236}">
-                <a16:creationId xmlns:a16="http://schemas.microsoft.com/office/drawing/2014/main" id="{6D2261D1-DBC8-4068-9D38-B06356232793}"/>
-              </a:ext>
-            </a:extLst>
-          </p:cNvPr>
-          <p:cNvSpPr>
-            <a:spLocks xmlns:a="http://schemas.openxmlformats.org/drawingml/2006/main" noGrp="1"/>
-          </p:cNvSpPr>
-          <p:nvPr/>
-        </p:nvSpPr>
-        <p:spPr>
-          <a:xfrm xmlns:a="http://schemas.openxmlformats.org/drawingml/2006/main">
-            <a:off x="523875" y="2800350"/>
-            <a:ext cx="4286250" cy="504825"/>
+          <p:cNvPr id="37" name="label-36">
+            <a:extLst xmlns:a="http://schemas.openxmlformats.org/drawingml/2006/main">
+              <a:ext uri="{FF2B5EF4-FFF2-40B4-BE49-F238E27FC236}">
+                <a16:creationId xmlns:a16="http://schemas.microsoft.com/office/drawing/2014/main" id="{0A78EF9B-B9CE-4654-A6FC-D147FF18D0C1}"/>
+              </a:ext>
+            </a:extLst>
+          </p:cNvPr>
+          <p:cNvSpPr>
+            <a:spLocks xmlns:a="http://schemas.openxmlformats.org/drawingml/2006/main" noGrp="1"/>
+          </p:cNvSpPr>
+          <p:nvPr/>
+        </p:nvSpPr>
+        <p:spPr>
+          <a:xfrm xmlns:a="http://schemas.openxmlformats.org/drawingml/2006/main">
+            <a:off x="790575" y="6067425"/>
+            <a:ext cx="2571750" cy="240030"/>
+          </a:xfrm>
+          <a:prstGeom xmlns:a="http://schemas.openxmlformats.org/drawingml/2006/main" prst="rect">
+            <a:avLst/>
+          </a:prstGeom>
+          <a:noFill xmlns:a="http://schemas.openxmlformats.org/drawingml/2006/main"/>
+          <a:ln xmlns:a="http://schemas.openxmlformats.org/drawingml/2006/main" w="0">
+            <a:noFill/>
+          </a:ln>
+        </p:spPr>
+        <p:txBody>
+          <a:bodyPr xmlns:a="http://schemas.openxmlformats.org/drawingml/2006/main" lIns="0" tIns="0" rIns="0" bIns="0" anchor="t"/>
+          <a:lstStyle xmlns:a="http://schemas.openxmlformats.org/drawingml/2006/main">
+            <a:defPPr>
+              <a:defRPr sz="1350" b="1">
+                <a:solidFill>
+                  <a:srgbClr val="4B606D"/>
+                </a:solidFill>
+                <a:latin typeface="Arial"/>
+                <a:ea typeface="Arial"/>
+                <a:cs typeface="Arial"/>
+              </a:defRPr>
+            </a:defPPr>
+          </a:lstStyle>
+          <a:p xmlns:a="http://schemas.openxmlformats.org/drawingml/2006/main">
+            <a:pPr>
+              <a:defRPr sz="1350" b="1">
+                <a:solidFill>
+                  <a:srgbClr val="4B606D"/>
+                </a:solidFill>
+                <a:latin typeface="Arial"/>
+                <a:ea typeface="Arial"/>
+                <a:cs typeface="Arial"/>
+              </a:defRPr>
+            </a:pPr>
+            <a:r>
+              <a:rPr sz="1350" b="1">
+                <a:solidFill>
+                  <a:srgbClr val="4B606D"/>
+                </a:solidFill>
+                <a:latin typeface="Arial"/>
+                <a:ea typeface="Arial"/>
+                <a:cs typeface="Arial"/>
+              </a:rPr>
+              <a:t>Gaussian-head uncertainty</a:t>
+            </a:r>
+          </a:p>
+        </p:txBody>
+      </p:sp>
+      <p:sp>
+        <p:nvSpPr>
+          <p:cNvPr id="38" name="">
+            <a:extLst xmlns:a="http://schemas.openxmlformats.org/drawingml/2006/main">
+              <a:ext uri="{FF2B5EF4-FFF2-40B4-BE49-F238E27FC236}">
+                <a16:creationId xmlns:a16="http://schemas.microsoft.com/office/drawing/2014/main" id="{D55C0C68-515A-415A-9852-F20FF079D953}"/>
+              </a:ext>
+            </a:extLst>
+          </p:cNvPr>
+          <p:cNvSpPr>
+            <a:spLocks xmlns:a="http://schemas.openxmlformats.org/drawingml/2006/main" noGrp="1"/>
+          </p:cNvSpPr>
+          <p:nvPr/>
+        </p:nvSpPr>
+        <p:spPr>
+          <a:xfrm xmlns:a="http://schemas.openxmlformats.org/drawingml/2006/main">
+            <a:off x="3924300" y="5162550"/>
+            <a:ext cx="2924175" cy="1314450"/>
           </a:xfrm>
           <a:prstGeom xmlns:a="http://schemas.openxmlformats.org/drawingml/2006/main" prst="roundRect">
             <a:avLst>
-              <a:gd name="adj" fmla="val 15094"/>
+              <a:gd name="adj" fmla="val 7246"/>
             </a:avLst>
           </a:prstGeom>
           <a:solidFill xmlns:a="http://schemas.openxmlformats.org/drawingml/2006/main">
-            <a:srgbClr val="E9F4F4"/>
+            <a:srgbClr val="FAFBFD"/>
+          </a:solidFill>
+          <a:ln xmlns:a="http://schemas.openxmlformats.org/drawingml/2006/main" w="19050">
+            <a:solidFill>
+              <a:srgbClr val="81BABC"/>
+            </a:solidFill>
+          </a:ln>
+        </p:spPr>
+      </p:sp>
+      <p:sp>
+        <p:nvSpPr>
+          <p:cNvPr id="39" name="">
+            <a:extLst xmlns:a="http://schemas.openxmlformats.org/drawingml/2006/main">
+              <a:ext uri="{FF2B5EF4-FFF2-40B4-BE49-F238E27FC236}">
+                <a16:creationId xmlns:a16="http://schemas.microsoft.com/office/drawing/2014/main" id="{0A3B99E1-80F6-45D8-BADE-3CDCA4D0B53B}"/>
+              </a:ext>
+            </a:extLst>
+          </p:cNvPr>
+          <p:cNvSpPr>
+            <a:spLocks xmlns:a="http://schemas.openxmlformats.org/drawingml/2006/main" noGrp="1"/>
+          </p:cNvSpPr>
+          <p:nvPr/>
+        </p:nvSpPr>
+        <p:spPr>
+          <a:xfrm xmlns:a="http://schemas.openxmlformats.org/drawingml/2006/main">
+            <a:off x="3924300" y="5162550"/>
+            <a:ext cx="2924175" cy="76200"/>
+          </a:xfrm>
+          <a:prstGeom xmlns:a="http://schemas.openxmlformats.org/drawingml/2006/main" prst="roundRect">
+            <a:avLst>
+              <a:gd name="adj" fmla="val 37500"/>
+            </a:avLst>
+          </a:prstGeom>
+          <a:solidFill xmlns:a="http://schemas.openxmlformats.org/drawingml/2006/main">
+            <a:srgbClr val="81BABC"/>
           </a:solidFill>
           <a:ln xmlns:a="http://schemas.openxmlformats.org/drawingml/2006/main" w="0">
             <a:noFill/>
@@ -3395,22 +4845,22 @@
       </p:sp>
       <p:sp>
         <p:nvSpPr>
-          <p:cNvPr id="11" name="label-10">
-            <a:extLst xmlns:a="http://schemas.openxmlformats.org/drawingml/2006/main">
-              <a:ext uri="{FF2B5EF4-FFF2-40B4-BE49-F238E27FC236}">
-                <a16:creationId xmlns:a16="http://schemas.microsoft.com/office/drawing/2014/main" id="{3FF0F73C-0BB7-4EB3-9A70-F9CDAEF10AFA}"/>
-              </a:ext>
-            </a:extLst>
-          </p:cNvPr>
-          <p:cNvSpPr>
-            <a:spLocks xmlns:a="http://schemas.openxmlformats.org/drawingml/2006/main" noGrp="1"/>
-          </p:cNvSpPr>
-          <p:nvPr/>
-        </p:nvSpPr>
-        <p:spPr>
-          <a:xfrm xmlns:a="http://schemas.openxmlformats.org/drawingml/2006/main">
-            <a:off x="657225" y="2905125"/>
-            <a:ext cx="4000500" cy="346710"/>
+          <p:cNvPr id="40" name="label-39">
+            <a:extLst xmlns:a="http://schemas.openxmlformats.org/drawingml/2006/main">
+              <a:ext uri="{FF2B5EF4-FFF2-40B4-BE49-F238E27FC236}">
+                <a16:creationId xmlns:a16="http://schemas.microsoft.com/office/drawing/2014/main" id="{5D2B1C51-2AA9-4870-9FD4-0EE54DA710D3}"/>
+              </a:ext>
+            </a:extLst>
+          </p:cNvPr>
+          <p:cNvSpPr>
+            <a:spLocks xmlns:a="http://schemas.openxmlformats.org/drawingml/2006/main" noGrp="1"/>
+          </p:cNvSpPr>
+          <p:nvPr/>
+        </p:nvSpPr>
+        <p:spPr>
+          <a:xfrm xmlns:a="http://schemas.openxmlformats.org/drawingml/2006/main">
+            <a:off x="4095750" y="5324475"/>
+            <a:ext cx="2571750" cy="346710"/>
           </a:xfrm>
           <a:prstGeom xmlns:a="http://schemas.openxmlformats.org/drawingml/2006/main" prst="rect">
             <a:avLst/>
@@ -3454,37 +4904,203 @@
                 <a:ea typeface="Arial"/>
                 <a:cs typeface="Arial"/>
               </a:rPr>
-              <a:t>01  Construct the mutation library</a:t>
+              <a:t>EpHod</a:t>
             </a:r>
           </a:p>
         </p:txBody>
       </p:sp>
       <p:sp>
         <p:nvSpPr>
-          <p:cNvPr id="12" name="">
-            <a:extLst xmlns:a="http://schemas.openxmlformats.org/drawingml/2006/main">
-              <a:ext uri="{FF2B5EF4-FFF2-40B4-BE49-F238E27FC236}">
-                <a16:creationId xmlns:a16="http://schemas.microsoft.com/office/drawing/2014/main" id="{6C48D8C4-7A55-4C07-B29E-BD97F1321DC7}"/>
-              </a:ext>
-            </a:extLst>
-          </p:cNvPr>
-          <p:cNvSpPr>
-            <a:spLocks xmlns:a="http://schemas.openxmlformats.org/drawingml/2006/main" noGrp="1"/>
-          </p:cNvSpPr>
-          <p:nvPr/>
-        </p:nvSpPr>
-        <p:spPr>
-          <a:xfrm xmlns:a="http://schemas.openxmlformats.org/drawingml/2006/main">
-            <a:off x="5524500" y="2800350"/>
-            <a:ext cx="4286250" cy="504825"/>
+          <p:cNvPr id="41" name="label-40">
+            <a:extLst xmlns:a="http://schemas.openxmlformats.org/drawingml/2006/main">
+              <a:ext uri="{FF2B5EF4-FFF2-40B4-BE49-F238E27FC236}">
+                <a16:creationId xmlns:a16="http://schemas.microsoft.com/office/drawing/2014/main" id="{7C6E1217-88E7-4577-9148-BD4F3DB42FEC}"/>
+              </a:ext>
+            </a:extLst>
+          </p:cNvPr>
+          <p:cNvSpPr>
+            <a:spLocks xmlns:a="http://schemas.openxmlformats.org/drawingml/2006/main" noGrp="1"/>
+          </p:cNvSpPr>
+          <p:nvPr/>
+        </p:nvSpPr>
+        <p:spPr>
+          <a:xfrm xmlns:a="http://schemas.openxmlformats.org/drawingml/2006/main">
+            <a:off x="4095750" y="5715000"/>
+            <a:ext cx="2571750" cy="293370"/>
+          </a:xfrm>
+          <a:prstGeom xmlns:a="http://schemas.openxmlformats.org/drawingml/2006/main" prst="rect">
+            <a:avLst/>
+          </a:prstGeom>
+          <a:noFill xmlns:a="http://schemas.openxmlformats.org/drawingml/2006/main"/>
+          <a:ln xmlns:a="http://schemas.openxmlformats.org/drawingml/2006/main" w="0">
+            <a:noFill/>
+          </a:ln>
+        </p:spPr>
+        <p:txBody>
+          <a:bodyPr xmlns:a="http://schemas.openxmlformats.org/drawingml/2006/main" lIns="0" tIns="0" rIns="0" bIns="0" anchor="t"/>
+          <a:lstStyle xmlns:a="http://schemas.openxmlformats.org/drawingml/2006/main">
+            <a:defPPr>
+              <a:defRPr sz="1650" b="1">
+                <a:solidFill>
+                  <a:srgbClr val="20333D"/>
+                </a:solidFill>
+                <a:latin typeface="Arial"/>
+                <a:ea typeface="Arial"/>
+                <a:cs typeface="Arial"/>
+              </a:defRPr>
+            </a:defPPr>
+          </a:lstStyle>
+          <a:p xmlns:a="http://schemas.openxmlformats.org/drawingml/2006/main">
+            <a:pPr>
+              <a:defRPr sz="1650" b="1">
+                <a:solidFill>
+                  <a:srgbClr val="20333D"/>
+                </a:solidFill>
+                <a:latin typeface="Arial"/>
+                <a:ea typeface="Arial"/>
+                <a:cs typeface="Arial"/>
+              </a:defRPr>
+            </a:pPr>
+            <a:r>
+              <a:rPr sz="1650" b="1">
+                <a:solidFill>
+                  <a:srgbClr val="20333D"/>
+                </a:solidFill>
+                <a:latin typeface="Arial"/>
+                <a:ea typeface="Arial"/>
+                <a:cs typeface="Arial"/>
+              </a:rPr>
+              <a:t>Optimal pH</a:t>
+            </a:r>
+          </a:p>
+        </p:txBody>
+      </p:sp>
+      <p:sp>
+        <p:nvSpPr>
+          <p:cNvPr id="42" name="label-41">
+            <a:extLst xmlns:a="http://schemas.openxmlformats.org/drawingml/2006/main">
+              <a:ext uri="{FF2B5EF4-FFF2-40B4-BE49-F238E27FC236}">
+                <a16:creationId xmlns:a16="http://schemas.microsoft.com/office/drawing/2014/main" id="{1F1A87BA-E890-457B-A79B-D44C994222AA}"/>
+              </a:ext>
+            </a:extLst>
+          </p:cNvPr>
+          <p:cNvSpPr>
+            <a:spLocks xmlns:a="http://schemas.openxmlformats.org/drawingml/2006/main" noGrp="1"/>
+          </p:cNvSpPr>
+          <p:nvPr/>
+        </p:nvSpPr>
+        <p:spPr>
+          <a:xfrm xmlns:a="http://schemas.openxmlformats.org/drawingml/2006/main">
+            <a:off x="4095750" y="6067425"/>
+            <a:ext cx="2571750" cy="240030"/>
+          </a:xfrm>
+          <a:prstGeom xmlns:a="http://schemas.openxmlformats.org/drawingml/2006/main" prst="rect">
+            <a:avLst/>
+          </a:prstGeom>
+          <a:noFill xmlns:a="http://schemas.openxmlformats.org/drawingml/2006/main"/>
+          <a:ln xmlns:a="http://schemas.openxmlformats.org/drawingml/2006/main" w="0">
+            <a:noFill/>
+          </a:ln>
+        </p:spPr>
+        <p:txBody>
+          <a:bodyPr xmlns:a="http://schemas.openxmlformats.org/drawingml/2006/main" lIns="0" tIns="0" rIns="0" bIns="0" anchor="t"/>
+          <a:lstStyle xmlns:a="http://schemas.openxmlformats.org/drawingml/2006/main">
+            <a:defPPr>
+              <a:defRPr sz="1350" b="1">
+                <a:solidFill>
+                  <a:srgbClr val="4B606D"/>
+                </a:solidFill>
+                <a:latin typeface="Arial"/>
+                <a:ea typeface="Arial"/>
+                <a:cs typeface="Arial"/>
+              </a:defRPr>
+            </a:defPPr>
+          </a:lstStyle>
+          <a:p xmlns:a="http://schemas.openxmlformats.org/drawingml/2006/main">
+            <a:pPr>
+              <a:defRPr sz="1350" b="1">
+                <a:solidFill>
+                  <a:srgbClr val="4B606D"/>
+                </a:solidFill>
+                <a:latin typeface="Arial"/>
+                <a:ea typeface="Arial"/>
+                <a:cs typeface="Arial"/>
+              </a:defRPr>
+            </a:pPr>
+            <a:r>
+              <a:rPr sz="1350" b="1">
+                <a:solidFill>
+                  <a:srgbClr val="4B606D"/>
+                </a:solidFill>
+                <a:latin typeface="Arial"/>
+                <a:ea typeface="Arial"/>
+                <a:cs typeface="Arial"/>
+              </a:rPr>
+              <a:t>Predictor disagreement</a:t>
+            </a:r>
+          </a:p>
+        </p:txBody>
+      </p:sp>
+      <p:sp>
+        <p:nvSpPr>
+          <p:cNvPr id="43" name="">
+            <a:extLst xmlns:a="http://schemas.openxmlformats.org/drawingml/2006/main">
+              <a:ext uri="{FF2B5EF4-FFF2-40B4-BE49-F238E27FC236}">
+                <a16:creationId xmlns:a16="http://schemas.microsoft.com/office/drawing/2014/main" id="{ABEF46C3-EB42-4FD6-8180-0121565AC4CC}"/>
+              </a:ext>
+            </a:extLst>
+          </p:cNvPr>
+          <p:cNvSpPr>
+            <a:spLocks xmlns:a="http://schemas.openxmlformats.org/drawingml/2006/main" noGrp="1"/>
+          </p:cNvSpPr>
+          <p:nvPr/>
+        </p:nvSpPr>
+        <p:spPr>
+          <a:xfrm xmlns:a="http://schemas.openxmlformats.org/drawingml/2006/main">
+            <a:off x="7229475" y="5162550"/>
+            <a:ext cx="2924175" cy="1314450"/>
           </a:xfrm>
           <a:prstGeom xmlns:a="http://schemas.openxmlformats.org/drawingml/2006/main" prst="roundRect">
             <a:avLst>
-              <a:gd name="adj" fmla="val 15094"/>
+              <a:gd name="adj" fmla="val 7246"/>
             </a:avLst>
           </a:prstGeom>
           <a:solidFill xmlns:a="http://schemas.openxmlformats.org/drawingml/2006/main">
-            <a:srgbClr val="F2EDF8"/>
+            <a:srgbClr val="FAFBFD"/>
+          </a:solidFill>
+          <a:ln xmlns:a="http://schemas.openxmlformats.org/drawingml/2006/main" w="19050">
+            <a:solidFill>
+              <a:srgbClr val="E8ACC9"/>
+            </a:solidFill>
+          </a:ln>
+        </p:spPr>
+      </p:sp>
+      <p:sp>
+        <p:nvSpPr>
+          <p:cNvPr id="44" name="">
+            <a:extLst xmlns:a="http://schemas.openxmlformats.org/drawingml/2006/main">
+              <a:ext uri="{FF2B5EF4-FFF2-40B4-BE49-F238E27FC236}">
+                <a16:creationId xmlns:a16="http://schemas.microsoft.com/office/drawing/2014/main" id="{59F7397F-797F-4643-8185-DF3521971322}"/>
+              </a:ext>
+            </a:extLst>
+          </p:cNvPr>
+          <p:cNvSpPr>
+            <a:spLocks xmlns:a="http://schemas.openxmlformats.org/drawingml/2006/main" noGrp="1"/>
+          </p:cNvSpPr>
+          <p:nvPr/>
+        </p:nvSpPr>
+        <p:spPr>
+          <a:xfrm xmlns:a="http://schemas.openxmlformats.org/drawingml/2006/main">
+            <a:off x="7229475" y="5162550"/>
+            <a:ext cx="2924175" cy="76200"/>
+          </a:xfrm>
+          <a:prstGeom xmlns:a="http://schemas.openxmlformats.org/drawingml/2006/main" prst="roundRect">
+            <a:avLst>
+              <a:gd name="adj" fmla="val 37500"/>
+            </a:avLst>
+          </a:prstGeom>
+          <a:solidFill xmlns:a="http://schemas.openxmlformats.org/drawingml/2006/main">
+            <a:srgbClr val="E8ACC9"/>
           </a:solidFill>
           <a:ln xmlns:a="http://schemas.openxmlformats.org/drawingml/2006/main" w="0">
             <a:noFill/>
@@ -3493,22 +5109,22 @@
       </p:sp>
       <p:sp>
         <p:nvSpPr>
-          <p:cNvPr id="13" name="label-12">
-            <a:extLst xmlns:a="http://schemas.openxmlformats.org/drawingml/2006/main">
-              <a:ext uri="{FF2B5EF4-FFF2-40B4-BE49-F238E27FC236}">
-                <a16:creationId xmlns:a16="http://schemas.microsoft.com/office/drawing/2014/main" id="{C2E8E91A-62E3-452E-9442-41E50CCCFF1A}"/>
-              </a:ext>
-            </a:extLst>
-          </p:cNvPr>
-          <p:cNvSpPr>
-            <a:spLocks xmlns:a="http://schemas.openxmlformats.org/drawingml/2006/main" noGrp="1"/>
-          </p:cNvSpPr>
-          <p:nvPr/>
-        </p:nvSpPr>
-        <p:spPr>
-          <a:xfrm xmlns:a="http://schemas.openxmlformats.org/drawingml/2006/main">
-            <a:off x="5657850" y="2905125"/>
-            <a:ext cx="4000500" cy="346710"/>
+          <p:cNvPr id="45" name="label-44">
+            <a:extLst xmlns:a="http://schemas.openxmlformats.org/drawingml/2006/main">
+              <a:ext uri="{FF2B5EF4-FFF2-40B4-BE49-F238E27FC236}">
+                <a16:creationId xmlns:a16="http://schemas.microsoft.com/office/drawing/2014/main" id="{189BB8DD-A6D2-450E-A93E-9F5EA6187654}"/>
+              </a:ext>
+            </a:extLst>
+          </p:cNvPr>
+          <p:cNvSpPr>
+            <a:spLocks xmlns:a="http://schemas.openxmlformats.org/drawingml/2006/main" noGrp="1"/>
+          </p:cNvSpPr>
+          <p:nvPr/>
+        </p:nvSpPr>
+        <p:spPr>
+          <a:xfrm xmlns:a="http://schemas.openxmlformats.org/drawingml/2006/main">
+            <a:off x="7400925" y="5324475"/>
+            <a:ext cx="2571750" cy="346710"/>
           </a:xfrm>
           <a:prstGeom xmlns:a="http://schemas.openxmlformats.org/drawingml/2006/main" prst="rect">
             <a:avLst/>
@@ -3552,1169 +5168,29 @@
                 <a:ea typeface="Arial"/>
                 <a:cs typeface="Arial"/>
               </a:rPr>
-              <a:t>02  Predict and balance scores</a:t>
+              <a:t>UniStab</a:t>
             </a:r>
           </a:p>
         </p:txBody>
       </p:sp>
       <p:sp>
         <p:nvSpPr>
-          <p:cNvPr id="14" name="">
-            <a:extLst xmlns:a="http://schemas.openxmlformats.org/drawingml/2006/main">
-              <a:ext uri="{FF2B5EF4-FFF2-40B4-BE49-F238E27FC236}">
-                <a16:creationId xmlns:a16="http://schemas.microsoft.com/office/drawing/2014/main" id="{9D901270-56EB-463A-BE33-2D38F5273D59}"/>
-              </a:ext>
-            </a:extLst>
-          </p:cNvPr>
-          <p:cNvSpPr>
-            <a:spLocks xmlns:a="http://schemas.openxmlformats.org/drawingml/2006/main" noGrp="1"/>
-          </p:cNvSpPr>
-          <p:nvPr/>
-        </p:nvSpPr>
-        <p:spPr>
-          <a:xfrm xmlns:a="http://schemas.openxmlformats.org/drawingml/2006/main">
-            <a:off x="10525125" y="2800350"/>
-            <a:ext cx="4286250" cy="504825"/>
-          </a:xfrm>
-          <a:prstGeom xmlns:a="http://schemas.openxmlformats.org/drawingml/2006/main" prst="roundRect">
-            <a:avLst>
-              <a:gd name="adj" fmla="val 15094"/>
-            </a:avLst>
-          </a:prstGeom>
-          <a:solidFill xmlns:a="http://schemas.openxmlformats.org/drawingml/2006/main">
-            <a:srgbClr val="FBF0F5"/>
-          </a:solidFill>
-          <a:ln xmlns:a="http://schemas.openxmlformats.org/drawingml/2006/main" w="0">
-            <a:noFill/>
-          </a:ln>
-        </p:spPr>
-      </p:sp>
-      <p:sp>
-        <p:nvSpPr>
-          <p:cNvPr id="15" name="label-14">
-            <a:extLst xmlns:a="http://schemas.openxmlformats.org/drawingml/2006/main">
-              <a:ext uri="{FF2B5EF4-FFF2-40B4-BE49-F238E27FC236}">
-                <a16:creationId xmlns:a16="http://schemas.microsoft.com/office/drawing/2014/main" id="{75168B84-1CA7-485E-A96C-8E25D682EB9E}"/>
-              </a:ext>
-            </a:extLst>
-          </p:cNvPr>
-          <p:cNvSpPr>
-            <a:spLocks xmlns:a="http://schemas.openxmlformats.org/drawingml/2006/main" noGrp="1"/>
-          </p:cNvSpPr>
-          <p:nvPr/>
-        </p:nvSpPr>
-        <p:spPr>
-          <a:xfrm xmlns:a="http://schemas.openxmlformats.org/drawingml/2006/main">
-            <a:off x="10658475" y="2905125"/>
-            <a:ext cx="4000500" cy="346710"/>
-          </a:xfrm>
-          <a:prstGeom xmlns:a="http://schemas.openxmlformats.org/drawingml/2006/main" prst="rect">
-            <a:avLst/>
-          </a:prstGeom>
-          <a:noFill xmlns:a="http://schemas.openxmlformats.org/drawingml/2006/main"/>
-          <a:ln xmlns:a="http://schemas.openxmlformats.org/drawingml/2006/main" w="0">
-            <a:noFill/>
-          </a:ln>
-        </p:spPr>
-        <p:txBody>
-          <a:bodyPr xmlns:a="http://schemas.openxmlformats.org/drawingml/2006/main" lIns="0" tIns="0" rIns="0" bIns="0" anchor="t"/>
-          <a:lstStyle xmlns:a="http://schemas.openxmlformats.org/drawingml/2006/main">
-            <a:defPPr>
-              <a:defRPr sz="1950" b="1">
-                <a:solidFill>
-                  <a:srgbClr val="20333D"/>
-                </a:solidFill>
-                <a:latin typeface="Arial"/>
-                <a:ea typeface="Arial"/>
-                <a:cs typeface="Arial"/>
-              </a:defRPr>
-            </a:defPPr>
-          </a:lstStyle>
-          <a:p xmlns:a="http://schemas.openxmlformats.org/drawingml/2006/main">
-            <a:pPr>
-              <a:defRPr sz="1950" b="1">
-                <a:solidFill>
-                  <a:srgbClr val="20333D"/>
-                </a:solidFill>
-                <a:latin typeface="Arial"/>
-                <a:ea typeface="Arial"/>
-                <a:cs typeface="Arial"/>
-              </a:defRPr>
-            </a:pPr>
-            <a:r>
-              <a:rPr sz="1950" b="1">
-                <a:solidFill>
-                  <a:srgbClr val="20333D"/>
-                </a:solidFill>
-                <a:latin typeface="Arial"/>
-                <a:ea typeface="Arial"/>
-                <a:cs typeface="Arial"/>
-              </a:rPr>
-              <a:t>03  Inspect and export candidates</a:t>
-            </a:r>
-          </a:p>
-        </p:txBody>
-      </p:sp>
-      <p:sp>
-        <p:nvSpPr>
-          <p:cNvPr id="16" name="">
-            <a:extLst xmlns:a="http://schemas.openxmlformats.org/drawingml/2006/main">
-              <a:ext uri="{FF2B5EF4-FFF2-40B4-BE49-F238E27FC236}">
-                <a16:creationId xmlns:a16="http://schemas.microsoft.com/office/drawing/2014/main" id="{6AAA47E2-5C3E-497F-8AF5-84C4823D9AF1}"/>
-              </a:ext>
-            </a:extLst>
-          </p:cNvPr>
-          <p:cNvSpPr>
-            <a:spLocks xmlns:a="http://schemas.openxmlformats.org/drawingml/2006/main" noGrp="1"/>
-          </p:cNvSpPr>
-          <p:nvPr/>
-        </p:nvSpPr>
-        <p:spPr>
-          <a:xfrm xmlns:a="http://schemas.openxmlformats.org/drawingml/2006/main">
-            <a:off x="5162550" y="3524250"/>
-            <a:ext cx="0" cy="6896100"/>
-          </a:xfrm>
-          <a:prstGeom xmlns:a="http://schemas.openxmlformats.org/drawingml/2006/main" prst="line">
-            <a:avLst/>
-          </a:prstGeom>
-          <a:noFill xmlns:a="http://schemas.openxmlformats.org/drawingml/2006/main"/>
-          <a:ln xmlns:a="http://schemas.openxmlformats.org/drawingml/2006/main" w="19050">
-            <a:solidFill>
-              <a:srgbClr val="DAE5E9"/>
-            </a:solidFill>
-          </a:ln>
-        </p:spPr>
-      </p:sp>
-      <p:sp>
-        <p:nvSpPr>
-          <p:cNvPr id="17" name="">
-            <a:extLst xmlns:a="http://schemas.openxmlformats.org/drawingml/2006/main">
-              <a:ext uri="{FF2B5EF4-FFF2-40B4-BE49-F238E27FC236}">
-                <a16:creationId xmlns:a16="http://schemas.microsoft.com/office/drawing/2014/main" id="{9BE93C55-9407-4BF5-9C64-70C08C392983}"/>
-              </a:ext>
-            </a:extLst>
-          </p:cNvPr>
-          <p:cNvSpPr>
-            <a:spLocks xmlns:a="http://schemas.openxmlformats.org/drawingml/2006/main" noGrp="1"/>
-          </p:cNvSpPr>
-          <p:nvPr/>
-        </p:nvSpPr>
-        <p:spPr>
-          <a:xfrm xmlns:a="http://schemas.openxmlformats.org/drawingml/2006/main">
-            <a:off x="10163175" y="3524250"/>
-            <a:ext cx="0" cy="6896100"/>
-          </a:xfrm>
-          <a:prstGeom xmlns:a="http://schemas.openxmlformats.org/drawingml/2006/main" prst="line">
-            <a:avLst/>
-          </a:prstGeom>
-          <a:noFill xmlns:a="http://schemas.openxmlformats.org/drawingml/2006/main"/>
-          <a:ln xmlns:a="http://schemas.openxmlformats.org/drawingml/2006/main" w="19050">
-            <a:solidFill>
-              <a:srgbClr val="DAE5E9"/>
-            </a:solidFill>
-          </a:ln>
-        </p:spPr>
-      </p:sp>
-      <p:pic>
-        <p:nvPicPr>
-          <p:cNvPr id="18" name="">
-            <a:extLst xmlns:a="http://schemas.openxmlformats.org/drawingml/2006/main">
-              <a:ext uri="{FF2B5EF4-FFF2-40B4-BE49-F238E27FC236}">
-                <a16:creationId xmlns:a16="http://schemas.microsoft.com/office/drawing/2014/main" id="{AFB9E7A1-5FD6-4ED1-8A35-A50B73CB34E8}"/>
-              </a:ext>
-            </a:extLst>
-          </p:cNvPr>
-          <p:cNvPicPr>
-            <a:picLocks xmlns:a="http://schemas.openxmlformats.org/drawingml/2006/main" noChangeAspect="1"/>
-          </p:cNvPicPr>
-          <p:nvPr/>
-        </p:nvPicPr>
-        <p:blipFill>
-          <a:blip xmlns:r="http://schemas.openxmlformats.org/officeDocument/2006/relationships" xmlns:a="http://schemas.openxmlformats.org/drawingml/2006/main" r:embed="R1594ca6d82cb435a">
-            <a:extLst>
-              <a:ext uri="{96DAC541-7B7A-43D3-8B79-37D633B846F1}">
-                <asvg:svgBlip xmlns:asvg="http://schemas.microsoft.com/office/drawing/2016/SVG/main" r:embed="Rcdae0befd9eb4aa6"/>
-              </a:ext>
-            </a:extLst>
-          </a:blip>
-          <a:stretch xmlns:a="http://schemas.openxmlformats.org/drawingml/2006/main"/>
-        </p:blipFill>
-        <p:spPr>
-          <a:xfrm xmlns:a="http://schemas.openxmlformats.org/drawingml/2006/main">
-            <a:off x="619125" y="3524250"/>
-            <a:ext cx="1809750" cy="1600200"/>
-          </a:xfrm>
-          <a:prstGeom xmlns:a="http://schemas.openxmlformats.org/drawingml/2006/main" prst="rect">
-            <a:avLst/>
-          </a:prstGeom>
-        </p:spPr>
-      </p:pic>
-      <p:sp>
-        <p:nvSpPr>
-          <p:cNvPr id="19" name="label-18">
-            <a:extLst xmlns:a="http://schemas.openxmlformats.org/drawingml/2006/main">
-              <a:ext uri="{FF2B5EF4-FFF2-40B4-BE49-F238E27FC236}">
-                <a16:creationId xmlns:a16="http://schemas.microsoft.com/office/drawing/2014/main" id="{8E6EFABB-63D6-45B5-A544-42ECC28EED8C}"/>
-              </a:ext>
-            </a:extLst>
-          </p:cNvPr>
-          <p:cNvSpPr>
-            <a:spLocks xmlns:a="http://schemas.openxmlformats.org/drawingml/2006/main" noGrp="1"/>
-          </p:cNvSpPr>
-          <p:nvPr/>
-        </p:nvSpPr>
-        <p:spPr>
-          <a:xfrm xmlns:a="http://schemas.openxmlformats.org/drawingml/2006/main">
-            <a:off x="2533650" y="3838575"/>
-            <a:ext cx="2095500" cy="333375"/>
-          </a:xfrm>
-          <a:prstGeom xmlns:a="http://schemas.openxmlformats.org/drawingml/2006/main" prst="rect">
-            <a:avLst/>
-          </a:prstGeom>
-          <a:noFill xmlns:a="http://schemas.openxmlformats.org/drawingml/2006/main"/>
-          <a:ln xmlns:a="http://schemas.openxmlformats.org/drawingml/2006/main" w="0">
-            <a:noFill/>
-          </a:ln>
-        </p:spPr>
-        <p:txBody>
-          <a:bodyPr xmlns:a="http://schemas.openxmlformats.org/drawingml/2006/main" lIns="0" tIns="0" rIns="0" bIns="0" anchor="t"/>
-          <a:lstStyle xmlns:a="http://schemas.openxmlformats.org/drawingml/2006/main">
-            <a:defPPr>
-              <a:defRPr sz="1875" b="1">
-                <a:solidFill>
-                  <a:srgbClr val="20333D"/>
-                </a:solidFill>
-                <a:latin typeface="Arial"/>
-                <a:ea typeface="Arial"/>
-                <a:cs typeface="Arial"/>
-              </a:defRPr>
-            </a:defPPr>
-          </a:lstStyle>
-          <a:p xmlns:a="http://schemas.openxmlformats.org/drawingml/2006/main">
-            <a:pPr>
-              <a:defRPr sz="1875" b="1">
-                <a:solidFill>
-                  <a:srgbClr val="20333D"/>
-                </a:solidFill>
-                <a:latin typeface="Arial"/>
-                <a:ea typeface="Arial"/>
-                <a:cs typeface="Arial"/>
-              </a:defRPr>
-            </a:pPr>
-            <a:r>
-              <a:rPr sz="1875" b="1">
-                <a:solidFill>
-                  <a:srgbClr val="20333D"/>
-                </a:solidFill>
-                <a:latin typeface="Arial"/>
-                <a:ea typeface="Arial"/>
-                <a:cs typeface="Arial"/>
-              </a:rPr>
-              <a:t>CO2 substrate</a:t>
-            </a:r>
-          </a:p>
-        </p:txBody>
-      </p:sp>
-      <p:sp>
-        <p:nvSpPr>
-          <p:cNvPr id="20" name="label-19">
-            <a:extLst xmlns:a="http://schemas.openxmlformats.org/drawingml/2006/main">
-              <a:ext uri="{FF2B5EF4-FFF2-40B4-BE49-F238E27FC236}">
-                <a16:creationId xmlns:a16="http://schemas.microsoft.com/office/drawing/2014/main" id="{ADA76060-34B1-4697-BD2E-0F0910C7E166}"/>
-              </a:ext>
-            </a:extLst>
-          </p:cNvPr>
-          <p:cNvSpPr>
-            <a:spLocks xmlns:a="http://schemas.openxmlformats.org/drawingml/2006/main" noGrp="1"/>
-          </p:cNvSpPr>
-          <p:nvPr/>
-        </p:nvSpPr>
-        <p:spPr>
-          <a:xfrm xmlns:a="http://schemas.openxmlformats.org/drawingml/2006/main">
-            <a:off x="2628900" y="4238625"/>
-            <a:ext cx="1905000" cy="413385"/>
-          </a:xfrm>
-          <a:prstGeom xmlns:a="http://schemas.openxmlformats.org/drawingml/2006/main" prst="rect">
-            <a:avLst/>
-          </a:prstGeom>
-          <a:noFill xmlns:a="http://schemas.openxmlformats.org/drawingml/2006/main"/>
-          <a:ln xmlns:a="http://schemas.openxmlformats.org/drawingml/2006/main" w="0">
-            <a:noFill/>
-          </a:ln>
-        </p:spPr>
-        <p:txBody>
-          <a:bodyPr xmlns:a="http://schemas.openxmlformats.org/drawingml/2006/main" lIns="0" tIns="0" rIns="0" bIns="0" anchor="t"/>
-          <a:lstStyle xmlns:a="http://schemas.openxmlformats.org/drawingml/2006/main">
-            <a:defPPr>
-              <a:defRPr sz="2325" b="1">
-                <a:solidFill>
-                  <a:srgbClr val="20333D"/>
-                </a:solidFill>
-                <a:latin typeface="Arial"/>
-                <a:ea typeface="Arial"/>
-                <a:cs typeface="Arial"/>
-              </a:defRPr>
-            </a:defPPr>
-          </a:lstStyle>
-          <a:p xmlns:a="http://schemas.openxmlformats.org/drawingml/2006/main">
-            <a:pPr>
-              <a:defRPr sz="2325" b="1">
-                <a:solidFill>
-                  <a:srgbClr val="20333D"/>
-                </a:solidFill>
-                <a:latin typeface="Arial"/>
-                <a:ea typeface="Arial"/>
-                <a:cs typeface="Arial"/>
-              </a:defRPr>
-            </a:pPr>
-            <a:r>
-              <a:rPr sz="2325" b="1">
-                <a:solidFill>
-                  <a:srgbClr val="20333D"/>
-                </a:solidFill>
-                <a:latin typeface="Arial"/>
-                <a:ea typeface="Arial"/>
-                <a:cs typeface="Arial"/>
-              </a:rPr>
-              <a:t>O = C = O</a:t>
-            </a:r>
-          </a:p>
-        </p:txBody>
-      </p:sp>
-      <p:sp>
-        <p:nvSpPr>
-          <p:cNvPr id="21" name="label-20">
-            <a:extLst xmlns:a="http://schemas.openxmlformats.org/drawingml/2006/main">
-              <a:ext uri="{FF2B5EF4-FFF2-40B4-BE49-F238E27FC236}">
-                <a16:creationId xmlns:a16="http://schemas.microsoft.com/office/drawing/2014/main" id="{86F33551-B758-475C-88E4-0C6EB455A051}"/>
-              </a:ext>
-            </a:extLst>
-          </p:cNvPr>
-          <p:cNvSpPr>
-            <a:spLocks xmlns:a="http://schemas.openxmlformats.org/drawingml/2006/main" noGrp="1"/>
-          </p:cNvSpPr>
-          <p:nvPr/>
-        </p:nvSpPr>
-        <p:spPr>
-          <a:xfrm xmlns:a="http://schemas.openxmlformats.org/drawingml/2006/main">
-            <a:off x="685800" y="5248275"/>
-            <a:ext cx="4048125" cy="320040"/>
-          </a:xfrm>
-          <a:prstGeom xmlns:a="http://schemas.openxmlformats.org/drawingml/2006/main" prst="rect">
-            <a:avLst/>
-          </a:prstGeom>
-          <a:noFill xmlns:a="http://schemas.openxmlformats.org/drawingml/2006/main"/>
-          <a:ln xmlns:a="http://schemas.openxmlformats.org/drawingml/2006/main" w="0">
-            <a:noFill/>
-          </a:ln>
-        </p:spPr>
-        <p:txBody>
-          <a:bodyPr xmlns:a="http://schemas.openxmlformats.org/drawingml/2006/main" lIns="0" tIns="0" rIns="0" bIns="0" anchor="t"/>
-          <a:lstStyle xmlns:a="http://schemas.openxmlformats.org/drawingml/2006/main">
-            <a:defPPr>
-              <a:defRPr sz="1800" b="1">
-                <a:solidFill>
-                  <a:srgbClr val="20333D"/>
-                </a:solidFill>
-                <a:latin typeface="Arial"/>
-                <a:ea typeface="Arial"/>
-                <a:cs typeface="Arial"/>
-              </a:defRPr>
-            </a:defPPr>
-          </a:lstStyle>
-          <a:p xmlns:a="http://schemas.openxmlformats.org/drawingml/2006/main">
-            <a:pPr>
-              <a:defRPr sz="1800" b="1">
-                <a:solidFill>
-                  <a:srgbClr val="20333D"/>
-                </a:solidFill>
-                <a:latin typeface="Arial"/>
-                <a:ea typeface="Arial"/>
-                <a:cs typeface="Arial"/>
-              </a:defRPr>
-            </a:pPr>
-            <a:r>
-              <a:rPr sz="1800" b="1">
-                <a:solidFill>
-                  <a:srgbClr val="20333D"/>
-                </a:solidFill>
-                <a:latin typeface="Arial"/>
-                <a:ea typeface="Arial"/>
-                <a:cs typeface="Arial"/>
-              </a:rPr>
-              <a:t>544 aa carbonic anhydrase</a:t>
-            </a:r>
-          </a:p>
-        </p:txBody>
-      </p:sp>
-      <p:sp>
-        <p:nvSpPr>
-          <p:cNvPr id="22" name="label-21">
-            <a:extLst xmlns:a="http://schemas.openxmlformats.org/drawingml/2006/main">
-              <a:ext uri="{FF2B5EF4-FFF2-40B4-BE49-F238E27FC236}">
-                <a16:creationId xmlns:a16="http://schemas.microsoft.com/office/drawing/2014/main" id="{C26D8767-7D77-4A1A-B7A0-734265C94F08}"/>
-              </a:ext>
-            </a:extLst>
-          </p:cNvPr>
-          <p:cNvSpPr>
-            <a:spLocks xmlns:a="http://schemas.openxmlformats.org/drawingml/2006/main" noGrp="1"/>
-          </p:cNvSpPr>
-          <p:nvPr/>
-        </p:nvSpPr>
-        <p:spPr>
-          <a:xfrm xmlns:a="http://schemas.openxmlformats.org/drawingml/2006/main">
-            <a:off x="685800" y="5600700"/>
-            <a:ext cx="4000500" cy="266700"/>
-          </a:xfrm>
-          <a:prstGeom xmlns:a="http://schemas.openxmlformats.org/drawingml/2006/main" prst="rect">
-            <a:avLst/>
-          </a:prstGeom>
-          <a:noFill xmlns:a="http://schemas.openxmlformats.org/drawingml/2006/main"/>
-          <a:ln xmlns:a="http://schemas.openxmlformats.org/drawingml/2006/main" w="0">
-            <a:noFill/>
-          </a:ln>
-        </p:spPr>
-        <p:txBody>
-          <a:bodyPr xmlns:a="http://schemas.openxmlformats.org/drawingml/2006/main" lIns="0" tIns="0" rIns="0" bIns="0" anchor="t"/>
-          <a:lstStyle xmlns:a="http://schemas.openxmlformats.org/drawingml/2006/main">
-            <a:defPPr>
-              <a:defRPr sz="1500" b="1">
-                <a:solidFill>
-                  <a:srgbClr val="4B606D"/>
-                </a:solidFill>
-                <a:latin typeface="Arial"/>
-                <a:ea typeface="Arial"/>
-                <a:cs typeface="Arial"/>
-              </a:defRPr>
-            </a:defPPr>
-          </a:lstStyle>
-          <a:p xmlns:a="http://schemas.openxmlformats.org/drawingml/2006/main">
-            <a:pPr>
-              <a:defRPr sz="1500" b="1">
-                <a:solidFill>
-                  <a:srgbClr val="4B606D"/>
-                </a:solidFill>
-                <a:latin typeface="Arial"/>
-                <a:ea typeface="Arial"/>
-                <a:cs typeface="Arial"/>
-              </a:defRPr>
-            </a:pPr>
-            <a:r>
-              <a:rPr sz="1500" b="1">
-                <a:solidFill>
-                  <a:srgbClr val="4B606D"/>
-                </a:solidFill>
-                <a:latin typeface="Arial"/>
-                <a:ea typeface="Arial"/>
-                <a:cs typeface="Arial"/>
-              </a:rPr>
-              <a:t>Predicted input fold, residues 65–544</a:t>
-            </a:r>
-          </a:p>
-        </p:txBody>
-      </p:sp>
-      <p:sp>
-        <p:nvSpPr>
-          <p:cNvPr id="23" name="">
-            <a:extLst xmlns:a="http://schemas.openxmlformats.org/drawingml/2006/main">
-              <a:ext uri="{FF2B5EF4-FFF2-40B4-BE49-F238E27FC236}">
-                <a16:creationId xmlns:a16="http://schemas.microsoft.com/office/drawing/2014/main" id="{A798956C-711C-4F98-A8CB-8A1426877D2F}"/>
-              </a:ext>
-            </a:extLst>
-          </p:cNvPr>
-          <p:cNvSpPr>
-            <a:spLocks xmlns:a="http://schemas.openxmlformats.org/drawingml/2006/main" noGrp="1"/>
-          </p:cNvSpPr>
-          <p:nvPr/>
-        </p:nvSpPr>
-        <p:spPr>
-          <a:xfrm xmlns:a="http://schemas.openxmlformats.org/drawingml/2006/main">
-            <a:off x="685800" y="6096000"/>
-            <a:ext cx="4019550" cy="495300"/>
-          </a:xfrm>
-          <a:prstGeom xmlns:a="http://schemas.openxmlformats.org/drawingml/2006/main" prst="roundRect">
-            <a:avLst>
-              <a:gd name="adj" fmla="val 11538"/>
-            </a:avLst>
-          </a:prstGeom>
-          <a:solidFill xmlns:a="http://schemas.openxmlformats.org/drawingml/2006/main">
-            <a:srgbClr val="FAFBFD"/>
-          </a:solidFill>
-          <a:ln xmlns:a="http://schemas.openxmlformats.org/drawingml/2006/main" w="0">
-            <a:noFill/>
-          </a:ln>
-        </p:spPr>
-      </p:sp>
-      <p:sp>
-        <p:nvSpPr>
-          <p:cNvPr id="24" name="">
-            <a:extLst xmlns:a="http://schemas.openxmlformats.org/drawingml/2006/main">
-              <a:ext uri="{FF2B5EF4-FFF2-40B4-BE49-F238E27FC236}">
-                <a16:creationId xmlns:a16="http://schemas.microsoft.com/office/drawing/2014/main" id="{993D60CD-1834-4ED8-A09E-34A955A915C9}"/>
-              </a:ext>
-            </a:extLst>
-          </p:cNvPr>
-          <p:cNvSpPr>
-            <a:spLocks xmlns:a="http://schemas.openxmlformats.org/drawingml/2006/main" noGrp="1"/>
-          </p:cNvSpPr>
-          <p:nvPr/>
-        </p:nvSpPr>
-        <p:spPr>
-          <a:xfrm xmlns:a="http://schemas.openxmlformats.org/drawingml/2006/main">
-            <a:off x="685800" y="6096000"/>
-            <a:ext cx="66675" cy="495300"/>
-          </a:xfrm>
-          <a:prstGeom xmlns:a="http://schemas.openxmlformats.org/drawingml/2006/main" prst="roundRect">
-            <a:avLst>
-              <a:gd name="adj" fmla="val 28571"/>
-            </a:avLst>
-          </a:prstGeom>
-          <a:solidFill xmlns:a="http://schemas.openxmlformats.org/drawingml/2006/main">
-            <a:srgbClr val="AE91C8"/>
-          </a:solidFill>
-          <a:ln xmlns:a="http://schemas.openxmlformats.org/drawingml/2006/main" w="0">
-            <a:noFill/>
-          </a:ln>
-        </p:spPr>
-      </p:sp>
-      <p:sp>
-        <p:nvSpPr>
-          <p:cNvPr id="25" name="label-24">
-            <a:extLst xmlns:a="http://schemas.openxmlformats.org/drawingml/2006/main">
-              <a:ext uri="{FF2B5EF4-FFF2-40B4-BE49-F238E27FC236}">
-                <a16:creationId xmlns:a16="http://schemas.microsoft.com/office/drawing/2014/main" id="{A1DDCADB-3133-464F-BE56-A279948E5AEF}"/>
-              </a:ext>
-            </a:extLst>
-          </p:cNvPr>
-          <p:cNvSpPr>
-            <a:spLocks xmlns:a="http://schemas.openxmlformats.org/drawingml/2006/main" noGrp="1"/>
-          </p:cNvSpPr>
-          <p:nvPr/>
-        </p:nvSpPr>
-        <p:spPr>
-          <a:xfrm xmlns:a="http://schemas.openxmlformats.org/drawingml/2006/main">
-            <a:off x="876300" y="6181725"/>
-            <a:ext cx="1809750" cy="320040"/>
-          </a:xfrm>
-          <a:prstGeom xmlns:a="http://schemas.openxmlformats.org/drawingml/2006/main" prst="rect">
-            <a:avLst/>
-          </a:prstGeom>
-          <a:noFill xmlns:a="http://schemas.openxmlformats.org/drawingml/2006/main"/>
-          <a:ln xmlns:a="http://schemas.openxmlformats.org/drawingml/2006/main" w="0">
-            <a:noFill/>
-          </a:ln>
-        </p:spPr>
-        <p:txBody>
-          <a:bodyPr xmlns:a="http://schemas.openxmlformats.org/drawingml/2006/main" lIns="0" tIns="0" rIns="0" bIns="0" anchor="t"/>
-          <a:lstStyle xmlns:a="http://schemas.openxmlformats.org/drawingml/2006/main">
-            <a:defPPr>
-              <a:defRPr sz="1800" b="1">
-                <a:solidFill>
-                  <a:srgbClr val="20333D"/>
-                </a:solidFill>
-                <a:latin typeface="Arial"/>
-                <a:ea typeface="Arial"/>
-                <a:cs typeface="Arial"/>
-              </a:defRPr>
-            </a:defPPr>
-          </a:lstStyle>
-          <a:p xmlns:a="http://schemas.openxmlformats.org/drawingml/2006/main">
-            <a:pPr>
-              <a:defRPr sz="1800" b="1">
-                <a:solidFill>
-                  <a:srgbClr val="20333D"/>
-                </a:solidFill>
-                <a:latin typeface="Arial"/>
-                <a:ea typeface="Arial"/>
-                <a:cs typeface="Arial"/>
-              </a:defRPr>
-            </a:pPr>
-            <a:r>
-              <a:rPr sz="1800" b="1">
-                <a:solidFill>
-                  <a:srgbClr val="20333D"/>
-                </a:solidFill>
-                <a:latin typeface="Arial"/>
-                <a:ea typeface="Arial"/>
-                <a:cs typeface="Arial"/>
-              </a:rPr>
-              <a:t>ProteinDPO</a:t>
-            </a:r>
-          </a:p>
-        </p:txBody>
-      </p:sp>
-      <p:sp>
-        <p:nvSpPr>
-          <p:cNvPr id="26" name="label-25">
-            <a:extLst xmlns:a="http://schemas.openxmlformats.org/drawingml/2006/main">
-              <a:ext uri="{FF2B5EF4-FFF2-40B4-BE49-F238E27FC236}">
-                <a16:creationId xmlns:a16="http://schemas.microsoft.com/office/drawing/2014/main" id="{804E2FCF-9A72-4A6C-BC69-D630D9CC2109}"/>
-              </a:ext>
-            </a:extLst>
-          </p:cNvPr>
-          <p:cNvSpPr>
-            <a:spLocks xmlns:a="http://schemas.openxmlformats.org/drawingml/2006/main" noGrp="1"/>
-          </p:cNvSpPr>
-          <p:nvPr/>
-        </p:nvSpPr>
-        <p:spPr>
-          <a:xfrm xmlns:a="http://schemas.openxmlformats.org/drawingml/2006/main">
-            <a:off x="2647950" y="6210300"/>
-            <a:ext cx="1981200" cy="253365"/>
-          </a:xfrm>
-          <a:prstGeom xmlns:a="http://schemas.openxmlformats.org/drawingml/2006/main" prst="rect">
-            <a:avLst/>
-          </a:prstGeom>
-          <a:noFill xmlns:a="http://schemas.openxmlformats.org/drawingml/2006/main"/>
-          <a:ln xmlns:a="http://schemas.openxmlformats.org/drawingml/2006/main" w="0">
-            <a:noFill/>
-          </a:ln>
-        </p:spPr>
-        <p:txBody>
-          <a:bodyPr xmlns:a="http://schemas.openxmlformats.org/drawingml/2006/main" lIns="0" tIns="0" rIns="0" bIns="0" anchor="t"/>
-          <a:lstStyle xmlns:a="http://schemas.openxmlformats.org/drawingml/2006/main">
-            <a:defPPr>
-              <a:defRPr sz="1425" b="1">
-                <a:solidFill>
-                  <a:srgbClr val="4B606D"/>
-                </a:solidFill>
-                <a:latin typeface="Arial"/>
-                <a:ea typeface="Arial"/>
-                <a:cs typeface="Arial"/>
-              </a:defRPr>
-            </a:defPPr>
-          </a:lstStyle>
-          <a:p xmlns:a="http://schemas.openxmlformats.org/drawingml/2006/main">
-            <a:pPr>
-              <a:defRPr sz="1425" b="1">
-                <a:solidFill>
-                  <a:srgbClr val="4B606D"/>
-                </a:solidFill>
-                <a:latin typeface="Arial"/>
-                <a:ea typeface="Arial"/>
-                <a:cs typeface="Arial"/>
-              </a:defRPr>
-            </a:pPr>
-            <a:r>
-              <a:rPr sz="1425" b="1">
-                <a:solidFill>
-                  <a:srgbClr val="4B606D"/>
-                </a:solidFill>
-                <a:latin typeface="Arial"/>
-                <a:ea typeface="Arial"/>
-                <a:cs typeface="Arial"/>
-              </a:rPr>
-              <a:t>Inverse folding</a:t>
-            </a:r>
-          </a:p>
-        </p:txBody>
-      </p:sp>
-      <p:sp>
-        <p:nvSpPr>
-          <p:cNvPr id="27" name="">
-            <a:extLst xmlns:a="http://schemas.openxmlformats.org/drawingml/2006/main">
-              <a:ext uri="{FF2B5EF4-FFF2-40B4-BE49-F238E27FC236}">
-                <a16:creationId xmlns:a16="http://schemas.microsoft.com/office/drawing/2014/main" id="{5DC7DD86-9B25-4B81-9AC4-F35B3AC1DC5D}"/>
-              </a:ext>
-            </a:extLst>
-          </p:cNvPr>
-          <p:cNvSpPr>
-            <a:spLocks xmlns:a="http://schemas.openxmlformats.org/drawingml/2006/main" noGrp="1"/>
-          </p:cNvSpPr>
-          <p:nvPr/>
-        </p:nvSpPr>
-        <p:spPr>
-          <a:xfrm xmlns:a="http://schemas.openxmlformats.org/drawingml/2006/main">
-            <a:off x="685800" y="6715125"/>
-            <a:ext cx="4019550" cy="495300"/>
-          </a:xfrm>
-          <a:prstGeom xmlns:a="http://schemas.openxmlformats.org/drawingml/2006/main" prst="roundRect">
-            <a:avLst>
-              <a:gd name="adj" fmla="val 11538"/>
-            </a:avLst>
-          </a:prstGeom>
-          <a:solidFill xmlns:a="http://schemas.openxmlformats.org/drawingml/2006/main">
-            <a:srgbClr val="FAFBFD"/>
-          </a:solidFill>
-          <a:ln xmlns:a="http://schemas.openxmlformats.org/drawingml/2006/main" w="0">
-            <a:noFill/>
-          </a:ln>
-        </p:spPr>
-      </p:sp>
-      <p:sp>
-        <p:nvSpPr>
-          <p:cNvPr id="28" name="">
-            <a:extLst xmlns:a="http://schemas.openxmlformats.org/drawingml/2006/main">
-              <a:ext uri="{FF2B5EF4-FFF2-40B4-BE49-F238E27FC236}">
-                <a16:creationId xmlns:a16="http://schemas.microsoft.com/office/drawing/2014/main" id="{A7A44F29-43C3-45CD-93BF-A260B879DB90}"/>
-              </a:ext>
-            </a:extLst>
-          </p:cNvPr>
-          <p:cNvSpPr>
-            <a:spLocks xmlns:a="http://schemas.openxmlformats.org/drawingml/2006/main" noGrp="1"/>
-          </p:cNvSpPr>
-          <p:nvPr/>
-        </p:nvSpPr>
-        <p:spPr>
-          <a:xfrm xmlns:a="http://schemas.openxmlformats.org/drawingml/2006/main">
-            <a:off x="685800" y="6715125"/>
-            <a:ext cx="66675" cy="495300"/>
-          </a:xfrm>
-          <a:prstGeom xmlns:a="http://schemas.openxmlformats.org/drawingml/2006/main" prst="roundRect">
-            <a:avLst>
-              <a:gd name="adj" fmla="val 28571"/>
-            </a:avLst>
-          </a:prstGeom>
-          <a:solidFill xmlns:a="http://schemas.openxmlformats.org/drawingml/2006/main">
-            <a:srgbClr val="81BABC"/>
-          </a:solidFill>
-          <a:ln xmlns:a="http://schemas.openxmlformats.org/drawingml/2006/main" w="0">
-            <a:noFill/>
-          </a:ln>
-        </p:spPr>
-      </p:sp>
-      <p:sp>
-        <p:nvSpPr>
-          <p:cNvPr id="29" name="label-28">
-            <a:extLst xmlns:a="http://schemas.openxmlformats.org/drawingml/2006/main">
-              <a:ext uri="{FF2B5EF4-FFF2-40B4-BE49-F238E27FC236}">
-                <a16:creationId xmlns:a16="http://schemas.microsoft.com/office/drawing/2014/main" id="{B6176E82-E1E6-4D74-8413-661CE8DF0B0A}"/>
-              </a:ext>
-            </a:extLst>
-          </p:cNvPr>
-          <p:cNvSpPr>
-            <a:spLocks xmlns:a="http://schemas.openxmlformats.org/drawingml/2006/main" noGrp="1"/>
-          </p:cNvSpPr>
-          <p:nvPr/>
-        </p:nvSpPr>
-        <p:spPr>
-          <a:xfrm xmlns:a="http://schemas.openxmlformats.org/drawingml/2006/main">
-            <a:off x="876300" y="6800850"/>
-            <a:ext cx="1809750" cy="320040"/>
-          </a:xfrm>
-          <a:prstGeom xmlns:a="http://schemas.openxmlformats.org/drawingml/2006/main" prst="rect">
-            <a:avLst/>
-          </a:prstGeom>
-          <a:noFill xmlns:a="http://schemas.openxmlformats.org/drawingml/2006/main"/>
-          <a:ln xmlns:a="http://schemas.openxmlformats.org/drawingml/2006/main" w="0">
-            <a:noFill/>
-          </a:ln>
-        </p:spPr>
-        <p:txBody>
-          <a:bodyPr xmlns:a="http://schemas.openxmlformats.org/drawingml/2006/main" lIns="0" tIns="0" rIns="0" bIns="0" anchor="t"/>
-          <a:lstStyle xmlns:a="http://schemas.openxmlformats.org/drawingml/2006/main">
-            <a:defPPr>
-              <a:defRPr sz="1800" b="1">
-                <a:solidFill>
-                  <a:srgbClr val="20333D"/>
-                </a:solidFill>
-                <a:latin typeface="Arial"/>
-                <a:ea typeface="Arial"/>
-                <a:cs typeface="Arial"/>
-              </a:defRPr>
-            </a:defPPr>
-          </a:lstStyle>
-          <a:p xmlns:a="http://schemas.openxmlformats.org/drawingml/2006/main">
-            <a:pPr>
-              <a:defRPr sz="1800" b="1">
-                <a:solidFill>
-                  <a:srgbClr val="20333D"/>
-                </a:solidFill>
-                <a:latin typeface="Arial"/>
-                <a:ea typeface="Arial"/>
-                <a:cs typeface="Arial"/>
-              </a:defRPr>
-            </a:pPr>
-            <a:r>
-              <a:rPr sz="1800" b="1">
-                <a:solidFill>
-                  <a:srgbClr val="20333D"/>
-                </a:solidFill>
-                <a:latin typeface="Arial"/>
-                <a:ea typeface="Arial"/>
-                <a:cs typeface="Arial"/>
-              </a:rPr>
-              <a:t>EnzGFM</a:t>
-            </a:r>
-          </a:p>
-        </p:txBody>
-      </p:sp>
-      <p:sp>
-        <p:nvSpPr>
-          <p:cNvPr id="30" name="label-29">
-            <a:extLst xmlns:a="http://schemas.openxmlformats.org/drawingml/2006/main">
-              <a:ext uri="{FF2B5EF4-FFF2-40B4-BE49-F238E27FC236}">
-                <a16:creationId xmlns:a16="http://schemas.microsoft.com/office/drawing/2014/main" id="{94FFA88E-DD98-4CB0-ACA9-FA105193C93A}"/>
-              </a:ext>
-            </a:extLst>
-          </p:cNvPr>
-          <p:cNvSpPr>
-            <a:spLocks xmlns:a="http://schemas.openxmlformats.org/drawingml/2006/main" noGrp="1"/>
-          </p:cNvSpPr>
-          <p:nvPr/>
-        </p:nvSpPr>
-        <p:spPr>
-          <a:xfrm xmlns:a="http://schemas.openxmlformats.org/drawingml/2006/main">
-            <a:off x="2647950" y="6829425"/>
-            <a:ext cx="1981200" cy="253365"/>
-          </a:xfrm>
-          <a:prstGeom xmlns:a="http://schemas.openxmlformats.org/drawingml/2006/main" prst="rect">
-            <a:avLst/>
-          </a:prstGeom>
-          <a:noFill xmlns:a="http://schemas.openxmlformats.org/drawingml/2006/main"/>
-          <a:ln xmlns:a="http://schemas.openxmlformats.org/drawingml/2006/main" w="0">
-            <a:noFill/>
-          </a:ln>
-        </p:spPr>
-        <p:txBody>
-          <a:bodyPr xmlns:a="http://schemas.openxmlformats.org/drawingml/2006/main" lIns="0" tIns="0" rIns="0" bIns="0" anchor="t"/>
-          <a:lstStyle xmlns:a="http://schemas.openxmlformats.org/drawingml/2006/main">
-            <a:defPPr>
-              <a:defRPr sz="1425" b="1">
-                <a:solidFill>
-                  <a:srgbClr val="4B606D"/>
-                </a:solidFill>
-                <a:latin typeface="Arial"/>
-                <a:ea typeface="Arial"/>
-                <a:cs typeface="Arial"/>
-              </a:defRPr>
-            </a:defPPr>
-          </a:lstStyle>
-          <a:p xmlns:a="http://schemas.openxmlformats.org/drawingml/2006/main">
-            <a:pPr>
-              <a:defRPr sz="1425" b="1">
-                <a:solidFill>
-                  <a:srgbClr val="4B606D"/>
-                </a:solidFill>
-                <a:latin typeface="Arial"/>
-                <a:ea typeface="Arial"/>
-                <a:cs typeface="Arial"/>
-              </a:defRPr>
-            </a:pPr>
-            <a:r>
-              <a:rPr sz="1425" b="1">
-                <a:solidFill>
-                  <a:srgbClr val="4B606D"/>
-                </a:solidFill>
-                <a:latin typeface="Arial"/>
-                <a:ea typeface="Arial"/>
-                <a:cs typeface="Arial"/>
-              </a:rPr>
-              <a:t>Enzyme-adapted PLM</a:t>
-            </a:r>
-          </a:p>
-        </p:txBody>
-      </p:sp>
-      <p:sp>
-        <p:nvSpPr>
-          <p:cNvPr id="31" name="">
-            <a:extLst xmlns:a="http://schemas.openxmlformats.org/drawingml/2006/main">
-              <a:ext uri="{FF2B5EF4-FFF2-40B4-BE49-F238E27FC236}">
-                <a16:creationId xmlns:a16="http://schemas.microsoft.com/office/drawing/2014/main" id="{B1F7DF1F-CD91-48D0-B86A-8E6122A14483}"/>
-              </a:ext>
-            </a:extLst>
-          </p:cNvPr>
-          <p:cNvSpPr>
-            <a:spLocks xmlns:a="http://schemas.openxmlformats.org/drawingml/2006/main" noGrp="1"/>
-          </p:cNvSpPr>
-          <p:nvPr/>
-        </p:nvSpPr>
-        <p:spPr>
-          <a:xfrm xmlns:a="http://schemas.openxmlformats.org/drawingml/2006/main">
-            <a:off x="685800" y="7334250"/>
-            <a:ext cx="4019550" cy="495300"/>
-          </a:xfrm>
-          <a:prstGeom xmlns:a="http://schemas.openxmlformats.org/drawingml/2006/main" prst="roundRect">
-            <a:avLst>
-              <a:gd name="adj" fmla="val 11538"/>
-            </a:avLst>
-          </a:prstGeom>
-          <a:solidFill xmlns:a="http://schemas.openxmlformats.org/drawingml/2006/main">
-            <a:srgbClr val="FAFBFD"/>
-          </a:solidFill>
-          <a:ln xmlns:a="http://schemas.openxmlformats.org/drawingml/2006/main" w="0">
-            <a:noFill/>
-          </a:ln>
-        </p:spPr>
-      </p:sp>
-      <p:sp>
-        <p:nvSpPr>
-          <p:cNvPr id="32" name="">
-            <a:extLst xmlns:a="http://schemas.openxmlformats.org/drawingml/2006/main">
-              <a:ext uri="{FF2B5EF4-FFF2-40B4-BE49-F238E27FC236}">
-                <a16:creationId xmlns:a16="http://schemas.microsoft.com/office/drawing/2014/main" id="{0D7D009B-F529-4F21-AE94-63D7640EB011}"/>
-              </a:ext>
-            </a:extLst>
-          </p:cNvPr>
-          <p:cNvSpPr>
-            <a:spLocks xmlns:a="http://schemas.openxmlformats.org/drawingml/2006/main" noGrp="1"/>
-          </p:cNvSpPr>
-          <p:nvPr/>
-        </p:nvSpPr>
-        <p:spPr>
-          <a:xfrm xmlns:a="http://schemas.openxmlformats.org/drawingml/2006/main">
-            <a:off x="685800" y="7334250"/>
-            <a:ext cx="66675" cy="495300"/>
-          </a:xfrm>
-          <a:prstGeom xmlns:a="http://schemas.openxmlformats.org/drawingml/2006/main" prst="roundRect">
-            <a:avLst>
-              <a:gd name="adj" fmla="val 28571"/>
-            </a:avLst>
-          </a:prstGeom>
-          <a:solidFill xmlns:a="http://schemas.openxmlformats.org/drawingml/2006/main">
-            <a:srgbClr val="E8ACC9"/>
-          </a:solidFill>
-          <a:ln xmlns:a="http://schemas.openxmlformats.org/drawingml/2006/main" w="0">
-            <a:noFill/>
-          </a:ln>
-        </p:spPr>
-      </p:sp>
-      <p:sp>
-        <p:nvSpPr>
-          <p:cNvPr id="33" name="label-32">
-            <a:extLst xmlns:a="http://schemas.openxmlformats.org/drawingml/2006/main">
-              <a:ext uri="{FF2B5EF4-FFF2-40B4-BE49-F238E27FC236}">
-                <a16:creationId xmlns:a16="http://schemas.microsoft.com/office/drawing/2014/main" id="{EEE7158B-8AA9-40C0-BA08-7E2A5F92E8C8}"/>
-              </a:ext>
-            </a:extLst>
-          </p:cNvPr>
-          <p:cNvSpPr>
-            <a:spLocks xmlns:a="http://schemas.openxmlformats.org/drawingml/2006/main" noGrp="1"/>
-          </p:cNvSpPr>
-          <p:nvPr/>
-        </p:nvSpPr>
-        <p:spPr>
-          <a:xfrm xmlns:a="http://schemas.openxmlformats.org/drawingml/2006/main">
-            <a:off x="876300" y="7419975"/>
-            <a:ext cx="1809750" cy="320040"/>
-          </a:xfrm>
-          <a:prstGeom xmlns:a="http://schemas.openxmlformats.org/drawingml/2006/main" prst="rect">
-            <a:avLst/>
-          </a:prstGeom>
-          <a:noFill xmlns:a="http://schemas.openxmlformats.org/drawingml/2006/main"/>
-          <a:ln xmlns:a="http://schemas.openxmlformats.org/drawingml/2006/main" w="0">
-            <a:noFill/>
-          </a:ln>
-        </p:spPr>
-        <p:txBody>
-          <a:bodyPr xmlns:a="http://schemas.openxmlformats.org/drawingml/2006/main" lIns="0" tIns="0" rIns="0" bIns="0" anchor="t"/>
-          <a:lstStyle xmlns:a="http://schemas.openxmlformats.org/drawingml/2006/main">
-            <a:defPPr>
-              <a:defRPr sz="1800" b="1">
-                <a:solidFill>
-                  <a:srgbClr val="20333D"/>
-                </a:solidFill>
-                <a:latin typeface="Arial"/>
-                <a:ea typeface="Arial"/>
-                <a:cs typeface="Arial"/>
-              </a:defRPr>
-            </a:defPPr>
-          </a:lstStyle>
-          <a:p xmlns:a="http://schemas.openxmlformats.org/drawingml/2006/main">
-            <a:pPr>
-              <a:defRPr sz="1800" b="1">
-                <a:solidFill>
-                  <a:srgbClr val="20333D"/>
-                </a:solidFill>
-                <a:latin typeface="Arial"/>
-                <a:ea typeface="Arial"/>
-                <a:cs typeface="Arial"/>
-              </a:defRPr>
-            </a:pPr>
-            <a:r>
-              <a:rPr sz="1800" b="1">
-                <a:solidFill>
-                  <a:srgbClr val="20333D"/>
-                </a:solidFill>
-                <a:latin typeface="Arial"/>
-                <a:ea typeface="Arial"/>
-                <a:cs typeface="Arial"/>
-              </a:rPr>
-              <a:t>VESM3</a:t>
-            </a:r>
-          </a:p>
-        </p:txBody>
-      </p:sp>
-      <p:sp>
-        <p:nvSpPr>
-          <p:cNvPr id="34" name="label-33">
-            <a:extLst xmlns:a="http://schemas.openxmlformats.org/drawingml/2006/main">
-              <a:ext uri="{FF2B5EF4-FFF2-40B4-BE49-F238E27FC236}">
-                <a16:creationId xmlns:a16="http://schemas.microsoft.com/office/drawing/2014/main" id="{C95750F8-3E18-4835-8A07-9F5A1C7A9E6D}"/>
-              </a:ext>
-            </a:extLst>
-          </p:cNvPr>
-          <p:cNvSpPr>
-            <a:spLocks xmlns:a="http://schemas.openxmlformats.org/drawingml/2006/main" noGrp="1"/>
-          </p:cNvSpPr>
-          <p:nvPr/>
-        </p:nvSpPr>
-        <p:spPr>
-          <a:xfrm xmlns:a="http://schemas.openxmlformats.org/drawingml/2006/main">
-            <a:off x="2647950" y="7448550"/>
-            <a:ext cx="1981200" cy="253365"/>
-          </a:xfrm>
-          <a:prstGeom xmlns:a="http://schemas.openxmlformats.org/drawingml/2006/main" prst="rect">
-            <a:avLst/>
-          </a:prstGeom>
-          <a:noFill xmlns:a="http://schemas.openxmlformats.org/drawingml/2006/main"/>
-          <a:ln xmlns:a="http://schemas.openxmlformats.org/drawingml/2006/main" w="0">
-            <a:noFill/>
-          </a:ln>
-        </p:spPr>
-        <p:txBody>
-          <a:bodyPr xmlns:a="http://schemas.openxmlformats.org/drawingml/2006/main" lIns="0" tIns="0" rIns="0" bIns="0" anchor="t"/>
-          <a:lstStyle xmlns:a="http://schemas.openxmlformats.org/drawingml/2006/main">
-            <a:defPPr>
-              <a:defRPr sz="1425" b="1">
-                <a:solidFill>
-                  <a:srgbClr val="4B606D"/>
-                </a:solidFill>
-                <a:latin typeface="Arial"/>
-                <a:ea typeface="Arial"/>
-                <a:cs typeface="Arial"/>
-              </a:defRPr>
-            </a:defPPr>
-          </a:lstStyle>
-          <a:p xmlns:a="http://schemas.openxmlformats.org/drawingml/2006/main">
-            <a:pPr>
-              <a:defRPr sz="1425" b="1">
-                <a:solidFill>
-                  <a:srgbClr val="4B606D"/>
-                </a:solidFill>
-                <a:latin typeface="Arial"/>
-                <a:ea typeface="Arial"/>
-                <a:cs typeface="Arial"/>
-              </a:defRPr>
-            </a:pPr>
-            <a:r>
-              <a:rPr sz="1425" b="1">
-                <a:solidFill>
-                  <a:srgbClr val="4B606D"/>
-                </a:solidFill>
-                <a:latin typeface="Arial"/>
-                <a:ea typeface="Arial"/>
-                <a:cs typeface="Arial"/>
-              </a:rPr>
-              <a:t>Distilled ESM3</a:t>
-            </a:r>
-          </a:p>
-        </p:txBody>
-      </p:sp>
-      <p:sp>
-        <p:nvSpPr>
-          <p:cNvPr id="35" name="">
-            <a:extLst xmlns:a="http://schemas.openxmlformats.org/drawingml/2006/main">
-              <a:ext uri="{FF2B5EF4-FFF2-40B4-BE49-F238E27FC236}">
-                <a16:creationId xmlns:a16="http://schemas.microsoft.com/office/drawing/2014/main" id="{E6FBFBB1-6B83-4927-BC8B-CDAA83E380AB}"/>
-              </a:ext>
-            </a:extLst>
-          </p:cNvPr>
-          <p:cNvSpPr>
-            <a:spLocks xmlns:a="http://schemas.openxmlformats.org/drawingml/2006/main" noGrp="1"/>
-          </p:cNvSpPr>
-          <p:nvPr/>
-        </p:nvSpPr>
-        <p:spPr>
-          <a:xfrm xmlns:a="http://schemas.openxmlformats.org/drawingml/2006/main">
-            <a:off x="2533650" y="7972425"/>
-            <a:ext cx="209550" cy="361950"/>
-          </a:xfrm>
-          <a:prstGeom xmlns:a="http://schemas.openxmlformats.org/drawingml/2006/main" prst="downArrow">
-            <a:avLst/>
-          </a:prstGeom>
-          <a:solidFill xmlns:a="http://schemas.openxmlformats.org/drawingml/2006/main">
-            <a:srgbClr val="AE91C8"/>
-          </a:solidFill>
-          <a:ln xmlns:a="http://schemas.openxmlformats.org/drawingml/2006/main" w="0">
-            <a:noFill/>
-          </a:ln>
-        </p:spPr>
-      </p:sp>
-      <p:sp>
-        <p:nvSpPr>
-          <p:cNvPr id="36" name="label-35">
-            <a:extLst xmlns:a="http://schemas.openxmlformats.org/drawingml/2006/main">
-              <a:ext uri="{FF2B5EF4-FFF2-40B4-BE49-F238E27FC236}">
-                <a16:creationId xmlns:a16="http://schemas.microsoft.com/office/drawing/2014/main" id="{1DA1D632-CF1C-42F0-A7EF-370C25C20945}"/>
-              </a:ext>
-            </a:extLst>
-          </p:cNvPr>
-          <p:cNvSpPr>
-            <a:spLocks xmlns:a="http://schemas.openxmlformats.org/drawingml/2006/main" noGrp="1"/>
-          </p:cNvSpPr>
-          <p:nvPr/>
-        </p:nvSpPr>
-        <p:spPr>
-          <a:xfrm xmlns:a="http://schemas.openxmlformats.org/drawingml/2006/main">
-            <a:off x="714375" y="8448675"/>
-            <a:ext cx="4048125" cy="306705"/>
-          </a:xfrm>
-          <a:prstGeom xmlns:a="http://schemas.openxmlformats.org/drawingml/2006/main" prst="rect">
-            <a:avLst/>
-          </a:prstGeom>
-          <a:noFill xmlns:a="http://schemas.openxmlformats.org/drawingml/2006/main"/>
-          <a:ln xmlns:a="http://schemas.openxmlformats.org/drawingml/2006/main" w="0">
-            <a:noFill/>
-          </a:ln>
-        </p:spPr>
-        <p:txBody>
-          <a:bodyPr xmlns:a="http://schemas.openxmlformats.org/drawingml/2006/main" lIns="0" tIns="0" rIns="0" bIns="0" anchor="t"/>
-          <a:lstStyle xmlns:a="http://schemas.openxmlformats.org/drawingml/2006/main">
-            <a:defPPr>
-              <a:defRPr sz="1725" b="1">
-                <a:solidFill>
-                  <a:srgbClr val="20333D"/>
-                </a:solidFill>
-                <a:latin typeface="Arial"/>
-                <a:ea typeface="Arial"/>
-                <a:cs typeface="Arial"/>
-              </a:defRPr>
-            </a:defPPr>
-          </a:lstStyle>
-          <a:p xmlns:a="http://schemas.openxmlformats.org/drawingml/2006/main">
-            <a:pPr>
-              <a:defRPr sz="1725" b="1">
-                <a:solidFill>
-                  <a:srgbClr val="20333D"/>
-                </a:solidFill>
-                <a:latin typeface="Arial"/>
-                <a:ea typeface="Arial"/>
-                <a:cs typeface="Arial"/>
-              </a:defRPr>
-            </a:pPr>
-            <a:r>
-              <a:rPr sz="1725" b="1">
-                <a:solidFill>
-                  <a:srgbClr val="20333D"/>
-                </a:solidFill>
-                <a:latin typeface="Arial"/>
-                <a:ea typeface="Arial"/>
-                <a:cs typeface="Arial"/>
-              </a:rPr>
-              <a:t>Align single-substitution effects</a:t>
-            </a:r>
-          </a:p>
-        </p:txBody>
-      </p:sp>
-      <p:sp>
-        <p:nvSpPr>
-          <p:cNvPr id="37" name="label-36">
-            <a:extLst xmlns:a="http://schemas.openxmlformats.org/drawingml/2006/main">
-              <a:ext uri="{FF2B5EF4-FFF2-40B4-BE49-F238E27FC236}">
-                <a16:creationId xmlns:a16="http://schemas.microsoft.com/office/drawing/2014/main" id="{4E763851-14F7-4E1E-9586-EF0BBE7F767E}"/>
-              </a:ext>
-            </a:extLst>
-          </p:cNvPr>
-          <p:cNvSpPr>
-            <a:spLocks xmlns:a="http://schemas.openxmlformats.org/drawingml/2006/main" noGrp="1"/>
-          </p:cNvSpPr>
-          <p:nvPr/>
-        </p:nvSpPr>
-        <p:spPr>
-          <a:xfrm xmlns:a="http://schemas.openxmlformats.org/drawingml/2006/main">
-            <a:off x="714375" y="8810625"/>
-            <a:ext cx="4048125" cy="293370"/>
+          <p:cNvPr id="46" name="label-45">
+            <a:extLst xmlns:a="http://schemas.openxmlformats.org/drawingml/2006/main">
+              <a:ext uri="{FF2B5EF4-FFF2-40B4-BE49-F238E27FC236}">
+                <a16:creationId xmlns:a16="http://schemas.microsoft.com/office/drawing/2014/main" id="{CE4F3830-B83B-46A3-8C4E-DE74ABC67BD8}"/>
+              </a:ext>
+            </a:extLst>
+          </p:cNvPr>
+          <p:cNvSpPr>
+            <a:spLocks xmlns:a="http://schemas.openxmlformats.org/drawingml/2006/main" noGrp="1"/>
+          </p:cNvSpPr>
+          <p:nvPr/>
+        </p:nvSpPr>
+        <p:spPr>
+          <a:xfrm xmlns:a="http://schemas.openxmlformats.org/drawingml/2006/main">
+            <a:off x="7400925" y="5715000"/>
+            <a:ext cx="2571750" cy="293370"/>
           </a:xfrm>
           <a:prstGeom xmlns:a="http://schemas.openxmlformats.org/drawingml/2006/main" prst="rect">
             <a:avLst/>
@@ -4730,7 +5206,7 @@
             <a:defPPr>
               <a:defRPr sz="1650" b="1">
                 <a:solidFill>
-                  <a:srgbClr val="4B606D"/>
+                  <a:srgbClr val="20333D"/>
                 </a:solidFill>
                 <a:latin typeface="Arial"/>
                 <a:ea typeface="Arial"/>
@@ -4742,7 +5218,7 @@
             <a:pPr>
               <a:defRPr sz="1650" b="1">
                 <a:solidFill>
-                  <a:srgbClr val="4B606D"/>
+                  <a:srgbClr val="20333D"/>
                 </a:solidFill>
                 <a:latin typeface="Arial"/>
                 <a:ea typeface="Arial"/>
@@ -4752,35 +5228,35 @@
             <a:r>
               <a:rPr sz="1650" b="1">
                 <a:solidFill>
-                  <a:srgbClr val="4B606D"/>
+                  <a:srgbClr val="20333D"/>
                 </a:solidFill>
                 <a:latin typeface="Arial"/>
                 <a:ea typeface="Arial"/>
                 <a:cs typeface="Arial"/>
               </a:rPr>
-              <a:t>Keep the minimum across models</a:t>
+              <a:t>Stability change</a:t>
             </a:r>
           </a:p>
         </p:txBody>
       </p:sp>
       <p:sp>
         <p:nvSpPr>
-          <p:cNvPr id="38" name="label-37">
-            <a:extLst xmlns:a="http://schemas.openxmlformats.org/drawingml/2006/main">
-              <a:ext uri="{FF2B5EF4-FFF2-40B4-BE49-F238E27FC236}">
-                <a16:creationId xmlns:a16="http://schemas.microsoft.com/office/drawing/2014/main" id="{CF3DADD5-887A-4139-8152-77844CAB7ABF}"/>
-              </a:ext>
-            </a:extLst>
-          </p:cNvPr>
-          <p:cNvSpPr>
-            <a:spLocks xmlns:a="http://schemas.openxmlformats.org/drawingml/2006/main" noGrp="1"/>
-          </p:cNvSpPr>
-          <p:nvPr/>
-        </p:nvSpPr>
-        <p:spPr>
-          <a:xfrm xmlns:a="http://schemas.openxmlformats.org/drawingml/2006/main">
-            <a:off x="714375" y="9401175"/>
-            <a:ext cx="4000500" cy="333375"/>
+          <p:cNvPr id="47" name="label-46">
+            <a:extLst xmlns:a="http://schemas.openxmlformats.org/drawingml/2006/main">
+              <a:ext uri="{FF2B5EF4-FFF2-40B4-BE49-F238E27FC236}">
+                <a16:creationId xmlns:a16="http://schemas.microsoft.com/office/drawing/2014/main" id="{6CCB4EB2-A0C7-4113-8410-1AA308DBD1EB}"/>
+              </a:ext>
+            </a:extLst>
+          </p:cNvPr>
+          <p:cNvSpPr>
+            <a:spLocks xmlns:a="http://schemas.openxmlformats.org/drawingml/2006/main" noGrp="1"/>
+          </p:cNvSpPr>
+          <p:nvPr/>
+        </p:nvSpPr>
+        <p:spPr>
+          <a:xfrm xmlns:a="http://schemas.openxmlformats.org/drawingml/2006/main">
+            <a:off x="7400925" y="6067425"/>
+            <a:ext cx="2571750" cy="240030"/>
           </a:xfrm>
           <a:prstGeom xmlns:a="http://schemas.openxmlformats.org/drawingml/2006/main" prst="rect">
             <a:avLst/>
@@ -4794,9 +5270,9 @@
           <a:bodyPr xmlns:a="http://schemas.openxmlformats.org/drawingml/2006/main" lIns="0" tIns="0" rIns="0" bIns="0" anchor="t"/>
           <a:lstStyle xmlns:a="http://schemas.openxmlformats.org/drawingml/2006/main">
             <a:defPPr>
-              <a:defRPr sz="1875" b="1">
-                <a:solidFill>
-                  <a:srgbClr val="20333D"/>
+              <a:defRPr sz="1350" b="1">
+                <a:solidFill>
+                  <a:srgbClr val="4B606D"/>
                 </a:solidFill>
                 <a:latin typeface="Arial"/>
                 <a:ea typeface="Arial"/>
@@ -4806,9 +5282,9 @@
           </a:lstStyle>
           <a:p xmlns:a="http://schemas.openxmlformats.org/drawingml/2006/main">
             <a:pPr>
-              <a:defRPr sz="1875" b="1">
-                <a:solidFill>
-                  <a:srgbClr val="20333D"/>
+              <a:defRPr sz="1350" b="1">
+                <a:solidFill>
+                  <a:srgbClr val="4B606D"/>
                 </a:solidFill>
                 <a:latin typeface="Arial"/>
                 <a:ea typeface="Arial"/>
@@ -4816,709 +5292,25 @@
               </a:defRPr>
             </a:pPr>
             <a:r>
-              <a:rPr sz="1875" b="1">
-                <a:solidFill>
-                  <a:srgbClr val="20333D"/>
+              <a:rPr sz="1350" b="1">
+                <a:solidFill>
+                  <a:srgbClr val="4B606D"/>
                 </a:solidFill>
                 <a:latin typeface="Arial"/>
                 <a:ea typeface="Arial"/>
                 <a:cs typeface="Arial"/>
               </a:rPr>
-              <a:t>1,000 unique variants by default</a:t>
+              <a:t>Head-dropout variation</a:t>
             </a:r>
           </a:p>
         </p:txBody>
       </p:sp>
-      <p:sp>
-        <p:nvSpPr>
-          <p:cNvPr id="39" name="label-38">
-            <a:extLst xmlns:a="http://schemas.openxmlformats.org/drawingml/2006/main">
-              <a:ext uri="{FF2B5EF4-FFF2-40B4-BE49-F238E27FC236}">
-                <a16:creationId xmlns:a16="http://schemas.microsoft.com/office/drawing/2014/main" id="{DE3B22E2-0119-4480-8043-105954697578}"/>
-              </a:ext>
-            </a:extLst>
-          </p:cNvPr>
-          <p:cNvSpPr>
-            <a:spLocks xmlns:a="http://schemas.openxmlformats.org/drawingml/2006/main" noGrp="1"/>
-          </p:cNvSpPr>
-          <p:nvPr/>
-        </p:nvSpPr>
-        <p:spPr>
-          <a:xfrm xmlns:a="http://schemas.openxmlformats.org/drawingml/2006/main">
-            <a:off x="714375" y="9801225"/>
-            <a:ext cx="4000500" cy="280035"/>
-          </a:xfrm>
-          <a:prstGeom xmlns:a="http://schemas.openxmlformats.org/drawingml/2006/main" prst="rect">
-            <a:avLst/>
-          </a:prstGeom>
-          <a:noFill xmlns:a="http://schemas.openxmlformats.org/drawingml/2006/main"/>
-          <a:ln xmlns:a="http://schemas.openxmlformats.org/drawingml/2006/main" w="0">
-            <a:noFill/>
-          </a:ln>
-        </p:spPr>
-        <p:txBody>
-          <a:bodyPr xmlns:a="http://schemas.openxmlformats.org/drawingml/2006/main" lIns="0" tIns="0" rIns="0" bIns="0" anchor="t"/>
-          <a:lstStyle xmlns:a="http://schemas.openxmlformats.org/drawingml/2006/main">
-            <a:defPPr>
-              <a:defRPr sz="1575" b="1">
-                <a:solidFill>
-                  <a:srgbClr val="4B606D"/>
-                </a:solidFill>
-                <a:latin typeface="Arial"/>
-                <a:ea typeface="Arial"/>
-                <a:cs typeface="Arial"/>
-              </a:defRPr>
-            </a:defPPr>
-          </a:lstStyle>
-          <a:p xmlns:a="http://schemas.openxmlformats.org/drawingml/2006/main">
-            <a:pPr>
-              <a:defRPr sz="1575" b="1">
-                <a:solidFill>
-                  <a:srgbClr val="4B606D"/>
-                </a:solidFill>
-                <a:latin typeface="Arial"/>
-                <a:ea typeface="Arial"/>
-                <a:cs typeface="Arial"/>
-              </a:defRPr>
-            </a:pPr>
-            <a:r>
-              <a:rPr sz="1575" b="1">
-                <a:solidFill>
-                  <a:srgbClr val="4B606D"/>
-                </a:solidFill>
-                <a:latin typeface="Arial"/>
-                <a:ea typeface="Arial"/>
-                <a:cs typeface="Arial"/>
-              </a:rPr>
-              <a:t>Choose mutation order and allowed sites</a:t>
-            </a:r>
-          </a:p>
-        </p:txBody>
-      </p:sp>
-      <p:sp>
-        <p:nvSpPr>
-          <p:cNvPr id="40" name="label-39">
-            <a:extLst xmlns:a="http://schemas.openxmlformats.org/drawingml/2006/main">
-              <a:ext uri="{FF2B5EF4-FFF2-40B4-BE49-F238E27FC236}">
-                <a16:creationId xmlns:a16="http://schemas.microsoft.com/office/drawing/2014/main" id="{3C0E6876-7E02-4AC0-8F07-FFF83CE809C3}"/>
-              </a:ext>
-            </a:extLst>
-          </p:cNvPr>
-          <p:cNvSpPr>
-            <a:spLocks xmlns:a="http://schemas.openxmlformats.org/drawingml/2006/main" noGrp="1"/>
-          </p:cNvSpPr>
-          <p:nvPr/>
-        </p:nvSpPr>
-        <p:spPr>
-          <a:xfrm xmlns:a="http://schemas.openxmlformats.org/drawingml/2006/main">
-            <a:off x="714375" y="10134600"/>
-            <a:ext cx="4000500" cy="280035"/>
-          </a:xfrm>
-          <a:prstGeom xmlns:a="http://schemas.openxmlformats.org/drawingml/2006/main" prst="rect">
-            <a:avLst/>
-          </a:prstGeom>
-          <a:noFill xmlns:a="http://schemas.openxmlformats.org/drawingml/2006/main"/>
-          <a:ln xmlns:a="http://schemas.openxmlformats.org/drawingml/2006/main" w="0">
-            <a:noFill/>
-          </a:ln>
-        </p:spPr>
-        <p:txBody>
-          <a:bodyPr xmlns:a="http://schemas.openxmlformats.org/drawingml/2006/main" lIns="0" tIns="0" rIns="0" bIns="0" anchor="t"/>
-          <a:lstStyle xmlns:a="http://schemas.openxmlformats.org/drawingml/2006/main">
-            <a:defPPr>
-              <a:defRPr sz="1575" b="1">
-                <a:solidFill>
-                  <a:srgbClr val="4B606D"/>
-                </a:solidFill>
-                <a:latin typeface="Arial"/>
-                <a:ea typeface="Arial"/>
-                <a:cs typeface="Arial"/>
-              </a:defRPr>
-            </a:defPPr>
-          </a:lstStyle>
-          <a:p xmlns:a="http://schemas.openxmlformats.org/drawingml/2006/main">
-            <a:pPr>
-              <a:defRPr sz="1575" b="1">
-                <a:solidFill>
-                  <a:srgbClr val="4B606D"/>
-                </a:solidFill>
-                <a:latin typeface="Arial"/>
-                <a:ea typeface="Arial"/>
-                <a:cs typeface="Arial"/>
-              </a:defRPr>
-            </a:pPr>
-            <a:r>
-              <a:rPr sz="1575" b="1">
-                <a:solidFill>
-                  <a:srgbClr val="4B606D"/>
-                </a:solidFill>
-                <a:latin typeface="Arial"/>
-                <a:ea typeface="Arial"/>
-                <a:cs typeface="Arial"/>
-              </a:rPr>
-              <a:t>Combine sites without full enumeration</a:t>
-            </a:r>
-          </a:p>
-        </p:txBody>
-      </p:sp>
-      <p:sp>
-        <p:nvSpPr>
-          <p:cNvPr id="41" name="">
-            <a:extLst xmlns:a="http://schemas.openxmlformats.org/drawingml/2006/main">
-              <a:ext uri="{FF2B5EF4-FFF2-40B4-BE49-F238E27FC236}">
-                <a16:creationId xmlns:a16="http://schemas.microsoft.com/office/drawing/2014/main" id="{401AEDC6-6AD4-439C-B9E4-59D98762DF34}"/>
-              </a:ext>
-            </a:extLst>
-          </p:cNvPr>
-          <p:cNvSpPr>
-            <a:spLocks xmlns:a="http://schemas.openxmlformats.org/drawingml/2006/main" noGrp="1"/>
-          </p:cNvSpPr>
-          <p:nvPr/>
-        </p:nvSpPr>
-        <p:spPr>
-          <a:xfrm xmlns:a="http://schemas.openxmlformats.org/drawingml/2006/main">
-            <a:off x="4895850" y="6324600"/>
-            <a:ext cx="466725" cy="190500"/>
-          </a:xfrm>
-          <a:prstGeom xmlns:a="http://schemas.openxmlformats.org/drawingml/2006/main" prst="rightArrow">
-            <a:avLst/>
-          </a:prstGeom>
-          <a:solidFill xmlns:a="http://schemas.openxmlformats.org/drawingml/2006/main">
-            <a:srgbClr val="4B606D"/>
-          </a:solidFill>
-          <a:ln xmlns:a="http://schemas.openxmlformats.org/drawingml/2006/main" w="0">
-            <a:noFill/>
-          </a:ln>
-        </p:spPr>
-      </p:sp>
-      <p:sp>
-        <p:nvSpPr>
-          <p:cNvPr id="42" name="">
-            <a:extLst xmlns:a="http://schemas.openxmlformats.org/drawingml/2006/main">
-              <a:ext uri="{FF2B5EF4-FFF2-40B4-BE49-F238E27FC236}">
-                <a16:creationId xmlns:a16="http://schemas.microsoft.com/office/drawing/2014/main" id="{3F04865B-B6B8-46CB-894E-0EAFBE6F868A}"/>
-              </a:ext>
-            </a:extLst>
-          </p:cNvPr>
-          <p:cNvSpPr>
-            <a:spLocks xmlns:a="http://schemas.openxmlformats.org/drawingml/2006/main" noGrp="1"/>
-          </p:cNvSpPr>
-          <p:nvPr/>
-        </p:nvSpPr>
-        <p:spPr>
-          <a:xfrm xmlns:a="http://schemas.openxmlformats.org/drawingml/2006/main">
-            <a:off x="5676900" y="3667125"/>
-            <a:ext cx="114300" cy="457200"/>
-          </a:xfrm>
-          <a:prstGeom xmlns:a="http://schemas.openxmlformats.org/drawingml/2006/main" prst="roundRect">
-            <a:avLst>
-              <a:gd name="adj" fmla="val 50000"/>
-            </a:avLst>
-          </a:prstGeom>
-          <a:solidFill xmlns:a="http://schemas.openxmlformats.org/drawingml/2006/main">
-            <a:srgbClr val="AE91C8"/>
-          </a:solidFill>
-          <a:ln xmlns:a="http://schemas.openxmlformats.org/drawingml/2006/main" w="0">
-            <a:noFill/>
-          </a:ln>
-        </p:spPr>
-      </p:sp>
-      <p:sp>
-        <p:nvSpPr>
-          <p:cNvPr id="43" name="label-42">
-            <a:extLst xmlns:a="http://schemas.openxmlformats.org/drawingml/2006/main">
-              <a:ext uri="{FF2B5EF4-FFF2-40B4-BE49-F238E27FC236}">
-                <a16:creationId xmlns:a16="http://schemas.microsoft.com/office/drawing/2014/main" id="{5A69584C-3E55-43FF-8B16-36E273BB2467}"/>
-              </a:ext>
-            </a:extLst>
-          </p:cNvPr>
-          <p:cNvSpPr>
-            <a:spLocks xmlns:a="http://schemas.openxmlformats.org/drawingml/2006/main" noGrp="1"/>
-          </p:cNvSpPr>
-          <p:nvPr/>
-        </p:nvSpPr>
-        <p:spPr>
-          <a:xfrm xmlns:a="http://schemas.openxmlformats.org/drawingml/2006/main">
-            <a:off x="5953125" y="3657600"/>
-            <a:ext cx="3733800" cy="346710"/>
-          </a:xfrm>
-          <a:prstGeom xmlns:a="http://schemas.openxmlformats.org/drawingml/2006/main" prst="rect">
-            <a:avLst/>
-          </a:prstGeom>
-          <a:noFill xmlns:a="http://schemas.openxmlformats.org/drawingml/2006/main"/>
-          <a:ln xmlns:a="http://schemas.openxmlformats.org/drawingml/2006/main" w="0">
-            <a:noFill/>
-          </a:ln>
-        </p:spPr>
-        <p:txBody>
-          <a:bodyPr xmlns:a="http://schemas.openxmlformats.org/drawingml/2006/main" lIns="0" tIns="0" rIns="0" bIns="0" anchor="t"/>
-          <a:lstStyle xmlns:a="http://schemas.openxmlformats.org/drawingml/2006/main">
-            <a:defPPr>
-              <a:defRPr sz="1950" b="1">
-                <a:solidFill>
-                  <a:srgbClr val="20333D"/>
-                </a:solidFill>
-                <a:latin typeface="Arial"/>
-                <a:ea typeface="Arial"/>
-                <a:cs typeface="Arial"/>
-              </a:defRPr>
-            </a:defPPr>
-          </a:lstStyle>
-          <a:p xmlns:a="http://schemas.openxmlformats.org/drawingml/2006/main">
-            <a:pPr>
-              <a:defRPr sz="1950" b="1">
-                <a:solidFill>
-                  <a:srgbClr val="20333D"/>
-                </a:solidFill>
-                <a:latin typeface="Arial"/>
-                <a:ea typeface="Arial"/>
-                <a:cs typeface="Arial"/>
-              </a:defRPr>
-            </a:pPr>
-            <a:r>
-              <a:rPr sz="1950" b="1">
-                <a:solidFill>
-                  <a:srgbClr val="20333D"/>
-                </a:solidFill>
-                <a:latin typeface="Arial"/>
-                <a:ea typeface="Arial"/>
-                <a:cs typeface="Arial"/>
-              </a:rPr>
-              <a:t>Phenom</a:t>
-            </a:r>
-          </a:p>
-        </p:txBody>
-      </p:sp>
-      <p:sp>
-        <p:nvSpPr>
-          <p:cNvPr id="44" name="label-43">
-            <a:extLst xmlns:a="http://schemas.openxmlformats.org/drawingml/2006/main">
-              <a:ext uri="{FF2B5EF4-FFF2-40B4-BE49-F238E27FC236}">
-                <a16:creationId xmlns:a16="http://schemas.microsoft.com/office/drawing/2014/main" id="{705ADB39-7E45-4F72-8351-7DC596FED8EE}"/>
-              </a:ext>
-            </a:extLst>
-          </p:cNvPr>
-          <p:cNvSpPr>
-            <a:spLocks xmlns:a="http://schemas.openxmlformats.org/drawingml/2006/main" noGrp="1"/>
-          </p:cNvSpPr>
-          <p:nvPr/>
-        </p:nvSpPr>
-        <p:spPr>
-          <a:xfrm xmlns:a="http://schemas.openxmlformats.org/drawingml/2006/main">
-            <a:off x="5953125" y="3971925"/>
-            <a:ext cx="3762375" cy="280035"/>
-          </a:xfrm>
-          <a:prstGeom xmlns:a="http://schemas.openxmlformats.org/drawingml/2006/main" prst="rect">
-            <a:avLst/>
-          </a:prstGeom>
-          <a:noFill xmlns:a="http://schemas.openxmlformats.org/drawingml/2006/main"/>
-          <a:ln xmlns:a="http://schemas.openxmlformats.org/drawingml/2006/main" w="0">
-            <a:noFill/>
-          </a:ln>
-        </p:spPr>
-        <p:txBody>
-          <a:bodyPr xmlns:a="http://schemas.openxmlformats.org/drawingml/2006/main" lIns="0" tIns="0" rIns="0" bIns="0" anchor="t"/>
-          <a:lstStyle xmlns:a="http://schemas.openxmlformats.org/drawingml/2006/main">
-            <a:defPPr>
-              <a:defRPr sz="1575" b="1">
-                <a:solidFill>
-                  <a:srgbClr val="4B606D"/>
-                </a:solidFill>
-                <a:latin typeface="Arial"/>
-                <a:ea typeface="Arial"/>
-                <a:cs typeface="Arial"/>
-              </a:defRPr>
-            </a:defPPr>
-          </a:lstStyle>
-          <a:p xmlns:a="http://schemas.openxmlformats.org/drawingml/2006/main">
-            <a:pPr>
-              <a:defRPr sz="1575" b="1">
-                <a:solidFill>
-                  <a:srgbClr val="4B606D"/>
-                </a:solidFill>
-                <a:latin typeface="Arial"/>
-                <a:ea typeface="Arial"/>
-                <a:cs typeface="Arial"/>
-              </a:defRPr>
-            </a:pPr>
-            <a:r>
-              <a:rPr sz="1575" b="1">
-                <a:solidFill>
-                  <a:srgbClr val="4B606D"/>
-                </a:solidFill>
-                <a:latin typeface="Arial"/>
-                <a:ea typeface="Arial"/>
-                <a:cs typeface="Arial"/>
-              </a:rPr>
-              <a:t>Activity and native uncertainty</a:t>
-            </a:r>
-          </a:p>
-        </p:txBody>
-      </p:sp>
-      <p:sp>
-        <p:nvSpPr>
-          <p:cNvPr id="45" name="">
-            <a:extLst xmlns:a="http://schemas.openxmlformats.org/drawingml/2006/main">
-              <a:ext uri="{FF2B5EF4-FFF2-40B4-BE49-F238E27FC236}">
-                <a16:creationId xmlns:a16="http://schemas.microsoft.com/office/drawing/2014/main" id="{DD2F7CC8-DE18-425E-BF49-3617B4B7E8F0}"/>
-              </a:ext>
-            </a:extLst>
-          </p:cNvPr>
-          <p:cNvSpPr>
-            <a:spLocks xmlns:a="http://schemas.openxmlformats.org/drawingml/2006/main" noGrp="1"/>
-          </p:cNvSpPr>
-          <p:nvPr/>
-        </p:nvSpPr>
-        <p:spPr>
-          <a:xfrm xmlns:a="http://schemas.openxmlformats.org/drawingml/2006/main">
-            <a:off x="5676900" y="4333875"/>
-            <a:ext cx="114300" cy="457200"/>
-          </a:xfrm>
-          <a:prstGeom xmlns:a="http://schemas.openxmlformats.org/drawingml/2006/main" prst="roundRect">
-            <a:avLst>
-              <a:gd name="adj" fmla="val 50000"/>
-            </a:avLst>
-          </a:prstGeom>
-          <a:solidFill xmlns:a="http://schemas.openxmlformats.org/drawingml/2006/main">
-            <a:srgbClr val="81BABC"/>
-          </a:solidFill>
-          <a:ln xmlns:a="http://schemas.openxmlformats.org/drawingml/2006/main" w="0">
-            <a:noFill/>
-          </a:ln>
-        </p:spPr>
-      </p:sp>
-      <p:sp>
-        <p:nvSpPr>
-          <p:cNvPr id="46" name="label-45">
-            <a:extLst xmlns:a="http://schemas.openxmlformats.org/drawingml/2006/main">
-              <a:ext uri="{FF2B5EF4-FFF2-40B4-BE49-F238E27FC236}">
-                <a16:creationId xmlns:a16="http://schemas.microsoft.com/office/drawing/2014/main" id="{43F99EB4-FFB5-4CE8-A140-62E15106A853}"/>
-              </a:ext>
-            </a:extLst>
-          </p:cNvPr>
-          <p:cNvSpPr>
-            <a:spLocks xmlns:a="http://schemas.openxmlformats.org/drawingml/2006/main" noGrp="1"/>
-          </p:cNvSpPr>
-          <p:nvPr/>
-        </p:nvSpPr>
-        <p:spPr>
-          <a:xfrm xmlns:a="http://schemas.openxmlformats.org/drawingml/2006/main">
-            <a:off x="5953125" y="4324350"/>
-            <a:ext cx="3733800" cy="346710"/>
-          </a:xfrm>
-          <a:prstGeom xmlns:a="http://schemas.openxmlformats.org/drawingml/2006/main" prst="rect">
-            <a:avLst/>
-          </a:prstGeom>
-          <a:noFill xmlns:a="http://schemas.openxmlformats.org/drawingml/2006/main"/>
-          <a:ln xmlns:a="http://schemas.openxmlformats.org/drawingml/2006/main" w="0">
-            <a:noFill/>
-          </a:ln>
-        </p:spPr>
-        <p:txBody>
-          <a:bodyPr xmlns:a="http://schemas.openxmlformats.org/drawingml/2006/main" lIns="0" tIns="0" rIns="0" bIns="0" anchor="t"/>
-          <a:lstStyle xmlns:a="http://schemas.openxmlformats.org/drawingml/2006/main">
-            <a:defPPr>
-              <a:defRPr sz="1950" b="1">
-                <a:solidFill>
-                  <a:srgbClr val="20333D"/>
-                </a:solidFill>
-                <a:latin typeface="Arial"/>
-                <a:ea typeface="Arial"/>
-                <a:cs typeface="Arial"/>
-              </a:defRPr>
-            </a:defPPr>
-          </a:lstStyle>
-          <a:p xmlns:a="http://schemas.openxmlformats.org/drawingml/2006/main">
-            <a:pPr>
-              <a:defRPr sz="1950" b="1">
-                <a:solidFill>
-                  <a:srgbClr val="20333D"/>
-                </a:solidFill>
-                <a:latin typeface="Arial"/>
-                <a:ea typeface="Arial"/>
-                <a:cs typeface="Arial"/>
-              </a:defRPr>
-            </a:pPr>
-            <a:r>
-              <a:rPr sz="1950" b="1">
-                <a:solidFill>
-                  <a:srgbClr val="20333D"/>
-                </a:solidFill>
-                <a:latin typeface="Arial"/>
-                <a:ea typeface="Arial"/>
-                <a:cs typeface="Arial"/>
-              </a:rPr>
-              <a:t>EpHod</a:t>
-            </a:r>
-          </a:p>
-        </p:txBody>
-      </p:sp>
-      <p:sp>
-        <p:nvSpPr>
-          <p:cNvPr id="47" name="label-46">
-            <a:extLst xmlns:a="http://schemas.openxmlformats.org/drawingml/2006/main">
-              <a:ext uri="{FF2B5EF4-FFF2-40B4-BE49-F238E27FC236}">
-                <a16:creationId xmlns:a16="http://schemas.microsoft.com/office/drawing/2014/main" id="{E40F199D-E113-4590-A0D3-D2AC7AFD3569}"/>
-              </a:ext>
-            </a:extLst>
-          </p:cNvPr>
-          <p:cNvSpPr>
-            <a:spLocks xmlns:a="http://schemas.openxmlformats.org/drawingml/2006/main" noGrp="1"/>
-          </p:cNvSpPr>
-          <p:nvPr/>
-        </p:nvSpPr>
-        <p:spPr>
-          <a:xfrm xmlns:a="http://schemas.openxmlformats.org/drawingml/2006/main">
-            <a:off x="5953125" y="4638675"/>
-            <a:ext cx="3762375" cy="280035"/>
-          </a:xfrm>
-          <a:prstGeom xmlns:a="http://schemas.openxmlformats.org/drawingml/2006/main" prst="rect">
-            <a:avLst/>
-          </a:prstGeom>
-          <a:noFill xmlns:a="http://schemas.openxmlformats.org/drawingml/2006/main"/>
-          <a:ln xmlns:a="http://schemas.openxmlformats.org/drawingml/2006/main" w="0">
-            <a:noFill/>
-          </a:ln>
-        </p:spPr>
-        <p:txBody>
-          <a:bodyPr xmlns:a="http://schemas.openxmlformats.org/drawingml/2006/main" lIns="0" tIns="0" rIns="0" bIns="0" anchor="t"/>
-          <a:lstStyle xmlns:a="http://schemas.openxmlformats.org/drawingml/2006/main">
-            <a:defPPr>
-              <a:defRPr sz="1575" b="1">
-                <a:solidFill>
-                  <a:srgbClr val="4B606D"/>
-                </a:solidFill>
-                <a:latin typeface="Arial"/>
-                <a:ea typeface="Arial"/>
-                <a:cs typeface="Arial"/>
-              </a:defRPr>
-            </a:defPPr>
-          </a:lstStyle>
-          <a:p xmlns:a="http://schemas.openxmlformats.org/drawingml/2006/main">
-            <a:pPr>
-              <a:defRPr sz="1575" b="1">
-                <a:solidFill>
-                  <a:srgbClr val="4B606D"/>
-                </a:solidFill>
-                <a:latin typeface="Arial"/>
-                <a:ea typeface="Arial"/>
-                <a:cs typeface="Arial"/>
-              </a:defRPr>
-            </a:pPr>
-            <a:r>
-              <a:rPr sz="1575" b="1">
-                <a:solidFill>
-                  <a:srgbClr val="4B606D"/>
-                </a:solidFill>
-                <a:latin typeface="Arial"/>
-                <a:ea typeface="Arial"/>
-                <a:cs typeface="Arial"/>
-              </a:rPr>
-              <a:t>Optimal pH and disagreement</a:t>
-            </a:r>
-          </a:p>
-        </p:txBody>
-      </p:sp>
-      <p:sp>
-        <p:nvSpPr>
-          <p:cNvPr id="48" name="">
-            <a:extLst xmlns:a="http://schemas.openxmlformats.org/drawingml/2006/main">
-              <a:ext uri="{FF2B5EF4-FFF2-40B4-BE49-F238E27FC236}">
-                <a16:creationId xmlns:a16="http://schemas.microsoft.com/office/drawing/2014/main" id="{4F75D274-2ED6-41BF-88F7-B0163B9BBC4F}"/>
-              </a:ext>
-            </a:extLst>
-          </p:cNvPr>
-          <p:cNvSpPr>
-            <a:spLocks xmlns:a="http://schemas.openxmlformats.org/drawingml/2006/main" noGrp="1"/>
-          </p:cNvSpPr>
-          <p:nvPr/>
-        </p:nvSpPr>
-        <p:spPr>
-          <a:xfrm xmlns:a="http://schemas.openxmlformats.org/drawingml/2006/main">
-            <a:off x="5676900" y="5000625"/>
-            <a:ext cx="114300" cy="457200"/>
-          </a:xfrm>
-          <a:prstGeom xmlns:a="http://schemas.openxmlformats.org/drawingml/2006/main" prst="roundRect">
-            <a:avLst>
-              <a:gd name="adj" fmla="val 50000"/>
-            </a:avLst>
-          </a:prstGeom>
-          <a:solidFill xmlns:a="http://schemas.openxmlformats.org/drawingml/2006/main">
-            <a:srgbClr val="E8ACC9"/>
-          </a:solidFill>
-          <a:ln xmlns:a="http://schemas.openxmlformats.org/drawingml/2006/main" w="0">
-            <a:noFill/>
-          </a:ln>
-        </p:spPr>
-      </p:sp>
-      <p:sp>
-        <p:nvSpPr>
-          <p:cNvPr id="49" name="label-48">
-            <a:extLst xmlns:a="http://schemas.openxmlformats.org/drawingml/2006/main">
-              <a:ext uri="{FF2B5EF4-FFF2-40B4-BE49-F238E27FC236}">
-                <a16:creationId xmlns:a16="http://schemas.microsoft.com/office/drawing/2014/main" id="{D824A1FC-7685-4BA4-9035-B89C71F9F1A9}"/>
-              </a:ext>
-            </a:extLst>
-          </p:cNvPr>
-          <p:cNvSpPr>
-            <a:spLocks xmlns:a="http://schemas.openxmlformats.org/drawingml/2006/main" noGrp="1"/>
-          </p:cNvSpPr>
-          <p:nvPr/>
-        </p:nvSpPr>
-        <p:spPr>
-          <a:xfrm xmlns:a="http://schemas.openxmlformats.org/drawingml/2006/main">
-            <a:off x="5953125" y="4991100"/>
-            <a:ext cx="3733800" cy="346710"/>
-          </a:xfrm>
-          <a:prstGeom xmlns:a="http://schemas.openxmlformats.org/drawingml/2006/main" prst="rect">
-            <a:avLst/>
-          </a:prstGeom>
-          <a:noFill xmlns:a="http://schemas.openxmlformats.org/drawingml/2006/main"/>
-          <a:ln xmlns:a="http://schemas.openxmlformats.org/drawingml/2006/main" w="0">
-            <a:noFill/>
-          </a:ln>
-        </p:spPr>
-        <p:txBody>
-          <a:bodyPr xmlns:a="http://schemas.openxmlformats.org/drawingml/2006/main" lIns="0" tIns="0" rIns="0" bIns="0" anchor="t"/>
-          <a:lstStyle xmlns:a="http://schemas.openxmlformats.org/drawingml/2006/main">
-            <a:defPPr>
-              <a:defRPr sz="1950" b="1">
-                <a:solidFill>
-                  <a:srgbClr val="20333D"/>
-                </a:solidFill>
-                <a:latin typeface="Arial"/>
-                <a:ea typeface="Arial"/>
-                <a:cs typeface="Arial"/>
-              </a:defRPr>
-            </a:defPPr>
-          </a:lstStyle>
-          <a:p xmlns:a="http://schemas.openxmlformats.org/drawingml/2006/main">
-            <a:pPr>
-              <a:defRPr sz="1950" b="1">
-                <a:solidFill>
-                  <a:srgbClr val="20333D"/>
-                </a:solidFill>
-                <a:latin typeface="Arial"/>
-                <a:ea typeface="Arial"/>
-                <a:cs typeface="Arial"/>
-              </a:defRPr>
-            </a:pPr>
-            <a:r>
-              <a:rPr sz="1950" b="1">
-                <a:solidFill>
-                  <a:srgbClr val="20333D"/>
-                </a:solidFill>
-                <a:latin typeface="Arial"/>
-                <a:ea typeface="Arial"/>
-                <a:cs typeface="Arial"/>
-              </a:rPr>
-              <a:t>UniStab</a:t>
-            </a:r>
-          </a:p>
-        </p:txBody>
-      </p:sp>
-      <p:sp>
-        <p:nvSpPr>
-          <p:cNvPr id="50" name="label-49">
-            <a:extLst xmlns:a="http://schemas.openxmlformats.org/drawingml/2006/main">
-              <a:ext uri="{FF2B5EF4-FFF2-40B4-BE49-F238E27FC236}">
-                <a16:creationId xmlns:a16="http://schemas.microsoft.com/office/drawing/2014/main" id="{DCC05305-B796-43A4-B651-B85149AAB037}"/>
-              </a:ext>
-            </a:extLst>
-          </p:cNvPr>
-          <p:cNvSpPr>
-            <a:spLocks xmlns:a="http://schemas.openxmlformats.org/drawingml/2006/main" noGrp="1"/>
-          </p:cNvSpPr>
-          <p:nvPr/>
-        </p:nvSpPr>
-        <p:spPr>
-          <a:xfrm xmlns:a="http://schemas.openxmlformats.org/drawingml/2006/main">
-            <a:off x="5953125" y="5305425"/>
-            <a:ext cx="3762375" cy="280035"/>
-          </a:xfrm>
-          <a:prstGeom xmlns:a="http://schemas.openxmlformats.org/drawingml/2006/main" prst="rect">
-            <a:avLst/>
-          </a:prstGeom>
-          <a:noFill xmlns:a="http://schemas.openxmlformats.org/drawingml/2006/main"/>
-          <a:ln xmlns:a="http://schemas.openxmlformats.org/drawingml/2006/main" w="0">
-            <a:noFill/>
-          </a:ln>
-        </p:spPr>
-        <p:txBody>
-          <a:bodyPr xmlns:a="http://schemas.openxmlformats.org/drawingml/2006/main" lIns="0" tIns="0" rIns="0" bIns="0" anchor="t"/>
-          <a:lstStyle xmlns:a="http://schemas.openxmlformats.org/drawingml/2006/main">
-            <a:defPPr>
-              <a:defRPr sz="1575" b="1">
-                <a:solidFill>
-                  <a:srgbClr val="4B606D"/>
-                </a:solidFill>
-                <a:latin typeface="Arial"/>
-                <a:ea typeface="Arial"/>
-                <a:cs typeface="Arial"/>
-              </a:defRPr>
-            </a:defPPr>
-          </a:lstStyle>
-          <a:p xmlns:a="http://schemas.openxmlformats.org/drawingml/2006/main">
-            <a:pPr>
-              <a:defRPr sz="1575" b="1">
-                <a:solidFill>
-                  <a:srgbClr val="4B606D"/>
-                </a:solidFill>
-                <a:latin typeface="Arial"/>
-                <a:ea typeface="Arial"/>
-                <a:cs typeface="Arial"/>
-              </a:defRPr>
-            </a:pPr>
-            <a:r>
-              <a:rPr sz="1575" b="1">
-                <a:solidFill>
-                  <a:srgbClr val="4B606D"/>
-                </a:solidFill>
-                <a:latin typeface="Arial"/>
-                <a:ea typeface="Arial"/>
-                <a:cs typeface="Arial"/>
-              </a:rPr>
-              <a:t>Stability change and variation</a:t>
-            </a:r>
-          </a:p>
-        </p:txBody>
-      </p:sp>
-      <p:sp>
-        <p:nvSpPr>
-          <p:cNvPr id="51" name="">
-            <a:extLst xmlns:a="http://schemas.openxmlformats.org/drawingml/2006/main">
-              <a:ext uri="{FF2B5EF4-FFF2-40B4-BE49-F238E27FC236}">
-                <a16:creationId xmlns:a16="http://schemas.microsoft.com/office/drawing/2014/main" id="{FA4F019B-9006-4F3E-A0DC-0BFC5C6A256F}"/>
-              </a:ext>
-            </a:extLst>
-          </p:cNvPr>
-          <p:cNvSpPr>
-            <a:spLocks xmlns:a="http://schemas.openxmlformats.org/drawingml/2006/main" noGrp="1"/>
-          </p:cNvSpPr>
-          <p:nvPr/>
-        </p:nvSpPr>
-        <p:spPr>
-          <a:xfrm xmlns:a="http://schemas.openxmlformats.org/drawingml/2006/main">
-            <a:off x="7477125" y="5743575"/>
-            <a:ext cx="190500" cy="381000"/>
-          </a:xfrm>
-          <a:prstGeom xmlns:a="http://schemas.openxmlformats.org/drawingml/2006/main" prst="downArrow">
-            <a:avLst/>
-          </a:prstGeom>
-          <a:solidFill xmlns:a="http://schemas.openxmlformats.org/drawingml/2006/main">
-            <a:srgbClr val="AE91C8"/>
-          </a:solidFill>
-          <a:ln xmlns:a="http://schemas.openxmlformats.org/drawingml/2006/main" w="0">
-            <a:noFill/>
-          </a:ln>
-        </p:spPr>
-      </p:sp>
       <p:pic>
         <p:nvPicPr>
-          <p:cNvPr id="52" name="">
-            <a:extLst xmlns:a="http://schemas.openxmlformats.org/drawingml/2006/main">
-              <a:ext uri="{FF2B5EF4-FFF2-40B4-BE49-F238E27FC236}">
-                <a16:creationId xmlns:a16="http://schemas.microsoft.com/office/drawing/2014/main" id="{C29B4610-3D9E-49C4-8CF4-FBFD5EFDBB41}"/>
+          <p:cNvPr id="48" name="">
+            <a:extLst xmlns:a="http://schemas.openxmlformats.org/drawingml/2006/main">
+              <a:ext uri="{FF2B5EF4-FFF2-40B4-BE49-F238E27FC236}">
+                <a16:creationId xmlns:a16="http://schemas.microsoft.com/office/drawing/2014/main" id="{75185ED9-6AF2-41EE-AF54-05129032212C}"/>
               </a:ext>
             </a:extLst>
           </p:cNvPr>
@@ -5528,10 +5320,10 @@
           <p:nvPr/>
         </p:nvPicPr>
         <p:blipFill>
-          <a:blip xmlns:r="http://schemas.openxmlformats.org/officeDocument/2006/relationships" xmlns:a="http://schemas.openxmlformats.org/drawingml/2006/main" r:embed="Rd4d0e206d4bf4c08">
+          <a:blip xmlns:r="http://schemas.openxmlformats.org/officeDocument/2006/relationships" xmlns:a="http://schemas.openxmlformats.org/drawingml/2006/main" r:embed="R252260cd00fe430b">
             <a:extLst>
               <a:ext uri="{96DAC541-7B7A-43D3-8B79-37D633B846F1}">
-                <asvg:svgBlip xmlns:asvg="http://schemas.microsoft.com/office/drawing/2016/SVG/main" r:embed="R309d115787f142a9"/>
+                <asvg:svgBlip xmlns:asvg="http://schemas.microsoft.com/office/drawing/2016/SVG/main" r:embed="R3f81271df0f744f0"/>
               </a:ext>
             </a:extLst>
           </a:blip>
@@ -5539,8 +5331,8 @@
         </p:blipFill>
         <p:spPr>
           <a:xfrm xmlns:a="http://schemas.openxmlformats.org/drawingml/2006/main">
-            <a:off x="5715000" y="6353175"/>
-            <a:ext cx="647700" cy="647700"/>
+            <a:off x="619125" y="6515100"/>
+            <a:ext cx="9906000" cy="1181100"/>
           </a:xfrm>
           <a:prstGeom xmlns:a="http://schemas.openxmlformats.org/drawingml/2006/main" prst="rect">
             <a:avLst/>
@@ -5549,290 +5341,26 @@
       </p:pic>
       <p:sp>
         <p:nvSpPr>
-          <p:cNvPr id="53" name="label-52">
-            <a:extLst xmlns:a="http://schemas.openxmlformats.org/drawingml/2006/main">
-              <a:ext uri="{FF2B5EF4-FFF2-40B4-BE49-F238E27FC236}">
-                <a16:creationId xmlns:a16="http://schemas.microsoft.com/office/drawing/2014/main" id="{730E1698-5984-4423-83E3-F1D4AC94B2AD}"/>
-              </a:ext>
-            </a:extLst>
-          </p:cNvPr>
-          <p:cNvSpPr>
-            <a:spLocks xmlns:a="http://schemas.openxmlformats.org/drawingml/2006/main" noGrp="1"/>
-          </p:cNvSpPr>
-          <p:nvPr/>
-        </p:nvSpPr>
-        <p:spPr>
-          <a:xfrm xmlns:a="http://schemas.openxmlformats.org/drawingml/2006/main">
-            <a:off x="6581775" y="6372225"/>
-            <a:ext cx="3143250" cy="386715"/>
-          </a:xfrm>
-          <a:prstGeom xmlns:a="http://schemas.openxmlformats.org/drawingml/2006/main" prst="rect">
-            <a:avLst/>
-          </a:prstGeom>
-          <a:noFill xmlns:a="http://schemas.openxmlformats.org/drawingml/2006/main"/>
-          <a:ln xmlns:a="http://schemas.openxmlformats.org/drawingml/2006/main" w="0">
-            <a:noFill/>
-          </a:ln>
-        </p:spPr>
-        <p:txBody>
-          <a:bodyPr xmlns:a="http://schemas.openxmlformats.org/drawingml/2006/main" lIns="0" tIns="0" rIns="0" bIns="0" anchor="t"/>
-          <a:lstStyle xmlns:a="http://schemas.openxmlformats.org/drawingml/2006/main">
-            <a:defPPr>
-              <a:defRPr sz="2175" b="1">
-                <a:solidFill>
-                  <a:srgbClr val="20333D"/>
-                </a:solidFill>
-                <a:latin typeface="Arial"/>
-                <a:ea typeface="Arial"/>
-                <a:cs typeface="Arial"/>
-              </a:defRPr>
-            </a:defPPr>
-          </a:lstStyle>
-          <a:p xmlns:a="http://schemas.openxmlformats.org/drawingml/2006/main">
-            <a:pPr>
-              <a:defRPr sz="2175" b="1">
-                <a:solidFill>
-                  <a:srgbClr val="20333D"/>
-                </a:solidFill>
-                <a:latin typeface="Arial"/>
-                <a:ea typeface="Arial"/>
-                <a:cs typeface="Arial"/>
-              </a:defRPr>
-            </a:pPr>
-            <a:r>
-              <a:rPr sz="2175" b="1">
-                <a:solidFill>
-                  <a:srgbClr val="20333D"/>
-                </a:solidFill>
-                <a:latin typeface="Arial"/>
-                <a:ea typeface="Arial"/>
-                <a:cs typeface="Arial"/>
-              </a:rPr>
-              <a:t>Enzora Assistant</a:t>
-            </a:r>
-          </a:p>
-        </p:txBody>
-      </p:sp>
-      <p:sp>
-        <p:nvSpPr>
-          <p:cNvPr id="54" name="label-53">
-            <a:extLst xmlns:a="http://schemas.openxmlformats.org/drawingml/2006/main">
-              <a:ext uri="{FF2B5EF4-FFF2-40B4-BE49-F238E27FC236}">
-                <a16:creationId xmlns:a16="http://schemas.microsoft.com/office/drawing/2014/main" id="{B337DA56-DBE1-4C22-9155-2C8EA94A03AB}"/>
-              </a:ext>
-            </a:extLst>
-          </p:cNvPr>
-          <p:cNvSpPr>
-            <a:spLocks xmlns:a="http://schemas.openxmlformats.org/drawingml/2006/main" noGrp="1"/>
-          </p:cNvSpPr>
-          <p:nvPr/>
-        </p:nvSpPr>
-        <p:spPr>
-          <a:xfrm xmlns:a="http://schemas.openxmlformats.org/drawingml/2006/main">
-            <a:off x="6581775" y="6762750"/>
-            <a:ext cx="3143250" cy="306705"/>
-          </a:xfrm>
-          <a:prstGeom xmlns:a="http://schemas.openxmlformats.org/drawingml/2006/main" prst="rect">
-            <a:avLst/>
-          </a:prstGeom>
-          <a:noFill xmlns:a="http://schemas.openxmlformats.org/drawingml/2006/main"/>
-          <a:ln xmlns:a="http://schemas.openxmlformats.org/drawingml/2006/main" w="0">
-            <a:noFill/>
-          </a:ln>
-        </p:spPr>
-        <p:txBody>
-          <a:bodyPr xmlns:a="http://schemas.openxmlformats.org/drawingml/2006/main" lIns="0" tIns="0" rIns="0" bIns="0" anchor="t"/>
-          <a:lstStyle xmlns:a="http://schemas.openxmlformats.org/drawingml/2006/main">
-            <a:defPPr>
-              <a:defRPr sz="1725" b="1">
-                <a:solidFill>
-                  <a:srgbClr val="4B606D"/>
-                </a:solidFill>
-                <a:latin typeface="Arial"/>
-                <a:ea typeface="Arial"/>
-                <a:cs typeface="Arial"/>
-              </a:defRPr>
-            </a:defPPr>
-          </a:lstStyle>
-          <a:p xmlns:a="http://schemas.openxmlformats.org/drawingml/2006/main">
-            <a:pPr>
-              <a:defRPr sz="1725" b="1">
-                <a:solidFill>
-                  <a:srgbClr val="4B606D"/>
-                </a:solidFill>
-                <a:latin typeface="Arial"/>
-                <a:ea typeface="Arial"/>
-                <a:cs typeface="Arial"/>
-              </a:defRPr>
-            </a:pPr>
-            <a:r>
-              <a:rPr sz="1725" b="1">
-                <a:solidFill>
-                  <a:srgbClr val="4B606D"/>
-                </a:solidFill>
-                <a:latin typeface="Arial"/>
-                <a:ea typeface="Arial"/>
-                <a:cs typeface="Arial"/>
-              </a:rPr>
-              <a:t>MiniMax tool use</a:t>
-            </a:r>
-          </a:p>
-        </p:txBody>
-      </p:sp>
-      <p:sp>
-        <p:nvSpPr>
-          <p:cNvPr id="55" name="label-54">
-            <a:extLst xmlns:a="http://schemas.openxmlformats.org/drawingml/2006/main">
-              <a:ext uri="{FF2B5EF4-FFF2-40B4-BE49-F238E27FC236}">
-                <a16:creationId xmlns:a16="http://schemas.microsoft.com/office/drawing/2014/main" id="{17834C67-2B39-4D34-9815-0F9CB2829FCC}"/>
-              </a:ext>
-            </a:extLst>
-          </p:cNvPr>
-          <p:cNvSpPr>
-            <a:spLocks xmlns:a="http://schemas.openxmlformats.org/drawingml/2006/main" noGrp="1"/>
-          </p:cNvSpPr>
-          <p:nvPr/>
-        </p:nvSpPr>
-        <p:spPr>
-          <a:xfrm xmlns:a="http://schemas.openxmlformats.org/drawingml/2006/main">
-            <a:off x="5715000" y="7315200"/>
-            <a:ext cx="4048125" cy="306705"/>
-          </a:xfrm>
-          <a:prstGeom xmlns:a="http://schemas.openxmlformats.org/drawingml/2006/main" prst="rect">
-            <a:avLst/>
-          </a:prstGeom>
-          <a:noFill xmlns:a="http://schemas.openxmlformats.org/drawingml/2006/main"/>
-          <a:ln xmlns:a="http://schemas.openxmlformats.org/drawingml/2006/main" w="0">
-            <a:noFill/>
-          </a:ln>
-        </p:spPr>
-        <p:txBody>
-          <a:bodyPr xmlns:a="http://schemas.openxmlformats.org/drawingml/2006/main" lIns="0" tIns="0" rIns="0" bIns="0" anchor="t"/>
-          <a:lstStyle xmlns:a="http://schemas.openxmlformats.org/drawingml/2006/main">
-            <a:defPPr>
-              <a:defRPr sz="1725" b="1">
-                <a:solidFill>
-                  <a:srgbClr val="20333D"/>
-                </a:solidFill>
-                <a:latin typeface="Arial"/>
-                <a:ea typeface="Arial"/>
-                <a:cs typeface="Arial"/>
-              </a:defRPr>
-            </a:defPPr>
-          </a:lstStyle>
-          <a:p xmlns:a="http://schemas.openxmlformats.org/drawingml/2006/main">
-            <a:pPr>
-              <a:defRPr sz="1725" b="1">
-                <a:solidFill>
-                  <a:srgbClr val="20333D"/>
-                </a:solidFill>
-                <a:latin typeface="Arial"/>
-                <a:ea typeface="Arial"/>
-                <a:cs typeface="Arial"/>
-              </a:defRPr>
-            </a:pPr>
-            <a:r>
-              <a:rPr sz="1725" b="1">
-                <a:solidFill>
-                  <a:srgbClr val="20333D"/>
-                </a:solidFill>
-                <a:latin typeface="Arial"/>
-                <a:ea typeface="Arial"/>
-                <a:cs typeface="Arial"/>
-              </a:rPr>
-              <a:t>Reads predictions and uncertainty</a:t>
-            </a:r>
-          </a:p>
-        </p:txBody>
-      </p:sp>
-      <p:sp>
-        <p:nvSpPr>
-          <p:cNvPr id="56" name="label-55">
-            <a:extLst xmlns:a="http://schemas.openxmlformats.org/drawingml/2006/main">
-              <a:ext uri="{FF2B5EF4-FFF2-40B4-BE49-F238E27FC236}">
-                <a16:creationId xmlns:a16="http://schemas.microsoft.com/office/drawing/2014/main" id="{2845B221-AEDB-4170-98CB-588AF99A8E9C}"/>
-              </a:ext>
-            </a:extLst>
-          </p:cNvPr>
-          <p:cNvSpPr>
-            <a:spLocks xmlns:a="http://schemas.openxmlformats.org/drawingml/2006/main" noGrp="1"/>
-          </p:cNvSpPr>
-          <p:nvPr/>
-        </p:nvSpPr>
-        <p:spPr>
-          <a:xfrm xmlns:a="http://schemas.openxmlformats.org/drawingml/2006/main">
-            <a:off x="5715000" y="7677150"/>
-            <a:ext cx="4048125" cy="293370"/>
-          </a:xfrm>
-          <a:prstGeom xmlns:a="http://schemas.openxmlformats.org/drawingml/2006/main" prst="rect">
-            <a:avLst/>
-          </a:prstGeom>
-          <a:noFill xmlns:a="http://schemas.openxmlformats.org/drawingml/2006/main"/>
-          <a:ln xmlns:a="http://schemas.openxmlformats.org/drawingml/2006/main" w="0">
-            <a:noFill/>
-          </a:ln>
-        </p:spPr>
-        <p:txBody>
-          <a:bodyPr xmlns:a="http://schemas.openxmlformats.org/drawingml/2006/main" lIns="0" tIns="0" rIns="0" bIns="0" anchor="t"/>
-          <a:lstStyle xmlns:a="http://schemas.openxmlformats.org/drawingml/2006/main">
-            <a:defPPr>
-              <a:defRPr sz="1650" b="1">
-                <a:solidFill>
-                  <a:srgbClr val="20333D"/>
-                </a:solidFill>
-                <a:latin typeface="Arial"/>
-                <a:ea typeface="Arial"/>
-                <a:cs typeface="Arial"/>
-              </a:defRPr>
-            </a:defPPr>
-          </a:lstStyle>
-          <a:p xmlns:a="http://schemas.openxmlformats.org/drawingml/2006/main">
-            <a:pPr>
-              <a:defRPr sz="1650" b="1">
-                <a:solidFill>
-                  <a:srgbClr val="20333D"/>
-                </a:solidFill>
-                <a:latin typeface="Arial"/>
-                <a:ea typeface="Arial"/>
-                <a:cs typeface="Arial"/>
-              </a:defRPr>
-            </a:pPr>
-            <a:r>
-              <a:rPr sz="1650" b="1">
-                <a:solidFill>
-                  <a:srgbClr val="20333D"/>
-                </a:solidFill>
-                <a:latin typeface="Arial"/>
-                <a:ea typeface="Arial"/>
-                <a:cs typeface="Arial"/>
-              </a:rPr>
-              <a:t>Requests bounded changes to weights</a:t>
-            </a:r>
-          </a:p>
-        </p:txBody>
-      </p:sp>
-      <p:sp>
-        <p:nvSpPr>
-          <p:cNvPr id="57" name="">
-            <a:extLst xmlns:a="http://schemas.openxmlformats.org/drawingml/2006/main">
-              <a:ext uri="{FF2B5EF4-FFF2-40B4-BE49-F238E27FC236}">
-                <a16:creationId xmlns:a16="http://schemas.microsoft.com/office/drawing/2014/main" id="{68A4809D-07F4-4FAB-BCFE-82FCED13FE35}"/>
-              </a:ext>
-            </a:extLst>
-          </p:cNvPr>
-          <p:cNvSpPr>
-            <a:spLocks xmlns:a="http://schemas.openxmlformats.org/drawingml/2006/main" noGrp="1"/>
-          </p:cNvSpPr>
-          <p:nvPr/>
-        </p:nvSpPr>
-        <p:spPr>
-          <a:xfrm xmlns:a="http://schemas.openxmlformats.org/drawingml/2006/main">
-            <a:off x="5715000" y="8153400"/>
-            <a:ext cx="3952875" cy="542925"/>
+          <p:cNvPr id="49" name="">
+            <a:extLst xmlns:a="http://schemas.openxmlformats.org/drawingml/2006/main">
+              <a:ext uri="{FF2B5EF4-FFF2-40B4-BE49-F238E27FC236}">
+                <a16:creationId xmlns:a16="http://schemas.microsoft.com/office/drawing/2014/main" id="{92781BF9-A239-47CC-AB09-FB3B85501FD2}"/>
+              </a:ext>
+            </a:extLst>
+          </p:cNvPr>
+          <p:cNvSpPr>
+            <a:spLocks xmlns:a="http://schemas.openxmlformats.org/drawingml/2006/main" noGrp="1"/>
+          </p:cNvSpPr>
+          <p:nvPr/>
+        </p:nvSpPr>
+        <p:spPr>
+          <a:xfrm xmlns:a="http://schemas.openxmlformats.org/drawingml/2006/main">
+            <a:off x="3714750" y="7543800"/>
+            <a:ext cx="5095875" cy="1152525"/>
           </a:xfrm>
           <a:prstGeom xmlns:a="http://schemas.openxmlformats.org/drawingml/2006/main" prst="roundRect">
             <a:avLst>
-              <a:gd name="adj" fmla="val 17544"/>
+              <a:gd name="adj" fmla="val 9917"/>
             </a:avLst>
           </a:prstGeom>
           <a:solidFill xmlns:a="http://schemas.openxmlformats.org/drawingml/2006/main">
@@ -5845,24 +5373,58 @@
           </a:ln>
         </p:spPr>
       </p:sp>
-      <p:sp>
-        <p:nvSpPr>
-          <p:cNvPr id="58" name="label-57">
-            <a:extLst xmlns:a="http://schemas.openxmlformats.org/drawingml/2006/main">
-              <a:ext uri="{FF2B5EF4-FFF2-40B4-BE49-F238E27FC236}">
-                <a16:creationId xmlns:a16="http://schemas.microsoft.com/office/drawing/2014/main" id="{70223E04-7F6E-4ED9-833B-159FD264C7A2}"/>
-              </a:ext>
-            </a:extLst>
-          </p:cNvPr>
-          <p:cNvSpPr>
-            <a:spLocks xmlns:a="http://schemas.openxmlformats.org/drawingml/2006/main" noGrp="1"/>
-          </p:cNvSpPr>
-          <p:nvPr/>
-        </p:nvSpPr>
-        <p:spPr>
-          <a:xfrm xmlns:a="http://schemas.openxmlformats.org/drawingml/2006/main">
-            <a:off x="5943600" y="8286750"/>
-            <a:ext cx="3571875" cy="320040"/>
+      <p:pic>
+        <p:nvPicPr>
+          <p:cNvPr id="50" name="">
+            <a:extLst xmlns:a="http://schemas.openxmlformats.org/drawingml/2006/main">
+              <a:ext uri="{FF2B5EF4-FFF2-40B4-BE49-F238E27FC236}">
+                <a16:creationId xmlns:a16="http://schemas.microsoft.com/office/drawing/2014/main" id="{FAD0DBC9-CA8A-4147-B80C-9BD02EC8D2B3}"/>
+              </a:ext>
+            </a:extLst>
+          </p:cNvPr>
+          <p:cNvPicPr>
+            <a:picLocks xmlns:a="http://schemas.openxmlformats.org/drawingml/2006/main" noChangeAspect="1"/>
+          </p:cNvPicPr>
+          <p:nvPr/>
+        </p:nvPicPr>
+        <p:blipFill>
+          <a:blip xmlns:r="http://schemas.openxmlformats.org/officeDocument/2006/relationships" xmlns:a="http://schemas.openxmlformats.org/drawingml/2006/main" r:embed="R748080433afa4ee9">
+            <a:extLst>
+              <a:ext uri="{96DAC541-7B7A-43D3-8B79-37D633B846F1}">
+                <asvg:svgBlip xmlns:asvg="http://schemas.microsoft.com/office/drawing/2016/SVG/main" r:embed="R2cd81ce9df5041ad"/>
+              </a:ext>
+            </a:extLst>
+          </a:blip>
+          <a:stretch xmlns:a="http://schemas.openxmlformats.org/drawingml/2006/main"/>
+        </p:blipFill>
+        <p:spPr>
+          <a:xfrm xmlns:a="http://schemas.openxmlformats.org/drawingml/2006/main">
+            <a:off x="3867150" y="7686675"/>
+            <a:ext cx="781050" cy="781050"/>
+          </a:xfrm>
+          <a:prstGeom xmlns:a="http://schemas.openxmlformats.org/drawingml/2006/main" prst="rect">
+            <a:avLst/>
+          </a:prstGeom>
+        </p:spPr>
+      </p:pic>
+      <p:sp>
+        <p:nvSpPr>
+          <p:cNvPr id="51" name="label-50">
+            <a:extLst xmlns:a="http://schemas.openxmlformats.org/drawingml/2006/main">
+              <a:ext uri="{FF2B5EF4-FFF2-40B4-BE49-F238E27FC236}">
+                <a16:creationId xmlns:a16="http://schemas.microsoft.com/office/drawing/2014/main" id="{E16F7093-CDB1-458C-AEDA-BC1613D5A257}"/>
+              </a:ext>
+            </a:extLst>
+          </p:cNvPr>
+          <p:cNvSpPr>
+            <a:spLocks xmlns:a="http://schemas.openxmlformats.org/drawingml/2006/main" noGrp="1"/>
+          </p:cNvSpPr>
+          <p:nvPr/>
+        </p:nvSpPr>
+        <p:spPr>
+          <a:xfrm xmlns:a="http://schemas.openxmlformats.org/drawingml/2006/main">
+            <a:off x="4857750" y="7677150"/>
+            <a:ext cx="3762375" cy="360045"/>
           </a:xfrm>
           <a:prstGeom xmlns:a="http://schemas.openxmlformats.org/drawingml/2006/main" prst="rect">
             <a:avLst/>
@@ -5876,7 +5438,7 @@
           <a:bodyPr xmlns:a="http://schemas.openxmlformats.org/drawingml/2006/main" lIns="0" tIns="0" rIns="0" bIns="0" anchor="t"/>
           <a:lstStyle xmlns:a="http://schemas.openxmlformats.org/drawingml/2006/main">
             <a:defPPr>
-              <a:defRPr sz="1800" b="1">
+              <a:defRPr sz="2025" b="1">
                 <a:solidFill>
                   <a:srgbClr val="20333D"/>
                 </a:solidFill>
@@ -5888,7 +5450,7 @@
           </a:lstStyle>
           <a:p xmlns:a="http://schemas.openxmlformats.org/drawingml/2006/main">
             <a:pPr>
-              <a:defRPr sz="1800" b="1">
+              <a:defRPr sz="2025" b="1">
                 <a:solidFill>
                   <a:srgbClr val="20333D"/>
                 </a:solidFill>
@@ -5898,7 +5460,7 @@
               </a:defRPr>
             </a:pPr>
             <a:r>
-              <a:rPr sz="1800" b="1">
+              <a:rPr sz="2025" b="1">
                 <a:solidFill>
                   <a:srgbClr val="20333D"/>
                 </a:solidFill>
@@ -5906,59 +5468,29 @@
                 <a:ea typeface="Arial"/>
                 <a:cs typeface="Arial"/>
               </a:rPr>
-              <a:t>Validate and record the policy</a:t>
+              <a:t>Enzora Assistant</a:t>
             </a:r>
           </a:p>
         </p:txBody>
       </p:sp>
       <p:sp>
         <p:nvSpPr>
-          <p:cNvPr id="59" name="">
-            <a:extLst xmlns:a="http://schemas.openxmlformats.org/drawingml/2006/main">
-              <a:ext uri="{FF2B5EF4-FFF2-40B4-BE49-F238E27FC236}">
-                <a16:creationId xmlns:a16="http://schemas.microsoft.com/office/drawing/2014/main" id="{B16D9DD9-2FED-43F3-89DA-479A0A446638}"/>
-              </a:ext>
-            </a:extLst>
-          </p:cNvPr>
-          <p:cNvSpPr>
-            <a:spLocks xmlns:a="http://schemas.openxmlformats.org/drawingml/2006/main" noGrp="1"/>
-          </p:cNvSpPr>
-          <p:nvPr/>
-        </p:nvSpPr>
-        <p:spPr>
-          <a:xfrm xmlns:a="http://schemas.openxmlformats.org/drawingml/2006/main">
-            <a:off x="7477125" y="8848725"/>
-            <a:ext cx="190500" cy="342900"/>
-          </a:xfrm>
-          <a:prstGeom xmlns:a="http://schemas.openxmlformats.org/drawingml/2006/main" prst="downArrow">
-            <a:avLst/>
-          </a:prstGeom>
-          <a:solidFill xmlns:a="http://schemas.openxmlformats.org/drawingml/2006/main">
-            <a:srgbClr val="AE91C8"/>
-          </a:solidFill>
-          <a:ln xmlns:a="http://schemas.openxmlformats.org/drawingml/2006/main" w="0">
-            <a:noFill/>
-          </a:ln>
-        </p:spPr>
-      </p:sp>
-      <p:sp>
-        <p:nvSpPr>
-          <p:cNvPr id="60" name="label-59">
-            <a:extLst xmlns:a="http://schemas.openxmlformats.org/drawingml/2006/main">
-              <a:ext uri="{FF2B5EF4-FFF2-40B4-BE49-F238E27FC236}">
-                <a16:creationId xmlns:a16="http://schemas.microsoft.com/office/drawing/2014/main" id="{63E994AD-9E1E-4BD0-AA40-B0EE1E25029A}"/>
-              </a:ext>
-            </a:extLst>
-          </p:cNvPr>
-          <p:cNvSpPr>
-            <a:spLocks xmlns:a="http://schemas.openxmlformats.org/drawingml/2006/main" noGrp="1"/>
-          </p:cNvSpPr>
-          <p:nvPr/>
-        </p:nvSpPr>
-        <p:spPr>
-          <a:xfrm xmlns:a="http://schemas.openxmlformats.org/drawingml/2006/main">
-            <a:off x="5715000" y="9391650"/>
-            <a:ext cx="4048125" cy="320040"/>
+          <p:cNvPr id="52" name="label-51">
+            <a:extLst xmlns:a="http://schemas.openxmlformats.org/drawingml/2006/main">
+              <a:ext uri="{FF2B5EF4-FFF2-40B4-BE49-F238E27FC236}">
+                <a16:creationId xmlns:a16="http://schemas.microsoft.com/office/drawing/2014/main" id="{F82213D7-70F2-4996-928B-C0DE57DFC424}"/>
+              </a:ext>
+            </a:extLst>
+          </p:cNvPr>
+          <p:cNvSpPr>
+            <a:spLocks xmlns:a="http://schemas.openxmlformats.org/drawingml/2006/main" noGrp="1"/>
+          </p:cNvSpPr>
+          <p:nvPr/>
+        </p:nvSpPr>
+        <p:spPr>
+          <a:xfrm xmlns:a="http://schemas.openxmlformats.org/drawingml/2006/main">
+            <a:off x="4857750" y="8067675"/>
+            <a:ext cx="3762375" cy="266700"/>
           </a:xfrm>
           <a:prstGeom xmlns:a="http://schemas.openxmlformats.org/drawingml/2006/main" prst="rect">
             <a:avLst/>
@@ -5972,9 +5504,9 @@
           <a:bodyPr xmlns:a="http://schemas.openxmlformats.org/drawingml/2006/main" lIns="0" tIns="0" rIns="0" bIns="0" anchor="t"/>
           <a:lstStyle xmlns:a="http://schemas.openxmlformats.org/drawingml/2006/main">
             <a:defPPr>
-              <a:defRPr sz="1800" b="1">
-                <a:solidFill>
-                  <a:srgbClr val="20333D"/>
+              <a:defRPr sz="1500" b="1">
+                <a:solidFill>
+                  <a:srgbClr val="4B606D"/>
                 </a:solidFill>
                 <a:latin typeface="Arial"/>
                 <a:ea typeface="Arial"/>
@@ -5984,9 +5516,9 @@
           </a:lstStyle>
           <a:p xmlns:a="http://schemas.openxmlformats.org/drawingml/2006/main">
             <a:pPr>
-              <a:defRPr sz="1800" b="1">
-                <a:solidFill>
-                  <a:srgbClr val="20333D"/>
+              <a:defRPr sz="1500" b="1">
+                <a:solidFill>
+                  <a:srgbClr val="4B606D"/>
                 </a:solidFill>
                 <a:latin typeface="Arial"/>
                 <a:ea typeface="Arial"/>
@@ -5994,37 +5526,137 @@
               </a:defRPr>
             </a:pPr>
             <a:r>
-              <a:rPr sz="1800" b="1">
-                <a:solidFill>
-                  <a:srgbClr val="20333D"/>
+              <a:rPr sz="1500" b="1">
+                <a:solidFill>
+                  <a:srgbClr val="4B606D"/>
                 </a:solidFill>
                 <a:latin typeface="Arial"/>
                 <a:ea typeface="Arial"/>
                 <a:cs typeface="Arial"/>
               </a:rPr>
-              <a:t>Rank against a fixed WT reference</a:t>
+              <a:t>Reads evidence; balances priorities</a:t>
             </a:r>
           </a:p>
         </p:txBody>
       </p:sp>
       <p:sp>
         <p:nvSpPr>
-          <p:cNvPr id="61" name="label-60">
-            <a:extLst xmlns:a="http://schemas.openxmlformats.org/drawingml/2006/main">
-              <a:ext uri="{FF2B5EF4-FFF2-40B4-BE49-F238E27FC236}">
-                <a16:creationId xmlns:a16="http://schemas.microsoft.com/office/drawing/2014/main" id="{56757AD7-D6C3-4F29-B179-7D63516C7DF2}"/>
-              </a:ext>
-            </a:extLst>
-          </p:cNvPr>
-          <p:cNvSpPr>
-            <a:spLocks xmlns:a="http://schemas.openxmlformats.org/drawingml/2006/main" noGrp="1"/>
-          </p:cNvSpPr>
-          <p:nvPr/>
-        </p:nvSpPr>
-        <p:spPr>
-          <a:xfrm xmlns:a="http://schemas.openxmlformats.org/drawingml/2006/main">
-            <a:off x="5715000" y="9772650"/>
-            <a:ext cx="4048125" cy="280035"/>
+          <p:cNvPr id="53" name="label-52">
+            <a:extLst xmlns:a="http://schemas.openxmlformats.org/drawingml/2006/main">
+              <a:ext uri="{FF2B5EF4-FFF2-40B4-BE49-F238E27FC236}">
+                <a16:creationId xmlns:a16="http://schemas.microsoft.com/office/drawing/2014/main" id="{8A5588D9-3A7E-4558-BCFB-FE64DFA4C8C4}"/>
+              </a:ext>
+            </a:extLst>
+          </p:cNvPr>
+          <p:cNvSpPr>
+            <a:spLocks xmlns:a="http://schemas.openxmlformats.org/drawingml/2006/main" noGrp="1"/>
+          </p:cNvSpPr>
+          <p:nvPr/>
+        </p:nvSpPr>
+        <p:spPr>
+          <a:xfrm xmlns:a="http://schemas.openxmlformats.org/drawingml/2006/main">
+            <a:off x="4200525" y="8448675"/>
+            <a:ext cx="4429125" cy="240030"/>
+          </a:xfrm>
+          <a:prstGeom xmlns:a="http://schemas.openxmlformats.org/drawingml/2006/main" prst="rect">
+            <a:avLst/>
+          </a:prstGeom>
+          <a:noFill xmlns:a="http://schemas.openxmlformats.org/drawingml/2006/main"/>
+          <a:ln xmlns:a="http://schemas.openxmlformats.org/drawingml/2006/main" w="0">
+            <a:noFill/>
+          </a:ln>
+        </p:spPr>
+        <p:txBody>
+          <a:bodyPr xmlns:a="http://schemas.openxmlformats.org/drawingml/2006/main" lIns="0" tIns="0" rIns="0" bIns="0" anchor="t"/>
+          <a:lstStyle xmlns:a="http://schemas.openxmlformats.org/drawingml/2006/main">
+            <a:defPPr>
+              <a:defRPr sz="1350" b="1">
+                <a:solidFill>
+                  <a:srgbClr val="4B606D"/>
+                </a:solidFill>
+                <a:latin typeface="Arial"/>
+                <a:ea typeface="Arial"/>
+                <a:cs typeface="Arial"/>
+              </a:defRPr>
+            </a:defPPr>
+          </a:lstStyle>
+          <a:p xmlns:a="http://schemas.openxmlformats.org/drawingml/2006/main">
+            <a:pPr>
+              <a:defRPr sz="1350" b="1">
+                <a:solidFill>
+                  <a:srgbClr val="4B606D"/>
+                </a:solidFill>
+                <a:latin typeface="Arial"/>
+                <a:ea typeface="Arial"/>
+                <a:cs typeface="Arial"/>
+              </a:defRPr>
+            </a:pPr>
+            <a:r>
+              <a:rPr sz="1350" b="1">
+                <a:solidFill>
+                  <a:srgbClr val="4B606D"/>
+                </a:solidFill>
+                <a:latin typeface="Arial"/>
+                <a:ea typeface="Arial"/>
+                <a:cs typeface="Arial"/>
+              </a:rPr>
+              <a:t>Validated weights · Fixed WT reference</a:t>
+            </a:r>
+          </a:p>
+        </p:txBody>
+      </p:sp>
+      <p:pic>
+        <p:nvPicPr>
+          <p:cNvPr id="54" name="">
+            <a:extLst xmlns:a="http://schemas.openxmlformats.org/drawingml/2006/main">
+              <a:ext uri="{FF2B5EF4-FFF2-40B4-BE49-F238E27FC236}">
+                <a16:creationId xmlns:a16="http://schemas.microsoft.com/office/drawing/2014/main" id="{3C3231CD-7373-4328-AD1E-7CC644A9090A}"/>
+              </a:ext>
+            </a:extLst>
+          </p:cNvPr>
+          <p:cNvPicPr>
+            <a:picLocks xmlns:a="http://schemas.openxmlformats.org/drawingml/2006/main" noChangeAspect="1"/>
+          </p:cNvPicPr>
+          <p:nvPr/>
+        </p:nvPicPr>
+        <p:blipFill>
+          <a:blip xmlns:r="http://schemas.openxmlformats.org/officeDocument/2006/relationships" xmlns:a="http://schemas.openxmlformats.org/drawingml/2006/main" r:embed="Rba52f0beff944d73">
+            <a:extLst>
+              <a:ext uri="{96DAC541-7B7A-43D3-8B79-37D633B846F1}">
+                <asvg:svgBlip xmlns:asvg="http://schemas.microsoft.com/office/drawing/2016/SVG/main" r:embed="R8b8ff1214c6b408f"/>
+              </a:ext>
+            </a:extLst>
+          </a:blip>
+          <a:stretch xmlns:a="http://schemas.openxmlformats.org/drawingml/2006/main"/>
+        </p:blipFill>
+        <p:spPr>
+          <a:xfrm xmlns:a="http://schemas.openxmlformats.org/drawingml/2006/main">
+            <a:off x="619125" y="6896100"/>
+            <a:ext cx="2228850" cy="1314450"/>
+          </a:xfrm>
+          <a:prstGeom xmlns:a="http://schemas.openxmlformats.org/drawingml/2006/main" prst="rect">
+            <a:avLst/>
+          </a:prstGeom>
+        </p:spPr>
+      </p:pic>
+      <p:sp>
+        <p:nvSpPr>
+          <p:cNvPr id="55" name="label-54">
+            <a:extLst xmlns:a="http://schemas.openxmlformats.org/drawingml/2006/main">
+              <a:ext uri="{FF2B5EF4-FFF2-40B4-BE49-F238E27FC236}">
+                <a16:creationId xmlns:a16="http://schemas.microsoft.com/office/drawing/2014/main" id="{F2102ECC-DB43-4112-ADB2-AF9CB4F12565}"/>
+              </a:ext>
+            </a:extLst>
+          </p:cNvPr>
+          <p:cNvSpPr>
+            <a:spLocks xmlns:a="http://schemas.openxmlformats.org/drawingml/2006/main" noGrp="1"/>
+          </p:cNvSpPr>
+          <p:nvPr/>
+        </p:nvSpPr>
+        <p:spPr>
+          <a:xfrm xmlns:a="http://schemas.openxmlformats.org/drawingml/2006/main">
+            <a:off x="647700" y="8286750"/>
+            <a:ext cx="2619375" cy="280035"/>
           </a:xfrm>
           <a:prstGeom xmlns:a="http://schemas.openxmlformats.org/drawingml/2006/main" prst="rect">
             <a:avLst/>
@@ -6040,7 +5672,7 @@
             <a:defPPr>
               <a:defRPr sz="1575" b="1">
                 <a:solidFill>
-                  <a:srgbClr val="4B606D"/>
+                  <a:srgbClr val="20333D"/>
                 </a:solidFill>
                 <a:latin typeface="Arial"/>
                 <a:ea typeface="Arial"/>
@@ -6052,7 +5684,7 @@
             <a:pPr>
               <a:defRPr sz="1575" b="1">
                 <a:solidFill>
-                  <a:srgbClr val="4B606D"/>
+                  <a:srgbClr val="20333D"/>
                 </a:solidFill>
                 <a:latin typeface="Arial"/>
                 <a:ea typeface="Arial"/>
@@ -6062,35 +5694,627 @@
             <a:r>
               <a:rPr sz="1575" b="1">
                 <a:solidFill>
-                  <a:srgbClr val="4B606D"/>
+                  <a:srgbClr val="20333D"/>
                 </a:solidFill>
                 <a:latin typeface="Arial"/>
                 <a:ea typeface="Arial"/>
                 <a:cs typeface="Arial"/>
               </a:rPr>
-              <a:t>Uncertain gains shrink towards neutral</a:t>
+              <a:t>Activity · pH · Stability</a:t>
             </a:r>
           </a:p>
         </p:txBody>
       </p:sp>
       <p:sp>
         <p:nvSpPr>
+          <p:cNvPr id="56" name="">
+            <a:extLst xmlns:a="http://schemas.openxmlformats.org/drawingml/2006/main">
+              <a:ext uri="{FF2B5EF4-FFF2-40B4-BE49-F238E27FC236}">
+                <a16:creationId xmlns:a16="http://schemas.microsoft.com/office/drawing/2014/main" id="{BD29B898-D4E7-47AD-BED3-3F914BB68A41}"/>
+              </a:ext>
+            </a:extLst>
+          </p:cNvPr>
+          <p:cNvSpPr>
+            <a:spLocks xmlns:a="http://schemas.openxmlformats.org/drawingml/2006/main" noGrp="1"/>
+          </p:cNvSpPr>
+          <p:nvPr/>
+        </p:nvSpPr>
+        <p:spPr>
+          <a:xfrm xmlns:a="http://schemas.openxmlformats.org/drawingml/2006/main">
+            <a:off x="10429875" y="5638800"/>
+            <a:ext cx="552450" cy="247650"/>
+          </a:xfrm>
+          <a:prstGeom xmlns:a="http://schemas.openxmlformats.org/drawingml/2006/main" prst="rightArrow">
+            <a:avLst/>
+          </a:prstGeom>
+          <a:solidFill xmlns:a="http://schemas.openxmlformats.org/drawingml/2006/main">
+            <a:srgbClr val="4B606D"/>
+          </a:solidFill>
+          <a:ln xmlns:a="http://schemas.openxmlformats.org/drawingml/2006/main" w="0">
+            <a:noFill/>
+          </a:ln>
+        </p:spPr>
+      </p:sp>
+      <p:pic>
+        <p:nvPicPr>
+          <p:cNvPr id="57" name="">
+            <a:extLst xmlns:a="http://schemas.openxmlformats.org/drawingml/2006/main">
+              <a:ext uri="{FF2B5EF4-FFF2-40B4-BE49-F238E27FC236}">
+                <a16:creationId xmlns:a16="http://schemas.microsoft.com/office/drawing/2014/main" id="{105FFD77-6926-4447-89A8-9C23C4015D90}"/>
+              </a:ext>
+            </a:extLst>
+          </p:cNvPr>
+          <p:cNvPicPr>
+            <a:picLocks xmlns:a="http://schemas.openxmlformats.org/drawingml/2006/main" noChangeAspect="1"/>
+          </p:cNvPicPr>
+          <p:nvPr/>
+        </p:nvPicPr>
+        <p:blipFill>
+          <a:blip xmlns:r="http://schemas.openxmlformats.org/officeDocument/2006/relationships" xmlns:a="http://schemas.openxmlformats.org/drawingml/2006/main" r:embed="R6ad5a8b1fdc3493c">
+            <a:extLst>
+              <a:ext uri="{96DAC541-7B7A-43D3-8B79-37D633B846F1}">
+                <asvg:svgBlip xmlns:asvg="http://schemas.microsoft.com/office/drawing/2016/SVG/main" r:embed="R8904e0537bba4b6e"/>
+              </a:ext>
+            </a:extLst>
+          </a:blip>
+          <a:stretch xmlns:a="http://schemas.openxmlformats.org/drawingml/2006/main"/>
+        </p:blipFill>
+        <p:spPr>
+          <a:xfrm xmlns:a="http://schemas.openxmlformats.org/drawingml/2006/main">
+            <a:off x="11077575" y="4981575"/>
+            <a:ext cx="3476625" cy="2114550"/>
+          </a:xfrm>
+          <a:prstGeom xmlns:a="http://schemas.openxmlformats.org/drawingml/2006/main" prst="rect">
+            <a:avLst/>
+          </a:prstGeom>
+        </p:spPr>
+      </p:pic>
+      <p:sp>
+        <p:nvSpPr>
+          <p:cNvPr id="58" name="label-57">
+            <a:extLst xmlns:a="http://schemas.openxmlformats.org/drawingml/2006/main">
+              <a:ext uri="{FF2B5EF4-FFF2-40B4-BE49-F238E27FC236}">
+                <a16:creationId xmlns:a16="http://schemas.microsoft.com/office/drawing/2014/main" id="{AEB8DFCD-6874-4D0E-A9A3-CE025819BEC3}"/>
+              </a:ext>
+            </a:extLst>
+          </p:cNvPr>
+          <p:cNvSpPr>
+            <a:spLocks xmlns:a="http://schemas.openxmlformats.org/drawingml/2006/main" noGrp="1"/>
+          </p:cNvSpPr>
+          <p:nvPr/>
+        </p:nvSpPr>
+        <p:spPr>
+          <a:xfrm xmlns:a="http://schemas.openxmlformats.org/drawingml/2006/main">
+            <a:off x="11106150" y="7162800"/>
+            <a:ext cx="3476625" cy="333375"/>
+          </a:xfrm>
+          <a:prstGeom xmlns:a="http://schemas.openxmlformats.org/drawingml/2006/main" prst="rect">
+            <a:avLst/>
+          </a:prstGeom>
+          <a:noFill xmlns:a="http://schemas.openxmlformats.org/drawingml/2006/main"/>
+          <a:ln xmlns:a="http://schemas.openxmlformats.org/drawingml/2006/main" w="0">
+            <a:noFill/>
+          </a:ln>
+        </p:spPr>
+        <p:txBody>
+          <a:bodyPr xmlns:a="http://schemas.openxmlformats.org/drawingml/2006/main" lIns="0" tIns="0" rIns="0" bIns="0" anchor="t"/>
+          <a:lstStyle xmlns:a="http://schemas.openxmlformats.org/drawingml/2006/main">
+            <a:defPPr>
+              <a:defRPr sz="1875" b="1">
+                <a:solidFill>
+                  <a:srgbClr val="20333D"/>
+                </a:solidFill>
+                <a:latin typeface="Arial"/>
+                <a:ea typeface="Arial"/>
+                <a:cs typeface="Arial"/>
+              </a:defRPr>
+            </a:defPPr>
+          </a:lstStyle>
+          <a:p xmlns:a="http://schemas.openxmlformats.org/drawingml/2006/main">
+            <a:pPr>
+              <a:defRPr sz="1875" b="1">
+                <a:solidFill>
+                  <a:srgbClr val="20333D"/>
+                </a:solidFill>
+                <a:latin typeface="Arial"/>
+                <a:ea typeface="Arial"/>
+                <a:cs typeface="Arial"/>
+              </a:defRPr>
+            </a:pPr>
+            <a:r>
+              <a:rPr sz="1875" b="1">
+                <a:solidFill>
+                  <a:srgbClr val="20333D"/>
+                </a:solidFill>
+                <a:latin typeface="Arial"/>
+                <a:ea typeface="Arial"/>
+                <a:cs typeface="Arial"/>
+              </a:rPr>
+              <a:t>Ranked candidates</a:t>
+            </a:r>
+          </a:p>
+        </p:txBody>
+      </p:sp>
+      <p:sp>
+        <p:nvSpPr>
+          <p:cNvPr id="59" name="label-58">
+            <a:extLst xmlns:a="http://schemas.openxmlformats.org/drawingml/2006/main">
+              <a:ext uri="{FF2B5EF4-FFF2-40B4-BE49-F238E27FC236}">
+                <a16:creationId xmlns:a16="http://schemas.microsoft.com/office/drawing/2014/main" id="{0937C28A-9680-48C5-9846-DC57C8D36192}"/>
+              </a:ext>
+            </a:extLst>
+          </p:cNvPr>
+          <p:cNvSpPr>
+            <a:spLocks xmlns:a="http://schemas.openxmlformats.org/drawingml/2006/main" noGrp="1"/>
+          </p:cNvSpPr>
+          <p:nvPr/>
+        </p:nvSpPr>
+        <p:spPr>
+          <a:xfrm xmlns:a="http://schemas.openxmlformats.org/drawingml/2006/main">
+            <a:off x="11106150" y="7562850"/>
+            <a:ext cx="3476625" cy="266700"/>
+          </a:xfrm>
+          <a:prstGeom xmlns:a="http://schemas.openxmlformats.org/drawingml/2006/main" prst="rect">
+            <a:avLst/>
+          </a:prstGeom>
+          <a:noFill xmlns:a="http://schemas.openxmlformats.org/drawingml/2006/main"/>
+          <a:ln xmlns:a="http://schemas.openxmlformats.org/drawingml/2006/main" w="0">
+            <a:noFill/>
+          </a:ln>
+        </p:spPr>
+        <p:txBody>
+          <a:bodyPr xmlns:a="http://schemas.openxmlformats.org/drawingml/2006/main" lIns="0" tIns="0" rIns="0" bIns="0" anchor="t"/>
+          <a:lstStyle xmlns:a="http://schemas.openxmlformats.org/drawingml/2006/main">
+            <a:defPPr>
+              <a:defRPr sz="1500" b="1">
+                <a:solidFill>
+                  <a:srgbClr val="4B606D"/>
+                </a:solidFill>
+                <a:latin typeface="Arial"/>
+                <a:ea typeface="Arial"/>
+                <a:cs typeface="Arial"/>
+              </a:defRPr>
+            </a:defPPr>
+          </a:lstStyle>
+          <a:p xmlns:a="http://schemas.openxmlformats.org/drawingml/2006/main">
+            <a:pPr>
+              <a:defRPr sz="1500" b="1">
+                <a:solidFill>
+                  <a:srgbClr val="4B606D"/>
+                </a:solidFill>
+                <a:latin typeface="Arial"/>
+                <a:ea typeface="Arial"/>
+                <a:cs typeface="Arial"/>
+              </a:defRPr>
+            </a:pPr>
+            <a:r>
+              <a:rPr sz="1500" b="1">
+                <a:solidFill>
+                  <a:srgbClr val="4B606D"/>
+                </a:solidFill>
+                <a:latin typeface="Arial"/>
+                <a:ea typeface="Arial"/>
+                <a:cs typeface="Arial"/>
+              </a:rPr>
+              <a:t>Protein designs + score evidence</a:t>
+            </a:r>
+          </a:p>
+        </p:txBody>
+      </p:sp>
+      <p:sp>
+        <p:nvSpPr>
+          <p:cNvPr id="60" name="label-59">
+            <a:extLst xmlns:a="http://schemas.openxmlformats.org/drawingml/2006/main">
+              <a:ext uri="{FF2B5EF4-FFF2-40B4-BE49-F238E27FC236}">
+                <a16:creationId xmlns:a16="http://schemas.microsoft.com/office/drawing/2014/main" id="{22A1CA3F-28B4-4737-8E9A-CAD89E24F564}"/>
+              </a:ext>
+            </a:extLst>
+          </p:cNvPr>
+          <p:cNvSpPr>
+            <a:spLocks xmlns:a="http://schemas.openxmlformats.org/drawingml/2006/main" noGrp="1"/>
+          </p:cNvSpPr>
+          <p:nvPr/>
+        </p:nvSpPr>
+        <p:spPr>
+          <a:xfrm xmlns:a="http://schemas.openxmlformats.org/drawingml/2006/main">
+            <a:off x="11106150" y="7915275"/>
+            <a:ext cx="3476625" cy="266700"/>
+          </a:xfrm>
+          <a:prstGeom xmlns:a="http://schemas.openxmlformats.org/drawingml/2006/main" prst="rect">
+            <a:avLst/>
+          </a:prstGeom>
+          <a:noFill xmlns:a="http://schemas.openxmlformats.org/drawingml/2006/main"/>
+          <a:ln xmlns:a="http://schemas.openxmlformats.org/drawingml/2006/main" w="0">
+            <a:noFill/>
+          </a:ln>
+        </p:spPr>
+        <p:txBody>
+          <a:bodyPr xmlns:a="http://schemas.openxmlformats.org/drawingml/2006/main" lIns="0" tIns="0" rIns="0" bIns="0" anchor="t"/>
+          <a:lstStyle xmlns:a="http://schemas.openxmlformats.org/drawingml/2006/main">
+            <a:defPPr>
+              <a:defRPr sz="1500" b="1">
+                <a:solidFill>
+                  <a:srgbClr val="4B606D"/>
+                </a:solidFill>
+                <a:latin typeface="Arial"/>
+                <a:ea typeface="Arial"/>
+                <a:cs typeface="Arial"/>
+              </a:defRPr>
+            </a:defPPr>
+          </a:lstStyle>
+          <a:p xmlns:a="http://schemas.openxmlformats.org/drawingml/2006/main">
+            <a:pPr>
+              <a:defRPr sz="1500" b="1">
+                <a:solidFill>
+                  <a:srgbClr val="4B606D"/>
+                </a:solidFill>
+                <a:latin typeface="Arial"/>
+                <a:ea typeface="Arial"/>
+                <a:cs typeface="Arial"/>
+              </a:defRPr>
+            </a:pPr>
+            <a:r>
+              <a:rPr sz="1500" b="1">
+                <a:solidFill>
+                  <a:srgbClr val="4B606D"/>
+                </a:solidFill>
+                <a:latin typeface="Arial"/>
+                <a:ea typeface="Arial"/>
+                <a:cs typeface="Arial"/>
+              </a:rPr>
+              <a:t>Top-K · report · coding DNA</a:t>
+            </a:r>
+          </a:p>
+        </p:txBody>
+      </p:sp>
+      <p:sp>
+        <p:nvSpPr>
+          <p:cNvPr id="61" name="label-60">
+            <a:extLst xmlns:a="http://schemas.openxmlformats.org/drawingml/2006/main">
+              <a:ext uri="{FF2B5EF4-FFF2-40B4-BE49-F238E27FC236}">
+                <a16:creationId xmlns:a16="http://schemas.microsoft.com/office/drawing/2014/main" id="{572C4A5F-CCBB-441F-9B3E-FF5AFCDB4DD4}"/>
+              </a:ext>
+            </a:extLst>
+          </p:cNvPr>
+          <p:cNvSpPr>
+            <a:spLocks xmlns:a="http://schemas.openxmlformats.org/drawingml/2006/main" noGrp="1"/>
+          </p:cNvSpPr>
+          <p:nvPr/>
+        </p:nvSpPr>
+        <p:spPr>
+          <a:xfrm xmlns:a="http://schemas.openxmlformats.org/drawingml/2006/main">
+            <a:off x="11106150" y="8372475"/>
+            <a:ext cx="3476625" cy="253365"/>
+          </a:xfrm>
+          <a:prstGeom xmlns:a="http://schemas.openxmlformats.org/drawingml/2006/main" prst="rect">
+            <a:avLst/>
+          </a:prstGeom>
+          <a:noFill xmlns:a="http://schemas.openxmlformats.org/drawingml/2006/main"/>
+          <a:ln xmlns:a="http://schemas.openxmlformats.org/drawingml/2006/main" w="0">
+            <a:noFill/>
+          </a:ln>
+        </p:spPr>
+        <p:txBody>
+          <a:bodyPr xmlns:a="http://schemas.openxmlformats.org/drawingml/2006/main" lIns="0" tIns="0" rIns="0" bIns="0" anchor="t"/>
+          <a:lstStyle xmlns:a="http://schemas.openxmlformats.org/drawingml/2006/main">
+            <a:defPPr>
+              <a:defRPr sz="1425" b="1">
+                <a:solidFill>
+                  <a:srgbClr val="173F80"/>
+                </a:solidFill>
+                <a:latin typeface="Arial"/>
+                <a:ea typeface="Arial"/>
+                <a:cs typeface="Arial"/>
+              </a:defRPr>
+            </a:defPPr>
+          </a:lstStyle>
+          <a:p xmlns:a="http://schemas.openxmlformats.org/drawingml/2006/main">
+            <a:pPr>
+              <a:defRPr sz="1425" b="1">
+                <a:solidFill>
+                  <a:srgbClr val="173F80"/>
+                </a:solidFill>
+                <a:latin typeface="Arial"/>
+                <a:ea typeface="Arial"/>
+                <a:cs typeface="Arial"/>
+              </a:defRPr>
+            </a:pPr>
+            <a:r>
+              <a:rPr sz="1425" b="1">
+                <a:solidFill>
+                  <a:srgbClr val="173F80"/>
+                </a:solidFill>
+                <a:latin typeface="Arial"/>
+                <a:ea typeface="Arial"/>
+                <a:cs typeface="Arial"/>
+              </a:rPr>
+              <a:t>Next-round parents / lab designs</a:t>
+            </a:r>
+          </a:p>
+        </p:txBody>
+      </p:sp>
+      <p:sp>
+        <p:nvSpPr>
           <p:cNvPr id="62" name="label-61">
             <a:extLst xmlns:a="http://schemas.openxmlformats.org/drawingml/2006/main">
               <a:ext uri="{FF2B5EF4-FFF2-40B4-BE49-F238E27FC236}">
-                <a16:creationId xmlns:a16="http://schemas.microsoft.com/office/drawing/2014/main" id="{63869D28-217D-47C4-94DD-EBB2EE99C7FC}"/>
-              </a:ext>
-            </a:extLst>
-          </p:cNvPr>
-          <p:cNvSpPr>
-            <a:spLocks xmlns:a="http://schemas.openxmlformats.org/drawingml/2006/main" noGrp="1"/>
-          </p:cNvSpPr>
-          <p:nvPr/>
-        </p:nvSpPr>
-        <p:spPr>
-          <a:xfrm xmlns:a="http://schemas.openxmlformats.org/drawingml/2006/main">
-            <a:off x="5715000" y="10115550"/>
-            <a:ext cx="4048125" cy="280035"/>
+                <a16:creationId xmlns:a16="http://schemas.microsoft.com/office/drawing/2014/main" id="{B1E5379F-89DD-4944-ABCB-390EB7F46013}"/>
+              </a:ext>
+            </a:extLst>
+          </p:cNvPr>
+          <p:cNvSpPr>
+            <a:spLocks xmlns:a="http://schemas.openxmlformats.org/drawingml/2006/main" noGrp="1"/>
+          </p:cNvSpPr>
+          <p:nvPr/>
+        </p:nvSpPr>
+        <p:spPr>
+          <a:xfrm xmlns:a="http://schemas.openxmlformats.org/drawingml/2006/main">
+            <a:off x="619125" y="9077325"/>
+            <a:ext cx="13335000" cy="373380"/>
+          </a:xfrm>
+          <a:prstGeom xmlns:a="http://schemas.openxmlformats.org/drawingml/2006/main" prst="rect">
+            <a:avLst/>
+          </a:prstGeom>
+          <a:noFill xmlns:a="http://schemas.openxmlformats.org/drawingml/2006/main"/>
+          <a:ln xmlns:a="http://schemas.openxmlformats.org/drawingml/2006/main" w="0">
+            <a:noFill/>
+          </a:ln>
+        </p:spPr>
+        <p:txBody>
+          <a:bodyPr xmlns:a="http://schemas.openxmlformats.org/drawingml/2006/main" lIns="0" tIns="0" rIns="0" bIns="0" anchor="t"/>
+          <a:lstStyle xmlns:a="http://schemas.openxmlformats.org/drawingml/2006/main">
+            <a:defPPr>
+              <a:defRPr sz="2100" b="1">
+                <a:solidFill>
+                  <a:srgbClr val="20333D"/>
+                </a:solidFill>
+                <a:latin typeface="Arial"/>
+                <a:ea typeface="Arial"/>
+                <a:cs typeface="Arial"/>
+              </a:defRPr>
+            </a:defPPr>
+          </a:lstStyle>
+          <a:p xmlns:a="http://schemas.openxmlformats.org/drawingml/2006/main">
+            <a:pPr>
+              <a:defRPr sz="2100" b="1">
+                <a:solidFill>
+                  <a:srgbClr val="20333D"/>
+                </a:solidFill>
+                <a:latin typeface="Arial"/>
+                <a:ea typeface="Arial"/>
+                <a:cs typeface="Arial"/>
+              </a:defRPr>
+            </a:pPr>
+            <a:r>
+              <a:rPr sz="2100" b="1">
+                <a:solidFill>
+                  <a:srgbClr val="20333D"/>
+                </a:solidFill>
+                <a:latin typeface="Arial"/>
+                <a:ea typeface="Arial"/>
+                <a:cs typeface="Arial"/>
+              </a:rPr>
+              <a:t>c  Reuse the evidence in the next design cycle</a:t>
+            </a:r>
+          </a:p>
+        </p:txBody>
+      </p:sp>
+      <p:sp>
+        <p:nvSpPr>
+          <p:cNvPr id="63" name="">
+            <a:extLst xmlns:a="http://schemas.openxmlformats.org/drawingml/2006/main">
+              <a:ext uri="{FF2B5EF4-FFF2-40B4-BE49-F238E27FC236}">
+                <a16:creationId xmlns:a16="http://schemas.microsoft.com/office/drawing/2014/main" id="{DAB92DDB-D52E-4836-83A2-7FAF1ED78FEE}"/>
+              </a:ext>
+            </a:extLst>
+          </p:cNvPr>
+          <p:cNvSpPr>
+            <a:spLocks xmlns:a="http://schemas.openxmlformats.org/drawingml/2006/main" noGrp="1"/>
+          </p:cNvSpPr>
+          <p:nvPr/>
+        </p:nvSpPr>
+        <p:spPr>
+          <a:xfrm xmlns:a="http://schemas.openxmlformats.org/drawingml/2006/main">
+            <a:off x="619125" y="9563100"/>
+            <a:ext cx="9144000" cy="676275"/>
+          </a:xfrm>
+          <a:prstGeom xmlns:a="http://schemas.openxmlformats.org/drawingml/2006/main" prst="roundRect">
+            <a:avLst>
+              <a:gd name="adj" fmla="val 14085"/>
+            </a:avLst>
+          </a:prstGeom>
+          <a:solidFill xmlns:a="http://schemas.openxmlformats.org/drawingml/2006/main">
+            <a:srgbClr val="EDF6F7"/>
+          </a:solidFill>
+          <a:ln xmlns:a="http://schemas.openxmlformats.org/drawingml/2006/main" w="0">
+            <a:noFill/>
+          </a:ln>
+        </p:spPr>
+      </p:sp>
+      <p:sp>
+        <p:nvSpPr>
+          <p:cNvPr id="64" name="label-63">
+            <a:extLst xmlns:a="http://schemas.openxmlformats.org/drawingml/2006/main">
+              <a:ext uri="{FF2B5EF4-FFF2-40B4-BE49-F238E27FC236}">
+                <a16:creationId xmlns:a16="http://schemas.microsoft.com/office/drawing/2014/main" id="{2F814F10-A87A-4BB6-BC1F-2054A0483B8C}"/>
+              </a:ext>
+            </a:extLst>
+          </p:cNvPr>
+          <p:cNvSpPr>
+            <a:spLocks xmlns:a="http://schemas.openxmlformats.org/drawingml/2006/main" noGrp="1"/>
+          </p:cNvSpPr>
+          <p:nvPr/>
+        </p:nvSpPr>
+        <p:spPr>
+          <a:xfrm xmlns:a="http://schemas.openxmlformats.org/drawingml/2006/main">
+            <a:off x="857250" y="9658350"/>
+            <a:ext cx="8572500" cy="293370"/>
+          </a:xfrm>
+          <a:prstGeom xmlns:a="http://schemas.openxmlformats.org/drawingml/2006/main" prst="rect">
+            <a:avLst/>
+          </a:prstGeom>
+          <a:noFill xmlns:a="http://schemas.openxmlformats.org/drawingml/2006/main"/>
+          <a:ln xmlns:a="http://schemas.openxmlformats.org/drawingml/2006/main" w="0">
+            <a:noFill/>
+          </a:ln>
+        </p:spPr>
+        <p:txBody>
+          <a:bodyPr xmlns:a="http://schemas.openxmlformats.org/drawingml/2006/main" lIns="0" tIns="0" rIns="0" bIns="0" anchor="t"/>
+          <a:lstStyle xmlns:a="http://schemas.openxmlformats.org/drawingml/2006/main">
+            <a:defPPr>
+              <a:defRPr sz="1650" b="1">
+                <a:solidFill>
+                  <a:srgbClr val="20333D"/>
+                </a:solidFill>
+                <a:latin typeface="Arial"/>
+                <a:ea typeface="Arial"/>
+                <a:cs typeface="Arial"/>
+              </a:defRPr>
+            </a:defPPr>
+          </a:lstStyle>
+          <a:p xmlns:a="http://schemas.openxmlformats.org/drawingml/2006/main">
+            <a:pPr>
+              <a:defRPr sz="1650" b="1">
+                <a:solidFill>
+                  <a:srgbClr val="20333D"/>
+                </a:solidFill>
+                <a:latin typeface="Arial"/>
+                <a:ea typeface="Arial"/>
+                <a:cs typeface="Arial"/>
+              </a:defRPr>
+            </a:pPr>
+            <a:r>
+              <a:rPr sz="1650" b="1">
+                <a:solidFill>
+                  <a:srgbClr val="20333D"/>
+                </a:solidFill>
+                <a:latin typeface="Arial"/>
+                <a:ea typeface="Arial"/>
+                <a:cs typeface="Arial"/>
+              </a:rPr>
+              <a:t>In silico iteration through protein sequence-space exploration</a:t>
+            </a:r>
+          </a:p>
+        </p:txBody>
+      </p:sp>
+      <p:sp>
+        <p:nvSpPr>
+          <p:cNvPr id="65" name="label-64">
+            <a:extLst xmlns:a="http://schemas.openxmlformats.org/drawingml/2006/main">
+              <a:ext uri="{FF2B5EF4-FFF2-40B4-BE49-F238E27FC236}">
+                <a16:creationId xmlns:a16="http://schemas.microsoft.com/office/drawing/2014/main" id="{63217868-BD94-4D7F-B3BD-30AA991A3256}"/>
+              </a:ext>
+            </a:extLst>
+          </p:cNvPr>
+          <p:cNvSpPr>
+            <a:spLocks xmlns:a="http://schemas.openxmlformats.org/drawingml/2006/main" noGrp="1"/>
+          </p:cNvSpPr>
+          <p:nvPr/>
+        </p:nvSpPr>
+        <p:spPr>
+          <a:xfrm xmlns:a="http://schemas.openxmlformats.org/drawingml/2006/main">
+            <a:off x="857250" y="9963150"/>
+            <a:ext cx="8572500" cy="240030"/>
+          </a:xfrm>
+          <a:prstGeom xmlns:a="http://schemas.openxmlformats.org/drawingml/2006/main" prst="rect">
+            <a:avLst/>
+          </a:prstGeom>
+          <a:noFill xmlns:a="http://schemas.openxmlformats.org/drawingml/2006/main"/>
+          <a:ln xmlns:a="http://schemas.openxmlformats.org/drawingml/2006/main" w="0">
+            <a:noFill/>
+          </a:ln>
+        </p:spPr>
+        <p:txBody>
+          <a:bodyPr xmlns:a="http://schemas.openxmlformats.org/drawingml/2006/main" lIns="0" tIns="0" rIns="0" bIns="0" anchor="t"/>
+          <a:lstStyle xmlns:a="http://schemas.openxmlformats.org/drawingml/2006/main">
+            <a:defPPr>
+              <a:defRPr sz="1350" b="1">
+                <a:solidFill>
+                  <a:srgbClr val="4B606D"/>
+                </a:solidFill>
+                <a:latin typeface="Arial"/>
+                <a:ea typeface="Arial"/>
+                <a:cs typeface="Arial"/>
+              </a:defRPr>
+            </a:defPPr>
+          </a:lstStyle>
+          <a:p xmlns:a="http://schemas.openxmlformats.org/drawingml/2006/main">
+            <a:pPr>
+              <a:defRPr sz="1350" b="1">
+                <a:solidFill>
+                  <a:srgbClr val="4B606D"/>
+                </a:solidFill>
+                <a:latin typeface="Arial"/>
+                <a:ea typeface="Arial"/>
+                <a:cs typeface="Arial"/>
+              </a:defRPr>
+            </a:pPr>
+            <a:r>
+              <a:rPr sz="1350" b="1">
+                <a:solidFill>
+                  <a:srgbClr val="4B606D"/>
+                </a:solidFill>
+                <a:latin typeface="Arial"/>
+                <a:ea typeface="Arial"/>
+                <a:cs typeface="Arial"/>
+              </a:rPr>
+              <a:t>Select parents → add substitutions → predict and rank again</a:t>
+            </a:r>
+          </a:p>
+        </p:txBody>
+      </p:sp>
+      <p:pic>
+        <p:nvPicPr>
+          <p:cNvPr id="66" name="">
+            <a:extLst xmlns:a="http://schemas.openxmlformats.org/drawingml/2006/main">
+              <a:ext uri="{FF2B5EF4-FFF2-40B4-BE49-F238E27FC236}">
+                <a16:creationId xmlns:a16="http://schemas.microsoft.com/office/drawing/2014/main" id="{14BDBAEE-DC52-4AF3-AE9B-84CEFBC2097E}"/>
+              </a:ext>
+            </a:extLst>
+          </p:cNvPr>
+          <p:cNvPicPr>
+            <a:picLocks xmlns:a="http://schemas.openxmlformats.org/drawingml/2006/main" noChangeAspect="1"/>
+          </p:cNvPicPr>
+          <p:nvPr/>
+        </p:nvPicPr>
+        <p:blipFill>
+          <a:blip xmlns:r="http://schemas.openxmlformats.org/officeDocument/2006/relationships" xmlns:a="http://schemas.openxmlformats.org/drawingml/2006/main" r:embed="Re07b55ff4f1341ac">
+            <a:extLst>
+              <a:ext uri="{96DAC541-7B7A-43D3-8B79-37D633B846F1}">
+                <asvg:svgBlip xmlns:asvg="http://schemas.microsoft.com/office/drawing/2016/SVG/main" r:embed="Re9ea2cbacafe4465"/>
+              </a:ext>
+            </a:extLst>
+          </a:blip>
+          <a:stretch xmlns:a="http://schemas.openxmlformats.org/drawingml/2006/main"/>
+        </p:blipFill>
+        <p:spPr>
+          <a:xfrm xmlns:a="http://schemas.openxmlformats.org/drawingml/2006/main">
+            <a:off x="10210800" y="9448800"/>
+            <a:ext cx="1219200" cy="723900"/>
+          </a:xfrm>
+          <a:prstGeom xmlns:a="http://schemas.openxmlformats.org/drawingml/2006/main" prst="rect">
+            <a:avLst/>
+          </a:prstGeom>
+        </p:spPr>
+      </p:pic>
+      <p:sp>
+        <p:nvSpPr>
+          <p:cNvPr id="67" name="label-66">
+            <a:extLst xmlns:a="http://schemas.openxmlformats.org/drawingml/2006/main">
+              <a:ext uri="{FF2B5EF4-FFF2-40B4-BE49-F238E27FC236}">
+                <a16:creationId xmlns:a16="http://schemas.microsoft.com/office/drawing/2014/main" id="{49619B0D-2BBA-4F6D-9A75-379011464481}"/>
+              </a:ext>
+            </a:extLst>
+          </p:cNvPr>
+          <p:cNvSpPr>
+            <a:spLocks xmlns:a="http://schemas.openxmlformats.org/drawingml/2006/main" noGrp="1"/>
+          </p:cNvSpPr>
+          <p:nvPr/>
+        </p:nvSpPr>
+        <p:spPr>
+          <a:xfrm xmlns:a="http://schemas.openxmlformats.org/drawingml/2006/main">
+            <a:off x="11649075" y="9582150"/>
+            <a:ext cx="3048000" cy="280035"/>
           </a:xfrm>
           <a:prstGeom xmlns:a="http://schemas.openxmlformats.org/drawingml/2006/main" prst="rect">
             <a:avLst/>
@@ -6106,7 +6330,7 @@
             <a:defPPr>
               <a:defRPr sz="1575" b="1">
                 <a:solidFill>
-                  <a:srgbClr val="4B606D"/>
+                  <a:srgbClr val="20333D"/>
                 </a:solidFill>
                 <a:latin typeface="Arial"/>
                 <a:ea typeface="Arial"/>
@@ -6118,7 +6342,7 @@
             <a:pPr>
               <a:defRPr sz="1575" b="1">
                 <a:solidFill>
-                  <a:srgbClr val="4B606D"/>
+                  <a:srgbClr val="20333D"/>
                 </a:solidFill>
                 <a:latin typeface="Arial"/>
                 <a:ea typeface="Arial"/>
@@ -6128,99 +6352,35 @@
             <a:r>
               <a:rPr sz="1575" b="1">
                 <a:solidFill>
-                  <a:srgbClr val="4B606D"/>
+                  <a:srgbClr val="20333D"/>
                 </a:solidFill>
                 <a:latin typeface="Arial"/>
                 <a:ea typeface="Arial"/>
                 <a:cs typeface="Arial"/>
               </a:rPr>
-              <a:t>Apply target and threshold filters</a:t>
+              <a:t>Lab-in-the-loop interface</a:t>
             </a:r>
           </a:p>
         </p:txBody>
       </p:sp>
       <p:sp>
         <p:nvSpPr>
-          <p:cNvPr id="63" name="">
-            <a:extLst xmlns:a="http://schemas.openxmlformats.org/drawingml/2006/main">
-              <a:ext uri="{FF2B5EF4-FFF2-40B4-BE49-F238E27FC236}">
-                <a16:creationId xmlns:a16="http://schemas.microsoft.com/office/drawing/2014/main" id="{8FBC988F-A0FC-4702-A169-EBCE8BBAC31F}"/>
-              </a:ext>
-            </a:extLst>
-          </p:cNvPr>
-          <p:cNvSpPr>
-            <a:spLocks xmlns:a="http://schemas.openxmlformats.org/drawingml/2006/main" noGrp="1"/>
-          </p:cNvSpPr>
-          <p:nvPr/>
-        </p:nvSpPr>
-        <p:spPr>
-          <a:xfrm xmlns:a="http://schemas.openxmlformats.org/drawingml/2006/main">
-            <a:off x="9896475" y="6324600"/>
-            <a:ext cx="466725" cy="190500"/>
-          </a:xfrm>
-          <a:prstGeom xmlns:a="http://schemas.openxmlformats.org/drawingml/2006/main" prst="rightArrow">
-            <a:avLst/>
-          </a:prstGeom>
-          <a:solidFill xmlns:a="http://schemas.openxmlformats.org/drawingml/2006/main">
-            <a:srgbClr val="4B606D"/>
-          </a:solidFill>
-          <a:ln xmlns:a="http://schemas.openxmlformats.org/drawingml/2006/main" w="0">
-            <a:noFill/>
-          </a:ln>
-        </p:spPr>
-      </p:sp>
-      <p:pic>
-        <p:nvPicPr>
-          <p:cNvPr id="64" name="">
-            <a:extLst xmlns:a="http://schemas.openxmlformats.org/drawingml/2006/main">
-              <a:ext uri="{FF2B5EF4-FFF2-40B4-BE49-F238E27FC236}">
-                <a16:creationId xmlns:a16="http://schemas.microsoft.com/office/drawing/2014/main" id="{40828082-DFCF-496F-8664-C161D8BF9A5E}"/>
-              </a:ext>
-            </a:extLst>
-          </p:cNvPr>
-          <p:cNvPicPr>
-            <a:picLocks xmlns:a="http://schemas.openxmlformats.org/drawingml/2006/main" noChangeAspect="1"/>
-          </p:cNvPicPr>
-          <p:nvPr/>
-        </p:nvPicPr>
-        <p:blipFill>
-          <a:blip xmlns:r="http://schemas.openxmlformats.org/officeDocument/2006/relationships" xmlns:a="http://schemas.openxmlformats.org/drawingml/2006/main" r:embed="Rb2d0bde8f6534a6c">
-            <a:extLst>
-              <a:ext uri="{96DAC541-7B7A-43D3-8B79-37D633B846F1}">
-                <asvg:svgBlip xmlns:asvg="http://schemas.microsoft.com/office/drawing/2016/SVG/main" r:embed="Rbd4ac031ec70446d"/>
-              </a:ext>
-            </a:extLst>
-          </a:blip>
-          <a:stretch xmlns:a="http://schemas.openxmlformats.org/drawingml/2006/main"/>
-        </p:blipFill>
-        <p:spPr>
-          <a:xfrm xmlns:a="http://schemas.openxmlformats.org/drawingml/2006/main">
-            <a:off x="10601325" y="3448050"/>
-            <a:ext cx="4057650" cy="2647950"/>
-          </a:xfrm>
-          <a:prstGeom xmlns:a="http://schemas.openxmlformats.org/drawingml/2006/main" prst="rect">
-            <a:avLst/>
-          </a:prstGeom>
-        </p:spPr>
-      </p:pic>
-      <p:sp>
-        <p:nvSpPr>
-          <p:cNvPr id="65" name="label-64">
-            <a:extLst xmlns:a="http://schemas.openxmlformats.org/drawingml/2006/main">
-              <a:ext uri="{FF2B5EF4-FFF2-40B4-BE49-F238E27FC236}">
-                <a16:creationId xmlns:a16="http://schemas.microsoft.com/office/drawing/2014/main" id="{A04CAB9A-1969-4793-8E57-AE24D7FC55EC}"/>
-              </a:ext>
-            </a:extLst>
-          </p:cNvPr>
-          <p:cNvSpPr>
-            <a:spLocks xmlns:a="http://schemas.openxmlformats.org/drawingml/2006/main" noGrp="1"/>
-          </p:cNvSpPr>
-          <p:nvPr/>
-        </p:nvSpPr>
-        <p:spPr>
-          <a:xfrm xmlns:a="http://schemas.openxmlformats.org/drawingml/2006/main">
-            <a:off x="10677525" y="6172200"/>
-            <a:ext cx="3952875" cy="280035"/>
+          <p:cNvPr id="68" name="label-67">
+            <a:extLst xmlns:a="http://schemas.openxmlformats.org/drawingml/2006/main">
+              <a:ext uri="{FF2B5EF4-FFF2-40B4-BE49-F238E27FC236}">
+                <a16:creationId xmlns:a16="http://schemas.microsoft.com/office/drawing/2014/main" id="{399BE9B0-B0BC-40E2-AC3A-4253F1211322}"/>
+              </a:ext>
+            </a:extLst>
+          </p:cNvPr>
+          <p:cNvSpPr>
+            <a:spLocks xmlns:a="http://schemas.openxmlformats.org/drawingml/2006/main" noGrp="1"/>
+          </p:cNvSpPr>
+          <p:nvPr/>
+        </p:nvSpPr>
+        <p:spPr>
+          <a:xfrm xmlns:a="http://schemas.openxmlformats.org/drawingml/2006/main">
+            <a:off x="11649075" y="9953625"/>
+            <a:ext cx="3048000" cy="240030"/>
           </a:xfrm>
           <a:prstGeom xmlns:a="http://schemas.openxmlformats.org/drawingml/2006/main" prst="rect">
             <a:avLst/>
@@ -6234,7 +6394,7 @@
           <a:bodyPr xmlns:a="http://schemas.openxmlformats.org/drawingml/2006/main" lIns="0" tIns="0" rIns="0" bIns="0" anchor="t"/>
           <a:lstStyle xmlns:a="http://schemas.openxmlformats.org/drawingml/2006/main">
             <a:defPPr>
-              <a:defRPr sz="1575" b="1">
+              <a:defRPr sz="1350" b="1">
                 <a:solidFill>
                   <a:srgbClr val="4B606D"/>
                 </a:solidFill>
@@ -6246,7 +6406,7 @@
           </a:lstStyle>
           <a:p xmlns:a="http://schemas.openxmlformats.org/drawingml/2006/main">
             <a:pPr>
-              <a:defRPr sz="1575" b="1">
+              <a:defRPr sz="1350" b="1">
                 <a:solidFill>
                   <a:srgbClr val="4B606D"/>
                 </a:solidFill>
@@ -6256,7 +6416,7 @@
               </a:defRPr>
             </a:pPr>
             <a:r>
-              <a:rPr sz="1575" b="1">
+              <a:rPr sz="1350" b="1">
                 <a:solidFill>
                   <a:srgbClr val="4B606D"/>
                 </a:solidFill>
@@ -6264,29 +6424,63 @@
                 <a:ea typeface="Arial"/>
                 <a:cs typeface="Arial"/>
               </a:rPr>
-              <a:t>Real 10-candidate UMAP example</a:t>
+              <a:t>Assay feedback → next design</a:t>
             </a:r>
           </a:p>
         </p:txBody>
       </p:sp>
-      <p:sp>
-        <p:nvSpPr>
-          <p:cNvPr id="66" name="label-65">
-            <a:extLst xmlns:a="http://schemas.openxmlformats.org/drawingml/2006/main">
-              <a:ext uri="{FF2B5EF4-FFF2-40B4-BE49-F238E27FC236}">
-                <a16:creationId xmlns:a16="http://schemas.microsoft.com/office/drawing/2014/main" id="{D1EB9633-8369-4A3E-A470-DA8E0FC6C211}"/>
-              </a:ext>
-            </a:extLst>
-          </p:cNvPr>
-          <p:cNvSpPr>
-            <a:spLocks xmlns:a="http://schemas.openxmlformats.org/drawingml/2006/main" noGrp="1"/>
-          </p:cNvSpPr>
-          <p:nvPr/>
-        </p:nvSpPr>
-        <p:spPr>
-          <a:xfrm xmlns:a="http://schemas.openxmlformats.org/drawingml/2006/main">
-            <a:off x="10677525" y="6734175"/>
-            <a:ext cx="3952875" cy="320040"/>
+      <p:pic>
+        <p:nvPicPr>
+          <p:cNvPr id="69" name="">
+            <a:extLst xmlns:a="http://schemas.openxmlformats.org/drawingml/2006/main">
+              <a:ext uri="{FF2B5EF4-FFF2-40B4-BE49-F238E27FC236}">
+                <a16:creationId xmlns:a16="http://schemas.microsoft.com/office/drawing/2014/main" id="{938E2436-C325-4AA0-8BF3-A54871558563}"/>
+              </a:ext>
+            </a:extLst>
+          </p:cNvPr>
+          <p:cNvPicPr>
+            <a:picLocks xmlns:a="http://schemas.openxmlformats.org/drawingml/2006/main" noChangeAspect="1"/>
+          </p:cNvPicPr>
+          <p:nvPr/>
+        </p:nvPicPr>
+        <p:blipFill>
+          <a:blip xmlns:r="http://schemas.openxmlformats.org/officeDocument/2006/relationships" xmlns:a="http://schemas.openxmlformats.org/drawingml/2006/main" r:embed="R533436a906054fae">
+            <a:extLst>
+              <a:ext uri="{96DAC541-7B7A-43D3-8B79-37D633B846F1}">
+                <asvg:svgBlip xmlns:asvg="http://schemas.microsoft.com/office/drawing/2016/SVG/main" r:embed="R21b8dcf8eba54491"/>
+              </a:ext>
+            </a:extLst>
+          </a:blip>
+          <a:stretch xmlns:a="http://schemas.openxmlformats.org/drawingml/2006/main"/>
+        </p:blipFill>
+        <p:spPr>
+          <a:xfrm xmlns:a="http://schemas.openxmlformats.org/drawingml/2006/main">
+            <a:off x="0" y="0"/>
+            <a:ext cx="15240000" cy="11239500"/>
+          </a:xfrm>
+          <a:prstGeom xmlns:a="http://schemas.openxmlformats.org/drawingml/2006/main" prst="rect">
+            <a:avLst/>
+          </a:prstGeom>
+        </p:spPr>
+      </p:pic>
+      <p:sp>
+        <p:nvSpPr>
+          <p:cNvPr id="70" name="label-69">
+            <a:extLst xmlns:a="http://schemas.openxmlformats.org/drawingml/2006/main">
+              <a:ext uri="{FF2B5EF4-FFF2-40B4-BE49-F238E27FC236}">
+                <a16:creationId xmlns:a16="http://schemas.microsoft.com/office/drawing/2014/main" id="{C8CDF8EB-2099-4EE5-9D19-D4E4F36CBEC3}"/>
+              </a:ext>
+            </a:extLst>
+          </p:cNvPr>
+          <p:cNvSpPr>
+            <a:spLocks xmlns:a="http://schemas.openxmlformats.org/drawingml/2006/main" noGrp="1"/>
+          </p:cNvSpPr>
+          <p:nvPr/>
+        </p:nvSpPr>
+        <p:spPr>
+          <a:xfrm xmlns:a="http://schemas.openxmlformats.org/drawingml/2006/main">
+            <a:off x="619125" y="10953750"/>
+            <a:ext cx="13906500" cy="226695"/>
           </a:xfrm>
           <a:prstGeom xmlns:a="http://schemas.openxmlformats.org/drawingml/2006/main" prst="rect">
             <a:avLst/>
@@ -6300,9 +6494,9 @@
           <a:bodyPr xmlns:a="http://schemas.openxmlformats.org/drawingml/2006/main" lIns="0" tIns="0" rIns="0" bIns="0" anchor="t"/>
           <a:lstStyle xmlns:a="http://schemas.openxmlformats.org/drawingml/2006/main">
             <a:defPPr>
-              <a:defRPr sz="1800" b="1">
-                <a:solidFill>
-                  <a:srgbClr val="20333D"/>
+              <a:defRPr sz="1275" b="1">
+                <a:solidFill>
+                  <a:srgbClr val="4B606D"/>
                 </a:solidFill>
                 <a:latin typeface="Arial"/>
                 <a:ea typeface="Arial"/>
@@ -6312,9 +6506,9 @@
           </a:lstStyle>
           <a:p xmlns:a="http://schemas.openxmlformats.org/drawingml/2006/main">
             <a:pPr>
-              <a:defRPr sz="1800" b="1">
-                <a:solidFill>
-                  <a:srgbClr val="20333D"/>
+              <a:defRPr sz="1275" b="1">
+                <a:solidFill>
+                  <a:srgbClr val="4B606D"/>
                 </a:solidFill>
                 <a:latin typeface="Arial"/>
                 <a:ea typeface="Arial"/>
@@ -6322,1933 +6516,23 @@
               </a:defRPr>
             </a:pPr>
             <a:r>
-              <a:rPr sz="1800" b="1">
-                <a:solidFill>
-                  <a:srgbClr val="20333D"/>
+              <a:rPr sz="1275" b="1">
+                <a:solidFill>
+                  <a:srgbClr val="4B606D"/>
                 </a:solidFill>
                 <a:latin typeface="Arial"/>
                 <a:ea typeface="Arial"/>
                 <a:cs typeface="Arial"/>
               </a:rPr>
-              <a:t>The changed residue stays visible</a:t>
+              <a:t>Computational iterations are evaluated. Multi-round wet-lab feedback was not performed because of budget limits.</a:t>
             </a:r>
           </a:p>
         </p:txBody>
       </p:sp>
-      <p:sp>
-        <p:nvSpPr>
-          <p:cNvPr id="67" name="label-66">
-            <a:extLst xmlns:a="http://schemas.openxmlformats.org/drawingml/2006/main">
-              <a:ext uri="{FF2B5EF4-FFF2-40B4-BE49-F238E27FC236}">
-                <a16:creationId xmlns:a16="http://schemas.microsoft.com/office/drawing/2014/main" id="{9EDB7B8C-C451-4AC5-8D9A-47AAD2A5D2D2}"/>
-              </a:ext>
-            </a:extLst>
-          </p:cNvPr>
-          <p:cNvSpPr>
-            <a:spLocks xmlns:a="http://schemas.openxmlformats.org/drawingml/2006/main" noGrp="1"/>
-          </p:cNvSpPr>
-          <p:nvPr/>
-        </p:nvSpPr>
-        <p:spPr>
-          <a:xfrm xmlns:a="http://schemas.openxmlformats.org/drawingml/2006/main">
-            <a:off x="10677525" y="7162800"/>
-            <a:ext cx="781050" cy="266700"/>
-          </a:xfrm>
-          <a:prstGeom xmlns:a="http://schemas.openxmlformats.org/drawingml/2006/main" prst="rect">
-            <a:avLst/>
-          </a:prstGeom>
-          <a:noFill xmlns:a="http://schemas.openxmlformats.org/drawingml/2006/main"/>
-          <a:ln xmlns:a="http://schemas.openxmlformats.org/drawingml/2006/main" w="0">
-            <a:noFill/>
-          </a:ln>
-        </p:spPr>
-        <p:txBody>
-          <a:bodyPr xmlns:a="http://schemas.openxmlformats.org/drawingml/2006/main" lIns="0" tIns="0" rIns="0" bIns="0" anchor="t"/>
-          <a:lstStyle xmlns:a="http://schemas.openxmlformats.org/drawingml/2006/main">
-            <a:defPPr>
-              <a:defRPr sz="1500" b="1">
-                <a:solidFill>
-                  <a:srgbClr val="4B606D"/>
-                </a:solidFill>
-                <a:latin typeface="Arial"/>
-                <a:ea typeface="Arial"/>
-                <a:cs typeface="Arial"/>
-              </a:defRPr>
-            </a:defPPr>
-          </a:lstStyle>
-          <a:p xmlns:a="http://schemas.openxmlformats.org/drawingml/2006/main">
-            <a:pPr>
-              <a:defRPr sz="1500" b="1">
-                <a:solidFill>
-                  <a:srgbClr val="4B606D"/>
-                </a:solidFill>
-                <a:latin typeface="Arial"/>
-                <a:ea typeface="Arial"/>
-                <a:cs typeface="Arial"/>
-              </a:defRPr>
-            </a:pPr>
-            <a:r>
-              <a:rPr sz="1500" b="1">
-                <a:solidFill>
-                  <a:srgbClr val="4B606D"/>
-                </a:solidFill>
-                <a:latin typeface="Arial"/>
-                <a:ea typeface="Arial"/>
-                <a:cs typeface="Arial"/>
-              </a:rPr>
-              <a:t>WT</a:t>
-            </a:r>
-          </a:p>
-        </p:txBody>
-      </p:sp>
-      <p:sp>
-        <p:nvSpPr>
-          <p:cNvPr id="68" name="label-67">
-            <a:extLst xmlns:a="http://schemas.openxmlformats.org/drawingml/2006/main">
-              <a:ext uri="{FF2B5EF4-FFF2-40B4-BE49-F238E27FC236}">
-                <a16:creationId xmlns:a16="http://schemas.microsoft.com/office/drawing/2014/main" id="{2CC39CFA-43D4-4AF0-8713-EE53CEBCE90C}"/>
-              </a:ext>
-            </a:extLst>
-          </p:cNvPr>
-          <p:cNvSpPr>
-            <a:spLocks xmlns:a="http://schemas.openxmlformats.org/drawingml/2006/main" noGrp="1"/>
-          </p:cNvSpPr>
-          <p:nvPr/>
-        </p:nvSpPr>
-        <p:spPr>
-          <a:xfrm xmlns:a="http://schemas.openxmlformats.org/drawingml/2006/main">
-            <a:off x="11487150" y="7143750"/>
-            <a:ext cx="247650" cy="306705"/>
-          </a:xfrm>
-          <a:prstGeom xmlns:a="http://schemas.openxmlformats.org/drawingml/2006/main" prst="rect">
-            <a:avLst/>
-          </a:prstGeom>
-          <a:noFill xmlns:a="http://schemas.openxmlformats.org/drawingml/2006/main"/>
-          <a:ln xmlns:a="http://schemas.openxmlformats.org/drawingml/2006/main" w="0">
-            <a:noFill/>
-          </a:ln>
-        </p:spPr>
-        <p:txBody>
-          <a:bodyPr xmlns:a="http://schemas.openxmlformats.org/drawingml/2006/main" lIns="0" tIns="0" rIns="0" bIns="0" anchor="t"/>
-          <a:lstStyle xmlns:a="http://schemas.openxmlformats.org/drawingml/2006/main">
-            <a:defPPr>
-              <a:defRPr sz="1725" b="1">
-                <a:solidFill>
-                  <a:srgbClr val="20333D"/>
-                </a:solidFill>
-                <a:latin typeface="Arial"/>
-                <a:ea typeface="Arial"/>
-                <a:cs typeface="Arial"/>
-              </a:defRPr>
-            </a:defPPr>
-          </a:lstStyle>
-          <a:p xmlns:a="http://schemas.openxmlformats.org/drawingml/2006/main">
-            <a:pPr>
-              <a:defRPr sz="1725" b="1">
-                <a:solidFill>
-                  <a:srgbClr val="20333D"/>
-                </a:solidFill>
-                <a:latin typeface="Arial"/>
-                <a:ea typeface="Arial"/>
-                <a:cs typeface="Arial"/>
-              </a:defRPr>
-            </a:pPr>
-            <a:r>
-              <a:rPr sz="1725" b="1">
-                <a:solidFill>
-                  <a:srgbClr val="20333D"/>
-                </a:solidFill>
-                <a:latin typeface="Arial"/>
-                <a:ea typeface="Arial"/>
-                <a:cs typeface="Arial"/>
-              </a:rPr>
-              <a:t>A</a:t>
-            </a:r>
-          </a:p>
-        </p:txBody>
-      </p:sp>
-      <p:sp>
-        <p:nvSpPr>
-          <p:cNvPr id="69" name="label-68">
-            <a:extLst xmlns:a="http://schemas.openxmlformats.org/drawingml/2006/main">
-              <a:ext uri="{FF2B5EF4-FFF2-40B4-BE49-F238E27FC236}">
-                <a16:creationId xmlns:a16="http://schemas.microsoft.com/office/drawing/2014/main" id="{EC3DDFA9-EC11-4F8F-9B9C-AB6D62C3F9F2}"/>
-              </a:ext>
-            </a:extLst>
-          </p:cNvPr>
-          <p:cNvSpPr>
-            <a:spLocks xmlns:a="http://schemas.openxmlformats.org/drawingml/2006/main" noGrp="1"/>
-          </p:cNvSpPr>
-          <p:nvPr/>
-        </p:nvSpPr>
-        <p:spPr>
-          <a:xfrm xmlns:a="http://schemas.openxmlformats.org/drawingml/2006/main">
-            <a:off x="11763375" y="7143750"/>
-            <a:ext cx="247650" cy="306705"/>
-          </a:xfrm>
-          <a:prstGeom xmlns:a="http://schemas.openxmlformats.org/drawingml/2006/main" prst="rect">
-            <a:avLst/>
-          </a:prstGeom>
-          <a:noFill xmlns:a="http://schemas.openxmlformats.org/drawingml/2006/main"/>
-          <a:ln xmlns:a="http://schemas.openxmlformats.org/drawingml/2006/main" w="0">
-            <a:noFill/>
-          </a:ln>
-        </p:spPr>
-        <p:txBody>
-          <a:bodyPr xmlns:a="http://schemas.openxmlformats.org/drawingml/2006/main" lIns="0" tIns="0" rIns="0" bIns="0" anchor="t"/>
-          <a:lstStyle xmlns:a="http://schemas.openxmlformats.org/drawingml/2006/main">
-            <a:defPPr>
-              <a:defRPr sz="1725" b="1">
-                <a:solidFill>
-                  <a:srgbClr val="20333D"/>
-                </a:solidFill>
-                <a:latin typeface="Arial"/>
-                <a:ea typeface="Arial"/>
-                <a:cs typeface="Arial"/>
-              </a:defRPr>
-            </a:defPPr>
-          </a:lstStyle>
-          <a:p xmlns:a="http://schemas.openxmlformats.org/drawingml/2006/main">
-            <a:pPr>
-              <a:defRPr sz="1725" b="1">
-                <a:solidFill>
-                  <a:srgbClr val="20333D"/>
-                </a:solidFill>
-                <a:latin typeface="Arial"/>
-                <a:ea typeface="Arial"/>
-                <a:cs typeface="Arial"/>
-              </a:defRPr>
-            </a:pPr>
-            <a:r>
-              <a:rPr sz="1725" b="1">
-                <a:solidFill>
-                  <a:srgbClr val="20333D"/>
-                </a:solidFill>
-                <a:latin typeface="Arial"/>
-                <a:ea typeface="Arial"/>
-                <a:cs typeface="Arial"/>
-              </a:rPr>
-              <a:t>A</a:t>
-            </a:r>
-          </a:p>
-        </p:txBody>
-      </p:sp>
-      <p:sp>
-        <p:nvSpPr>
-          <p:cNvPr id="70" name="label-69">
-            <a:extLst xmlns:a="http://schemas.openxmlformats.org/drawingml/2006/main">
-              <a:ext uri="{FF2B5EF4-FFF2-40B4-BE49-F238E27FC236}">
-                <a16:creationId xmlns:a16="http://schemas.microsoft.com/office/drawing/2014/main" id="{4BC3BE5F-2D74-4CE9-90E0-137F18FC5B89}"/>
-              </a:ext>
-            </a:extLst>
-          </p:cNvPr>
-          <p:cNvSpPr>
-            <a:spLocks xmlns:a="http://schemas.openxmlformats.org/drawingml/2006/main" noGrp="1"/>
-          </p:cNvSpPr>
-          <p:nvPr/>
-        </p:nvSpPr>
-        <p:spPr>
-          <a:xfrm xmlns:a="http://schemas.openxmlformats.org/drawingml/2006/main">
-            <a:off x="12039600" y="7143750"/>
-            <a:ext cx="247650" cy="306705"/>
-          </a:xfrm>
-          <a:prstGeom xmlns:a="http://schemas.openxmlformats.org/drawingml/2006/main" prst="rect">
-            <a:avLst/>
-          </a:prstGeom>
-          <a:noFill xmlns:a="http://schemas.openxmlformats.org/drawingml/2006/main"/>
-          <a:ln xmlns:a="http://schemas.openxmlformats.org/drawingml/2006/main" w="0">
-            <a:noFill/>
-          </a:ln>
-        </p:spPr>
-        <p:txBody>
-          <a:bodyPr xmlns:a="http://schemas.openxmlformats.org/drawingml/2006/main" lIns="0" tIns="0" rIns="0" bIns="0" anchor="t"/>
-          <a:lstStyle xmlns:a="http://schemas.openxmlformats.org/drawingml/2006/main">
-            <a:defPPr>
-              <a:defRPr sz="1725" b="1">
-                <a:solidFill>
-                  <a:srgbClr val="20333D"/>
-                </a:solidFill>
-                <a:latin typeface="Arial"/>
-                <a:ea typeface="Arial"/>
-                <a:cs typeface="Arial"/>
-              </a:defRPr>
-            </a:defPPr>
-          </a:lstStyle>
-          <a:p xmlns:a="http://schemas.openxmlformats.org/drawingml/2006/main">
-            <a:pPr>
-              <a:defRPr sz="1725" b="1">
-                <a:solidFill>
-                  <a:srgbClr val="20333D"/>
-                </a:solidFill>
-                <a:latin typeface="Arial"/>
-                <a:ea typeface="Arial"/>
-                <a:cs typeface="Arial"/>
-              </a:defRPr>
-            </a:pPr>
-            <a:r>
-              <a:rPr sz="1725" b="1">
-                <a:solidFill>
-                  <a:srgbClr val="20333D"/>
-                </a:solidFill>
-                <a:latin typeface="Arial"/>
-                <a:ea typeface="Arial"/>
-                <a:cs typeface="Arial"/>
-              </a:rPr>
-              <a:t>A</a:t>
-            </a:r>
-          </a:p>
-        </p:txBody>
-      </p:sp>
-      <p:sp>
-        <p:nvSpPr>
-          <p:cNvPr id="71" name="label-70">
-            <a:extLst xmlns:a="http://schemas.openxmlformats.org/drawingml/2006/main">
-              <a:ext uri="{FF2B5EF4-FFF2-40B4-BE49-F238E27FC236}">
-                <a16:creationId xmlns:a16="http://schemas.microsoft.com/office/drawing/2014/main" id="{051BCA0A-C8F2-4379-AF66-0E58D4A30D3A}"/>
-              </a:ext>
-            </a:extLst>
-          </p:cNvPr>
-          <p:cNvSpPr>
-            <a:spLocks xmlns:a="http://schemas.openxmlformats.org/drawingml/2006/main" noGrp="1"/>
-          </p:cNvSpPr>
-          <p:nvPr/>
-        </p:nvSpPr>
-        <p:spPr>
-          <a:xfrm xmlns:a="http://schemas.openxmlformats.org/drawingml/2006/main">
-            <a:off x="12315825" y="7143750"/>
-            <a:ext cx="247650" cy="306705"/>
-          </a:xfrm>
-          <a:prstGeom xmlns:a="http://schemas.openxmlformats.org/drawingml/2006/main" prst="rect">
-            <a:avLst/>
-          </a:prstGeom>
-          <a:noFill xmlns:a="http://schemas.openxmlformats.org/drawingml/2006/main"/>
-          <a:ln xmlns:a="http://schemas.openxmlformats.org/drawingml/2006/main" w="0">
-            <a:noFill/>
-          </a:ln>
-        </p:spPr>
-        <p:txBody>
-          <a:bodyPr xmlns:a="http://schemas.openxmlformats.org/drawingml/2006/main" lIns="0" tIns="0" rIns="0" bIns="0" anchor="t"/>
-          <a:lstStyle xmlns:a="http://schemas.openxmlformats.org/drawingml/2006/main">
-            <a:defPPr>
-              <a:defRPr sz="1725" b="1">
-                <a:solidFill>
-                  <a:srgbClr val="20333D"/>
-                </a:solidFill>
-                <a:latin typeface="Arial"/>
-                <a:ea typeface="Arial"/>
-                <a:cs typeface="Arial"/>
-              </a:defRPr>
-            </a:defPPr>
-          </a:lstStyle>
-          <a:p xmlns:a="http://schemas.openxmlformats.org/drawingml/2006/main">
-            <a:pPr>
-              <a:defRPr sz="1725" b="1">
-                <a:solidFill>
-                  <a:srgbClr val="20333D"/>
-                </a:solidFill>
-                <a:latin typeface="Arial"/>
-                <a:ea typeface="Arial"/>
-                <a:cs typeface="Arial"/>
-              </a:defRPr>
-            </a:pPr>
-            <a:r>
-              <a:rPr sz="1725" b="1">
-                <a:solidFill>
-                  <a:srgbClr val="20333D"/>
-                </a:solidFill>
-                <a:latin typeface="Arial"/>
-                <a:ea typeface="Arial"/>
-                <a:cs typeface="Arial"/>
-              </a:rPr>
-              <a:t>M</a:t>
-            </a:r>
-          </a:p>
-        </p:txBody>
-      </p:sp>
-      <p:sp>
-        <p:nvSpPr>
-          <p:cNvPr id="72" name="label-71">
-            <a:extLst xmlns:a="http://schemas.openxmlformats.org/drawingml/2006/main">
-              <a:ext uri="{FF2B5EF4-FFF2-40B4-BE49-F238E27FC236}">
-                <a16:creationId xmlns:a16="http://schemas.microsoft.com/office/drawing/2014/main" id="{0237319C-FB8B-49F9-AEAD-4B235B600DD5}"/>
-              </a:ext>
-            </a:extLst>
-          </p:cNvPr>
-          <p:cNvSpPr>
-            <a:spLocks xmlns:a="http://schemas.openxmlformats.org/drawingml/2006/main" noGrp="1"/>
-          </p:cNvSpPr>
-          <p:nvPr/>
-        </p:nvSpPr>
-        <p:spPr>
-          <a:xfrm xmlns:a="http://schemas.openxmlformats.org/drawingml/2006/main">
-            <a:off x="12592050" y="7143750"/>
-            <a:ext cx="247650" cy="306705"/>
-          </a:xfrm>
-          <a:prstGeom xmlns:a="http://schemas.openxmlformats.org/drawingml/2006/main" prst="rect">
-            <a:avLst/>
-          </a:prstGeom>
-          <a:noFill xmlns:a="http://schemas.openxmlformats.org/drawingml/2006/main"/>
-          <a:ln xmlns:a="http://schemas.openxmlformats.org/drawingml/2006/main" w="0">
-            <a:noFill/>
-          </a:ln>
-        </p:spPr>
-        <p:txBody>
-          <a:bodyPr xmlns:a="http://schemas.openxmlformats.org/drawingml/2006/main" lIns="0" tIns="0" rIns="0" bIns="0" anchor="t"/>
-          <a:lstStyle xmlns:a="http://schemas.openxmlformats.org/drawingml/2006/main">
-            <a:defPPr>
-              <a:defRPr sz="1725" b="1">
-                <a:solidFill>
-                  <a:srgbClr val="20333D"/>
-                </a:solidFill>
-                <a:latin typeface="Arial"/>
-                <a:ea typeface="Arial"/>
-                <a:cs typeface="Arial"/>
-              </a:defRPr>
-            </a:defPPr>
-          </a:lstStyle>
-          <a:p xmlns:a="http://schemas.openxmlformats.org/drawingml/2006/main">
-            <a:pPr>
-              <a:defRPr sz="1725" b="1">
-                <a:solidFill>
-                  <a:srgbClr val="20333D"/>
-                </a:solidFill>
-                <a:latin typeface="Arial"/>
-                <a:ea typeface="Arial"/>
-                <a:cs typeface="Arial"/>
-              </a:defRPr>
-            </a:pPr>
-            <a:r>
-              <a:rPr sz="1725" b="1">
-                <a:solidFill>
-                  <a:srgbClr val="20333D"/>
-                </a:solidFill>
-                <a:latin typeface="Arial"/>
-                <a:ea typeface="Arial"/>
-                <a:cs typeface="Arial"/>
-              </a:rPr>
-              <a:t>N</a:t>
-            </a:r>
-          </a:p>
-        </p:txBody>
-      </p:sp>
-      <p:sp>
-        <p:nvSpPr>
-          <p:cNvPr id="73" name="label-72">
-            <a:extLst xmlns:a="http://schemas.openxmlformats.org/drawingml/2006/main">
-              <a:ext uri="{FF2B5EF4-FFF2-40B4-BE49-F238E27FC236}">
-                <a16:creationId xmlns:a16="http://schemas.microsoft.com/office/drawing/2014/main" id="{ACB41B10-8409-44CD-99AB-15A9F394736E}"/>
-              </a:ext>
-            </a:extLst>
-          </p:cNvPr>
-          <p:cNvSpPr>
-            <a:spLocks xmlns:a="http://schemas.openxmlformats.org/drawingml/2006/main" noGrp="1"/>
-          </p:cNvSpPr>
-          <p:nvPr/>
-        </p:nvSpPr>
-        <p:spPr>
-          <a:xfrm xmlns:a="http://schemas.openxmlformats.org/drawingml/2006/main">
-            <a:off x="12868275" y="7143750"/>
-            <a:ext cx="247650" cy="306705"/>
-          </a:xfrm>
-          <a:prstGeom xmlns:a="http://schemas.openxmlformats.org/drawingml/2006/main" prst="rect">
-            <a:avLst/>
-          </a:prstGeom>
-          <a:noFill xmlns:a="http://schemas.openxmlformats.org/drawingml/2006/main"/>
-          <a:ln xmlns:a="http://schemas.openxmlformats.org/drawingml/2006/main" w="0">
-            <a:noFill/>
-          </a:ln>
-        </p:spPr>
-        <p:txBody>
-          <a:bodyPr xmlns:a="http://schemas.openxmlformats.org/drawingml/2006/main" lIns="0" tIns="0" rIns="0" bIns="0" anchor="t"/>
-          <a:lstStyle xmlns:a="http://schemas.openxmlformats.org/drawingml/2006/main">
-            <a:defPPr>
-              <a:defRPr sz="1725" b="1">
-                <a:solidFill>
-                  <a:srgbClr val="20333D"/>
-                </a:solidFill>
-                <a:latin typeface="Arial"/>
-                <a:ea typeface="Arial"/>
-                <a:cs typeface="Arial"/>
-              </a:defRPr>
-            </a:defPPr>
-          </a:lstStyle>
-          <a:p xmlns:a="http://schemas.openxmlformats.org/drawingml/2006/main">
-            <a:pPr>
-              <a:defRPr sz="1725" b="1">
-                <a:solidFill>
-                  <a:srgbClr val="20333D"/>
-                </a:solidFill>
-                <a:latin typeface="Arial"/>
-                <a:ea typeface="Arial"/>
-                <a:cs typeface="Arial"/>
-              </a:defRPr>
-            </a:pPr>
-            <a:r>
-              <a:rPr sz="1725" b="1">
-                <a:solidFill>
-                  <a:srgbClr val="20333D"/>
-                </a:solidFill>
-                <a:latin typeface="Arial"/>
-                <a:ea typeface="Arial"/>
-                <a:cs typeface="Arial"/>
-              </a:rPr>
-              <a:t>T</a:t>
-            </a:r>
-          </a:p>
-        </p:txBody>
-      </p:sp>
-      <p:sp>
-        <p:nvSpPr>
-          <p:cNvPr id="74" name="label-73">
-            <a:extLst xmlns:a="http://schemas.openxmlformats.org/drawingml/2006/main">
-              <a:ext uri="{FF2B5EF4-FFF2-40B4-BE49-F238E27FC236}">
-                <a16:creationId xmlns:a16="http://schemas.microsoft.com/office/drawing/2014/main" id="{442E22F7-EE74-4B77-A501-0162D0C4D5CE}"/>
-              </a:ext>
-            </a:extLst>
-          </p:cNvPr>
-          <p:cNvSpPr>
-            <a:spLocks xmlns:a="http://schemas.openxmlformats.org/drawingml/2006/main" noGrp="1"/>
-          </p:cNvSpPr>
-          <p:nvPr/>
-        </p:nvSpPr>
-        <p:spPr>
-          <a:xfrm xmlns:a="http://schemas.openxmlformats.org/drawingml/2006/main">
-            <a:off x="13144500" y="7143750"/>
-            <a:ext cx="247650" cy="306705"/>
-          </a:xfrm>
-          <a:prstGeom xmlns:a="http://schemas.openxmlformats.org/drawingml/2006/main" prst="rect">
-            <a:avLst/>
-          </a:prstGeom>
-          <a:noFill xmlns:a="http://schemas.openxmlformats.org/drawingml/2006/main"/>
-          <a:ln xmlns:a="http://schemas.openxmlformats.org/drawingml/2006/main" w="0">
-            <a:noFill/>
-          </a:ln>
-        </p:spPr>
-        <p:txBody>
-          <a:bodyPr xmlns:a="http://schemas.openxmlformats.org/drawingml/2006/main" lIns="0" tIns="0" rIns="0" bIns="0" anchor="t"/>
-          <a:lstStyle xmlns:a="http://schemas.openxmlformats.org/drawingml/2006/main">
-            <a:defPPr>
-              <a:defRPr sz="1725" b="1">
-                <a:solidFill>
-                  <a:srgbClr val="20333D"/>
-                </a:solidFill>
-                <a:latin typeface="Arial"/>
-                <a:ea typeface="Arial"/>
-                <a:cs typeface="Arial"/>
-              </a:defRPr>
-            </a:defPPr>
-          </a:lstStyle>
-          <a:p xmlns:a="http://schemas.openxmlformats.org/drawingml/2006/main">
-            <a:pPr>
-              <a:defRPr sz="1725" b="1">
-                <a:solidFill>
-                  <a:srgbClr val="20333D"/>
-                </a:solidFill>
-                <a:latin typeface="Arial"/>
-                <a:ea typeface="Arial"/>
-                <a:cs typeface="Arial"/>
-              </a:defRPr>
-            </a:pPr>
-            <a:r>
-              <a:rPr sz="1725" b="1">
-                <a:solidFill>
-                  <a:srgbClr val="20333D"/>
-                </a:solidFill>
-                <a:latin typeface="Arial"/>
-                <a:ea typeface="Arial"/>
-                <a:cs typeface="Arial"/>
-              </a:rPr>
-              <a:t>R</a:t>
-            </a:r>
-          </a:p>
-        </p:txBody>
-      </p:sp>
-      <p:sp>
-        <p:nvSpPr>
-          <p:cNvPr id="75" name="label-74">
-            <a:extLst xmlns:a="http://schemas.openxmlformats.org/drawingml/2006/main">
-              <a:ext uri="{FF2B5EF4-FFF2-40B4-BE49-F238E27FC236}">
-                <a16:creationId xmlns:a16="http://schemas.microsoft.com/office/drawing/2014/main" id="{D590CDF4-A115-4262-9BEF-7E47CF148D51}"/>
-              </a:ext>
-            </a:extLst>
-          </p:cNvPr>
-          <p:cNvSpPr>
-            <a:spLocks xmlns:a="http://schemas.openxmlformats.org/drawingml/2006/main" noGrp="1"/>
-          </p:cNvSpPr>
-          <p:nvPr/>
-        </p:nvSpPr>
-        <p:spPr>
-          <a:xfrm xmlns:a="http://schemas.openxmlformats.org/drawingml/2006/main">
-            <a:off x="13420725" y="7143750"/>
-            <a:ext cx="247650" cy="306705"/>
-          </a:xfrm>
-          <a:prstGeom xmlns:a="http://schemas.openxmlformats.org/drawingml/2006/main" prst="rect">
-            <a:avLst/>
-          </a:prstGeom>
-          <a:noFill xmlns:a="http://schemas.openxmlformats.org/drawingml/2006/main"/>
-          <a:ln xmlns:a="http://schemas.openxmlformats.org/drawingml/2006/main" w="0">
-            <a:noFill/>
-          </a:ln>
-        </p:spPr>
-        <p:txBody>
-          <a:bodyPr xmlns:a="http://schemas.openxmlformats.org/drawingml/2006/main" lIns="0" tIns="0" rIns="0" bIns="0" anchor="t"/>
-          <a:lstStyle xmlns:a="http://schemas.openxmlformats.org/drawingml/2006/main">
-            <a:defPPr>
-              <a:defRPr sz="1725" b="1">
-                <a:solidFill>
-                  <a:srgbClr val="20333D"/>
-                </a:solidFill>
-                <a:latin typeface="Arial"/>
-                <a:ea typeface="Arial"/>
-                <a:cs typeface="Arial"/>
-              </a:defRPr>
-            </a:defPPr>
-          </a:lstStyle>
-          <a:p xmlns:a="http://schemas.openxmlformats.org/drawingml/2006/main">
-            <a:pPr>
-              <a:defRPr sz="1725" b="1">
-                <a:solidFill>
-                  <a:srgbClr val="20333D"/>
-                </a:solidFill>
-                <a:latin typeface="Arial"/>
-                <a:ea typeface="Arial"/>
-                <a:cs typeface="Arial"/>
-              </a:defRPr>
-            </a:pPr>
-            <a:r>
-              <a:rPr sz="1725" b="1">
-                <a:solidFill>
-                  <a:srgbClr val="20333D"/>
-                </a:solidFill>
-                <a:latin typeface="Arial"/>
-                <a:ea typeface="Arial"/>
-                <a:cs typeface="Arial"/>
-              </a:rPr>
-              <a:t>N</a:t>
-            </a:r>
-          </a:p>
-        </p:txBody>
-      </p:sp>
-      <p:sp>
-        <p:nvSpPr>
-          <p:cNvPr id="76" name="label-75">
-            <a:extLst xmlns:a="http://schemas.openxmlformats.org/drawingml/2006/main">
-              <a:ext uri="{FF2B5EF4-FFF2-40B4-BE49-F238E27FC236}">
-                <a16:creationId xmlns:a16="http://schemas.microsoft.com/office/drawing/2014/main" id="{65C132CC-637E-4F60-956B-C5EE81FAD0F4}"/>
-              </a:ext>
-            </a:extLst>
-          </p:cNvPr>
-          <p:cNvSpPr>
-            <a:spLocks xmlns:a="http://schemas.openxmlformats.org/drawingml/2006/main" noGrp="1"/>
-          </p:cNvSpPr>
-          <p:nvPr/>
-        </p:nvSpPr>
-        <p:spPr>
-          <a:xfrm xmlns:a="http://schemas.openxmlformats.org/drawingml/2006/main">
-            <a:off x="13696950" y="7143750"/>
-            <a:ext cx="247650" cy="306705"/>
-          </a:xfrm>
-          <a:prstGeom xmlns:a="http://schemas.openxmlformats.org/drawingml/2006/main" prst="rect">
-            <a:avLst/>
-          </a:prstGeom>
-          <a:noFill xmlns:a="http://schemas.openxmlformats.org/drawingml/2006/main"/>
-          <a:ln xmlns:a="http://schemas.openxmlformats.org/drawingml/2006/main" w="0">
-            <a:noFill/>
-          </a:ln>
-        </p:spPr>
-        <p:txBody>
-          <a:bodyPr xmlns:a="http://schemas.openxmlformats.org/drawingml/2006/main" lIns="0" tIns="0" rIns="0" bIns="0" anchor="t"/>
-          <a:lstStyle xmlns:a="http://schemas.openxmlformats.org/drawingml/2006/main">
-            <a:defPPr>
-              <a:defRPr sz="1725" b="1">
-                <a:solidFill>
-                  <a:srgbClr val="20333D"/>
-                </a:solidFill>
-                <a:latin typeface="Arial"/>
-                <a:ea typeface="Arial"/>
-                <a:cs typeface="Arial"/>
-              </a:defRPr>
-            </a:defPPr>
-          </a:lstStyle>
-          <a:p xmlns:a="http://schemas.openxmlformats.org/drawingml/2006/main">
-            <a:pPr>
-              <a:defRPr sz="1725" b="1">
-                <a:solidFill>
-                  <a:srgbClr val="20333D"/>
-                </a:solidFill>
-                <a:latin typeface="Arial"/>
-                <a:ea typeface="Arial"/>
-                <a:cs typeface="Arial"/>
-              </a:defRPr>
-            </a:pPr>
-            <a:r>
-              <a:rPr sz="1725" b="1">
-                <a:solidFill>
-                  <a:srgbClr val="20333D"/>
-                </a:solidFill>
-                <a:latin typeface="Arial"/>
-                <a:ea typeface="Arial"/>
-                <a:cs typeface="Arial"/>
-              </a:rPr>
-              <a:t>T</a:t>
-            </a:r>
-          </a:p>
-        </p:txBody>
-      </p:sp>
-      <p:sp>
-        <p:nvSpPr>
-          <p:cNvPr id="77" name="label-76">
-            <a:extLst xmlns:a="http://schemas.openxmlformats.org/drawingml/2006/main">
-              <a:ext uri="{FF2B5EF4-FFF2-40B4-BE49-F238E27FC236}">
-                <a16:creationId xmlns:a16="http://schemas.microsoft.com/office/drawing/2014/main" id="{BAA4CB52-BFD5-4034-A5FA-B821783BBF48}"/>
-              </a:ext>
-            </a:extLst>
-          </p:cNvPr>
-          <p:cNvSpPr>
-            <a:spLocks xmlns:a="http://schemas.openxmlformats.org/drawingml/2006/main" noGrp="1"/>
-          </p:cNvSpPr>
-          <p:nvPr/>
-        </p:nvSpPr>
-        <p:spPr>
-          <a:xfrm xmlns:a="http://schemas.openxmlformats.org/drawingml/2006/main">
-            <a:off x="13973175" y="7143750"/>
-            <a:ext cx="247650" cy="306705"/>
-          </a:xfrm>
-          <a:prstGeom xmlns:a="http://schemas.openxmlformats.org/drawingml/2006/main" prst="rect">
-            <a:avLst/>
-          </a:prstGeom>
-          <a:noFill xmlns:a="http://schemas.openxmlformats.org/drawingml/2006/main"/>
-          <a:ln xmlns:a="http://schemas.openxmlformats.org/drawingml/2006/main" w="0">
-            <a:noFill/>
-          </a:ln>
-        </p:spPr>
-        <p:txBody>
-          <a:bodyPr xmlns:a="http://schemas.openxmlformats.org/drawingml/2006/main" lIns="0" tIns="0" rIns="0" bIns="0" anchor="t"/>
-          <a:lstStyle xmlns:a="http://schemas.openxmlformats.org/drawingml/2006/main">
-            <a:defPPr>
-              <a:defRPr sz="1725" b="1">
-                <a:solidFill>
-                  <a:srgbClr val="20333D"/>
-                </a:solidFill>
-                <a:latin typeface="Arial"/>
-                <a:ea typeface="Arial"/>
-                <a:cs typeface="Arial"/>
-              </a:defRPr>
-            </a:defPPr>
-          </a:lstStyle>
-          <a:p xmlns:a="http://schemas.openxmlformats.org/drawingml/2006/main">
-            <a:pPr>
-              <a:defRPr sz="1725" b="1">
-                <a:solidFill>
-                  <a:srgbClr val="20333D"/>
-                </a:solidFill>
-                <a:latin typeface="Arial"/>
-                <a:ea typeface="Arial"/>
-                <a:cs typeface="Arial"/>
-              </a:defRPr>
-            </a:pPr>
-            <a:r>
-              <a:rPr sz="1725" b="1">
-                <a:solidFill>
-                  <a:srgbClr val="20333D"/>
-                </a:solidFill>
-                <a:latin typeface="Arial"/>
-                <a:ea typeface="Arial"/>
-                <a:cs typeface="Arial"/>
-              </a:rPr>
-              <a:t>R</a:t>
-            </a:r>
-          </a:p>
-        </p:txBody>
-      </p:sp>
-      <p:sp>
-        <p:nvSpPr>
-          <p:cNvPr id="78" name="label-77">
-            <a:extLst xmlns:a="http://schemas.openxmlformats.org/drawingml/2006/main">
-              <a:ext uri="{FF2B5EF4-FFF2-40B4-BE49-F238E27FC236}">
-                <a16:creationId xmlns:a16="http://schemas.microsoft.com/office/drawing/2014/main" id="{A214337D-F823-44F2-85A3-A67E90CFBCE3}"/>
-              </a:ext>
-            </a:extLst>
-          </p:cNvPr>
-          <p:cNvSpPr>
-            <a:spLocks xmlns:a="http://schemas.openxmlformats.org/drawingml/2006/main" noGrp="1"/>
-          </p:cNvSpPr>
-          <p:nvPr/>
-        </p:nvSpPr>
-        <p:spPr>
-          <a:xfrm xmlns:a="http://schemas.openxmlformats.org/drawingml/2006/main">
-            <a:off x="10677525" y="7524750"/>
-            <a:ext cx="781050" cy="266700"/>
-          </a:xfrm>
-          <a:prstGeom xmlns:a="http://schemas.openxmlformats.org/drawingml/2006/main" prst="rect">
-            <a:avLst/>
-          </a:prstGeom>
-          <a:noFill xmlns:a="http://schemas.openxmlformats.org/drawingml/2006/main"/>
-          <a:ln xmlns:a="http://schemas.openxmlformats.org/drawingml/2006/main" w="0">
-            <a:noFill/>
-          </a:ln>
-        </p:spPr>
-        <p:txBody>
-          <a:bodyPr xmlns:a="http://schemas.openxmlformats.org/drawingml/2006/main" lIns="0" tIns="0" rIns="0" bIns="0" anchor="t"/>
-          <a:lstStyle xmlns:a="http://schemas.openxmlformats.org/drawingml/2006/main">
-            <a:defPPr>
-              <a:defRPr sz="1500" b="1">
-                <a:solidFill>
-                  <a:srgbClr val="4B606D"/>
-                </a:solidFill>
-                <a:latin typeface="Arial"/>
-                <a:ea typeface="Arial"/>
-                <a:cs typeface="Arial"/>
-              </a:defRPr>
-            </a:defPPr>
-          </a:lstStyle>
-          <a:p xmlns:a="http://schemas.openxmlformats.org/drawingml/2006/main">
-            <a:pPr>
-              <a:defRPr sz="1500" b="1">
-                <a:solidFill>
-                  <a:srgbClr val="4B606D"/>
-                </a:solidFill>
-                <a:latin typeface="Arial"/>
-                <a:ea typeface="Arial"/>
-                <a:cs typeface="Arial"/>
-              </a:defRPr>
-            </a:pPr>
-            <a:r>
-              <a:rPr sz="1500" b="1">
-                <a:solidFill>
-                  <a:srgbClr val="4B606D"/>
-                </a:solidFill>
-                <a:latin typeface="Arial"/>
-                <a:ea typeface="Arial"/>
-                <a:cs typeface="Arial"/>
-              </a:rPr>
-              <a:t>N32A</a:t>
-            </a:r>
-          </a:p>
-        </p:txBody>
-      </p:sp>
-      <p:sp>
-        <p:nvSpPr>
-          <p:cNvPr id="79" name="label-78">
-            <a:extLst xmlns:a="http://schemas.openxmlformats.org/drawingml/2006/main">
-              <a:ext uri="{FF2B5EF4-FFF2-40B4-BE49-F238E27FC236}">
-                <a16:creationId xmlns:a16="http://schemas.microsoft.com/office/drawing/2014/main" id="{A1E527D3-9288-47B5-B6E6-BFBC6C85504C}"/>
-              </a:ext>
-            </a:extLst>
-          </p:cNvPr>
-          <p:cNvSpPr>
-            <a:spLocks xmlns:a="http://schemas.openxmlformats.org/drawingml/2006/main" noGrp="1"/>
-          </p:cNvSpPr>
-          <p:nvPr/>
-        </p:nvSpPr>
-        <p:spPr>
-          <a:xfrm xmlns:a="http://schemas.openxmlformats.org/drawingml/2006/main">
-            <a:off x="11487150" y="7505700"/>
-            <a:ext cx="247650" cy="306705"/>
-          </a:xfrm>
-          <a:prstGeom xmlns:a="http://schemas.openxmlformats.org/drawingml/2006/main" prst="rect">
-            <a:avLst/>
-          </a:prstGeom>
-          <a:noFill xmlns:a="http://schemas.openxmlformats.org/drawingml/2006/main"/>
-          <a:ln xmlns:a="http://schemas.openxmlformats.org/drawingml/2006/main" w="0">
-            <a:noFill/>
-          </a:ln>
-        </p:spPr>
-        <p:txBody>
-          <a:bodyPr xmlns:a="http://schemas.openxmlformats.org/drawingml/2006/main" lIns="0" tIns="0" rIns="0" bIns="0" anchor="t"/>
-          <a:lstStyle xmlns:a="http://schemas.openxmlformats.org/drawingml/2006/main">
-            <a:defPPr>
-              <a:defRPr sz="1725" b="1">
-                <a:solidFill>
-                  <a:srgbClr val="20333D"/>
-                </a:solidFill>
-                <a:latin typeface="Arial"/>
-                <a:ea typeface="Arial"/>
-                <a:cs typeface="Arial"/>
-              </a:defRPr>
-            </a:defPPr>
-          </a:lstStyle>
-          <a:p xmlns:a="http://schemas.openxmlformats.org/drawingml/2006/main">
-            <a:pPr>
-              <a:defRPr sz="1725" b="1">
-                <a:solidFill>
-                  <a:srgbClr val="20333D"/>
-                </a:solidFill>
-                <a:latin typeface="Arial"/>
-                <a:ea typeface="Arial"/>
-                <a:cs typeface="Arial"/>
-              </a:defRPr>
-            </a:pPr>
-            <a:r>
-              <a:rPr sz="1725" b="1">
-                <a:solidFill>
-                  <a:srgbClr val="20333D"/>
-                </a:solidFill>
-                <a:latin typeface="Arial"/>
-                <a:ea typeface="Arial"/>
-                <a:cs typeface="Arial"/>
-              </a:rPr>
-              <a:t>A</a:t>
-            </a:r>
-          </a:p>
-        </p:txBody>
-      </p:sp>
-      <p:sp>
-        <p:nvSpPr>
-          <p:cNvPr id="80" name="label-79">
-            <a:extLst xmlns:a="http://schemas.openxmlformats.org/drawingml/2006/main">
-              <a:ext uri="{FF2B5EF4-FFF2-40B4-BE49-F238E27FC236}">
-                <a16:creationId xmlns:a16="http://schemas.microsoft.com/office/drawing/2014/main" id="{A177316D-0A39-44A2-AE7E-9207CD2578C5}"/>
-              </a:ext>
-            </a:extLst>
-          </p:cNvPr>
-          <p:cNvSpPr>
-            <a:spLocks xmlns:a="http://schemas.openxmlformats.org/drawingml/2006/main" noGrp="1"/>
-          </p:cNvSpPr>
-          <p:nvPr/>
-        </p:nvSpPr>
-        <p:spPr>
-          <a:xfrm xmlns:a="http://schemas.openxmlformats.org/drawingml/2006/main">
-            <a:off x="11763375" y="7505700"/>
-            <a:ext cx="247650" cy="306705"/>
-          </a:xfrm>
-          <a:prstGeom xmlns:a="http://schemas.openxmlformats.org/drawingml/2006/main" prst="rect">
-            <a:avLst/>
-          </a:prstGeom>
-          <a:noFill xmlns:a="http://schemas.openxmlformats.org/drawingml/2006/main"/>
-          <a:ln xmlns:a="http://schemas.openxmlformats.org/drawingml/2006/main" w="0">
-            <a:noFill/>
-          </a:ln>
-        </p:spPr>
-        <p:txBody>
-          <a:bodyPr xmlns:a="http://schemas.openxmlformats.org/drawingml/2006/main" lIns="0" tIns="0" rIns="0" bIns="0" anchor="t"/>
-          <a:lstStyle xmlns:a="http://schemas.openxmlformats.org/drawingml/2006/main">
-            <a:defPPr>
-              <a:defRPr sz="1725" b="1">
-                <a:solidFill>
-                  <a:srgbClr val="20333D"/>
-                </a:solidFill>
-                <a:latin typeface="Arial"/>
-                <a:ea typeface="Arial"/>
-                <a:cs typeface="Arial"/>
-              </a:defRPr>
-            </a:defPPr>
-          </a:lstStyle>
-          <a:p xmlns:a="http://schemas.openxmlformats.org/drawingml/2006/main">
-            <a:pPr>
-              <a:defRPr sz="1725" b="1">
-                <a:solidFill>
-                  <a:srgbClr val="20333D"/>
-                </a:solidFill>
-                <a:latin typeface="Arial"/>
-                <a:ea typeface="Arial"/>
-                <a:cs typeface="Arial"/>
-              </a:defRPr>
-            </a:pPr>
-            <a:r>
-              <a:rPr sz="1725" b="1">
-                <a:solidFill>
-                  <a:srgbClr val="20333D"/>
-                </a:solidFill>
-                <a:latin typeface="Arial"/>
-                <a:ea typeface="Arial"/>
-                <a:cs typeface="Arial"/>
-              </a:rPr>
-              <a:t>A</a:t>
-            </a:r>
-          </a:p>
-        </p:txBody>
-      </p:sp>
-      <p:sp>
-        <p:nvSpPr>
-          <p:cNvPr id="81" name="label-80">
-            <a:extLst xmlns:a="http://schemas.openxmlformats.org/drawingml/2006/main">
-              <a:ext uri="{FF2B5EF4-FFF2-40B4-BE49-F238E27FC236}">
-                <a16:creationId xmlns:a16="http://schemas.microsoft.com/office/drawing/2014/main" id="{B18511C6-1051-41F5-A8ED-4D0F0C533268}"/>
-              </a:ext>
-            </a:extLst>
-          </p:cNvPr>
-          <p:cNvSpPr>
-            <a:spLocks xmlns:a="http://schemas.openxmlformats.org/drawingml/2006/main" noGrp="1"/>
-          </p:cNvSpPr>
-          <p:nvPr/>
-        </p:nvSpPr>
-        <p:spPr>
-          <a:xfrm xmlns:a="http://schemas.openxmlformats.org/drawingml/2006/main">
-            <a:off x="12039600" y="7505700"/>
-            <a:ext cx="247650" cy="306705"/>
-          </a:xfrm>
-          <a:prstGeom xmlns:a="http://schemas.openxmlformats.org/drawingml/2006/main" prst="rect">
-            <a:avLst/>
-          </a:prstGeom>
-          <a:noFill xmlns:a="http://schemas.openxmlformats.org/drawingml/2006/main"/>
-          <a:ln xmlns:a="http://schemas.openxmlformats.org/drawingml/2006/main" w="0">
-            <a:noFill/>
-          </a:ln>
-        </p:spPr>
-        <p:txBody>
-          <a:bodyPr xmlns:a="http://schemas.openxmlformats.org/drawingml/2006/main" lIns="0" tIns="0" rIns="0" bIns="0" anchor="t"/>
-          <a:lstStyle xmlns:a="http://schemas.openxmlformats.org/drawingml/2006/main">
-            <a:defPPr>
-              <a:defRPr sz="1725" b="1">
-                <a:solidFill>
-                  <a:srgbClr val="20333D"/>
-                </a:solidFill>
-                <a:latin typeface="Arial"/>
-                <a:ea typeface="Arial"/>
-                <a:cs typeface="Arial"/>
-              </a:defRPr>
-            </a:defPPr>
-          </a:lstStyle>
-          <a:p xmlns:a="http://schemas.openxmlformats.org/drawingml/2006/main">
-            <a:pPr>
-              <a:defRPr sz="1725" b="1">
-                <a:solidFill>
-                  <a:srgbClr val="20333D"/>
-                </a:solidFill>
-                <a:latin typeface="Arial"/>
-                <a:ea typeface="Arial"/>
-                <a:cs typeface="Arial"/>
-              </a:defRPr>
-            </a:pPr>
-            <a:r>
-              <a:rPr sz="1725" b="1">
-                <a:solidFill>
-                  <a:srgbClr val="20333D"/>
-                </a:solidFill>
-                <a:latin typeface="Arial"/>
-                <a:ea typeface="Arial"/>
-                <a:cs typeface="Arial"/>
-              </a:rPr>
-              <a:t>A</a:t>
-            </a:r>
-          </a:p>
-        </p:txBody>
-      </p:sp>
-      <p:sp>
-        <p:nvSpPr>
-          <p:cNvPr id="82" name="label-81">
-            <a:extLst xmlns:a="http://schemas.openxmlformats.org/drawingml/2006/main">
-              <a:ext uri="{FF2B5EF4-FFF2-40B4-BE49-F238E27FC236}">
-                <a16:creationId xmlns:a16="http://schemas.microsoft.com/office/drawing/2014/main" id="{3012BEBB-D165-4B16-A40B-8BF4344F9249}"/>
-              </a:ext>
-            </a:extLst>
-          </p:cNvPr>
-          <p:cNvSpPr>
-            <a:spLocks xmlns:a="http://schemas.openxmlformats.org/drawingml/2006/main" noGrp="1"/>
-          </p:cNvSpPr>
-          <p:nvPr/>
-        </p:nvSpPr>
-        <p:spPr>
-          <a:xfrm xmlns:a="http://schemas.openxmlformats.org/drawingml/2006/main">
-            <a:off x="12315825" y="7505700"/>
-            <a:ext cx="247650" cy="306705"/>
-          </a:xfrm>
-          <a:prstGeom xmlns:a="http://schemas.openxmlformats.org/drawingml/2006/main" prst="rect">
-            <a:avLst/>
-          </a:prstGeom>
-          <a:noFill xmlns:a="http://schemas.openxmlformats.org/drawingml/2006/main"/>
-          <a:ln xmlns:a="http://schemas.openxmlformats.org/drawingml/2006/main" w="0">
-            <a:noFill/>
-          </a:ln>
-        </p:spPr>
-        <p:txBody>
-          <a:bodyPr xmlns:a="http://schemas.openxmlformats.org/drawingml/2006/main" lIns="0" tIns="0" rIns="0" bIns="0" anchor="t"/>
-          <a:lstStyle xmlns:a="http://schemas.openxmlformats.org/drawingml/2006/main">
-            <a:defPPr>
-              <a:defRPr sz="1725" b="1">
-                <a:solidFill>
-                  <a:srgbClr val="20333D"/>
-                </a:solidFill>
-                <a:latin typeface="Arial"/>
-                <a:ea typeface="Arial"/>
-                <a:cs typeface="Arial"/>
-              </a:defRPr>
-            </a:defPPr>
-          </a:lstStyle>
-          <a:p xmlns:a="http://schemas.openxmlformats.org/drawingml/2006/main">
-            <a:pPr>
-              <a:defRPr sz="1725" b="1">
-                <a:solidFill>
-                  <a:srgbClr val="20333D"/>
-                </a:solidFill>
-                <a:latin typeface="Arial"/>
-                <a:ea typeface="Arial"/>
-                <a:cs typeface="Arial"/>
-              </a:defRPr>
-            </a:pPr>
-            <a:r>
-              <a:rPr sz="1725" b="1">
-                <a:solidFill>
-                  <a:srgbClr val="20333D"/>
-                </a:solidFill>
-                <a:latin typeface="Arial"/>
-                <a:ea typeface="Arial"/>
-                <a:cs typeface="Arial"/>
-              </a:rPr>
-              <a:t>M</a:t>
-            </a:r>
-          </a:p>
-        </p:txBody>
-      </p:sp>
-      <p:sp>
-        <p:nvSpPr>
-          <p:cNvPr id="83" name="">
-            <a:extLst xmlns:a="http://schemas.openxmlformats.org/drawingml/2006/main">
-              <a:ext uri="{FF2B5EF4-FFF2-40B4-BE49-F238E27FC236}">
-                <a16:creationId xmlns:a16="http://schemas.microsoft.com/office/drawing/2014/main" id="{F4B89E47-89C3-4D2F-81E6-054672770006}"/>
-              </a:ext>
-            </a:extLst>
-          </p:cNvPr>
-          <p:cNvSpPr>
-            <a:spLocks xmlns:a="http://schemas.openxmlformats.org/drawingml/2006/main" noGrp="1"/>
-          </p:cNvSpPr>
-          <p:nvPr/>
-        </p:nvSpPr>
-        <p:spPr>
-          <a:xfrm xmlns:a="http://schemas.openxmlformats.org/drawingml/2006/main">
-            <a:off x="12553950" y="7486650"/>
-            <a:ext cx="238125" cy="295275"/>
-          </a:xfrm>
-          <a:prstGeom xmlns:a="http://schemas.openxmlformats.org/drawingml/2006/main" prst="roundRect">
-            <a:avLst>
-              <a:gd name="adj" fmla="val 16000"/>
-            </a:avLst>
-          </a:prstGeom>
-          <a:solidFill xmlns:a="http://schemas.openxmlformats.org/drawingml/2006/main">
-            <a:srgbClr val="173F80"/>
-          </a:solidFill>
-          <a:ln xmlns:a="http://schemas.openxmlformats.org/drawingml/2006/main" w="0">
-            <a:noFill/>
-          </a:ln>
-        </p:spPr>
-      </p:sp>
-      <p:sp>
-        <p:nvSpPr>
-          <p:cNvPr id="84" name="label-83">
-            <a:extLst xmlns:a="http://schemas.openxmlformats.org/drawingml/2006/main">
-              <a:ext uri="{FF2B5EF4-FFF2-40B4-BE49-F238E27FC236}">
-                <a16:creationId xmlns:a16="http://schemas.microsoft.com/office/drawing/2014/main" id="{320C2649-975E-4682-95D0-7FAD8891848B}"/>
-              </a:ext>
-            </a:extLst>
-          </p:cNvPr>
-          <p:cNvSpPr>
-            <a:spLocks xmlns:a="http://schemas.openxmlformats.org/drawingml/2006/main" noGrp="1"/>
-          </p:cNvSpPr>
-          <p:nvPr/>
-        </p:nvSpPr>
-        <p:spPr>
-          <a:xfrm xmlns:a="http://schemas.openxmlformats.org/drawingml/2006/main">
-            <a:off x="12592050" y="7505700"/>
-            <a:ext cx="247650" cy="306705"/>
-          </a:xfrm>
-          <a:prstGeom xmlns:a="http://schemas.openxmlformats.org/drawingml/2006/main" prst="rect">
-            <a:avLst/>
-          </a:prstGeom>
-          <a:noFill xmlns:a="http://schemas.openxmlformats.org/drawingml/2006/main"/>
-          <a:ln xmlns:a="http://schemas.openxmlformats.org/drawingml/2006/main" w="0">
-            <a:noFill/>
-          </a:ln>
-        </p:spPr>
-        <p:txBody>
-          <a:bodyPr xmlns:a="http://schemas.openxmlformats.org/drawingml/2006/main" lIns="0" tIns="0" rIns="0" bIns="0" anchor="t"/>
-          <a:lstStyle xmlns:a="http://schemas.openxmlformats.org/drawingml/2006/main">
-            <a:defPPr>
-              <a:defRPr sz="1725" b="1">
-                <a:solidFill>
-                  <a:srgbClr val="FFFFFF"/>
-                </a:solidFill>
-                <a:latin typeface="Arial"/>
-                <a:ea typeface="Arial"/>
-                <a:cs typeface="Arial"/>
-              </a:defRPr>
-            </a:defPPr>
-          </a:lstStyle>
-          <a:p xmlns:a="http://schemas.openxmlformats.org/drawingml/2006/main">
-            <a:pPr>
-              <a:defRPr sz="1725" b="1">
-                <a:solidFill>
-                  <a:srgbClr val="FFFFFF"/>
-                </a:solidFill>
-                <a:latin typeface="Arial"/>
-                <a:ea typeface="Arial"/>
-                <a:cs typeface="Arial"/>
-              </a:defRPr>
-            </a:pPr>
-            <a:r>
-              <a:rPr sz="1725" b="1">
-                <a:solidFill>
-                  <a:srgbClr val="FFFFFF"/>
-                </a:solidFill>
-                <a:latin typeface="Arial"/>
-                <a:ea typeface="Arial"/>
-                <a:cs typeface="Arial"/>
-              </a:rPr>
-              <a:t>A</a:t>
-            </a:r>
-          </a:p>
-        </p:txBody>
-      </p:sp>
-      <p:sp>
-        <p:nvSpPr>
-          <p:cNvPr id="85" name="label-84">
-            <a:extLst xmlns:a="http://schemas.openxmlformats.org/drawingml/2006/main">
-              <a:ext uri="{FF2B5EF4-FFF2-40B4-BE49-F238E27FC236}">
-                <a16:creationId xmlns:a16="http://schemas.microsoft.com/office/drawing/2014/main" id="{EF51F08A-6CDF-4B75-8477-C20A27F442B9}"/>
-              </a:ext>
-            </a:extLst>
-          </p:cNvPr>
-          <p:cNvSpPr>
-            <a:spLocks xmlns:a="http://schemas.openxmlformats.org/drawingml/2006/main" noGrp="1"/>
-          </p:cNvSpPr>
-          <p:nvPr/>
-        </p:nvSpPr>
-        <p:spPr>
-          <a:xfrm xmlns:a="http://schemas.openxmlformats.org/drawingml/2006/main">
-            <a:off x="12868275" y="7505700"/>
-            <a:ext cx="247650" cy="306705"/>
-          </a:xfrm>
-          <a:prstGeom xmlns:a="http://schemas.openxmlformats.org/drawingml/2006/main" prst="rect">
-            <a:avLst/>
-          </a:prstGeom>
-          <a:noFill xmlns:a="http://schemas.openxmlformats.org/drawingml/2006/main"/>
-          <a:ln xmlns:a="http://schemas.openxmlformats.org/drawingml/2006/main" w="0">
-            <a:noFill/>
-          </a:ln>
-        </p:spPr>
-        <p:txBody>
-          <a:bodyPr xmlns:a="http://schemas.openxmlformats.org/drawingml/2006/main" lIns="0" tIns="0" rIns="0" bIns="0" anchor="t"/>
-          <a:lstStyle xmlns:a="http://schemas.openxmlformats.org/drawingml/2006/main">
-            <a:defPPr>
-              <a:defRPr sz="1725" b="1">
-                <a:solidFill>
-                  <a:srgbClr val="20333D"/>
-                </a:solidFill>
-                <a:latin typeface="Arial"/>
-                <a:ea typeface="Arial"/>
-                <a:cs typeface="Arial"/>
-              </a:defRPr>
-            </a:defPPr>
-          </a:lstStyle>
-          <a:p xmlns:a="http://schemas.openxmlformats.org/drawingml/2006/main">
-            <a:pPr>
-              <a:defRPr sz="1725" b="1">
-                <a:solidFill>
-                  <a:srgbClr val="20333D"/>
-                </a:solidFill>
-                <a:latin typeface="Arial"/>
-                <a:ea typeface="Arial"/>
-                <a:cs typeface="Arial"/>
-              </a:defRPr>
-            </a:pPr>
-            <a:r>
-              <a:rPr sz="1725" b="1">
-                <a:solidFill>
-                  <a:srgbClr val="20333D"/>
-                </a:solidFill>
-                <a:latin typeface="Arial"/>
-                <a:ea typeface="Arial"/>
-                <a:cs typeface="Arial"/>
-              </a:rPr>
-              <a:t>T</a:t>
-            </a:r>
-          </a:p>
-        </p:txBody>
-      </p:sp>
-      <p:sp>
-        <p:nvSpPr>
-          <p:cNvPr id="86" name="label-85">
-            <a:extLst xmlns:a="http://schemas.openxmlformats.org/drawingml/2006/main">
-              <a:ext uri="{FF2B5EF4-FFF2-40B4-BE49-F238E27FC236}">
-                <a16:creationId xmlns:a16="http://schemas.microsoft.com/office/drawing/2014/main" id="{841C74D2-5A21-40C3-B728-FB9D530DAF7D}"/>
-              </a:ext>
-            </a:extLst>
-          </p:cNvPr>
-          <p:cNvSpPr>
-            <a:spLocks xmlns:a="http://schemas.openxmlformats.org/drawingml/2006/main" noGrp="1"/>
-          </p:cNvSpPr>
-          <p:nvPr/>
-        </p:nvSpPr>
-        <p:spPr>
-          <a:xfrm xmlns:a="http://schemas.openxmlformats.org/drawingml/2006/main">
-            <a:off x="13144500" y="7505700"/>
-            <a:ext cx="247650" cy="306705"/>
-          </a:xfrm>
-          <a:prstGeom xmlns:a="http://schemas.openxmlformats.org/drawingml/2006/main" prst="rect">
-            <a:avLst/>
-          </a:prstGeom>
-          <a:noFill xmlns:a="http://schemas.openxmlformats.org/drawingml/2006/main"/>
-          <a:ln xmlns:a="http://schemas.openxmlformats.org/drawingml/2006/main" w="0">
-            <a:noFill/>
-          </a:ln>
-        </p:spPr>
-        <p:txBody>
-          <a:bodyPr xmlns:a="http://schemas.openxmlformats.org/drawingml/2006/main" lIns="0" tIns="0" rIns="0" bIns="0" anchor="t"/>
-          <a:lstStyle xmlns:a="http://schemas.openxmlformats.org/drawingml/2006/main">
-            <a:defPPr>
-              <a:defRPr sz="1725" b="1">
-                <a:solidFill>
-                  <a:srgbClr val="20333D"/>
-                </a:solidFill>
-                <a:latin typeface="Arial"/>
-                <a:ea typeface="Arial"/>
-                <a:cs typeface="Arial"/>
-              </a:defRPr>
-            </a:defPPr>
-          </a:lstStyle>
-          <a:p xmlns:a="http://schemas.openxmlformats.org/drawingml/2006/main">
-            <a:pPr>
-              <a:defRPr sz="1725" b="1">
-                <a:solidFill>
-                  <a:srgbClr val="20333D"/>
-                </a:solidFill>
-                <a:latin typeface="Arial"/>
-                <a:ea typeface="Arial"/>
-                <a:cs typeface="Arial"/>
-              </a:defRPr>
-            </a:pPr>
-            <a:r>
-              <a:rPr sz="1725" b="1">
-                <a:solidFill>
-                  <a:srgbClr val="20333D"/>
-                </a:solidFill>
-                <a:latin typeface="Arial"/>
-                <a:ea typeface="Arial"/>
-                <a:cs typeface="Arial"/>
-              </a:rPr>
-              <a:t>R</a:t>
-            </a:r>
-          </a:p>
-        </p:txBody>
-      </p:sp>
-      <p:sp>
-        <p:nvSpPr>
-          <p:cNvPr id="87" name="label-86">
-            <a:extLst xmlns:a="http://schemas.openxmlformats.org/drawingml/2006/main">
-              <a:ext uri="{FF2B5EF4-FFF2-40B4-BE49-F238E27FC236}">
-                <a16:creationId xmlns:a16="http://schemas.microsoft.com/office/drawing/2014/main" id="{46A95AB5-3861-48AC-A2E8-7A65388E3CBB}"/>
-              </a:ext>
-            </a:extLst>
-          </p:cNvPr>
-          <p:cNvSpPr>
-            <a:spLocks xmlns:a="http://schemas.openxmlformats.org/drawingml/2006/main" noGrp="1"/>
-          </p:cNvSpPr>
-          <p:nvPr/>
-        </p:nvSpPr>
-        <p:spPr>
-          <a:xfrm xmlns:a="http://schemas.openxmlformats.org/drawingml/2006/main">
-            <a:off x="13420725" y="7505700"/>
-            <a:ext cx="247650" cy="306705"/>
-          </a:xfrm>
-          <a:prstGeom xmlns:a="http://schemas.openxmlformats.org/drawingml/2006/main" prst="rect">
-            <a:avLst/>
-          </a:prstGeom>
-          <a:noFill xmlns:a="http://schemas.openxmlformats.org/drawingml/2006/main"/>
-          <a:ln xmlns:a="http://schemas.openxmlformats.org/drawingml/2006/main" w="0">
-            <a:noFill/>
-          </a:ln>
-        </p:spPr>
-        <p:txBody>
-          <a:bodyPr xmlns:a="http://schemas.openxmlformats.org/drawingml/2006/main" lIns="0" tIns="0" rIns="0" bIns="0" anchor="t"/>
-          <a:lstStyle xmlns:a="http://schemas.openxmlformats.org/drawingml/2006/main">
-            <a:defPPr>
-              <a:defRPr sz="1725" b="1">
-                <a:solidFill>
-                  <a:srgbClr val="20333D"/>
-                </a:solidFill>
-                <a:latin typeface="Arial"/>
-                <a:ea typeface="Arial"/>
-                <a:cs typeface="Arial"/>
-              </a:defRPr>
-            </a:defPPr>
-          </a:lstStyle>
-          <a:p xmlns:a="http://schemas.openxmlformats.org/drawingml/2006/main">
-            <a:pPr>
-              <a:defRPr sz="1725" b="1">
-                <a:solidFill>
-                  <a:srgbClr val="20333D"/>
-                </a:solidFill>
-                <a:latin typeface="Arial"/>
-                <a:ea typeface="Arial"/>
-                <a:cs typeface="Arial"/>
-              </a:defRPr>
-            </a:pPr>
-            <a:r>
-              <a:rPr sz="1725" b="1">
-                <a:solidFill>
-                  <a:srgbClr val="20333D"/>
-                </a:solidFill>
-                <a:latin typeface="Arial"/>
-                <a:ea typeface="Arial"/>
-                <a:cs typeface="Arial"/>
-              </a:rPr>
-              <a:t>N</a:t>
-            </a:r>
-          </a:p>
-        </p:txBody>
-      </p:sp>
-      <p:sp>
-        <p:nvSpPr>
-          <p:cNvPr id="88" name="label-87">
-            <a:extLst xmlns:a="http://schemas.openxmlformats.org/drawingml/2006/main">
-              <a:ext uri="{FF2B5EF4-FFF2-40B4-BE49-F238E27FC236}">
-                <a16:creationId xmlns:a16="http://schemas.microsoft.com/office/drawing/2014/main" id="{28723B5F-23E4-4CA1-B282-5F7984DFE699}"/>
-              </a:ext>
-            </a:extLst>
-          </p:cNvPr>
-          <p:cNvSpPr>
-            <a:spLocks xmlns:a="http://schemas.openxmlformats.org/drawingml/2006/main" noGrp="1"/>
-          </p:cNvSpPr>
-          <p:nvPr/>
-        </p:nvSpPr>
-        <p:spPr>
-          <a:xfrm xmlns:a="http://schemas.openxmlformats.org/drawingml/2006/main">
-            <a:off x="13696950" y="7505700"/>
-            <a:ext cx="247650" cy="306705"/>
-          </a:xfrm>
-          <a:prstGeom xmlns:a="http://schemas.openxmlformats.org/drawingml/2006/main" prst="rect">
-            <a:avLst/>
-          </a:prstGeom>
-          <a:noFill xmlns:a="http://schemas.openxmlformats.org/drawingml/2006/main"/>
-          <a:ln xmlns:a="http://schemas.openxmlformats.org/drawingml/2006/main" w="0">
-            <a:noFill/>
-          </a:ln>
-        </p:spPr>
-        <p:txBody>
-          <a:bodyPr xmlns:a="http://schemas.openxmlformats.org/drawingml/2006/main" lIns="0" tIns="0" rIns="0" bIns="0" anchor="t"/>
-          <a:lstStyle xmlns:a="http://schemas.openxmlformats.org/drawingml/2006/main">
-            <a:defPPr>
-              <a:defRPr sz="1725" b="1">
-                <a:solidFill>
-                  <a:srgbClr val="20333D"/>
-                </a:solidFill>
-                <a:latin typeface="Arial"/>
-                <a:ea typeface="Arial"/>
-                <a:cs typeface="Arial"/>
-              </a:defRPr>
-            </a:defPPr>
-          </a:lstStyle>
-          <a:p xmlns:a="http://schemas.openxmlformats.org/drawingml/2006/main">
-            <a:pPr>
-              <a:defRPr sz="1725" b="1">
-                <a:solidFill>
-                  <a:srgbClr val="20333D"/>
-                </a:solidFill>
-                <a:latin typeface="Arial"/>
-                <a:ea typeface="Arial"/>
-                <a:cs typeface="Arial"/>
-              </a:defRPr>
-            </a:pPr>
-            <a:r>
-              <a:rPr sz="1725" b="1">
-                <a:solidFill>
-                  <a:srgbClr val="20333D"/>
-                </a:solidFill>
-                <a:latin typeface="Arial"/>
-                <a:ea typeface="Arial"/>
-                <a:cs typeface="Arial"/>
-              </a:rPr>
-              <a:t>T</a:t>
-            </a:r>
-          </a:p>
-        </p:txBody>
-      </p:sp>
-      <p:sp>
-        <p:nvSpPr>
-          <p:cNvPr id="89" name="label-88">
-            <a:extLst xmlns:a="http://schemas.openxmlformats.org/drawingml/2006/main">
-              <a:ext uri="{FF2B5EF4-FFF2-40B4-BE49-F238E27FC236}">
-                <a16:creationId xmlns:a16="http://schemas.microsoft.com/office/drawing/2014/main" id="{830467A0-54F6-465E-8929-7D155B0DCFEF}"/>
-              </a:ext>
-            </a:extLst>
-          </p:cNvPr>
-          <p:cNvSpPr>
-            <a:spLocks xmlns:a="http://schemas.openxmlformats.org/drawingml/2006/main" noGrp="1"/>
-          </p:cNvSpPr>
-          <p:nvPr/>
-        </p:nvSpPr>
-        <p:spPr>
-          <a:xfrm xmlns:a="http://schemas.openxmlformats.org/drawingml/2006/main">
-            <a:off x="13973175" y="7505700"/>
-            <a:ext cx="247650" cy="306705"/>
-          </a:xfrm>
-          <a:prstGeom xmlns:a="http://schemas.openxmlformats.org/drawingml/2006/main" prst="rect">
-            <a:avLst/>
-          </a:prstGeom>
-          <a:noFill xmlns:a="http://schemas.openxmlformats.org/drawingml/2006/main"/>
-          <a:ln xmlns:a="http://schemas.openxmlformats.org/drawingml/2006/main" w="0">
-            <a:noFill/>
-          </a:ln>
-        </p:spPr>
-        <p:txBody>
-          <a:bodyPr xmlns:a="http://schemas.openxmlformats.org/drawingml/2006/main" lIns="0" tIns="0" rIns="0" bIns="0" anchor="t"/>
-          <a:lstStyle xmlns:a="http://schemas.openxmlformats.org/drawingml/2006/main">
-            <a:defPPr>
-              <a:defRPr sz="1725" b="1">
-                <a:solidFill>
-                  <a:srgbClr val="20333D"/>
-                </a:solidFill>
-                <a:latin typeface="Arial"/>
-                <a:ea typeface="Arial"/>
-                <a:cs typeface="Arial"/>
-              </a:defRPr>
-            </a:defPPr>
-          </a:lstStyle>
-          <a:p xmlns:a="http://schemas.openxmlformats.org/drawingml/2006/main">
-            <a:pPr>
-              <a:defRPr sz="1725" b="1">
-                <a:solidFill>
-                  <a:srgbClr val="20333D"/>
-                </a:solidFill>
-                <a:latin typeface="Arial"/>
-                <a:ea typeface="Arial"/>
-                <a:cs typeface="Arial"/>
-              </a:defRPr>
-            </a:pPr>
-            <a:r>
-              <a:rPr sz="1725" b="1">
-                <a:solidFill>
-                  <a:srgbClr val="20333D"/>
-                </a:solidFill>
-                <a:latin typeface="Arial"/>
-                <a:ea typeface="Arial"/>
-                <a:cs typeface="Arial"/>
-              </a:rPr>
-              <a:t>R</a:t>
-            </a:r>
-          </a:p>
-        </p:txBody>
-      </p:sp>
-      <p:sp>
-        <p:nvSpPr>
-          <p:cNvPr id="90" name="label-89">
-            <a:extLst xmlns:a="http://schemas.openxmlformats.org/drawingml/2006/main">
-              <a:ext uri="{FF2B5EF4-FFF2-40B4-BE49-F238E27FC236}">
-                <a16:creationId xmlns:a16="http://schemas.microsoft.com/office/drawing/2014/main" id="{1B574CB7-B5F4-4C6F-8DF1-A0BAD5C3A276}"/>
-              </a:ext>
-            </a:extLst>
-          </p:cNvPr>
-          <p:cNvSpPr>
-            <a:spLocks xmlns:a="http://schemas.openxmlformats.org/drawingml/2006/main" noGrp="1"/>
-          </p:cNvSpPr>
-          <p:nvPr/>
-        </p:nvSpPr>
-        <p:spPr>
-          <a:xfrm xmlns:a="http://schemas.openxmlformats.org/drawingml/2006/main">
-            <a:off x="10677525" y="8115300"/>
-            <a:ext cx="3952875" cy="320040"/>
-          </a:xfrm>
-          <a:prstGeom xmlns:a="http://schemas.openxmlformats.org/drawingml/2006/main" prst="rect">
-            <a:avLst/>
-          </a:prstGeom>
-          <a:noFill xmlns:a="http://schemas.openxmlformats.org/drawingml/2006/main"/>
-          <a:ln xmlns:a="http://schemas.openxmlformats.org/drawingml/2006/main" w="0">
-            <a:noFill/>
-          </a:ln>
-        </p:spPr>
-        <p:txBody>
-          <a:bodyPr xmlns:a="http://schemas.openxmlformats.org/drawingml/2006/main" lIns="0" tIns="0" rIns="0" bIns="0" anchor="t"/>
-          <a:lstStyle xmlns:a="http://schemas.openxmlformats.org/drawingml/2006/main">
-            <a:defPPr>
-              <a:defRPr sz="1800" b="1">
-                <a:solidFill>
-                  <a:srgbClr val="20333D"/>
-                </a:solidFill>
-                <a:latin typeface="Arial"/>
-                <a:ea typeface="Arial"/>
-                <a:cs typeface="Arial"/>
-              </a:defRPr>
-            </a:defPPr>
-          </a:lstStyle>
-          <a:p xmlns:a="http://schemas.openxmlformats.org/drawingml/2006/main">
-            <a:pPr>
-              <a:defRPr sz="1800" b="1">
-                <a:solidFill>
-                  <a:srgbClr val="20333D"/>
-                </a:solidFill>
-                <a:latin typeface="Arial"/>
-                <a:ea typeface="Arial"/>
-                <a:cs typeface="Arial"/>
-              </a:defRPr>
-            </a:pPr>
-            <a:r>
-              <a:rPr sz="1800" b="1">
-                <a:solidFill>
-                  <a:srgbClr val="20333D"/>
-                </a:solidFill>
-                <a:latin typeface="Arial"/>
-                <a:ea typeface="Arial"/>
-                <a:cs typeface="Arial"/>
-              </a:rPr>
-              <a:t>Top-K proteins and report</a:t>
-            </a:r>
-          </a:p>
-        </p:txBody>
-      </p:sp>
-      <p:sp>
-        <p:nvSpPr>
-          <p:cNvPr id="91" name="label-90">
-            <a:extLst xmlns:a="http://schemas.openxmlformats.org/drawingml/2006/main">
-              <a:ext uri="{FF2B5EF4-FFF2-40B4-BE49-F238E27FC236}">
-                <a16:creationId xmlns:a16="http://schemas.microsoft.com/office/drawing/2014/main" id="{84F0473E-3680-4C57-A287-D07B3457E0F9}"/>
-              </a:ext>
-            </a:extLst>
-          </p:cNvPr>
-          <p:cNvSpPr>
-            <a:spLocks xmlns:a="http://schemas.openxmlformats.org/drawingml/2006/main" noGrp="1"/>
-          </p:cNvSpPr>
-          <p:nvPr/>
-        </p:nvSpPr>
-        <p:spPr>
-          <a:xfrm xmlns:a="http://schemas.openxmlformats.org/drawingml/2006/main">
-            <a:off x="10677525" y="8524875"/>
-            <a:ext cx="3952875" cy="280035"/>
-          </a:xfrm>
-          <a:prstGeom xmlns:a="http://schemas.openxmlformats.org/drawingml/2006/main" prst="rect">
-            <a:avLst/>
-          </a:prstGeom>
-          <a:noFill xmlns:a="http://schemas.openxmlformats.org/drawingml/2006/main"/>
-          <a:ln xmlns:a="http://schemas.openxmlformats.org/drawingml/2006/main" w="0">
-            <a:noFill/>
-          </a:ln>
-        </p:spPr>
-        <p:txBody>
-          <a:bodyPr xmlns:a="http://schemas.openxmlformats.org/drawingml/2006/main" lIns="0" tIns="0" rIns="0" bIns="0" anchor="t"/>
-          <a:lstStyle xmlns:a="http://schemas.openxmlformats.org/drawingml/2006/main">
-            <a:defPPr>
-              <a:defRPr sz="1575" b="1">
-                <a:solidFill>
-                  <a:srgbClr val="4B606D"/>
-                </a:solidFill>
-                <a:latin typeface="Arial"/>
-                <a:ea typeface="Arial"/>
-                <a:cs typeface="Arial"/>
-              </a:defRPr>
-            </a:defPPr>
-          </a:lstStyle>
-          <a:p xmlns:a="http://schemas.openxmlformats.org/drawingml/2006/main">
-            <a:pPr>
-              <a:defRPr sz="1575" b="1">
-                <a:solidFill>
-                  <a:srgbClr val="4B606D"/>
-                </a:solidFill>
-                <a:latin typeface="Arial"/>
-                <a:ea typeface="Arial"/>
-                <a:cs typeface="Arial"/>
-              </a:defRPr>
-            </a:pPr>
-            <a:r>
-              <a:rPr sz="1575" b="1">
-                <a:solidFill>
-                  <a:srgbClr val="4B606D"/>
-                </a:solidFill>
-                <a:latin typeface="Arial"/>
-                <a:ea typeface="Arial"/>
-                <a:cs typeface="Arial"/>
-              </a:rPr>
-              <a:t>CSV, FASTA, JSON, GenBank, SBOL</a:t>
-            </a:r>
-          </a:p>
-        </p:txBody>
-      </p:sp>
-      <p:sp>
-        <p:nvSpPr>
-          <p:cNvPr id="92" name="label-91">
-            <a:extLst xmlns:a="http://schemas.openxmlformats.org/drawingml/2006/main">
-              <a:ext uri="{FF2B5EF4-FFF2-40B4-BE49-F238E27FC236}">
-                <a16:creationId xmlns:a16="http://schemas.microsoft.com/office/drawing/2014/main" id="{A8D14F79-7DF7-4311-A27C-101973F1025A}"/>
-              </a:ext>
-            </a:extLst>
-          </p:cNvPr>
-          <p:cNvSpPr>
-            <a:spLocks xmlns:a="http://schemas.openxmlformats.org/drawingml/2006/main" noGrp="1"/>
-          </p:cNvSpPr>
-          <p:nvPr/>
-        </p:nvSpPr>
-        <p:spPr>
-          <a:xfrm xmlns:a="http://schemas.openxmlformats.org/drawingml/2006/main">
-            <a:off x="10677525" y="9124950"/>
-            <a:ext cx="3952875" cy="320040"/>
-          </a:xfrm>
-          <a:prstGeom xmlns:a="http://schemas.openxmlformats.org/drawingml/2006/main" prst="rect">
-            <a:avLst/>
-          </a:prstGeom>
-          <a:noFill xmlns:a="http://schemas.openxmlformats.org/drawingml/2006/main"/>
-          <a:ln xmlns:a="http://schemas.openxmlformats.org/drawingml/2006/main" w="0">
-            <a:noFill/>
-          </a:ln>
-        </p:spPr>
-        <p:txBody>
-          <a:bodyPr xmlns:a="http://schemas.openxmlformats.org/drawingml/2006/main" lIns="0" tIns="0" rIns="0" bIns="0" anchor="t"/>
-          <a:lstStyle xmlns:a="http://schemas.openxmlformats.org/drawingml/2006/main">
-            <a:defPPr>
-              <a:defRPr sz="1800" b="1">
-                <a:solidFill>
-                  <a:srgbClr val="20333D"/>
-                </a:solidFill>
-                <a:latin typeface="Arial"/>
-                <a:ea typeface="Arial"/>
-                <a:cs typeface="Arial"/>
-              </a:defRPr>
-            </a:defPPr>
-          </a:lstStyle>
-          <a:p xmlns:a="http://schemas.openxmlformats.org/drawingml/2006/main">
-            <a:pPr>
-              <a:defRPr sz="1800" b="1">
-                <a:solidFill>
-                  <a:srgbClr val="20333D"/>
-                </a:solidFill>
-                <a:latin typeface="Arial"/>
-                <a:ea typeface="Arial"/>
-                <a:cs typeface="Arial"/>
-              </a:defRPr>
-            </a:pPr>
-            <a:r>
-              <a:rPr sz="1800" b="1">
-                <a:solidFill>
-                  <a:srgbClr val="20333D"/>
-                </a:solidFill>
-                <a:latin typeface="Arial"/>
-                <a:ea typeface="Arial"/>
-                <a:cs typeface="Arial"/>
-              </a:rPr>
-              <a:t>Optional host-specific coding DNA</a:t>
-            </a:r>
-          </a:p>
-        </p:txBody>
-      </p:sp>
-      <p:sp>
-        <p:nvSpPr>
-          <p:cNvPr id="93" name="label-92">
-            <a:extLst xmlns:a="http://schemas.openxmlformats.org/drawingml/2006/main">
-              <a:ext uri="{FF2B5EF4-FFF2-40B4-BE49-F238E27FC236}">
-                <a16:creationId xmlns:a16="http://schemas.microsoft.com/office/drawing/2014/main" id="{CFAF0776-C32F-49DF-A51B-456E48F5AAE8}"/>
-              </a:ext>
-            </a:extLst>
-          </p:cNvPr>
-          <p:cNvSpPr>
-            <a:spLocks xmlns:a="http://schemas.openxmlformats.org/drawingml/2006/main" noGrp="1"/>
-          </p:cNvSpPr>
-          <p:nvPr/>
-        </p:nvSpPr>
-        <p:spPr>
-          <a:xfrm xmlns:a="http://schemas.openxmlformats.org/drawingml/2006/main">
-            <a:off x="10677525" y="9534525"/>
-            <a:ext cx="3952875" cy="280035"/>
-          </a:xfrm>
-          <a:prstGeom xmlns:a="http://schemas.openxmlformats.org/drawingml/2006/main" prst="rect">
-            <a:avLst/>
-          </a:prstGeom>
-          <a:noFill xmlns:a="http://schemas.openxmlformats.org/drawingml/2006/main"/>
-          <a:ln xmlns:a="http://schemas.openxmlformats.org/drawingml/2006/main" w="0">
-            <a:noFill/>
-          </a:ln>
-        </p:spPr>
-        <p:txBody>
-          <a:bodyPr xmlns:a="http://schemas.openxmlformats.org/drawingml/2006/main" lIns="0" tIns="0" rIns="0" bIns="0" anchor="t"/>
-          <a:lstStyle xmlns:a="http://schemas.openxmlformats.org/drawingml/2006/main">
-            <a:defPPr>
-              <a:defRPr sz="1575" b="1">
-                <a:solidFill>
-                  <a:srgbClr val="4B606D"/>
-                </a:solidFill>
-                <a:latin typeface="Arial"/>
-                <a:ea typeface="Arial"/>
-                <a:cs typeface="Arial"/>
-              </a:defRPr>
-            </a:defPPr>
-          </a:lstStyle>
-          <a:p xmlns:a="http://schemas.openxmlformats.org/drawingml/2006/main">
-            <a:pPr>
-              <a:defRPr sz="1575" b="1">
-                <a:solidFill>
-                  <a:srgbClr val="4B606D"/>
-                </a:solidFill>
-                <a:latin typeface="Arial"/>
-                <a:ea typeface="Arial"/>
-                <a:cs typeface="Arial"/>
-              </a:defRPr>
-            </a:pPr>
-            <a:r>
-              <a:rPr sz="1575" b="1">
-                <a:solidFill>
-                  <a:srgbClr val="4B606D"/>
-                </a:solidFill>
-                <a:latin typeface="Arial"/>
-                <a:ea typeface="Arial"/>
-                <a:cs typeface="Arial"/>
-              </a:rPr>
-              <a:t>Synonymous codons preserve identity</a:t>
-            </a:r>
-          </a:p>
-        </p:txBody>
-      </p:sp>
-      <p:sp>
-        <p:nvSpPr>
-          <p:cNvPr id="94" name="label-93">
-            <a:extLst xmlns:a="http://schemas.openxmlformats.org/drawingml/2006/main">
-              <a:ext uri="{FF2B5EF4-FFF2-40B4-BE49-F238E27FC236}">
-                <a16:creationId xmlns:a16="http://schemas.microsoft.com/office/drawing/2014/main" id="{52CE93A6-157A-4315-9A49-211A9709CAD8}"/>
-              </a:ext>
-            </a:extLst>
-          </p:cNvPr>
-          <p:cNvSpPr>
-            <a:spLocks xmlns:a="http://schemas.openxmlformats.org/drawingml/2006/main" noGrp="1"/>
-          </p:cNvSpPr>
-          <p:nvPr/>
-        </p:nvSpPr>
-        <p:spPr>
-          <a:xfrm xmlns:a="http://schemas.openxmlformats.org/drawingml/2006/main">
-            <a:off x="10677525" y="9925050"/>
-            <a:ext cx="3952875" cy="280035"/>
-          </a:xfrm>
-          <a:prstGeom xmlns:a="http://schemas.openxmlformats.org/drawingml/2006/main" prst="rect">
-            <a:avLst/>
-          </a:prstGeom>
-          <a:noFill xmlns:a="http://schemas.openxmlformats.org/drawingml/2006/main"/>
-          <a:ln xmlns:a="http://schemas.openxmlformats.org/drawingml/2006/main" w="0">
-            <a:noFill/>
-          </a:ln>
-        </p:spPr>
-        <p:txBody>
-          <a:bodyPr xmlns:a="http://schemas.openxmlformats.org/drawingml/2006/main" lIns="0" tIns="0" rIns="0" bIns="0" anchor="t"/>
-          <a:lstStyle xmlns:a="http://schemas.openxmlformats.org/drawingml/2006/main">
-            <a:defPPr>
-              <a:defRPr sz="1575" b="1">
-                <a:solidFill>
-                  <a:srgbClr val="4B606D"/>
-                </a:solidFill>
-                <a:latin typeface="Arial"/>
-                <a:ea typeface="Arial"/>
-                <a:cs typeface="Arial"/>
-              </a:defRPr>
-            </a:defPPr>
-          </a:lstStyle>
-          <a:p xmlns:a="http://schemas.openxmlformats.org/drawingml/2006/main">
-            <a:pPr>
-              <a:defRPr sz="1575" b="1">
-                <a:solidFill>
-                  <a:srgbClr val="4B606D"/>
-                </a:solidFill>
-                <a:latin typeface="Arial"/>
-                <a:ea typeface="Arial"/>
-                <a:cs typeface="Arial"/>
-              </a:defRPr>
-            </a:pPr>
-            <a:r>
-              <a:rPr sz="1575" b="1">
-                <a:solidFill>
-                  <a:srgbClr val="4B606D"/>
-                </a:solidFill>
-                <a:latin typeface="Arial"/>
-                <a:ea typeface="Arial"/>
-                <a:cs typeface="Arial"/>
-              </a:rPr>
-              <a:t>Ready for the next experimental design</a:t>
-            </a:r>
-          </a:p>
-        </p:txBody>
-      </p:sp>
-      <p:sp>
-        <p:nvSpPr>
-          <p:cNvPr id="95" name="">
-            <a:extLst xmlns:a="http://schemas.openxmlformats.org/drawingml/2006/main">
-              <a:ext uri="{FF2B5EF4-FFF2-40B4-BE49-F238E27FC236}">
-                <a16:creationId xmlns:a16="http://schemas.microsoft.com/office/drawing/2014/main" id="{A4E217C9-9DA4-4C47-8425-124495105477}"/>
-              </a:ext>
-            </a:extLst>
-          </p:cNvPr>
-          <p:cNvSpPr>
-            <a:spLocks xmlns:a="http://schemas.openxmlformats.org/drawingml/2006/main" noGrp="1"/>
-          </p:cNvSpPr>
-          <p:nvPr/>
-        </p:nvSpPr>
-        <p:spPr>
-          <a:xfrm xmlns:a="http://schemas.openxmlformats.org/drawingml/2006/main">
-            <a:off x="523875" y="10668000"/>
-            <a:ext cx="14192250" cy="0"/>
-          </a:xfrm>
-          <a:prstGeom xmlns:a="http://schemas.openxmlformats.org/drawingml/2006/main" prst="line">
-            <a:avLst/>
-          </a:prstGeom>
-          <a:noFill xmlns:a="http://schemas.openxmlformats.org/drawingml/2006/main"/>
-          <a:ln xmlns:a="http://schemas.openxmlformats.org/drawingml/2006/main" w="19050">
-            <a:solidFill>
-              <a:srgbClr val="C5D5DE"/>
-            </a:solidFill>
-          </a:ln>
-        </p:spPr>
-      </p:sp>
-      <p:sp>
-        <p:nvSpPr>
-          <p:cNvPr id="96" name="label-95">
-            <a:extLst xmlns:a="http://schemas.openxmlformats.org/drawingml/2006/main">
-              <a:ext uri="{FF2B5EF4-FFF2-40B4-BE49-F238E27FC236}">
-                <a16:creationId xmlns:a16="http://schemas.microsoft.com/office/drawing/2014/main" id="{0F511046-7F89-491E-A44E-88C415EA98B7}"/>
-              </a:ext>
-            </a:extLst>
-          </p:cNvPr>
-          <p:cNvSpPr>
-            <a:spLocks xmlns:a="http://schemas.openxmlformats.org/drawingml/2006/main" noGrp="1"/>
-          </p:cNvSpPr>
-          <p:nvPr/>
-        </p:nvSpPr>
-        <p:spPr>
-          <a:xfrm xmlns:a="http://schemas.openxmlformats.org/drawingml/2006/main">
-            <a:off x="523875" y="10858500"/>
-            <a:ext cx="14192250" cy="253365"/>
-          </a:xfrm>
-          <a:prstGeom xmlns:a="http://schemas.openxmlformats.org/drawingml/2006/main" prst="rect">
-            <a:avLst/>
-          </a:prstGeom>
-          <a:noFill xmlns:a="http://schemas.openxmlformats.org/drawingml/2006/main"/>
-          <a:ln xmlns:a="http://schemas.openxmlformats.org/drawingml/2006/main" w="0">
-            <a:noFill/>
-          </a:ln>
-        </p:spPr>
-        <p:txBody>
-          <a:bodyPr xmlns:a="http://schemas.openxmlformats.org/drawingml/2006/main" lIns="0" tIns="0" rIns="0" bIns="0" anchor="t"/>
-          <a:lstStyle xmlns:a="http://schemas.openxmlformats.org/drawingml/2006/main">
-            <a:defPPr>
-              <a:defRPr sz="1425" b="1">
-                <a:solidFill>
-                  <a:srgbClr val="4B606D"/>
-                </a:solidFill>
-                <a:latin typeface="Arial"/>
-                <a:ea typeface="Arial"/>
-                <a:cs typeface="Arial"/>
-              </a:defRPr>
-            </a:defPPr>
-          </a:lstStyle>
-          <a:p xmlns:a="http://schemas.openxmlformats.org/drawingml/2006/main">
-            <a:pPr>
-              <a:defRPr sz="1425" b="1">
-                <a:solidFill>
-                  <a:srgbClr val="4B606D"/>
-                </a:solidFill>
-                <a:latin typeface="Arial"/>
-                <a:ea typeface="Arial"/>
-                <a:cs typeface="Arial"/>
-              </a:defRPr>
-            </a:pPr>
-            <a:r>
-              <a:rPr sz="1425" b="1">
-                <a:solidFill>
-                  <a:srgbClr val="4B606D"/>
-                </a:solidFill>
-                <a:latin typeface="Arial"/>
-                <a:ea typeface="Arial"/>
-                <a:cs typeface="Arial"/>
-              </a:rPr>
-              <a:t>Computational workflow. Predicted structures and ranked candidates still require wet-lab validation.</a:t>
-            </a:r>
-          </a:p>
-        </p:txBody>
-      </p:sp>
     </p:spTree>
     <p:extLst>
       <p:ext uri="{BB962C8B-B14F-4D97-AF65-F5344CB8AC3E}">
-        <p14:creationId xmlns:p14="http://schemas.microsoft.com/office/powerpoint/2010/main" val="1160707965"/>
+        <p14:creationId xmlns:p14="http://schemas.microsoft.com/office/powerpoint/2010/main" val="1843429981"/>
       </p:ext>
     </p:extLst>
   </p:cSld>
@@ -8279,7 +6563,7 @@
           <p:cNvPr id="22" name="">
             <a:extLst xmlns:a="http://schemas.openxmlformats.org/drawingml/2006/main">
               <a:ext uri="{FF2B5EF4-FFF2-40B4-BE49-F238E27FC236}">
-                <a16:creationId xmlns:a16="http://schemas.microsoft.com/office/drawing/2014/main" id="{3B899112-2105-4B9A-8087-A9688186EBF5}"/>
+                <a16:creationId xmlns:a16="http://schemas.microsoft.com/office/drawing/2014/main" id="{CFE9CDC0-549B-4446-82BC-0F6685D9EFC1}"/>
               </a:ext>
             </a:extLst>
           </p:cNvPr>
@@ -8309,7 +6593,7 @@
           <p:cNvPr id="2" name="label-1">
             <a:extLst xmlns:a="http://schemas.openxmlformats.org/drawingml/2006/main">
               <a:ext uri="{FF2B5EF4-FFF2-40B4-BE49-F238E27FC236}">
-                <a16:creationId xmlns:a16="http://schemas.microsoft.com/office/drawing/2014/main" id="{1F04CCE6-22EE-4328-8DDB-DF81C7D18EBB}"/>
+                <a16:creationId xmlns:a16="http://schemas.microsoft.com/office/drawing/2014/main" id="{C25112FE-6C4F-4036-A59A-11B70CF55436}"/>
               </a:ext>
             </a:extLst>
           </p:cNvPr>
@@ -8375,7 +6659,7 @@
           <p:cNvPr id="3" name="label-2">
             <a:extLst xmlns:a="http://schemas.openxmlformats.org/drawingml/2006/main">
               <a:ext uri="{FF2B5EF4-FFF2-40B4-BE49-F238E27FC236}">
-                <a16:creationId xmlns:a16="http://schemas.microsoft.com/office/drawing/2014/main" id="{45C56FBA-A11A-4752-A8FF-C08B4686E66B}"/>
+                <a16:creationId xmlns:a16="http://schemas.microsoft.com/office/drawing/2014/main" id="{78924C1E-98C1-4A0E-9D1A-603A3A5F79D2}"/>
               </a:ext>
             </a:extLst>
           </p:cNvPr>
@@ -8441,7 +6725,7 @@
           <p:cNvPr id="4" name="label-3">
             <a:extLst xmlns:a="http://schemas.openxmlformats.org/drawingml/2006/main">
               <a:ext uri="{FF2B5EF4-FFF2-40B4-BE49-F238E27FC236}">
-                <a16:creationId xmlns:a16="http://schemas.microsoft.com/office/drawing/2014/main" id="{04F619C8-A19B-4385-AECB-0EE43A1EA824}"/>
+                <a16:creationId xmlns:a16="http://schemas.microsoft.com/office/drawing/2014/main" id="{1BB7C4F4-F0E5-4BF1-84BE-8C6CFA11C3DA}"/>
               </a:ext>
             </a:extLst>
           </p:cNvPr>
@@ -8507,7 +6791,7 @@
           <p:cNvPr id="5" name="">
             <a:extLst xmlns:a="http://schemas.openxmlformats.org/drawingml/2006/main">
               <a:ext uri="{FF2B5EF4-FFF2-40B4-BE49-F238E27FC236}">
-                <a16:creationId xmlns:a16="http://schemas.microsoft.com/office/drawing/2014/main" id="{58F70D98-4C17-4258-ADFF-1FC84B81DB93}"/>
+                <a16:creationId xmlns:a16="http://schemas.microsoft.com/office/drawing/2014/main" id="{93E7A734-A831-4A0A-B713-8F2A02316FAE}"/>
               </a:ext>
             </a:extLst>
           </p:cNvPr>
@@ -8517,7 +6801,7 @@
           <p:nvPr/>
         </p:nvPicPr>
         <p:blipFill>
-          <a:blip xmlns:r="http://schemas.openxmlformats.org/officeDocument/2006/relationships" xmlns:a="http://schemas.openxmlformats.org/drawingml/2006/main" r:embed="Ra368f790b2654210"/>
+          <a:blip xmlns:r="http://schemas.openxmlformats.org/officeDocument/2006/relationships" xmlns:a="http://schemas.openxmlformats.org/drawingml/2006/main" r:embed="R60fda683fddb4126"/>
           <a:stretch xmlns:a="http://schemas.openxmlformats.org/drawingml/2006/main"/>
         </p:blipFill>
         <p:spPr>
@@ -8535,7 +6819,7 @@
           <p:cNvPr id="6" name="label-5">
             <a:extLst xmlns:a="http://schemas.openxmlformats.org/drawingml/2006/main">
               <a:ext uri="{FF2B5EF4-FFF2-40B4-BE49-F238E27FC236}">
-                <a16:creationId xmlns:a16="http://schemas.microsoft.com/office/drawing/2014/main" id="{DC8AD294-CDA2-42E5-A925-0F04D2863708}"/>
+                <a16:creationId xmlns:a16="http://schemas.microsoft.com/office/drawing/2014/main" id="{238D4DDD-C1D6-4768-9C18-2FF272EBF3B3}"/>
               </a:ext>
             </a:extLst>
           </p:cNvPr>
@@ -8601,7 +6885,7 @@
           <p:cNvPr id="7" name="label-6">
             <a:extLst xmlns:a="http://schemas.openxmlformats.org/drawingml/2006/main">
               <a:ext uri="{FF2B5EF4-FFF2-40B4-BE49-F238E27FC236}">
-                <a16:creationId xmlns:a16="http://schemas.microsoft.com/office/drawing/2014/main" id="{435F1B66-3B9B-481C-B3F8-4AC5AB70A5F7}"/>
+                <a16:creationId xmlns:a16="http://schemas.microsoft.com/office/drawing/2014/main" id="{4BDBA52A-81EF-4C50-8824-CEF2B8233FDF}"/>
               </a:ext>
             </a:extLst>
           </p:cNvPr>
@@ -8667,7 +6951,7 @@
           <p:cNvPr id="8" name="label-7">
             <a:extLst xmlns:a="http://schemas.openxmlformats.org/drawingml/2006/main">
               <a:ext uri="{FF2B5EF4-FFF2-40B4-BE49-F238E27FC236}">
-                <a16:creationId xmlns:a16="http://schemas.microsoft.com/office/drawing/2014/main" id="{F9A66D8D-0E1A-4FB0-BE65-F684A199F0A1}"/>
+                <a16:creationId xmlns:a16="http://schemas.microsoft.com/office/drawing/2014/main" id="{A172FE25-E57C-4348-855D-AA01A373B0B1}"/>
               </a:ext>
             </a:extLst>
           </p:cNvPr>
@@ -8733,7 +7017,7 @@
           <p:cNvPr id="9" name="label-8">
             <a:extLst xmlns:a="http://schemas.openxmlformats.org/drawingml/2006/main">
               <a:ext uri="{FF2B5EF4-FFF2-40B4-BE49-F238E27FC236}">
-                <a16:creationId xmlns:a16="http://schemas.microsoft.com/office/drawing/2014/main" id="{E2985765-7082-49CE-B6D6-D304068C7BE1}"/>
+                <a16:creationId xmlns:a16="http://schemas.microsoft.com/office/drawing/2014/main" id="{6AB1B954-CC37-4112-BE15-ECBC508A9828}"/>
               </a:ext>
             </a:extLst>
           </p:cNvPr>
@@ -8799,7 +7083,7 @@
           <p:cNvPr id="10" name="">
             <a:extLst xmlns:a="http://schemas.openxmlformats.org/drawingml/2006/main">
               <a:ext uri="{FF2B5EF4-FFF2-40B4-BE49-F238E27FC236}">
-                <a16:creationId xmlns:a16="http://schemas.microsoft.com/office/drawing/2014/main" id="{CEF669F1-BC76-47AD-9B99-367977A7DCC3}"/>
+                <a16:creationId xmlns:a16="http://schemas.microsoft.com/office/drawing/2014/main" id="{5B982B42-8605-474F-A6EA-DE84EF829E23}"/>
               </a:ext>
             </a:extLst>
           </p:cNvPr>
@@ -8809,7 +7093,7 @@
           <p:nvPr/>
         </p:nvPicPr>
         <p:blipFill>
-          <a:blip xmlns:r="http://schemas.openxmlformats.org/officeDocument/2006/relationships" xmlns:a="http://schemas.openxmlformats.org/drawingml/2006/main" r:embed="Rabd01ac549ba4754"/>
+          <a:blip xmlns:r="http://schemas.openxmlformats.org/officeDocument/2006/relationships" xmlns:a="http://schemas.openxmlformats.org/drawingml/2006/main" r:embed="R114b4a74bd0045b8"/>
           <a:stretch xmlns:a="http://schemas.openxmlformats.org/drawingml/2006/main"/>
         </p:blipFill>
         <p:spPr>
@@ -8827,7 +7111,7 @@
           <p:cNvPr id="11" name="label-10">
             <a:extLst xmlns:a="http://schemas.openxmlformats.org/drawingml/2006/main">
               <a:ext uri="{FF2B5EF4-FFF2-40B4-BE49-F238E27FC236}">
-                <a16:creationId xmlns:a16="http://schemas.microsoft.com/office/drawing/2014/main" id="{74A877E7-1530-4242-902F-C3CB40AB3EDA}"/>
+                <a16:creationId xmlns:a16="http://schemas.microsoft.com/office/drawing/2014/main" id="{229968D6-7853-4E12-BC0B-C973600EF0F7}"/>
               </a:ext>
             </a:extLst>
           </p:cNvPr>
@@ -8893,7 +7177,7 @@
           <p:cNvPr id="12" name="">
             <a:extLst xmlns:a="http://schemas.openxmlformats.org/drawingml/2006/main">
               <a:ext uri="{FF2B5EF4-FFF2-40B4-BE49-F238E27FC236}">
-                <a16:creationId xmlns:a16="http://schemas.microsoft.com/office/drawing/2014/main" id="{1A095E50-A41D-45FA-8232-FBB16D051535}"/>
+                <a16:creationId xmlns:a16="http://schemas.microsoft.com/office/drawing/2014/main" id="{E6F8ACBF-5EEA-400B-BE7A-03FAC880DE83}"/>
               </a:ext>
             </a:extLst>
           </p:cNvPr>
@@ -8903,7 +7187,7 @@
           <p:nvPr/>
         </p:nvPicPr>
         <p:blipFill>
-          <a:blip xmlns:r="http://schemas.openxmlformats.org/officeDocument/2006/relationships" xmlns:a="http://schemas.openxmlformats.org/drawingml/2006/main" r:embed="R3490c31fa78e4c14"/>
+          <a:blip xmlns:r="http://schemas.openxmlformats.org/officeDocument/2006/relationships" xmlns:a="http://schemas.openxmlformats.org/drawingml/2006/main" r:embed="R247f4ed9384b40fb"/>
           <a:stretch xmlns:a="http://schemas.openxmlformats.org/drawingml/2006/main"/>
         </p:blipFill>
         <p:spPr>
@@ -8921,7 +7205,7 @@
           <p:cNvPr id="13" name="label-12">
             <a:extLst xmlns:a="http://schemas.openxmlformats.org/drawingml/2006/main">
               <a:ext uri="{FF2B5EF4-FFF2-40B4-BE49-F238E27FC236}">
-                <a16:creationId xmlns:a16="http://schemas.microsoft.com/office/drawing/2014/main" id="{277A5452-5DE2-4EBD-B942-BDDDF4C6B4F8}"/>
+                <a16:creationId xmlns:a16="http://schemas.microsoft.com/office/drawing/2014/main" id="{383770AE-3CEC-46F9-8211-C38BA5C4FA4B}"/>
               </a:ext>
             </a:extLst>
           </p:cNvPr>
@@ -8987,7 +7271,7 @@
           <p:cNvPr id="14" name="">
             <a:extLst xmlns:a="http://schemas.openxmlformats.org/drawingml/2006/main">
               <a:ext uri="{FF2B5EF4-FFF2-40B4-BE49-F238E27FC236}">
-                <a16:creationId xmlns:a16="http://schemas.microsoft.com/office/drawing/2014/main" id="{6383DF5F-8A73-4ED1-9A90-8A79CAC29132}"/>
+                <a16:creationId xmlns:a16="http://schemas.microsoft.com/office/drawing/2014/main" id="{E65B576F-F192-4B86-9614-6B23A890BDA9}"/>
               </a:ext>
             </a:extLst>
           </p:cNvPr>
@@ -9017,7 +7301,7 @@
           <p:cNvPr id="15" name="label-14">
             <a:extLst xmlns:a="http://schemas.openxmlformats.org/drawingml/2006/main">
               <a:ext uri="{FF2B5EF4-FFF2-40B4-BE49-F238E27FC236}">
-                <a16:creationId xmlns:a16="http://schemas.microsoft.com/office/drawing/2014/main" id="{DCC9176F-1D58-45F1-89BD-D7DCB8EDF1A9}"/>
+                <a16:creationId xmlns:a16="http://schemas.microsoft.com/office/drawing/2014/main" id="{394E2907-92E6-4B98-891A-D13D91433C81}"/>
               </a:ext>
             </a:extLst>
           </p:cNvPr>
@@ -9083,7 +7367,7 @@
           <p:cNvPr id="16" name="">
             <a:extLst xmlns:a="http://schemas.openxmlformats.org/drawingml/2006/main">
               <a:ext uri="{FF2B5EF4-FFF2-40B4-BE49-F238E27FC236}">
-                <a16:creationId xmlns:a16="http://schemas.microsoft.com/office/drawing/2014/main" id="{3858DAD4-9961-457D-AEA4-48B231AAB6BA}"/>
+                <a16:creationId xmlns:a16="http://schemas.microsoft.com/office/drawing/2014/main" id="{3C67A883-4D3D-40DF-9787-9684DE4A4B43}"/>
               </a:ext>
             </a:extLst>
           </p:cNvPr>
@@ -9093,7 +7377,7 @@
           <p:nvPr/>
         </p:nvPicPr>
         <p:blipFill>
-          <a:blip xmlns:r="http://schemas.openxmlformats.org/officeDocument/2006/relationships" xmlns:a="http://schemas.openxmlformats.org/drawingml/2006/main" r:embed="R5ce1679696d5471d"/>
+          <a:blip xmlns:r="http://schemas.openxmlformats.org/officeDocument/2006/relationships" xmlns:a="http://schemas.openxmlformats.org/drawingml/2006/main" r:embed="R6bdc164d58d94330"/>
           <a:stretch xmlns:a="http://schemas.openxmlformats.org/drawingml/2006/main"/>
         </p:blipFill>
         <p:spPr>
@@ -9111,7 +7395,7 @@
           <p:cNvPr id="17" name="label-16">
             <a:extLst xmlns:a="http://schemas.openxmlformats.org/drawingml/2006/main">
               <a:ext uri="{FF2B5EF4-FFF2-40B4-BE49-F238E27FC236}">
-                <a16:creationId xmlns:a16="http://schemas.microsoft.com/office/drawing/2014/main" id="{44ADB0FF-53AC-4905-B160-A2FA1FE90F19}"/>
+                <a16:creationId xmlns:a16="http://schemas.microsoft.com/office/drawing/2014/main" id="{F6902A99-A085-41AA-88FF-30B383D19FF3}"/>
               </a:ext>
             </a:extLst>
           </p:cNvPr>
@@ -9200,7 +7484,7 @@
           <p:cNvPr id="18" name="label-17">
             <a:extLst xmlns:a="http://schemas.openxmlformats.org/drawingml/2006/main">
               <a:ext uri="{FF2B5EF4-FFF2-40B4-BE49-F238E27FC236}">
-                <a16:creationId xmlns:a16="http://schemas.microsoft.com/office/drawing/2014/main" id="{09136706-A53D-4032-840C-E583F52A5A19}"/>
+                <a16:creationId xmlns:a16="http://schemas.microsoft.com/office/drawing/2014/main" id="{A25F6A27-4C0A-4B35-B912-9603DEB062AA}"/>
               </a:ext>
             </a:extLst>
           </p:cNvPr>
@@ -9266,7 +7550,7 @@
           <p:cNvPr id="19" name="label-18">
             <a:extLst xmlns:a="http://schemas.openxmlformats.org/drawingml/2006/main">
               <a:ext uri="{FF2B5EF4-FFF2-40B4-BE49-F238E27FC236}">
-                <a16:creationId xmlns:a16="http://schemas.microsoft.com/office/drawing/2014/main" id="{D1789444-A12F-4A4E-B615-CACC55BA9F2A}"/>
+                <a16:creationId xmlns:a16="http://schemas.microsoft.com/office/drawing/2014/main" id="{2F5D1B32-51CA-4353-A2D5-5ADB561DF4CE}"/>
               </a:ext>
             </a:extLst>
           </p:cNvPr>
@@ -9332,7 +7616,7 @@
           <p:cNvPr id="20" name="">
             <a:extLst xmlns:a="http://schemas.openxmlformats.org/drawingml/2006/main">
               <a:ext uri="{FF2B5EF4-FFF2-40B4-BE49-F238E27FC236}">
-                <a16:creationId xmlns:a16="http://schemas.microsoft.com/office/drawing/2014/main" id="{96A6A6FB-B292-4F07-890B-7971BEFB2569}"/>
+                <a16:creationId xmlns:a16="http://schemas.microsoft.com/office/drawing/2014/main" id="{C2FBB831-F110-4BBA-8DA2-09F87EDEC8EC}"/>
               </a:ext>
             </a:extLst>
           </p:cNvPr>
@@ -9342,10 +7626,10 @@
           <p:nvPr/>
         </p:nvPicPr>
         <p:blipFill>
-          <a:blip xmlns:r="http://schemas.openxmlformats.org/officeDocument/2006/relationships" xmlns:a="http://schemas.openxmlformats.org/drawingml/2006/main" r:embed="Ra439fc206acd4f4e">
+          <a:blip xmlns:r="http://schemas.openxmlformats.org/officeDocument/2006/relationships" xmlns:a="http://schemas.openxmlformats.org/drawingml/2006/main" r:embed="R860ce6de8ec84e5c">
             <a:extLst>
               <a:ext uri="{96DAC541-7B7A-43D3-8B79-37D633B846F1}">
-                <asvg:svgBlip xmlns:asvg="http://schemas.microsoft.com/office/drawing/2016/SVG/main" r:embed="R282af99a05a04b56"/>
+                <asvg:svgBlip xmlns:asvg="http://schemas.microsoft.com/office/drawing/2016/SVG/main" r:embed="R3ad41faca3f74bef"/>
               </a:ext>
             </a:extLst>
           </a:blip>
@@ -9366,7 +7650,7 @@
           <p:cNvPr id="21" name="label-20">
             <a:extLst xmlns:a="http://schemas.openxmlformats.org/drawingml/2006/main">
               <a:ext uri="{FF2B5EF4-FFF2-40B4-BE49-F238E27FC236}">
-                <a16:creationId xmlns:a16="http://schemas.microsoft.com/office/drawing/2014/main" id="{F45830AA-464C-4B8E-BAEE-FA008F8B7C27}"/>
+                <a16:creationId xmlns:a16="http://schemas.microsoft.com/office/drawing/2014/main" id="{476DECF6-89F5-489F-937D-893332C192BA}"/>
               </a:ext>
             </a:extLst>
           </p:cNvPr>
@@ -9430,7 +7714,7 @@
     </p:spTree>
     <p:extLst>
       <p:ext uri="{BB962C8B-B14F-4D97-AF65-F5344CB8AC3E}">
-        <p14:creationId xmlns:p14="http://schemas.microsoft.com/office/powerpoint/2010/main" val="56447776"/>
+        <p14:creationId xmlns:p14="http://schemas.microsoft.com/office/powerpoint/2010/main" val="1839124759"/>
       </p:ext>
     </p:extLst>
   </p:cSld>
@@ -9461,7 +7745,7 @@
           <p:cNvPr id="30" name="">
             <a:extLst xmlns:a="http://schemas.openxmlformats.org/drawingml/2006/main">
               <a:ext uri="{FF2B5EF4-FFF2-40B4-BE49-F238E27FC236}">
-                <a16:creationId xmlns:a16="http://schemas.microsoft.com/office/drawing/2014/main" id="{17B012B6-C1A5-4822-9563-081C48ECCC4D}"/>
+                <a16:creationId xmlns:a16="http://schemas.microsoft.com/office/drawing/2014/main" id="{849813FD-6125-4D26-88C9-3233ECB3DFF7}"/>
               </a:ext>
             </a:extLst>
           </p:cNvPr>
@@ -9491,7 +7775,7 @@
           <p:cNvPr id="2" name="label-1">
             <a:extLst xmlns:a="http://schemas.openxmlformats.org/drawingml/2006/main">
               <a:ext uri="{FF2B5EF4-FFF2-40B4-BE49-F238E27FC236}">
-                <a16:creationId xmlns:a16="http://schemas.microsoft.com/office/drawing/2014/main" id="{C19639D4-469A-42B2-B3A4-38F81B036217}"/>
+                <a16:creationId xmlns:a16="http://schemas.microsoft.com/office/drawing/2014/main" id="{B997E9F6-1CD4-4E91-AE5D-73CF83AF9330}"/>
               </a:ext>
             </a:extLst>
           </p:cNvPr>
@@ -9557,7 +7841,7 @@
           <p:cNvPr id="3" name="label-2">
             <a:extLst xmlns:a="http://schemas.openxmlformats.org/drawingml/2006/main">
               <a:ext uri="{FF2B5EF4-FFF2-40B4-BE49-F238E27FC236}">
-                <a16:creationId xmlns:a16="http://schemas.microsoft.com/office/drawing/2014/main" id="{5E8A5151-B024-4F4B-9925-9A87DA0AF65C}"/>
+                <a16:creationId xmlns:a16="http://schemas.microsoft.com/office/drawing/2014/main" id="{AB5A8B02-F622-4283-8943-63601C1312B7}"/>
               </a:ext>
             </a:extLst>
           </p:cNvPr>
@@ -9623,7 +7907,7 @@
           <p:cNvPr id="4" name="">
             <a:extLst xmlns:a="http://schemas.openxmlformats.org/drawingml/2006/main">
               <a:ext uri="{FF2B5EF4-FFF2-40B4-BE49-F238E27FC236}">
-                <a16:creationId xmlns:a16="http://schemas.microsoft.com/office/drawing/2014/main" id="{64F4AA61-9F82-4B13-9D17-69D661D3DE8A}"/>
+                <a16:creationId xmlns:a16="http://schemas.microsoft.com/office/drawing/2014/main" id="{C79D1838-CB74-4266-BF61-2FFEE96CD656}"/>
               </a:ext>
             </a:extLst>
           </p:cNvPr>
@@ -9657,7 +7941,7 @@
           <p:cNvPr id="5" name="label-4">
             <a:extLst xmlns:a="http://schemas.openxmlformats.org/drawingml/2006/main">
               <a:ext uri="{FF2B5EF4-FFF2-40B4-BE49-F238E27FC236}">
-                <a16:creationId xmlns:a16="http://schemas.microsoft.com/office/drawing/2014/main" id="{7004D85F-C762-4183-A90A-8D380F11B22E}"/>
+                <a16:creationId xmlns:a16="http://schemas.microsoft.com/office/drawing/2014/main" id="{0612D1C3-5C38-44A5-96AA-DA1A957229DB}"/>
               </a:ext>
             </a:extLst>
           </p:cNvPr>
@@ -9723,7 +8007,7 @@
           <p:cNvPr id="6" name="label-5">
             <a:extLst xmlns:a="http://schemas.openxmlformats.org/drawingml/2006/main">
               <a:ext uri="{FF2B5EF4-FFF2-40B4-BE49-F238E27FC236}">
-                <a16:creationId xmlns:a16="http://schemas.microsoft.com/office/drawing/2014/main" id="{6F6F6EE4-E7E2-4AAA-B188-05FE2C1E647D}"/>
+                <a16:creationId xmlns:a16="http://schemas.microsoft.com/office/drawing/2014/main" id="{083E94B9-5FC8-44C6-9E11-3D458401EBF6}"/>
               </a:ext>
             </a:extLst>
           </p:cNvPr>
@@ -9835,7 +8119,7 @@
           <p:cNvPr id="7" name="">
             <a:extLst xmlns:a="http://schemas.openxmlformats.org/drawingml/2006/main">
               <a:ext uri="{FF2B5EF4-FFF2-40B4-BE49-F238E27FC236}">
-                <a16:creationId xmlns:a16="http://schemas.microsoft.com/office/drawing/2014/main" id="{124F47E8-14F3-4085-B184-B774BE7CF662}"/>
+                <a16:creationId xmlns:a16="http://schemas.microsoft.com/office/drawing/2014/main" id="{4FD84FFD-0C2B-49DF-9735-B3DE81A634F9}"/>
               </a:ext>
             </a:extLst>
           </p:cNvPr>
@@ -9869,7 +8153,7 @@
           <p:cNvPr id="8" name="label-7">
             <a:extLst xmlns:a="http://schemas.openxmlformats.org/drawingml/2006/main">
               <a:ext uri="{FF2B5EF4-FFF2-40B4-BE49-F238E27FC236}">
-                <a16:creationId xmlns:a16="http://schemas.microsoft.com/office/drawing/2014/main" id="{6BBF7FF0-E0B3-4D6C-81B7-F5D49E0C6EAD}"/>
+                <a16:creationId xmlns:a16="http://schemas.microsoft.com/office/drawing/2014/main" id="{DA4E1135-5456-4D9E-B1C7-A282A437D44C}"/>
               </a:ext>
             </a:extLst>
           </p:cNvPr>
@@ -9935,7 +8219,7 @@
           <p:cNvPr id="9" name="label-8">
             <a:extLst xmlns:a="http://schemas.openxmlformats.org/drawingml/2006/main">
               <a:ext uri="{FF2B5EF4-FFF2-40B4-BE49-F238E27FC236}">
-                <a16:creationId xmlns:a16="http://schemas.microsoft.com/office/drawing/2014/main" id="{C6BDCC14-0424-4CD2-BB5F-FA23A3409178}"/>
+                <a16:creationId xmlns:a16="http://schemas.microsoft.com/office/drawing/2014/main" id="{30606BAE-E624-4F77-827B-4340F0D38F79}"/>
               </a:ext>
             </a:extLst>
           </p:cNvPr>
@@ -10047,7 +8331,7 @@
           <p:cNvPr id="10" name="">
             <a:extLst xmlns:a="http://schemas.openxmlformats.org/drawingml/2006/main">
               <a:ext uri="{FF2B5EF4-FFF2-40B4-BE49-F238E27FC236}">
-                <a16:creationId xmlns:a16="http://schemas.microsoft.com/office/drawing/2014/main" id="{DD173B66-4472-442B-8815-838DFB51F911}"/>
+                <a16:creationId xmlns:a16="http://schemas.microsoft.com/office/drawing/2014/main" id="{303F8163-E7AF-426A-A9D2-3D641AE63A63}"/>
               </a:ext>
             </a:extLst>
           </p:cNvPr>
@@ -10081,7 +8365,7 @@
           <p:cNvPr id="11" name="label-10">
             <a:extLst xmlns:a="http://schemas.openxmlformats.org/drawingml/2006/main">
               <a:ext uri="{FF2B5EF4-FFF2-40B4-BE49-F238E27FC236}">
-                <a16:creationId xmlns:a16="http://schemas.microsoft.com/office/drawing/2014/main" id="{A34D74CD-5746-4F6B-9CC7-E73BDD69CB45}"/>
+                <a16:creationId xmlns:a16="http://schemas.microsoft.com/office/drawing/2014/main" id="{65F42669-C8AB-494E-A94A-9EB0679D198B}"/>
               </a:ext>
             </a:extLst>
           </p:cNvPr>
@@ -10147,7 +8431,7 @@
           <p:cNvPr id="12" name="label-11">
             <a:extLst xmlns:a="http://schemas.openxmlformats.org/drawingml/2006/main">
               <a:ext uri="{FF2B5EF4-FFF2-40B4-BE49-F238E27FC236}">
-                <a16:creationId xmlns:a16="http://schemas.microsoft.com/office/drawing/2014/main" id="{ACBA4837-8AA6-4A7F-B70A-BDE49D44C120}"/>
+                <a16:creationId xmlns:a16="http://schemas.microsoft.com/office/drawing/2014/main" id="{B0929DEF-BD51-40DC-9863-EF1CF907FFED}"/>
               </a:ext>
             </a:extLst>
           </p:cNvPr>
@@ -10259,7 +8543,7 @@
           <p:cNvPr id="13" name="">
             <a:extLst xmlns:a="http://schemas.openxmlformats.org/drawingml/2006/main">
               <a:ext uri="{FF2B5EF4-FFF2-40B4-BE49-F238E27FC236}">
-                <a16:creationId xmlns:a16="http://schemas.microsoft.com/office/drawing/2014/main" id="{34326808-D3A6-4F2F-B616-EAF65AFA8055}"/>
+                <a16:creationId xmlns:a16="http://schemas.microsoft.com/office/drawing/2014/main" id="{47F874AD-3DCE-4E3E-8BA6-D18E50231841}"/>
               </a:ext>
             </a:extLst>
           </p:cNvPr>
@@ -10289,7 +8573,7 @@
           <p:cNvPr id="14" name="">
             <a:extLst xmlns:a="http://schemas.openxmlformats.org/drawingml/2006/main">
               <a:ext uri="{FF2B5EF4-FFF2-40B4-BE49-F238E27FC236}">
-                <a16:creationId xmlns:a16="http://schemas.microsoft.com/office/drawing/2014/main" id="{ACA0BE0C-F896-4B96-8E96-C8590E06440C}"/>
+                <a16:creationId xmlns:a16="http://schemas.microsoft.com/office/drawing/2014/main" id="{9F3CA63E-E431-4338-982C-B70B6D44057A}"/>
               </a:ext>
             </a:extLst>
           </p:cNvPr>
@@ -10319,7 +8603,7 @@
           <p:cNvPr id="15" name="label-14">
             <a:extLst xmlns:a="http://schemas.openxmlformats.org/drawingml/2006/main">
               <a:ext uri="{FF2B5EF4-FFF2-40B4-BE49-F238E27FC236}">
-                <a16:creationId xmlns:a16="http://schemas.microsoft.com/office/drawing/2014/main" id="{404134CE-903A-467C-A878-E021DA0C8434}"/>
+                <a16:creationId xmlns:a16="http://schemas.microsoft.com/office/drawing/2014/main" id="{83EE3334-1A69-41BA-B074-4AD086ACE80A}"/>
               </a:ext>
             </a:extLst>
           </p:cNvPr>
@@ -10385,7 +8669,7 @@
           <p:cNvPr id="16" name="label-15">
             <a:extLst xmlns:a="http://schemas.openxmlformats.org/drawingml/2006/main">
               <a:ext uri="{FF2B5EF4-FFF2-40B4-BE49-F238E27FC236}">
-                <a16:creationId xmlns:a16="http://schemas.microsoft.com/office/drawing/2014/main" id="{E7B34FDF-2648-4800-8320-02AC8B6966C0}"/>
+                <a16:creationId xmlns:a16="http://schemas.microsoft.com/office/drawing/2014/main" id="{D6E3E127-68C2-4AB6-9AC1-696D4832ACB2}"/>
               </a:ext>
             </a:extLst>
           </p:cNvPr>
@@ -10474,7 +8758,7 @@
           <p:cNvPr id="17" name="label-16">
             <a:extLst xmlns:a="http://schemas.openxmlformats.org/drawingml/2006/main">
               <a:ext uri="{FF2B5EF4-FFF2-40B4-BE49-F238E27FC236}">
-                <a16:creationId xmlns:a16="http://schemas.microsoft.com/office/drawing/2014/main" id="{0106E8C9-E728-48E8-9892-461675C1CCBA}"/>
+                <a16:creationId xmlns:a16="http://schemas.microsoft.com/office/drawing/2014/main" id="{10B333E5-BDA3-4777-AAE9-AFD60EA7D386}"/>
               </a:ext>
             </a:extLst>
           </p:cNvPr>
@@ -10563,7 +8847,7 @@
           <p:cNvPr id="18" name="label-17">
             <a:extLst xmlns:a="http://schemas.openxmlformats.org/drawingml/2006/main">
               <a:ext uri="{FF2B5EF4-FFF2-40B4-BE49-F238E27FC236}">
-                <a16:creationId xmlns:a16="http://schemas.microsoft.com/office/drawing/2014/main" id="{99286AE9-4629-44CF-BA5D-6F657434977F}"/>
+                <a16:creationId xmlns:a16="http://schemas.microsoft.com/office/drawing/2014/main" id="{A02302C1-0C86-402D-8048-CC117960724E}"/>
               </a:ext>
             </a:extLst>
           </p:cNvPr>
@@ -10652,7 +8936,7 @@
           <p:cNvPr id="19" name="">
             <a:extLst xmlns:a="http://schemas.openxmlformats.org/drawingml/2006/main">
               <a:ext uri="{FF2B5EF4-FFF2-40B4-BE49-F238E27FC236}">
-                <a16:creationId xmlns:a16="http://schemas.microsoft.com/office/drawing/2014/main" id="{0FC8556B-B17B-495E-9E5F-D47A2F4CB22D}"/>
+                <a16:creationId xmlns:a16="http://schemas.microsoft.com/office/drawing/2014/main" id="{0C8D2908-9140-499B-87C9-188F76AC938A}"/>
               </a:ext>
             </a:extLst>
           </p:cNvPr>
@@ -10684,7 +8968,7 @@
           <p:cNvPr id="20" name="label-19">
             <a:extLst xmlns:a="http://schemas.openxmlformats.org/drawingml/2006/main">
               <a:ext uri="{FF2B5EF4-FFF2-40B4-BE49-F238E27FC236}">
-                <a16:creationId xmlns:a16="http://schemas.microsoft.com/office/drawing/2014/main" id="{9DCFE32E-3E29-4D8F-BC6E-7C2909EE24FF}"/>
+                <a16:creationId xmlns:a16="http://schemas.microsoft.com/office/drawing/2014/main" id="{94B11A6D-B87C-41E6-8689-F9475DEB31EA}"/>
               </a:ext>
             </a:extLst>
           </p:cNvPr>
@@ -10750,7 +9034,7 @@
           <p:cNvPr id="21" name="label-20">
             <a:extLst xmlns:a="http://schemas.openxmlformats.org/drawingml/2006/main">
               <a:ext uri="{FF2B5EF4-FFF2-40B4-BE49-F238E27FC236}">
-                <a16:creationId xmlns:a16="http://schemas.microsoft.com/office/drawing/2014/main" id="{52A54A66-61E0-4D25-AEBA-E3BEDA404994}"/>
+                <a16:creationId xmlns:a16="http://schemas.microsoft.com/office/drawing/2014/main" id="{6AD18C9C-ACA2-4A94-9820-CD6881BC8469}"/>
               </a:ext>
             </a:extLst>
           </p:cNvPr>
@@ -10816,7 +9100,7 @@
           <p:cNvPr id="22" name="">
             <a:extLst xmlns:a="http://schemas.openxmlformats.org/drawingml/2006/main">
               <a:ext uri="{FF2B5EF4-FFF2-40B4-BE49-F238E27FC236}">
-                <a16:creationId xmlns:a16="http://schemas.microsoft.com/office/drawing/2014/main" id="{34787588-C850-478E-9646-F5782EC3A643}"/>
+                <a16:creationId xmlns:a16="http://schemas.microsoft.com/office/drawing/2014/main" id="{27F70687-2F72-4321-A47A-77F80E1A6157}"/>
               </a:ext>
             </a:extLst>
           </p:cNvPr>
@@ -10846,7 +9130,7 @@
           <p:cNvPr id="23" name="label-22">
             <a:extLst xmlns:a="http://schemas.openxmlformats.org/drawingml/2006/main">
               <a:ext uri="{FF2B5EF4-FFF2-40B4-BE49-F238E27FC236}">
-                <a16:creationId xmlns:a16="http://schemas.microsoft.com/office/drawing/2014/main" id="{DA969F22-AE8C-455C-A90E-F88F32F5DC4B}"/>
+                <a16:creationId xmlns:a16="http://schemas.microsoft.com/office/drawing/2014/main" id="{463AE48B-BB49-4E9B-9E9C-152871B67BA5}"/>
               </a:ext>
             </a:extLst>
           </p:cNvPr>
@@ -10912,7 +9196,7 @@
           <p:cNvPr id="24" name="">
             <a:extLst xmlns:a="http://schemas.openxmlformats.org/drawingml/2006/main">
               <a:ext uri="{FF2B5EF4-FFF2-40B4-BE49-F238E27FC236}">
-                <a16:creationId xmlns:a16="http://schemas.microsoft.com/office/drawing/2014/main" id="{C976F0FE-B824-42D8-97CC-30263D4A35EF}"/>
+                <a16:creationId xmlns:a16="http://schemas.microsoft.com/office/drawing/2014/main" id="{1F259D0A-8418-434A-A19A-7897F443CB11}"/>
               </a:ext>
             </a:extLst>
           </p:cNvPr>
@@ -10942,7 +9226,7 @@
           <p:cNvPr id="25" name="label-24">
             <a:extLst xmlns:a="http://schemas.openxmlformats.org/drawingml/2006/main">
               <a:ext uri="{FF2B5EF4-FFF2-40B4-BE49-F238E27FC236}">
-                <a16:creationId xmlns:a16="http://schemas.microsoft.com/office/drawing/2014/main" id="{CE71897B-3B5E-41E7-8B0B-B40027C1E08F}"/>
+                <a16:creationId xmlns:a16="http://schemas.microsoft.com/office/drawing/2014/main" id="{1364D969-556F-4B01-B4B0-B4B0B496A4B2}"/>
               </a:ext>
             </a:extLst>
           </p:cNvPr>
@@ -11008,7 +9292,7 @@
           <p:cNvPr id="26" name="">
             <a:extLst xmlns:a="http://schemas.openxmlformats.org/drawingml/2006/main">
               <a:ext uri="{FF2B5EF4-FFF2-40B4-BE49-F238E27FC236}">
-                <a16:creationId xmlns:a16="http://schemas.microsoft.com/office/drawing/2014/main" id="{66E4CA51-577F-43F4-9DE1-12ED3AA78919}"/>
+                <a16:creationId xmlns:a16="http://schemas.microsoft.com/office/drawing/2014/main" id="{B3F2464A-47AD-4264-808D-B95871129078}"/>
               </a:ext>
             </a:extLst>
           </p:cNvPr>
@@ -11038,7 +9322,7 @@
           <p:cNvPr id="27" name="">
             <a:extLst xmlns:a="http://schemas.openxmlformats.org/drawingml/2006/main">
               <a:ext uri="{FF2B5EF4-FFF2-40B4-BE49-F238E27FC236}">
-                <a16:creationId xmlns:a16="http://schemas.microsoft.com/office/drawing/2014/main" id="{476ECF82-D5B3-4059-9887-985283E057E9}"/>
+                <a16:creationId xmlns:a16="http://schemas.microsoft.com/office/drawing/2014/main" id="{0BF771F7-C69E-4384-B3BE-18B396F792B4}"/>
               </a:ext>
             </a:extLst>
           </p:cNvPr>
@@ -11070,7 +9354,7 @@
           <p:cNvPr id="28" name="label-27">
             <a:extLst xmlns:a="http://schemas.openxmlformats.org/drawingml/2006/main">
               <a:ext uri="{FF2B5EF4-FFF2-40B4-BE49-F238E27FC236}">
-                <a16:creationId xmlns:a16="http://schemas.microsoft.com/office/drawing/2014/main" id="{68857DB2-6FD8-44C6-A14E-0E893952B28A}"/>
+                <a16:creationId xmlns:a16="http://schemas.microsoft.com/office/drawing/2014/main" id="{9F479C35-8E4F-4064-87DC-8DE75E06D74A}"/>
               </a:ext>
             </a:extLst>
           </p:cNvPr>
@@ -11136,7 +9420,7 @@
           <p:cNvPr id="29" name="label-28">
             <a:extLst xmlns:a="http://schemas.openxmlformats.org/drawingml/2006/main">
               <a:ext uri="{FF2B5EF4-FFF2-40B4-BE49-F238E27FC236}">
-                <a16:creationId xmlns:a16="http://schemas.microsoft.com/office/drawing/2014/main" id="{4BCE446C-C5D5-4628-B833-3565641BCD0A}"/>
+                <a16:creationId xmlns:a16="http://schemas.microsoft.com/office/drawing/2014/main" id="{EA788CCC-6BC1-4E2B-9540-6B94BFBBFB46}"/>
               </a:ext>
             </a:extLst>
           </p:cNvPr>
@@ -11200,7 +9484,7 @@
     </p:spTree>
     <p:extLst>
       <p:ext uri="{BB962C8B-B14F-4D97-AF65-F5344CB8AC3E}">
-        <p14:creationId xmlns:p14="http://schemas.microsoft.com/office/powerpoint/2010/main" val="834967023"/>
+        <p14:creationId xmlns:p14="http://schemas.microsoft.com/office/powerpoint/2010/main" val="1552345273"/>
       </p:ext>
     </p:extLst>
   </p:cSld>
